--- a/Y4O4X0_0318/Xquery.pptx
+++ b/Y4O4X0_0318/Xquery.pptx
@@ -8,7 +8,8 @@
     <p:sldId id="256" r:id="rId2"/>
     <p:sldId id="257" r:id="rId3"/>
     <p:sldId id="258" r:id="rId4"/>
-    <p:sldId id="259" r:id="rId5"/>
+    <p:sldId id="260" r:id="rId5"/>
+    <p:sldId id="259" r:id="rId6"/>
   </p:sldIdLst>
   <p:sldSz cx="12192000" cy="6858000"/>
   <p:notesSz cx="6858000" cy="9144000"/>
@@ -107,6 +108,11 @@
       </a:defRPr>
     </a:lvl9pPr>
   </p:defaultTextStyle>
+  <p:extLst>
+    <p:ext uri="{EFAFB233-063F-42B5-8137-9DF3F51BA10A}">
+      <p15:sldGuideLst xmlns:p15="http://schemas.microsoft.com/office/powerpoint/2012/main"/>
+    </p:ext>
+  </p:extLst>
 </p:presentation>
 </file>
 
@@ -154,7 +160,7 @@
           </a:lstStyle>
           <a:p>
             <a:r>
-              <a:rPr lang="hu-HU" smtClean="0"/>
+              <a:rPr lang="hu-HU"/>
               <a:t>Mintacím szerkesztése</a:t>
             </a:r>
             <a:endParaRPr lang="en-US" dirty="0"/>
@@ -274,7 +280,7 @@
           </a:lstStyle>
           <a:p>
             <a:r>
-              <a:rPr lang="hu-HU" smtClean="0"/>
+              <a:rPr lang="hu-HU"/>
               <a:t>Kattintson ide az alcím mintájának szerkesztéséhez</a:t>
             </a:r>
             <a:endParaRPr lang="en-US" dirty="0"/>
@@ -298,7 +304,7 @@
           <a:p>
             <a:fld id="{9FFE2455-E091-4BD6-840D-D056C88E8DD0}" type="datetimeFigureOut">
               <a:rPr lang="en-US" smtClean="0"/>
-              <a:t>3/14/2026</a:t>
+              <a:t>3/16/2026</a:t>
             </a:fld>
             <a:endParaRPr lang="en-US"/>
           </a:p>
@@ -404,6 +410,13 @@
             <a:noFill/>
           </a:ln>
         </p:spPr>
+        <p:txBody>
+          <a:bodyPr/>
+          <a:lstStyle/>
+          <a:p>
+            <a:endParaRPr lang="hu-HU"/>
+          </a:p>
+        </p:txBody>
       </p:sp>
       <p:sp>
         <p:nvSpPr>
@@ -490,7 +503,7 @@
           </a:lstStyle>
           <a:p>
             <a:r>
-              <a:rPr lang="hu-HU" smtClean="0"/>
+              <a:rPr lang="hu-HU"/>
               <a:t>Mintacím szerkesztése</a:t>
             </a:r>
             <a:endParaRPr lang="en-US" dirty="0"/>
@@ -613,7 +626,7 @@
           <a:p>
             <a:pPr lvl="0"/>
             <a:r>
-              <a:rPr lang="hu-HU" smtClean="0"/>
+              <a:rPr lang="hu-HU"/>
               <a:t>Mintaszöveg szerkesztése</a:t>
             </a:r>
           </a:p>
@@ -636,7 +649,7 @@
           <a:p>
             <a:fld id="{9FFE2455-E091-4BD6-840D-D056C88E8DD0}" type="datetimeFigureOut">
               <a:rPr lang="en-US" smtClean="0"/>
-              <a:t>3/14/2026</a:t>
+              <a:t>3/16/2026</a:t>
             </a:fld>
             <a:endParaRPr lang="en-US"/>
           </a:p>
@@ -828,7 +841,7 @@
           </a:lstStyle>
           <a:p>
             <a:r>
-              <a:rPr lang="hu-HU" smtClean="0"/>
+              <a:rPr lang="hu-HU"/>
               <a:t>Mintacím szerkesztése</a:t>
             </a:r>
             <a:endParaRPr lang="en-US" dirty="0"/>
@@ -892,7 +905,7 @@
           <a:p>
             <a:pPr lvl="0"/>
             <a:r>
-              <a:rPr lang="hu-HU" smtClean="0"/>
+              <a:rPr lang="hu-HU"/>
               <a:t>Mintaszöveg szerkesztése</a:t>
             </a:r>
           </a:p>
@@ -1014,7 +1027,7 @@
           <a:p>
             <a:pPr lvl="0"/>
             <a:r>
-              <a:rPr lang="hu-HU" smtClean="0"/>
+              <a:rPr lang="hu-HU"/>
               <a:t>Mintaszöveg szerkesztése</a:t>
             </a:r>
           </a:p>
@@ -1037,7 +1050,7 @@
           <a:p>
             <a:fld id="{9FFE2455-E091-4BD6-840D-D056C88E8DD0}" type="datetimeFigureOut">
               <a:rPr lang="en-US" smtClean="0"/>
-              <a:t>3/14/2026</a:t>
+              <a:t>3/16/2026</a:t>
             </a:fld>
             <a:endParaRPr lang="en-US"/>
           </a:p>
@@ -1305,7 +1318,7 @@
           </a:lstStyle>
           <a:p>
             <a:r>
-              <a:rPr lang="hu-HU" smtClean="0"/>
+              <a:rPr lang="hu-HU"/>
               <a:t>Mintacím szerkesztése</a:t>
             </a:r>
             <a:endParaRPr lang="en-US" dirty="0"/>
@@ -1350,7 +1363,7 @@
               <a:buNone/>
             </a:pPr>
             <a:r>
-              <a:rPr lang="hu-HU" smtClean="0"/>
+              <a:rPr lang="hu-HU"/>
               <a:t>Mintaszöveg szerkesztése</a:t>
             </a:r>
           </a:p>
@@ -1373,7 +1386,7 @@
           <a:p>
             <a:fld id="{9FFE2455-E091-4BD6-840D-D056C88E8DD0}" type="datetimeFigureOut">
               <a:rPr lang="en-US" smtClean="0"/>
-              <a:t>3/14/2026</a:t>
+              <a:t>3/16/2026</a:t>
             </a:fld>
             <a:endParaRPr lang="en-US"/>
           </a:p>
@@ -1565,7 +1578,7 @@
           </a:lstStyle>
           <a:p>
             <a:r>
-              <a:rPr lang="hu-HU" smtClean="0"/>
+              <a:rPr lang="hu-HU"/>
               <a:t>Mintacím szerkesztése</a:t>
             </a:r>
             <a:endParaRPr lang="en-US" dirty="0"/>
@@ -1626,7 +1639,7 @@
           <a:p>
             <a:pPr lvl="0"/>
             <a:r>
-              <a:rPr lang="hu-HU" smtClean="0"/>
+              <a:rPr lang="hu-HU"/>
               <a:t>Mintaszöveg szerkesztése</a:t>
             </a:r>
           </a:p>
@@ -1670,7 +1683,7 @@
               <a:buNone/>
             </a:pPr>
             <a:r>
-              <a:rPr lang="hu-HU" smtClean="0"/>
+              <a:rPr lang="hu-HU"/>
               <a:t>Mintaszöveg szerkesztése</a:t>
             </a:r>
           </a:p>
@@ -1693,7 +1706,7 @@
           <a:p>
             <a:fld id="{9FFE2455-E091-4BD6-840D-D056C88E8DD0}" type="datetimeFigureOut">
               <a:rPr lang="en-US" smtClean="0"/>
-              <a:t>3/14/2026</a:t>
+              <a:t>3/16/2026</a:t>
             </a:fld>
             <a:endParaRPr lang="en-US"/>
           </a:p>
@@ -1961,7 +1974,7 @@
           </a:lstStyle>
           <a:p>
             <a:r>
-              <a:rPr lang="hu-HU" smtClean="0"/>
+              <a:rPr lang="hu-HU"/>
               <a:t>Mintacím szerkesztése</a:t>
             </a:r>
             <a:endParaRPr lang="en-US" dirty="0"/>
@@ -2022,7 +2035,7 @@
           <a:p>
             <a:pPr lvl="0"/>
             <a:r>
-              <a:rPr lang="hu-HU" smtClean="0"/>
+              <a:rPr lang="hu-HU"/>
               <a:t>Mintaszöveg szerkesztése</a:t>
             </a:r>
           </a:p>
@@ -2066,7 +2079,7 @@
               <a:buNone/>
             </a:pPr>
             <a:r>
-              <a:rPr lang="hu-HU" smtClean="0"/>
+              <a:rPr lang="hu-HU"/>
               <a:t>Mintaszöveg szerkesztése</a:t>
             </a:r>
           </a:p>
@@ -2089,7 +2102,7 @@
           <a:p>
             <a:fld id="{9FFE2455-E091-4BD6-840D-D056C88E8DD0}" type="datetimeFigureOut">
               <a:rPr lang="en-US" smtClean="0"/>
-              <a:t>3/14/2026</a:t>
+              <a:t>3/16/2026</a:t>
             </a:fld>
             <a:endParaRPr lang="en-US"/>
           </a:p>
@@ -2270,7 +2283,7 @@
           <a:lstStyle/>
           <a:p>
             <a:r>
-              <a:rPr lang="hu-HU" smtClean="0"/>
+              <a:rPr lang="hu-HU"/>
               <a:t>Mintacím szerkesztése</a:t>
             </a:r>
             <a:endParaRPr lang="en-US" dirty="0"/>
@@ -2294,35 +2307,35 @@
           <a:p>
             <a:pPr lvl="0"/>
             <a:r>
-              <a:rPr lang="hu-HU" smtClean="0"/>
+              <a:rPr lang="hu-HU"/>
               <a:t>Mintaszöveg szerkesztése</a:t>
             </a:r>
           </a:p>
           <a:p>
             <a:pPr lvl="1"/>
             <a:r>
-              <a:rPr lang="hu-HU" smtClean="0"/>
+              <a:rPr lang="hu-HU"/>
               <a:t>Második szint</a:t>
             </a:r>
           </a:p>
           <a:p>
             <a:pPr lvl="2"/>
             <a:r>
-              <a:rPr lang="hu-HU" smtClean="0"/>
+              <a:rPr lang="hu-HU"/>
               <a:t>Harmadik szint</a:t>
             </a:r>
           </a:p>
           <a:p>
             <a:pPr lvl="3"/>
             <a:r>
-              <a:rPr lang="hu-HU" smtClean="0"/>
+              <a:rPr lang="hu-HU"/>
               <a:t>Negyedik szint</a:t>
             </a:r>
           </a:p>
           <a:p>
             <a:pPr lvl="4"/>
             <a:r>
-              <a:rPr lang="hu-HU" smtClean="0"/>
+              <a:rPr lang="hu-HU"/>
               <a:t>Ötödik szint</a:t>
             </a:r>
             <a:endParaRPr lang="en-US" dirty="0"/>
@@ -2346,7 +2359,7 @@
           <a:p>
             <a:fld id="{9FFE2455-E091-4BD6-840D-D056C88E8DD0}" type="datetimeFigureOut">
               <a:rPr lang="en-US" smtClean="0"/>
-              <a:t>3/14/2026</a:t>
+              <a:t>3/16/2026</a:t>
             </a:fld>
             <a:endParaRPr lang="en-US"/>
           </a:p>
@@ -2527,7 +2540,7 @@
           <a:lstStyle/>
           <a:p>
             <a:r>
-              <a:rPr lang="hu-HU" smtClean="0"/>
+              <a:rPr lang="hu-HU"/>
               <a:t>Mintacím szerkesztése</a:t>
             </a:r>
             <a:endParaRPr lang="en-US" dirty="0"/>
@@ -2556,35 +2569,35 @@
           <a:p>
             <a:pPr lvl="0"/>
             <a:r>
-              <a:rPr lang="hu-HU" smtClean="0"/>
+              <a:rPr lang="hu-HU"/>
               <a:t>Mintaszöveg szerkesztése</a:t>
             </a:r>
           </a:p>
           <a:p>
             <a:pPr lvl="1"/>
             <a:r>
-              <a:rPr lang="hu-HU" smtClean="0"/>
+              <a:rPr lang="hu-HU"/>
               <a:t>Második szint</a:t>
             </a:r>
           </a:p>
           <a:p>
             <a:pPr lvl="2"/>
             <a:r>
-              <a:rPr lang="hu-HU" smtClean="0"/>
+              <a:rPr lang="hu-HU"/>
               <a:t>Harmadik szint</a:t>
             </a:r>
           </a:p>
           <a:p>
             <a:pPr lvl="3"/>
             <a:r>
-              <a:rPr lang="hu-HU" smtClean="0"/>
+              <a:rPr lang="hu-HU"/>
               <a:t>Negyedik szint</a:t>
             </a:r>
           </a:p>
           <a:p>
             <a:pPr lvl="4"/>
             <a:r>
-              <a:rPr lang="hu-HU" smtClean="0"/>
+              <a:rPr lang="hu-HU"/>
               <a:t>Ötödik szint</a:t>
             </a:r>
             <a:endParaRPr lang="en-US" dirty="0"/>
@@ -2608,7 +2621,7 @@
           <a:p>
             <a:fld id="{9FFE2455-E091-4BD6-840D-D056C88E8DD0}" type="datetimeFigureOut">
               <a:rPr lang="en-US" smtClean="0"/>
-              <a:t>3/14/2026</a:t>
+              <a:t>3/16/2026</a:t>
             </a:fld>
             <a:endParaRPr lang="en-US"/>
           </a:p>
@@ -2789,7 +2802,7 @@
           <a:lstStyle/>
           <a:p>
             <a:r>
-              <a:rPr lang="hu-HU" smtClean="0"/>
+              <a:rPr lang="hu-HU"/>
               <a:t>Mintacím szerkesztése</a:t>
             </a:r>
             <a:endParaRPr lang="en-US" dirty="0"/>
@@ -2818,35 +2831,35 @@
           <a:p>
             <a:pPr lvl="0"/>
             <a:r>
-              <a:rPr lang="hu-HU" smtClean="0"/>
+              <a:rPr lang="hu-HU"/>
               <a:t>Mintaszöveg szerkesztése</a:t>
             </a:r>
           </a:p>
           <a:p>
             <a:pPr lvl="1"/>
             <a:r>
-              <a:rPr lang="hu-HU" smtClean="0"/>
+              <a:rPr lang="hu-HU"/>
               <a:t>Második szint</a:t>
             </a:r>
           </a:p>
           <a:p>
             <a:pPr lvl="2"/>
             <a:r>
-              <a:rPr lang="hu-HU" smtClean="0"/>
+              <a:rPr lang="hu-HU"/>
               <a:t>Harmadik szint</a:t>
             </a:r>
           </a:p>
           <a:p>
             <a:pPr lvl="3"/>
             <a:r>
-              <a:rPr lang="hu-HU" smtClean="0"/>
+              <a:rPr lang="hu-HU"/>
               <a:t>Negyedik szint</a:t>
             </a:r>
           </a:p>
           <a:p>
             <a:pPr lvl="4"/>
             <a:r>
-              <a:rPr lang="hu-HU" smtClean="0"/>
+              <a:rPr lang="hu-HU"/>
               <a:t>Ötödik szint</a:t>
             </a:r>
             <a:endParaRPr lang="en-US" dirty="0"/>
@@ -2870,7 +2883,7 @@
           <a:p>
             <a:fld id="{9FFE2455-E091-4BD6-840D-D056C88E8DD0}" type="datetimeFigureOut">
               <a:rPr lang="en-US" smtClean="0"/>
-              <a:t>3/14/2026</a:t>
+              <a:t>3/16/2026</a:t>
             </a:fld>
             <a:endParaRPr lang="en-US"/>
           </a:p>
@@ -3055,7 +3068,7 @@
           </a:lstStyle>
           <a:p>
             <a:r>
-              <a:rPr lang="hu-HU" smtClean="0"/>
+              <a:rPr lang="hu-HU"/>
               <a:t>Mintacím szerkesztése</a:t>
             </a:r>
             <a:endParaRPr lang="en-US" dirty="0"/>
@@ -3176,7 +3189,7 @@
           <a:p>
             <a:pPr lvl="0"/>
             <a:r>
-              <a:rPr lang="hu-HU" smtClean="0"/>
+              <a:rPr lang="hu-HU"/>
               <a:t>Mintaszöveg szerkesztése</a:t>
             </a:r>
           </a:p>
@@ -3199,7 +3212,7 @@
           <a:p>
             <a:fld id="{9FFE2455-E091-4BD6-840D-D056C88E8DD0}" type="datetimeFigureOut">
               <a:rPr lang="en-US" smtClean="0"/>
-              <a:t>3/14/2026</a:t>
+              <a:t>3/16/2026</a:t>
             </a:fld>
             <a:endParaRPr lang="en-US"/>
           </a:p>
@@ -3380,7 +3393,7 @@
           <a:lstStyle/>
           <a:p>
             <a:r>
-              <a:rPr lang="hu-HU" smtClean="0"/>
+              <a:rPr lang="hu-HU"/>
               <a:t>Mintacím szerkesztése</a:t>
             </a:r>
             <a:endParaRPr lang="en-US" dirty="0"/>
@@ -3411,35 +3424,35 @@
           <a:p>
             <a:pPr lvl="0"/>
             <a:r>
-              <a:rPr lang="hu-HU" smtClean="0"/>
+              <a:rPr lang="hu-HU"/>
               <a:t>Mintaszöveg szerkesztése</a:t>
             </a:r>
           </a:p>
           <a:p>
             <a:pPr lvl="1"/>
             <a:r>
-              <a:rPr lang="hu-HU" smtClean="0"/>
+              <a:rPr lang="hu-HU"/>
               <a:t>Második szint</a:t>
             </a:r>
           </a:p>
           <a:p>
             <a:pPr lvl="2"/>
             <a:r>
-              <a:rPr lang="hu-HU" smtClean="0"/>
+              <a:rPr lang="hu-HU"/>
               <a:t>Harmadik szint</a:t>
             </a:r>
           </a:p>
           <a:p>
             <a:pPr lvl="3"/>
             <a:r>
-              <a:rPr lang="hu-HU" smtClean="0"/>
+              <a:rPr lang="hu-HU"/>
               <a:t>Negyedik szint</a:t>
             </a:r>
           </a:p>
           <a:p>
             <a:pPr lvl="4"/>
             <a:r>
-              <a:rPr lang="hu-HU" smtClean="0"/>
+              <a:rPr lang="hu-HU"/>
               <a:t>Ötödik szint</a:t>
             </a:r>
             <a:endParaRPr lang="en-US" dirty="0"/>
@@ -3470,35 +3483,35 @@
           <a:p>
             <a:pPr lvl="0"/>
             <a:r>
-              <a:rPr lang="hu-HU" smtClean="0"/>
+              <a:rPr lang="hu-HU"/>
               <a:t>Mintaszöveg szerkesztése</a:t>
             </a:r>
           </a:p>
           <a:p>
             <a:pPr lvl="1"/>
             <a:r>
-              <a:rPr lang="hu-HU" smtClean="0"/>
+              <a:rPr lang="hu-HU"/>
               <a:t>Második szint</a:t>
             </a:r>
           </a:p>
           <a:p>
             <a:pPr lvl="2"/>
             <a:r>
-              <a:rPr lang="hu-HU" smtClean="0"/>
+              <a:rPr lang="hu-HU"/>
               <a:t>Harmadik szint</a:t>
             </a:r>
           </a:p>
           <a:p>
             <a:pPr lvl="3"/>
             <a:r>
-              <a:rPr lang="hu-HU" smtClean="0"/>
+              <a:rPr lang="hu-HU"/>
               <a:t>Negyedik szint</a:t>
             </a:r>
           </a:p>
           <a:p>
             <a:pPr lvl="4"/>
             <a:r>
-              <a:rPr lang="hu-HU" smtClean="0"/>
+              <a:rPr lang="hu-HU"/>
               <a:t>Ötödik szint</a:t>
             </a:r>
             <a:endParaRPr lang="en-US" dirty="0"/>
@@ -3522,7 +3535,7 @@
           <a:p>
             <a:fld id="{9FFE2455-E091-4BD6-840D-D056C88E8DD0}" type="datetimeFigureOut">
               <a:rPr lang="en-US" smtClean="0"/>
-              <a:t>3/14/2026</a:t>
+              <a:t>3/16/2026</a:t>
             </a:fld>
             <a:endParaRPr lang="en-US"/>
           </a:p>
@@ -3703,7 +3716,7 @@
           <a:lstStyle/>
           <a:p>
             <a:r>
-              <a:rPr lang="hu-HU" smtClean="0"/>
+              <a:rPr lang="hu-HU"/>
               <a:t>Mintacím szerkesztése</a:t>
             </a:r>
             <a:endParaRPr lang="en-US" dirty="0"/>
@@ -3771,7 +3784,7 @@
           <a:p>
             <a:pPr lvl="0"/>
             <a:r>
-              <a:rPr lang="hu-HU" smtClean="0"/>
+              <a:rPr lang="hu-HU"/>
               <a:t>Mintaszöveg szerkesztése</a:t>
             </a:r>
           </a:p>
@@ -3801,35 +3814,35 @@
           <a:p>
             <a:pPr lvl="0"/>
             <a:r>
-              <a:rPr lang="hu-HU" smtClean="0"/>
+              <a:rPr lang="hu-HU"/>
               <a:t>Mintaszöveg szerkesztése</a:t>
             </a:r>
           </a:p>
           <a:p>
             <a:pPr lvl="1"/>
             <a:r>
-              <a:rPr lang="hu-HU" smtClean="0"/>
+              <a:rPr lang="hu-HU"/>
               <a:t>Második szint</a:t>
             </a:r>
           </a:p>
           <a:p>
             <a:pPr lvl="2"/>
             <a:r>
-              <a:rPr lang="hu-HU" smtClean="0"/>
+              <a:rPr lang="hu-HU"/>
               <a:t>Harmadik szint</a:t>
             </a:r>
           </a:p>
           <a:p>
             <a:pPr lvl="3"/>
             <a:r>
-              <a:rPr lang="hu-HU" smtClean="0"/>
+              <a:rPr lang="hu-HU"/>
               <a:t>Negyedik szint</a:t>
             </a:r>
           </a:p>
           <a:p>
             <a:pPr lvl="4"/>
             <a:r>
-              <a:rPr lang="hu-HU" smtClean="0"/>
+              <a:rPr lang="hu-HU"/>
               <a:t>Ötödik szint</a:t>
             </a:r>
             <a:endParaRPr lang="en-US" dirty="0"/>
@@ -3897,7 +3910,7 @@
           <a:p>
             <a:pPr lvl="0"/>
             <a:r>
-              <a:rPr lang="hu-HU" smtClean="0"/>
+              <a:rPr lang="hu-HU"/>
               <a:t>Mintaszöveg szerkesztése</a:t>
             </a:r>
           </a:p>
@@ -3927,35 +3940,35 @@
           <a:p>
             <a:pPr lvl="0"/>
             <a:r>
-              <a:rPr lang="hu-HU" smtClean="0"/>
+              <a:rPr lang="hu-HU"/>
               <a:t>Mintaszöveg szerkesztése</a:t>
             </a:r>
           </a:p>
           <a:p>
             <a:pPr lvl="1"/>
             <a:r>
-              <a:rPr lang="hu-HU" smtClean="0"/>
+              <a:rPr lang="hu-HU"/>
               <a:t>Második szint</a:t>
             </a:r>
           </a:p>
           <a:p>
             <a:pPr lvl="2"/>
             <a:r>
-              <a:rPr lang="hu-HU" smtClean="0"/>
+              <a:rPr lang="hu-HU"/>
               <a:t>Harmadik szint</a:t>
             </a:r>
           </a:p>
           <a:p>
             <a:pPr lvl="3"/>
             <a:r>
-              <a:rPr lang="hu-HU" smtClean="0"/>
+              <a:rPr lang="hu-HU"/>
               <a:t>Negyedik szint</a:t>
             </a:r>
           </a:p>
           <a:p>
             <a:pPr lvl="4"/>
             <a:r>
-              <a:rPr lang="hu-HU" smtClean="0"/>
+              <a:rPr lang="hu-HU"/>
               <a:t>Ötödik szint</a:t>
             </a:r>
             <a:endParaRPr lang="en-US" dirty="0"/>
@@ -3979,7 +3992,7 @@
           <a:p>
             <a:fld id="{9FFE2455-E091-4BD6-840D-D056C88E8DD0}" type="datetimeFigureOut">
               <a:rPr lang="en-US" smtClean="0"/>
-              <a:t>3/14/2026</a:t>
+              <a:t>3/16/2026</a:t>
             </a:fld>
             <a:endParaRPr lang="en-US"/>
           </a:p>
@@ -4160,7 +4173,7 @@
           <a:lstStyle/>
           <a:p>
             <a:r>
-              <a:rPr lang="hu-HU" smtClean="0"/>
+              <a:rPr lang="hu-HU"/>
               <a:t>Mintacím szerkesztése</a:t>
             </a:r>
             <a:endParaRPr lang="en-US" dirty="0"/>
@@ -4184,7 +4197,7 @@
           <a:p>
             <a:fld id="{9FFE2455-E091-4BD6-840D-D056C88E8DD0}" type="datetimeFigureOut">
               <a:rPr lang="en-US" smtClean="0"/>
-              <a:t>3/14/2026</a:t>
+              <a:t>3/16/2026</a:t>
             </a:fld>
             <a:endParaRPr lang="en-US"/>
           </a:p>
@@ -4361,7 +4374,7 @@
           <a:p>
             <a:fld id="{9FFE2455-E091-4BD6-840D-D056C88E8DD0}" type="datetimeFigureOut">
               <a:rPr lang="en-US" smtClean="0"/>
-              <a:t>3/14/2026</a:t>
+              <a:t>3/16/2026</a:t>
             </a:fld>
             <a:endParaRPr lang="en-US"/>
           </a:p>
@@ -4546,7 +4559,7 @@
           </a:lstStyle>
           <a:p>
             <a:r>
-              <a:rPr lang="hu-HU" smtClean="0"/>
+              <a:rPr lang="hu-HU"/>
               <a:t>Mintacím szerkesztése</a:t>
             </a:r>
             <a:endParaRPr lang="en-US" dirty="0"/>
@@ -4577,35 +4590,35 @@
           <a:p>
             <a:pPr lvl="0"/>
             <a:r>
-              <a:rPr lang="hu-HU" smtClean="0"/>
+              <a:rPr lang="hu-HU"/>
               <a:t>Mintaszöveg szerkesztése</a:t>
             </a:r>
           </a:p>
           <a:p>
             <a:pPr lvl="1"/>
             <a:r>
-              <a:rPr lang="hu-HU" smtClean="0"/>
+              <a:rPr lang="hu-HU"/>
               <a:t>Második szint</a:t>
             </a:r>
           </a:p>
           <a:p>
             <a:pPr lvl="2"/>
             <a:r>
-              <a:rPr lang="hu-HU" smtClean="0"/>
+              <a:rPr lang="hu-HU"/>
               <a:t>Harmadik szint</a:t>
             </a:r>
           </a:p>
           <a:p>
             <a:pPr lvl="3"/>
             <a:r>
-              <a:rPr lang="hu-HU" smtClean="0"/>
+              <a:rPr lang="hu-HU"/>
               <a:t>Negyedik szint</a:t>
             </a:r>
           </a:p>
           <a:p>
             <a:pPr lvl="4"/>
             <a:r>
-              <a:rPr lang="hu-HU" smtClean="0"/>
+              <a:rPr lang="hu-HU"/>
               <a:t>Ötödik szint</a:t>
             </a:r>
             <a:endParaRPr lang="en-US" dirty="0"/>
@@ -4671,7 +4684,7 @@
           <a:p>
             <a:pPr lvl="0"/>
             <a:r>
-              <a:rPr lang="hu-HU" smtClean="0"/>
+              <a:rPr lang="hu-HU"/>
               <a:t>Mintaszöveg szerkesztése</a:t>
             </a:r>
           </a:p>
@@ -4694,7 +4707,7 @@
           <a:p>
             <a:fld id="{9FFE2455-E091-4BD6-840D-D056C88E8DD0}" type="datetimeFigureOut">
               <a:rPr lang="en-US" smtClean="0"/>
-              <a:t>3/14/2026</a:t>
+              <a:t>3/16/2026</a:t>
             </a:fld>
             <a:endParaRPr lang="en-US"/>
           </a:p>
@@ -4881,7 +4894,7 @@
           </a:lstStyle>
           <a:p>
             <a:r>
-              <a:rPr lang="hu-HU" smtClean="0"/>
+              <a:rPr lang="hu-HU"/>
               <a:t>Mintacím szerkesztése</a:t>
             </a:r>
             <a:endParaRPr lang="en-US" dirty="0"/>
@@ -4948,7 +4961,7 @@
           </a:lstStyle>
           <a:p>
             <a:r>
-              <a:rPr lang="hu-HU" smtClean="0"/>
+              <a:rPr lang="hu-HU"/>
               <a:t>Kép beszúrásához kattintson az ikonra</a:t>
             </a:r>
             <a:endParaRPr lang="en-US" dirty="0"/>
@@ -5016,7 +5029,7 @@
           <a:p>
             <a:pPr lvl="0"/>
             <a:r>
-              <a:rPr lang="hu-HU" smtClean="0"/>
+              <a:rPr lang="hu-HU"/>
               <a:t>Mintaszöveg szerkesztése</a:t>
             </a:r>
           </a:p>
@@ -5039,7 +5052,7 @@
           <a:p>
             <a:fld id="{9FFE2455-E091-4BD6-840D-D056C88E8DD0}" type="datetimeFigureOut">
               <a:rPr lang="en-US" smtClean="0"/>
-              <a:t>3/14/2026</a:t>
+              <a:t>3/16/2026</a:t>
             </a:fld>
             <a:endParaRPr lang="en-US"/>
           </a:p>
@@ -5283,6 +5296,13 @@
               <a:noFill/>
             </a:ln>
           </p:spPr>
+          <p:txBody>
+            <a:bodyPr/>
+            <a:lstStyle/>
+            <a:p>
+              <a:endParaRPr lang="hu-HU"/>
+            </a:p>
+          </p:txBody>
         </p:sp>
         <p:sp>
           <p:nvSpPr>
@@ -5349,6 +5369,13 @@
               <a:noFill/>
             </a:ln>
           </p:spPr>
+          <p:txBody>
+            <a:bodyPr/>
+            <a:lstStyle/>
+            <a:p>
+              <a:endParaRPr lang="hu-HU"/>
+            </a:p>
+          </p:txBody>
         </p:sp>
         <p:sp>
           <p:nvSpPr>
@@ -5420,6 +5447,13 @@
               <a:noFill/>
             </a:ln>
           </p:spPr>
+          <p:txBody>
+            <a:bodyPr/>
+            <a:lstStyle/>
+            <a:p>
+              <a:endParaRPr lang="hu-HU"/>
+            </a:p>
+          </p:txBody>
         </p:sp>
         <p:sp>
           <p:nvSpPr>
@@ -5471,6 +5505,13 @@
               <a:noFill/>
             </a:ln>
           </p:spPr>
+          <p:txBody>
+            <a:bodyPr/>
+            <a:lstStyle/>
+            <a:p>
+              <a:endParaRPr lang="hu-HU"/>
+            </a:p>
+          </p:txBody>
         </p:sp>
         <p:sp>
           <p:nvSpPr>
@@ -5557,6 +5598,13 @@
               <a:noFill/>
             </a:ln>
           </p:spPr>
+          <p:txBody>
+            <a:bodyPr/>
+            <a:lstStyle/>
+            <a:p>
+              <a:endParaRPr lang="hu-HU"/>
+            </a:p>
+          </p:txBody>
         </p:sp>
         <p:sp>
           <p:nvSpPr>
@@ -5638,6 +5686,13 @@
               <a:noFill/>
             </a:ln>
           </p:spPr>
+          <p:txBody>
+            <a:bodyPr/>
+            <a:lstStyle/>
+            <a:p>
+              <a:endParaRPr lang="hu-HU"/>
+            </a:p>
+          </p:txBody>
         </p:sp>
         <p:sp>
           <p:nvSpPr>
@@ -5699,6 +5754,13 @@
               <a:noFill/>
             </a:ln>
           </p:spPr>
+          <p:txBody>
+            <a:bodyPr/>
+            <a:lstStyle/>
+            <a:p>
+              <a:endParaRPr lang="hu-HU"/>
+            </a:p>
+          </p:txBody>
         </p:sp>
         <p:sp>
           <p:nvSpPr>
@@ -5780,6 +5842,13 @@
               <a:noFill/>
             </a:ln>
           </p:spPr>
+          <p:txBody>
+            <a:bodyPr/>
+            <a:lstStyle/>
+            <a:p>
+              <a:endParaRPr lang="hu-HU"/>
+            </a:p>
+          </p:txBody>
         </p:sp>
         <p:sp>
           <p:nvSpPr>
@@ -5896,6 +5965,13 @@
               <a:noFill/>
             </a:ln>
           </p:spPr>
+          <p:txBody>
+            <a:bodyPr/>
+            <a:lstStyle/>
+            <a:p>
+              <a:endParaRPr lang="hu-HU"/>
+            </a:p>
+          </p:txBody>
         </p:sp>
         <p:sp>
           <p:nvSpPr>
@@ -5947,6 +6023,13 @@
               <a:noFill/>
             </a:ln>
           </p:spPr>
+          <p:txBody>
+            <a:bodyPr/>
+            <a:lstStyle/>
+            <a:p>
+              <a:endParaRPr lang="hu-HU"/>
+            </a:p>
+          </p:txBody>
         </p:sp>
         <p:sp>
           <p:nvSpPr>
@@ -6008,6 +6091,13 @@
               <a:noFill/>
             </a:ln>
           </p:spPr>
+          <p:txBody>
+            <a:bodyPr/>
+            <a:lstStyle/>
+            <a:p>
+              <a:endParaRPr lang="hu-HU"/>
+            </a:p>
+          </p:txBody>
         </p:sp>
         <p:sp>
           <p:nvSpPr>
@@ -6079,6 +6169,13 @@
               <a:noFill/>
             </a:ln>
           </p:spPr>
+          <p:txBody>
+            <a:bodyPr/>
+            <a:lstStyle/>
+            <a:p>
+              <a:endParaRPr lang="hu-HU"/>
+            </a:p>
+          </p:txBody>
         </p:sp>
       </p:grpSp>
       <p:grpSp>
@@ -6198,6 +6295,13 @@
               <a:noFill/>
             </a:ln>
           </p:spPr>
+          <p:txBody>
+            <a:bodyPr/>
+            <a:lstStyle/>
+            <a:p>
+              <a:endParaRPr lang="hu-HU"/>
+            </a:p>
+          </p:txBody>
         </p:sp>
         <p:sp>
           <p:nvSpPr>
@@ -6267,6 +6371,13 @@
               <a:noFill/>
             </a:ln>
           </p:spPr>
+          <p:txBody>
+            <a:bodyPr/>
+            <a:lstStyle/>
+            <a:p>
+              <a:endParaRPr lang="hu-HU"/>
+            </a:p>
+          </p:txBody>
         </p:sp>
         <p:sp>
           <p:nvSpPr>
@@ -6336,6 +6447,13 @@
               <a:noFill/>
             </a:ln>
           </p:spPr>
+          <p:txBody>
+            <a:bodyPr/>
+            <a:lstStyle/>
+            <a:p>
+              <a:endParaRPr lang="hu-HU"/>
+            </a:p>
+          </p:txBody>
         </p:sp>
         <p:sp>
           <p:nvSpPr>
@@ -6420,6 +6538,13 @@
               <a:noFill/>
             </a:ln>
           </p:spPr>
+          <p:txBody>
+            <a:bodyPr/>
+            <a:lstStyle/>
+            <a:p>
+              <a:endParaRPr lang="hu-HU"/>
+            </a:p>
+          </p:txBody>
         </p:sp>
         <p:sp>
           <p:nvSpPr>
@@ -6514,6 +6639,13 @@
               <a:noFill/>
             </a:ln>
           </p:spPr>
+          <p:txBody>
+            <a:bodyPr/>
+            <a:lstStyle/>
+            <a:p>
+              <a:endParaRPr lang="hu-HU"/>
+            </a:p>
+          </p:txBody>
         </p:sp>
         <p:sp>
           <p:nvSpPr>
@@ -6563,6 +6695,13 @@
               <a:noFill/>
             </a:ln>
           </p:spPr>
+          <p:txBody>
+            <a:bodyPr/>
+            <a:lstStyle/>
+            <a:p>
+              <a:endParaRPr lang="hu-HU"/>
+            </a:p>
+          </p:txBody>
         </p:sp>
         <p:sp>
           <p:nvSpPr>
@@ -6627,6 +6766,13 @@
               <a:noFill/>
             </a:ln>
           </p:spPr>
+          <p:txBody>
+            <a:bodyPr/>
+            <a:lstStyle/>
+            <a:p>
+              <a:endParaRPr lang="hu-HU"/>
+            </a:p>
+          </p:txBody>
         </p:sp>
         <p:sp>
           <p:nvSpPr>
@@ -6736,6 +6882,13 @@
               <a:noFill/>
             </a:ln>
           </p:spPr>
+          <p:txBody>
+            <a:bodyPr/>
+            <a:lstStyle/>
+            <a:p>
+              <a:endParaRPr lang="hu-HU"/>
+            </a:p>
+          </p:txBody>
         </p:sp>
         <p:sp>
           <p:nvSpPr>
@@ -6785,6 +6938,13 @@
               <a:noFill/>
             </a:ln>
           </p:spPr>
+          <p:txBody>
+            <a:bodyPr/>
+            <a:lstStyle/>
+            <a:p>
+              <a:endParaRPr lang="hu-HU"/>
+            </a:p>
+          </p:txBody>
         </p:sp>
         <p:sp>
           <p:nvSpPr>
@@ -6854,6 +7014,13 @@
               <a:noFill/>
             </a:ln>
           </p:spPr>
+          <p:txBody>
+            <a:bodyPr/>
+            <a:lstStyle/>
+            <a:p>
+              <a:endParaRPr lang="hu-HU"/>
+            </a:p>
+          </p:txBody>
         </p:sp>
         <p:sp>
           <p:nvSpPr>
@@ -6918,6 +7085,13 @@
               <a:noFill/>
             </a:ln>
           </p:spPr>
+          <p:txBody>
+            <a:bodyPr/>
+            <a:lstStyle/>
+            <a:p>
+              <a:endParaRPr lang="hu-HU"/>
+            </a:p>
+          </p:txBody>
         </p:sp>
         <p:sp>
           <p:nvSpPr>
@@ -6987,6 +7161,13 @@
               <a:noFill/>
             </a:ln>
           </p:spPr>
+          <p:txBody>
+            <a:bodyPr/>
+            <a:lstStyle/>
+            <a:p>
+              <a:endParaRPr lang="hu-HU"/>
+            </a:p>
+          </p:txBody>
         </p:sp>
       </p:grpSp>
       <p:sp>
@@ -7025,6 +7206,13 @@
             <a:schemeClr val="lt1"/>
           </a:fontRef>
         </p:style>
+        <p:txBody>
+          <a:bodyPr/>
+          <a:lstStyle/>
+          <a:p>
+            <a:endParaRPr lang="hu-HU"/>
+          </a:p>
+        </p:txBody>
       </p:sp>
       <p:sp>
         <p:nvSpPr>
@@ -7052,7 +7240,7 @@
           <a:lstStyle/>
           <a:p>
             <a:r>
-              <a:rPr lang="hu-HU" smtClean="0"/>
+              <a:rPr lang="hu-HU"/>
               <a:t>Mintacím szerkesztése</a:t>
             </a:r>
             <a:endParaRPr lang="en-US" dirty="0"/>
@@ -7086,35 +7274,35 @@
           <a:p>
             <a:pPr lvl="0"/>
             <a:r>
-              <a:rPr lang="hu-HU" smtClean="0"/>
+              <a:rPr lang="hu-HU"/>
               <a:t>Mintaszöveg szerkesztése</a:t>
             </a:r>
           </a:p>
           <a:p>
             <a:pPr lvl="1"/>
             <a:r>
-              <a:rPr lang="hu-HU" smtClean="0"/>
+              <a:rPr lang="hu-HU"/>
               <a:t>Második szint</a:t>
             </a:r>
           </a:p>
           <a:p>
             <a:pPr lvl="2"/>
             <a:r>
-              <a:rPr lang="hu-HU" smtClean="0"/>
+              <a:rPr lang="hu-HU"/>
               <a:t>Harmadik szint</a:t>
             </a:r>
           </a:p>
           <a:p>
             <a:pPr lvl="3"/>
             <a:r>
-              <a:rPr lang="hu-HU" smtClean="0"/>
+              <a:rPr lang="hu-HU"/>
               <a:t>Negyedik szint</a:t>
             </a:r>
           </a:p>
           <a:p>
             <a:pPr lvl="4"/>
             <a:r>
-              <a:rPr lang="hu-HU" smtClean="0"/>
+              <a:rPr lang="hu-HU"/>
               <a:t>Ötödik szint</a:t>
             </a:r>
             <a:endParaRPr lang="en-US" dirty="0"/>
@@ -7156,7 +7344,7 @@
           <a:p>
             <a:fld id="{9FFE2455-E091-4BD6-840D-D056C88E8DD0}" type="datetimeFigureOut">
               <a:rPr lang="en-US" smtClean="0"/>
-              <a:t>3/14/2026</a:t>
+              <a:t>3/16/2026</a:t>
             </a:fld>
             <a:endParaRPr lang="en-US"/>
           </a:p>
@@ -7697,7 +7885,7 @@
           <a:lstStyle/>
           <a:p>
             <a:r>
-              <a:rPr lang="hu-HU" sz="6600" dirty="0" err="1" smtClean="0">
+              <a:rPr lang="hu-HU" sz="6600" dirty="0" err="1">
                 <a:solidFill>
                   <a:schemeClr val="tx1"/>
                 </a:solidFill>
@@ -7728,7 +7916,7 @@
           <a:lstStyle/>
           <a:p>
             <a:r>
-              <a:rPr lang="hu-HU" dirty="0" smtClean="0"/>
+              <a:rPr lang="hu-HU" dirty="0"/>
               <a:t>Készítette: Szalóczy Krisztián</a:t>
             </a:r>
             <a:endParaRPr lang="en-US" dirty="0"/>
@@ -7745,13 +7933,6 @@
   <p:clrMapOvr>
     <a:masterClrMapping/>
   </p:clrMapOvr>
-  <p:timing>
-    <p:tnLst>
-      <p:par>
-        <p:cTn id="1" dur="indefinite" restart="never" nodeType="tmRoot"/>
-      </p:par>
-    </p:tnLst>
-  </p:timing>
 </p:sld>
 </file>
 
@@ -8164,13 +8345,6 @@
   <p:clrMapOvr>
     <a:masterClrMapping/>
   </p:clrMapOvr>
-  <p:timing>
-    <p:tnLst>
-      <p:par>
-        <p:cTn id="1" dur="indefinite" restart="never" nodeType="tmRoot"/>
-      </p:par>
-    </p:tnLst>
-  </p:timing>
 </p:sld>
 </file>
 
@@ -8207,7 +8381,7 @@
           <a:lstStyle/>
           <a:p>
             <a:r>
-              <a:rPr lang="hu-HU" dirty="0" smtClean="0"/>
+              <a:rPr lang="hu-HU" dirty="0"/>
               <a:t>Fő célja - használata</a:t>
             </a:r>
             <a:endParaRPr lang="en-US" dirty="0"/>
@@ -8435,7 +8609,7 @@
               <a:buChar char="•"/>
               <a:tabLst/>
             </a:pPr>
-            <a:endParaRPr kumimoji="0" lang="en-US" altLang="en-US" sz="1800" b="0" i="0" u="none" strike="noStrike" cap="none" normalizeH="0" baseline="0" dirty="0" smtClean="0">
+            <a:endParaRPr kumimoji="0" lang="en-US" altLang="en-US" sz="1800" b="0" i="0" u="none" strike="noStrike" cap="none" normalizeH="0" baseline="0" dirty="0">
               <a:ln>
                 <a:noFill/>
               </a:ln>
@@ -8458,13 +8632,6 @@
   <p:clrMapOvr>
     <a:masterClrMapping/>
   </p:clrMapOvr>
-  <p:timing>
-    <p:tnLst>
-      <p:par>
-        <p:cTn id="1" dur="indefinite" restart="never" nodeType="tmRoot"/>
-      </p:par>
-    </p:tnLst>
-  </p:timing>
 </p:sld>
 </file>
 
@@ -8487,6 +8654,428 @@
       </p:grpSpPr>
       <p:sp>
         <p:nvSpPr>
+          <p:cNvPr id="4" name="Ellipszis 3">
+            <a:extLst>
+              <a:ext uri="{FF2B5EF4-FFF2-40B4-BE49-F238E27FC236}">
+                <a16:creationId xmlns:a16="http://schemas.microsoft.com/office/drawing/2014/main" id="{DDF9337B-0E19-2E70-AFC0-2F31E7F488CF}"/>
+              </a:ext>
+            </a:extLst>
+          </p:cNvPr>
+          <p:cNvSpPr/>
+          <p:nvPr/>
+        </p:nvSpPr>
+        <p:spPr>
+          <a:xfrm>
+            <a:off x="6629400" y="406400"/>
+            <a:ext cx="1739900" cy="749300"/>
+          </a:xfrm>
+          <a:prstGeom prst="ellipse">
+            <a:avLst/>
+          </a:prstGeom>
+        </p:spPr>
+        <p:style>
+          <a:lnRef idx="2">
+            <a:schemeClr val="accent6"/>
+          </a:lnRef>
+          <a:fillRef idx="1">
+            <a:schemeClr val="lt1"/>
+          </a:fillRef>
+          <a:effectRef idx="0">
+            <a:schemeClr val="accent6"/>
+          </a:effectRef>
+          <a:fontRef idx="minor">
+            <a:schemeClr val="dk1"/>
+          </a:fontRef>
+        </p:style>
+        <p:txBody>
+          <a:bodyPr rtlCol="0" anchor="ctr"/>
+          <a:lstStyle/>
+          <a:p>
+            <a:pPr algn="ctr"/>
+            <a:r>
+              <a:rPr lang="hu-HU" dirty="0" err="1"/>
+              <a:t>Xquery</a:t>
+            </a:r>
+            <a:endParaRPr lang="hu-HU" dirty="0"/>
+          </a:p>
+        </p:txBody>
+      </p:sp>
+      <p:sp>
+        <p:nvSpPr>
+          <p:cNvPr id="5" name="Ellipszis 4">
+            <a:extLst>
+              <a:ext uri="{FF2B5EF4-FFF2-40B4-BE49-F238E27FC236}">
+                <a16:creationId xmlns:a16="http://schemas.microsoft.com/office/drawing/2014/main" id="{22FA9C70-6626-2365-30B3-B3CC9F27DA34}"/>
+              </a:ext>
+            </a:extLst>
+          </p:cNvPr>
+          <p:cNvSpPr/>
+          <p:nvPr/>
+        </p:nvSpPr>
+        <p:spPr>
+          <a:xfrm>
+            <a:off x="4298156" y="1672911"/>
+            <a:ext cx="1422400" cy="749300"/>
+          </a:xfrm>
+          <a:prstGeom prst="ellipse">
+            <a:avLst/>
+          </a:prstGeom>
+        </p:spPr>
+        <p:style>
+          <a:lnRef idx="2">
+            <a:schemeClr val="accent6"/>
+          </a:lnRef>
+          <a:fillRef idx="1">
+            <a:schemeClr val="lt1"/>
+          </a:fillRef>
+          <a:effectRef idx="0">
+            <a:schemeClr val="accent6"/>
+          </a:effectRef>
+          <a:fontRef idx="minor">
+            <a:schemeClr val="dk1"/>
+          </a:fontRef>
+        </p:style>
+        <p:txBody>
+          <a:bodyPr rtlCol="0" anchor="ctr"/>
+          <a:lstStyle/>
+          <a:p>
+            <a:pPr algn="ctr"/>
+            <a:r>
+              <a:rPr lang="hu-HU" dirty="0" err="1"/>
+              <a:t>Query</a:t>
+            </a:r>
+            <a:r>
+              <a:rPr lang="hu-HU" dirty="0"/>
+              <a:t> FLWOR</a:t>
+            </a:r>
+          </a:p>
+        </p:txBody>
+      </p:sp>
+      <p:sp>
+        <p:nvSpPr>
+          <p:cNvPr id="7" name="Ellipszis 6">
+            <a:extLst>
+              <a:ext uri="{FF2B5EF4-FFF2-40B4-BE49-F238E27FC236}">
+                <a16:creationId xmlns:a16="http://schemas.microsoft.com/office/drawing/2014/main" id="{2135333B-A0C0-3B67-54A8-3576D89ED47C}"/>
+              </a:ext>
+            </a:extLst>
+          </p:cNvPr>
+          <p:cNvSpPr/>
+          <p:nvPr/>
+        </p:nvSpPr>
+        <p:spPr>
+          <a:xfrm>
+            <a:off x="9354342" y="1672911"/>
+            <a:ext cx="1536700" cy="749300"/>
+          </a:xfrm>
+          <a:prstGeom prst="ellipse">
+            <a:avLst/>
+          </a:prstGeom>
+        </p:spPr>
+        <p:style>
+          <a:lnRef idx="2">
+            <a:schemeClr val="accent6"/>
+          </a:lnRef>
+          <a:fillRef idx="1">
+            <a:schemeClr val="lt1"/>
+          </a:fillRef>
+          <a:effectRef idx="0">
+            <a:schemeClr val="accent6"/>
+          </a:effectRef>
+          <a:fontRef idx="minor">
+            <a:schemeClr val="dk1"/>
+          </a:fontRef>
+        </p:style>
+        <p:txBody>
+          <a:bodyPr rtlCol="0" anchor="ctr"/>
+          <a:lstStyle/>
+          <a:p>
+            <a:pPr algn="ctr"/>
+            <a:r>
+              <a:rPr lang="hu-HU" dirty="0"/>
+              <a:t>Update</a:t>
+            </a:r>
+          </a:p>
+        </p:txBody>
+      </p:sp>
+      <p:sp>
+        <p:nvSpPr>
+          <p:cNvPr id="8" name="Ellipszis 7">
+            <a:extLst>
+              <a:ext uri="{FF2B5EF4-FFF2-40B4-BE49-F238E27FC236}">
+                <a16:creationId xmlns:a16="http://schemas.microsoft.com/office/drawing/2014/main" id="{B36A805E-D790-8253-A800-285F42F0D605}"/>
+              </a:ext>
+            </a:extLst>
+          </p:cNvPr>
+          <p:cNvSpPr/>
+          <p:nvPr/>
+        </p:nvSpPr>
+        <p:spPr>
+          <a:xfrm>
+            <a:off x="1905000" y="4006850"/>
+            <a:ext cx="1320800" cy="571500"/>
+          </a:xfrm>
+          <a:prstGeom prst="ellipse">
+            <a:avLst/>
+          </a:prstGeom>
+        </p:spPr>
+        <p:style>
+          <a:lnRef idx="2">
+            <a:schemeClr val="accent6"/>
+          </a:lnRef>
+          <a:fillRef idx="1">
+            <a:schemeClr val="lt1"/>
+          </a:fillRef>
+          <a:effectRef idx="0">
+            <a:schemeClr val="accent6"/>
+          </a:effectRef>
+          <a:fontRef idx="minor">
+            <a:schemeClr val="dk1"/>
+          </a:fontRef>
+        </p:style>
+        <p:txBody>
+          <a:bodyPr rtlCol="0" anchor="ctr"/>
+          <a:lstStyle/>
+          <a:p>
+            <a:pPr algn="ctr"/>
+            <a:r>
+              <a:rPr lang="hu-HU" dirty="0" err="1"/>
+              <a:t>Selection</a:t>
+            </a:r>
+            <a:endParaRPr lang="hu-HU" dirty="0"/>
+          </a:p>
+        </p:txBody>
+      </p:sp>
+      <p:sp>
+        <p:nvSpPr>
+          <p:cNvPr id="9" name="Ellipszis 8">
+            <a:extLst>
+              <a:ext uri="{FF2B5EF4-FFF2-40B4-BE49-F238E27FC236}">
+                <a16:creationId xmlns:a16="http://schemas.microsoft.com/office/drawing/2014/main" id="{F4D740C2-2EDD-F56A-6528-EEE4BC005864}"/>
+              </a:ext>
+            </a:extLst>
+          </p:cNvPr>
+          <p:cNvSpPr/>
+          <p:nvPr/>
+        </p:nvSpPr>
+        <p:spPr>
+          <a:xfrm>
+            <a:off x="3541713" y="4006850"/>
+            <a:ext cx="1320800" cy="571500"/>
+          </a:xfrm>
+          <a:prstGeom prst="ellipse">
+            <a:avLst/>
+          </a:prstGeom>
+        </p:spPr>
+        <p:style>
+          <a:lnRef idx="2">
+            <a:schemeClr val="accent6"/>
+          </a:lnRef>
+          <a:fillRef idx="1">
+            <a:schemeClr val="lt1"/>
+          </a:fillRef>
+          <a:effectRef idx="0">
+            <a:schemeClr val="accent6"/>
+          </a:effectRef>
+          <a:fontRef idx="minor">
+            <a:schemeClr val="dk1"/>
+          </a:fontRef>
+        </p:style>
+        <p:txBody>
+          <a:bodyPr rtlCol="0" anchor="ctr"/>
+          <a:lstStyle/>
+          <a:p>
+            <a:pPr algn="ctr"/>
+            <a:r>
+              <a:rPr lang="hu-HU" dirty="0"/>
+              <a:t>Projection</a:t>
+            </a:r>
+          </a:p>
+        </p:txBody>
+      </p:sp>
+      <p:sp>
+        <p:nvSpPr>
+          <p:cNvPr id="10" name="Ellipszis 9">
+            <a:extLst>
+              <a:ext uri="{FF2B5EF4-FFF2-40B4-BE49-F238E27FC236}">
+                <a16:creationId xmlns:a16="http://schemas.microsoft.com/office/drawing/2014/main" id="{2B625B94-B04C-DE66-5865-4EE9676534BC}"/>
+              </a:ext>
+            </a:extLst>
+          </p:cNvPr>
+          <p:cNvSpPr/>
+          <p:nvPr/>
+        </p:nvSpPr>
+        <p:spPr>
+          <a:xfrm>
+            <a:off x="5009356" y="4006851"/>
+            <a:ext cx="1320800" cy="571499"/>
+          </a:xfrm>
+          <a:prstGeom prst="ellipse">
+            <a:avLst/>
+          </a:prstGeom>
+        </p:spPr>
+        <p:style>
+          <a:lnRef idx="2">
+            <a:schemeClr val="accent6"/>
+          </a:lnRef>
+          <a:fillRef idx="1">
+            <a:schemeClr val="lt1"/>
+          </a:fillRef>
+          <a:effectRef idx="0">
+            <a:schemeClr val="accent6"/>
+          </a:effectRef>
+          <a:fontRef idx="minor">
+            <a:schemeClr val="dk1"/>
+          </a:fontRef>
+        </p:style>
+        <p:txBody>
+          <a:bodyPr rtlCol="0" anchor="ctr"/>
+          <a:lstStyle/>
+          <a:p>
+            <a:pPr algn="ctr"/>
+            <a:r>
+              <a:rPr lang="hu-HU" dirty="0"/>
+              <a:t>Group </a:t>
+            </a:r>
+          </a:p>
+        </p:txBody>
+      </p:sp>
+      <p:sp>
+        <p:nvSpPr>
+          <p:cNvPr id="11" name="Ellipszis 10">
+            <a:extLst>
+              <a:ext uri="{FF2B5EF4-FFF2-40B4-BE49-F238E27FC236}">
+                <a16:creationId xmlns:a16="http://schemas.microsoft.com/office/drawing/2014/main" id="{FEE51206-AE15-3A98-FE71-FD008335C960}"/>
+              </a:ext>
+            </a:extLst>
+          </p:cNvPr>
+          <p:cNvSpPr/>
+          <p:nvPr/>
+        </p:nvSpPr>
+        <p:spPr>
+          <a:xfrm>
+            <a:off x="6477000" y="4006850"/>
+            <a:ext cx="1320800" cy="571500"/>
+          </a:xfrm>
+          <a:prstGeom prst="ellipse">
+            <a:avLst/>
+          </a:prstGeom>
+        </p:spPr>
+        <p:style>
+          <a:lnRef idx="2">
+            <a:schemeClr val="accent6"/>
+          </a:lnRef>
+          <a:fillRef idx="1">
+            <a:schemeClr val="lt1"/>
+          </a:fillRef>
+          <a:effectRef idx="0">
+            <a:schemeClr val="accent6"/>
+          </a:effectRef>
+          <a:fontRef idx="minor">
+            <a:schemeClr val="dk1"/>
+          </a:fontRef>
+        </p:style>
+        <p:txBody>
+          <a:bodyPr rtlCol="0" anchor="ctr"/>
+          <a:lstStyle/>
+          <a:p>
+            <a:pPr algn="ctr"/>
+            <a:r>
+              <a:rPr lang="hu-HU" dirty="0" err="1"/>
+              <a:t>Join</a:t>
+            </a:r>
+            <a:endParaRPr lang="hu-HU" dirty="0"/>
+          </a:p>
+        </p:txBody>
+      </p:sp>
+      <p:sp>
+        <p:nvSpPr>
+          <p:cNvPr id="12" name="Ellipszis 11">
+            <a:extLst>
+              <a:ext uri="{FF2B5EF4-FFF2-40B4-BE49-F238E27FC236}">
+                <a16:creationId xmlns:a16="http://schemas.microsoft.com/office/drawing/2014/main" id="{5D882330-2F7A-F9F8-8A84-A5D488D05218}"/>
+              </a:ext>
+            </a:extLst>
+          </p:cNvPr>
+          <p:cNvSpPr/>
+          <p:nvPr/>
+        </p:nvSpPr>
+        <p:spPr>
+          <a:xfrm>
+            <a:off x="9354342" y="3740150"/>
+            <a:ext cx="2037558" cy="933450"/>
+          </a:xfrm>
+          <a:prstGeom prst="ellipse">
+            <a:avLst/>
+          </a:prstGeom>
+        </p:spPr>
+        <p:style>
+          <a:lnRef idx="2">
+            <a:schemeClr val="accent6"/>
+          </a:lnRef>
+          <a:fillRef idx="1">
+            <a:schemeClr val="lt1"/>
+          </a:fillRef>
+          <a:effectRef idx="0">
+            <a:schemeClr val="accent6"/>
+          </a:effectRef>
+          <a:fontRef idx="minor">
+            <a:schemeClr val="dk1"/>
+          </a:fontRef>
+        </p:style>
+        <p:txBody>
+          <a:bodyPr rtlCol="0" anchor="ctr"/>
+          <a:lstStyle/>
+          <a:p>
+            <a:pPr algn="ctr"/>
+            <a:r>
+              <a:rPr lang="hu-HU" dirty="0" err="1"/>
+              <a:t>Insert</a:t>
+            </a:r>
+            <a:r>
+              <a:rPr lang="hu-HU" dirty="0"/>
+              <a:t>, update, </a:t>
+            </a:r>
+            <a:r>
+              <a:rPr lang="hu-HU" dirty="0" err="1"/>
+              <a:t>delete</a:t>
+            </a:r>
+            <a:endParaRPr lang="hu-HU" dirty="0"/>
+          </a:p>
+        </p:txBody>
+      </p:sp>
+    </p:spTree>
+    <p:extLst>
+      <p:ext uri="{BB962C8B-B14F-4D97-AF65-F5344CB8AC3E}">
+        <p14:creationId xmlns:p14="http://schemas.microsoft.com/office/powerpoint/2010/main" val="2294121857"/>
+      </p:ext>
+    </p:extLst>
+  </p:cSld>
+  <p:clrMapOvr>
+    <a:masterClrMapping/>
+  </p:clrMapOvr>
+</p:sld>
+</file>
+
+<file path=ppt/slides/slide5.xml><?xml version="1.0" encoding="utf-8"?>
+<p:sld xmlns:a="http://schemas.openxmlformats.org/drawingml/2006/main" xmlns:r="http://schemas.openxmlformats.org/officeDocument/2006/relationships" xmlns:p="http://schemas.openxmlformats.org/presentationml/2006/main">
+  <p:cSld>
+    <p:spTree>
+      <p:nvGrpSpPr>
+        <p:cNvPr id="1" name=""/>
+        <p:cNvGrpSpPr/>
+        <p:nvPr/>
+      </p:nvGrpSpPr>
+      <p:grpSpPr>
+        <a:xfrm>
+          <a:off x="0" y="0"/>
+          <a:ext cx="0" cy="0"/>
+          <a:chOff x="0" y="0"/>
+          <a:chExt cx="0" cy="0"/>
+        </a:xfrm>
+      </p:grpSpPr>
+      <p:sp>
+        <p:nvSpPr>
           <p:cNvPr id="2" name="Cím 1"/>
           <p:cNvSpPr>
             <a:spLocks noGrp="1"/>
@@ -8501,11 +9090,11 @@
           <a:lstStyle/>
           <a:p>
             <a:r>
-              <a:rPr lang="hu-HU" dirty="0" smtClean="0"/>
+              <a:rPr lang="hu-HU" dirty="0"/>
               <a:t>FLWOR </a:t>
             </a:r>
             <a:r>
-              <a:rPr lang="hu-HU" dirty="0" err="1" smtClean="0"/>
+              <a:rPr lang="hu-HU" dirty="0" err="1"/>
               <a:t>expression</a:t>
             </a:r>
             <a:endParaRPr lang="en-US" dirty="0"/>
@@ -8552,11 +9141,11 @@
               <a:t>FLWOR</a:t>
             </a:r>
             <a:r>
-              <a:rPr lang="en-US" dirty="0" smtClean="0"/>
+              <a:rPr lang="en-US" dirty="0"/>
               <a:t>.</a:t>
             </a:r>
             <a:r>
-              <a:rPr lang="hu-HU" dirty="0" smtClean="0"/>
+              <a:rPr lang="hu-HU" dirty="0"/>
               <a:t> </a:t>
             </a:r>
             <a:r>
@@ -8619,67 +9208,67 @@
               <a:rPr lang="en-US" dirty="0"/>
               <a:t>.</a:t>
             </a:r>
-            <a:endParaRPr lang="hu-HU" dirty="0" smtClean="0"/>
+            <a:endParaRPr lang="hu-HU" dirty="0"/>
           </a:p>
           <a:p>
             <a:pPr lvl="1"/>
             <a:r>
-              <a:rPr lang="hu-HU" dirty="0" smtClean="0"/>
+              <a:rPr lang="hu-HU" dirty="0"/>
               <a:t>Mozaikszó : </a:t>
             </a:r>
           </a:p>
           <a:p>
             <a:pPr lvl="2"/>
             <a:r>
-              <a:rPr lang="hu-HU" b="1" dirty="0" smtClean="0"/>
+              <a:rPr lang="hu-HU" b="1" dirty="0"/>
               <a:t>FOR -&gt; </a:t>
             </a:r>
             <a:r>
-              <a:rPr lang="hu-HU" dirty="0" smtClean="0"/>
+              <a:rPr lang="hu-HU" dirty="0"/>
               <a:t>Iterál egy elem listán</a:t>
             </a:r>
           </a:p>
           <a:p>
             <a:pPr lvl="2"/>
             <a:r>
-              <a:rPr lang="hu-HU" b="1" dirty="0" smtClean="0"/>
+              <a:rPr lang="hu-HU" b="1" dirty="0"/>
               <a:t>LET -&gt; </a:t>
             </a:r>
             <a:r>
-              <a:rPr lang="hu-HU" dirty="0" smtClean="0"/>
+              <a:rPr lang="hu-HU" dirty="0"/>
               <a:t>Változóba tesz egy értéket</a:t>
             </a:r>
           </a:p>
           <a:p>
             <a:pPr lvl="2"/>
             <a:r>
-              <a:rPr lang="hu-HU" b="1" dirty="0" smtClean="0"/>
+              <a:rPr lang="hu-HU" b="1" dirty="0"/>
               <a:t>WHERE </a:t>
             </a:r>
             <a:r>
-              <a:rPr lang="hu-HU" dirty="0" smtClean="0"/>
+              <a:rPr lang="hu-HU" dirty="0"/>
               <a:t>-&gt; Szűrés (mint SQL WHERE)</a:t>
             </a:r>
           </a:p>
           <a:p>
             <a:pPr lvl="2"/>
             <a:r>
-              <a:rPr lang="hu-HU" b="1" dirty="0" smtClean="0"/>
+              <a:rPr lang="hu-HU" b="1" dirty="0"/>
               <a:t>ORDER BY </a:t>
             </a:r>
             <a:r>
-              <a:rPr lang="hu-HU" dirty="0" smtClean="0"/>
+              <a:rPr lang="hu-HU" dirty="0"/>
               <a:t>-&gt; Rendezés</a:t>
             </a:r>
           </a:p>
           <a:p>
             <a:pPr lvl="2"/>
             <a:r>
-              <a:rPr lang="hu-HU" b="1" dirty="0" smtClean="0"/>
+              <a:rPr lang="hu-HU" b="1" dirty="0"/>
               <a:t>RETURN </a:t>
             </a:r>
             <a:r>
-              <a:rPr lang="hu-HU" dirty="0" smtClean="0"/>
+              <a:rPr lang="hu-HU" dirty="0"/>
               <a:t>-&gt; Mit adjon vissza a lekérdezés</a:t>
             </a:r>
           </a:p>
@@ -8699,13 +9288,6 @@
   <p:clrMapOvr>
     <a:masterClrMapping/>
   </p:clrMapOvr>
-  <p:timing>
-    <p:tnLst>
-      <p:par>
-        <p:cTn id="1" dur="indefinite" restart="never" nodeType="tmRoot"/>
-      </p:par>
-    </p:tnLst>
-  </p:timing>
 </p:sld>
 </file>
 

--- a/Y4O4X0_0318/Xquery.pptx
+++ b/Y4O4X0_0318/Xquery.pptx
@@ -10,6 +10,11 @@
     <p:sldId id="258" r:id="rId4"/>
     <p:sldId id="260" r:id="rId5"/>
     <p:sldId id="259" r:id="rId6"/>
+    <p:sldId id="261" r:id="rId7"/>
+    <p:sldId id="262" r:id="rId8"/>
+    <p:sldId id="263" r:id="rId9"/>
+    <p:sldId id="264" r:id="rId10"/>
+    <p:sldId id="265" r:id="rId11"/>
   </p:sldIdLst>
   <p:sldSz cx="12192000" cy="6858000"/>
   <p:notesSz cx="6858000" cy="9144000"/>
@@ -7936,6 +7941,712 @@
 </p:sld>
 </file>
 
+<file path=ppt/slides/slide10.xml><?xml version="1.0" encoding="utf-8"?>
+<p:sld xmlns:a="http://schemas.openxmlformats.org/drawingml/2006/main" xmlns:r="http://schemas.openxmlformats.org/officeDocument/2006/relationships" xmlns:p="http://schemas.openxmlformats.org/presentationml/2006/main">
+  <p:cSld>
+    <p:spTree>
+      <p:nvGrpSpPr>
+        <p:cNvPr id="1" name=""/>
+        <p:cNvGrpSpPr/>
+        <p:nvPr/>
+      </p:nvGrpSpPr>
+      <p:grpSpPr>
+        <a:xfrm>
+          <a:off x="0" y="0"/>
+          <a:ext cx="0" cy="0"/>
+          <a:chOff x="0" y="0"/>
+          <a:chExt cx="0" cy="0"/>
+        </a:xfrm>
+      </p:grpSpPr>
+      <p:sp>
+        <p:nvSpPr>
+          <p:cNvPr id="2" name="Cím 1"/>
+          <p:cNvSpPr>
+            <a:spLocks noGrp="1"/>
+          </p:cNvSpPr>
+          <p:nvPr>
+            <p:ph type="title"/>
+          </p:nvPr>
+        </p:nvSpPr>
+        <p:spPr/>
+        <p:txBody>
+          <a:bodyPr/>
+          <a:lstStyle/>
+          <a:p>
+            <a:r>
+              <a:rPr lang="hu-HU" dirty="0" smtClean="0"/>
+              <a:t>Használ </a:t>
+            </a:r>
+            <a:r>
+              <a:rPr lang="hu-HU" dirty="0" err="1" smtClean="0"/>
+              <a:t>Xpath</a:t>
+            </a:r>
+            <a:r>
+              <a:rPr lang="hu-HU" dirty="0" smtClean="0"/>
+              <a:t> kifejezések</a:t>
+            </a:r>
+            <a:endParaRPr lang="en-US" dirty="0"/>
+          </a:p>
+        </p:txBody>
+      </p:sp>
+      <p:graphicFrame>
+        <p:nvGraphicFramePr>
+          <p:cNvPr id="4" name="Tartalom helye 3"/>
+          <p:cNvGraphicFramePr>
+            <a:graphicFrameLocks noGrp="1"/>
+          </p:cNvGraphicFramePr>
+          <p:nvPr>
+            <p:ph idx="1"/>
+            <p:extLst>
+              <p:ext uri="{D42A27DB-BD31-4B8C-83A1-F6EECF244321}">
+                <p14:modId xmlns:p14="http://schemas.microsoft.com/office/powerpoint/2010/main" val="3013127671"/>
+              </p:ext>
+            </p:extLst>
+          </p:nvPr>
+        </p:nvGraphicFramePr>
+        <p:xfrm>
+          <a:off x="3103271" y="1689717"/>
+          <a:ext cx="8401341" cy="4578234"/>
+        </p:xfrm>
+        <a:graphic>
+          <a:graphicData uri="http://schemas.openxmlformats.org/drawingml/2006/table">
+            <a:tbl>
+              <a:tblPr firstRow="1" bandRow="1">
+                <a:tableStyleId>{5C22544A-7EE6-4342-B048-85BDC9FD1C3A}</a:tableStyleId>
+              </a:tblPr>
+              <a:tblGrid>
+                <a:gridCol w="2800447">
+                  <a:extLst>
+                    <a:ext uri="{9D8B030D-6E8A-4147-A177-3AD203B41FA5}">
+                      <a16:colId xmlns:a16="http://schemas.microsoft.com/office/drawing/2014/main" val="925800942"/>
+                    </a:ext>
+                  </a:extLst>
+                </a:gridCol>
+                <a:gridCol w="2800447">
+                  <a:extLst>
+                    <a:ext uri="{9D8B030D-6E8A-4147-A177-3AD203B41FA5}">
+                      <a16:colId xmlns:a16="http://schemas.microsoft.com/office/drawing/2014/main" val="671270567"/>
+                    </a:ext>
+                  </a:extLst>
+                </a:gridCol>
+                <a:gridCol w="2800447">
+                  <a:extLst>
+                    <a:ext uri="{9D8B030D-6E8A-4147-A177-3AD203B41FA5}">
+                      <a16:colId xmlns:a16="http://schemas.microsoft.com/office/drawing/2014/main" val="3629005481"/>
+                    </a:ext>
+                  </a:extLst>
+                </a:gridCol>
+              </a:tblGrid>
+              <a:tr h="243465">
+                <a:tc>
+                  <a:txBody>
+                    <a:bodyPr/>
+                    <a:lstStyle/>
+                    <a:p>
+                      <a:r>
+                        <a:rPr lang="en-US" sz="1100" dirty="0" err="1"/>
+                        <a:t>Feladat</a:t>
+                      </a:r>
+                      <a:endParaRPr lang="en-US" sz="1100" dirty="0"/>
+                    </a:p>
+                  </a:txBody>
+                  <a:tcPr anchor="ctr"/>
+                </a:tc>
+                <a:tc>
+                  <a:txBody>
+                    <a:bodyPr/>
+                    <a:lstStyle/>
+                    <a:p>
+                      <a:r>
+                        <a:rPr lang="en-US" sz="1100"/>
+                        <a:t>XPath kifejezés</a:t>
+                      </a:r>
+                    </a:p>
+                  </a:txBody>
+                  <a:tcPr anchor="ctr"/>
+                </a:tc>
+                <a:tc>
+                  <a:txBody>
+                    <a:bodyPr/>
+                    <a:lstStyle/>
+                    <a:p>
+                      <a:r>
+                        <a:rPr lang="en-US" sz="1100" dirty="0" err="1"/>
+                        <a:t>Jelentés</a:t>
+                      </a:r>
+                      <a:endParaRPr lang="en-US" sz="1100" dirty="0"/>
+                    </a:p>
+                  </a:txBody>
+                  <a:tcPr anchor="ctr"/>
+                </a:tc>
+                <a:extLst>
+                  <a:ext uri="{0D108BD9-81ED-4DB2-BD59-A6C34878D82A}">
+                    <a16:rowId xmlns:a16="http://schemas.microsoft.com/office/drawing/2014/main" val="2873163458"/>
+                  </a:ext>
+                </a:extLst>
+              </a:tr>
+              <a:tr h="600325">
+                <a:tc>
+                  <a:txBody>
+                    <a:bodyPr/>
+                    <a:lstStyle/>
+                    <a:p>
+                      <a:r>
+                        <a:rPr lang="en-US" sz="1100"/>
+                        <a:t>Szakácsok lekérdezése</a:t>
+                      </a:r>
+                    </a:p>
+                  </a:txBody>
+                  <a:tcPr anchor="ctr"/>
+                </a:tc>
+                <a:tc>
+                  <a:txBody>
+                    <a:bodyPr/>
+                    <a:lstStyle/>
+                    <a:p>
+                      <a:r>
+                        <a:rPr lang="en-US" sz="1100"/>
+                        <a:t>//szakacs</a:t>
+                      </a:r>
+                    </a:p>
+                  </a:txBody>
+                  <a:tcPr anchor="ctr"/>
+                </a:tc>
+                <a:tc>
+                  <a:txBody>
+                    <a:bodyPr/>
+                    <a:lstStyle/>
+                    <a:p>
+                      <a:r>
+                        <a:rPr lang="en-US" sz="1100"/>
+                        <a:t>Az XML dokumentum összes szakács elemének kiválasztása</a:t>
+                      </a:r>
+                    </a:p>
+                  </a:txBody>
+                  <a:tcPr anchor="ctr"/>
+                </a:tc>
+                <a:extLst>
+                  <a:ext uri="{0D108BD9-81ED-4DB2-BD59-A6C34878D82A}">
+                    <a16:rowId xmlns:a16="http://schemas.microsoft.com/office/drawing/2014/main" val="3294387894"/>
+                  </a:ext>
+                </a:extLst>
+              </a:tr>
+              <a:tr h="420227">
+                <a:tc>
+                  <a:txBody>
+                    <a:bodyPr/>
+                    <a:lstStyle/>
+                    <a:p>
+                      <a:r>
+                        <a:rPr lang="en-US" sz="1100"/>
+                        <a:t>Szakács végzettsége</a:t>
+                      </a:r>
+                    </a:p>
+                  </a:txBody>
+                  <a:tcPr anchor="ctr"/>
+                </a:tc>
+                <a:tc>
+                  <a:txBody>
+                    <a:bodyPr/>
+                    <a:lstStyle/>
+                    <a:p>
+                      <a:r>
+                        <a:rPr lang="en-US" sz="1100"/>
+                        <a:t>$s/vegzettseg</a:t>
+                      </a:r>
+                    </a:p>
+                  </a:txBody>
+                  <a:tcPr anchor="ctr"/>
+                </a:tc>
+                <a:tc>
+                  <a:txBody>
+                    <a:bodyPr/>
+                    <a:lstStyle/>
+                    <a:p>
+                      <a:r>
+                        <a:rPr lang="en-US" sz="1100"/>
+                        <a:t>Az adott szakács végzettség elemei</a:t>
+                      </a:r>
+                    </a:p>
+                  </a:txBody>
+                  <a:tcPr anchor="ctr"/>
+                </a:tc>
+                <a:extLst>
+                  <a:ext uri="{0D108BD9-81ED-4DB2-BD59-A6C34878D82A}">
+                    <a16:rowId xmlns:a16="http://schemas.microsoft.com/office/drawing/2014/main" val="696365189"/>
+                  </a:ext>
+                </a:extLst>
+              </a:tr>
+              <a:tr h="420227">
+                <a:tc>
+                  <a:txBody>
+                    <a:bodyPr/>
+                    <a:lstStyle/>
+                    <a:p>
+                      <a:r>
+                        <a:rPr lang="en-US" sz="1100" dirty="0" err="1"/>
+                        <a:t>Éttermek</a:t>
+                      </a:r>
+                      <a:r>
+                        <a:rPr lang="en-US" sz="1100" dirty="0"/>
+                        <a:t> </a:t>
+                      </a:r>
+                      <a:r>
+                        <a:rPr lang="en-US" sz="1100" dirty="0" err="1"/>
+                        <a:t>lekérdezése</a:t>
+                      </a:r>
+                      <a:endParaRPr lang="en-US" sz="1100" dirty="0"/>
+                    </a:p>
+                  </a:txBody>
+                  <a:tcPr anchor="ctr"/>
+                </a:tc>
+                <a:tc>
+                  <a:txBody>
+                    <a:bodyPr/>
+                    <a:lstStyle/>
+                    <a:p>
+                      <a:r>
+                        <a:rPr lang="en-US" sz="1100" dirty="0"/>
+                        <a:t>//</a:t>
+                      </a:r>
+                      <a:r>
+                        <a:rPr lang="en-US" sz="1100" dirty="0" err="1"/>
+                        <a:t>etterem</a:t>
+                      </a:r>
+                      <a:endParaRPr lang="en-US" sz="1100" dirty="0"/>
+                    </a:p>
+                  </a:txBody>
+                  <a:tcPr anchor="ctr"/>
+                </a:tc>
+                <a:tc>
+                  <a:txBody>
+                    <a:bodyPr/>
+                    <a:lstStyle/>
+                    <a:p>
+                      <a:r>
+                        <a:rPr lang="pt-BR" sz="1100"/>
+                        <a:t>Az összes étterem elem kiválasztása</a:t>
+                      </a:r>
+                    </a:p>
+                  </a:txBody>
+                  <a:tcPr anchor="ctr"/>
+                </a:tc>
+                <a:extLst>
+                  <a:ext uri="{0D108BD9-81ED-4DB2-BD59-A6C34878D82A}">
+                    <a16:rowId xmlns:a16="http://schemas.microsoft.com/office/drawing/2014/main" val="3950804346"/>
+                  </a:ext>
+                </a:extLst>
+              </a:tr>
+              <a:tr h="420227">
+                <a:tc>
+                  <a:txBody>
+                    <a:bodyPr/>
+                    <a:lstStyle/>
+                    <a:p>
+                      <a:r>
+                        <a:rPr lang="en-US" sz="1100"/>
+                        <a:t>Étterem csillaga</a:t>
+                      </a:r>
+                    </a:p>
+                  </a:txBody>
+                  <a:tcPr anchor="ctr"/>
+                </a:tc>
+                <a:tc>
+                  <a:txBody>
+                    <a:bodyPr/>
+                    <a:lstStyle/>
+                    <a:p>
+                      <a:r>
+                        <a:rPr lang="en-US" sz="1100"/>
+                        <a:t>$e/csillag</a:t>
+                      </a:r>
+                    </a:p>
+                  </a:txBody>
+                  <a:tcPr anchor="ctr"/>
+                </a:tc>
+                <a:tc>
+                  <a:txBody>
+                    <a:bodyPr/>
+                    <a:lstStyle/>
+                    <a:p>
+                      <a:r>
+                        <a:rPr lang="en-US" sz="1100"/>
+                        <a:t>Az adott étterem csillag értéke</a:t>
+                      </a:r>
+                    </a:p>
+                  </a:txBody>
+                  <a:tcPr anchor="ctr"/>
+                </a:tc>
+                <a:extLst>
+                  <a:ext uri="{0D108BD9-81ED-4DB2-BD59-A6C34878D82A}">
+                    <a16:rowId xmlns:a16="http://schemas.microsoft.com/office/drawing/2014/main" val="646776315"/>
+                  </a:ext>
+                </a:extLst>
+              </a:tr>
+              <a:tr h="243465">
+                <a:tc>
+                  <a:txBody>
+                    <a:bodyPr/>
+                    <a:lstStyle/>
+                    <a:p>
+                      <a:r>
+                        <a:rPr lang="en-US" sz="1100"/>
+                        <a:t>Étterem neve</a:t>
+                      </a:r>
+                    </a:p>
+                  </a:txBody>
+                  <a:tcPr anchor="ctr"/>
+                </a:tc>
+                <a:tc>
+                  <a:txBody>
+                    <a:bodyPr/>
+                    <a:lstStyle/>
+                    <a:p>
+                      <a:r>
+                        <a:rPr lang="en-US" sz="1100"/>
+                        <a:t>$e/nev</a:t>
+                      </a:r>
+                    </a:p>
+                  </a:txBody>
+                  <a:tcPr anchor="ctr"/>
+                </a:tc>
+                <a:tc>
+                  <a:txBody>
+                    <a:bodyPr/>
+                    <a:lstStyle/>
+                    <a:p>
+                      <a:r>
+                        <a:rPr lang="en-US" sz="1100"/>
+                        <a:t>Az étterem neve</a:t>
+                      </a:r>
+                    </a:p>
+                  </a:txBody>
+                  <a:tcPr anchor="ctr"/>
+                </a:tc>
+                <a:extLst>
+                  <a:ext uri="{0D108BD9-81ED-4DB2-BD59-A6C34878D82A}">
+                    <a16:rowId xmlns:a16="http://schemas.microsoft.com/office/drawing/2014/main" val="2921376196"/>
+                  </a:ext>
+                </a:extLst>
+              </a:tr>
+              <a:tr h="243465">
+                <a:tc>
+                  <a:txBody>
+                    <a:bodyPr/>
+                    <a:lstStyle/>
+                    <a:p>
+                      <a:r>
+                        <a:rPr lang="en-US" sz="1100"/>
+                        <a:t>Étterem címe</a:t>
+                      </a:r>
+                    </a:p>
+                  </a:txBody>
+                  <a:tcPr anchor="ctr"/>
+                </a:tc>
+                <a:tc>
+                  <a:txBody>
+                    <a:bodyPr/>
+                    <a:lstStyle/>
+                    <a:p>
+                      <a:r>
+                        <a:rPr lang="en-US" sz="1100"/>
+                        <a:t>$e/cim</a:t>
+                      </a:r>
+                    </a:p>
+                  </a:txBody>
+                  <a:tcPr anchor="ctr"/>
+                </a:tc>
+                <a:tc>
+                  <a:txBody>
+                    <a:bodyPr/>
+                    <a:lstStyle/>
+                    <a:p>
+                      <a:r>
+                        <a:rPr lang="en-US" sz="1100"/>
+                        <a:t>Az étterem cím adatai</a:t>
+                      </a:r>
+                    </a:p>
+                  </a:txBody>
+                  <a:tcPr anchor="ctr"/>
+                </a:tc>
+                <a:extLst>
+                  <a:ext uri="{0D108BD9-81ED-4DB2-BD59-A6C34878D82A}">
+                    <a16:rowId xmlns:a16="http://schemas.microsoft.com/office/drawing/2014/main" val="2272557042"/>
+                  </a:ext>
+                </a:extLst>
+              </a:tr>
+              <a:tr h="420227">
+                <a:tc>
+                  <a:txBody>
+                    <a:bodyPr/>
+                    <a:lstStyle/>
+                    <a:p>
+                      <a:r>
+                        <a:rPr lang="en-US" sz="1100"/>
+                        <a:t>Gyakornokok lekérdezése</a:t>
+                      </a:r>
+                    </a:p>
+                  </a:txBody>
+                  <a:tcPr anchor="ctr"/>
+                </a:tc>
+                <a:tc>
+                  <a:txBody>
+                    <a:bodyPr/>
+                    <a:lstStyle/>
+                    <a:p>
+                      <a:r>
+                        <a:rPr lang="en-US" sz="1100"/>
+                        <a:t>//gyakornok</a:t>
+                      </a:r>
+                    </a:p>
+                  </a:txBody>
+                  <a:tcPr anchor="ctr"/>
+                </a:tc>
+                <a:tc>
+                  <a:txBody>
+                    <a:bodyPr/>
+                    <a:lstStyle/>
+                    <a:p>
+                      <a:r>
+                        <a:rPr lang="en-US" sz="1100"/>
+                        <a:t>Az összes gyakornok elem kiválasztása</a:t>
+                      </a:r>
+                    </a:p>
+                  </a:txBody>
+                  <a:tcPr anchor="ctr"/>
+                </a:tc>
+                <a:extLst>
+                  <a:ext uri="{0D108BD9-81ED-4DB2-BD59-A6C34878D82A}">
+                    <a16:rowId xmlns:a16="http://schemas.microsoft.com/office/drawing/2014/main" val="2031586805"/>
+                  </a:ext>
+                </a:extLst>
+              </a:tr>
+              <a:tr h="420227">
+                <a:tc>
+                  <a:txBody>
+                    <a:bodyPr/>
+                    <a:lstStyle/>
+                    <a:p>
+                      <a:r>
+                        <a:rPr lang="hu-HU" sz="1100"/>
+                        <a:t>Gyakornok műszaka</a:t>
+                      </a:r>
+                    </a:p>
+                  </a:txBody>
+                  <a:tcPr anchor="ctr"/>
+                </a:tc>
+                <a:tc>
+                  <a:txBody>
+                    <a:bodyPr/>
+                    <a:lstStyle/>
+                    <a:p>
+                      <a:r>
+                        <a:rPr lang="en-US" sz="1100"/>
+                        <a:t>$g/muszak</a:t>
+                      </a:r>
+                    </a:p>
+                  </a:txBody>
+                  <a:tcPr anchor="ctr"/>
+                </a:tc>
+                <a:tc>
+                  <a:txBody>
+                    <a:bodyPr/>
+                    <a:lstStyle/>
+                    <a:p>
+                      <a:r>
+                        <a:rPr lang="hu-HU" sz="1100"/>
+                        <a:t>Az adott gyakornok műszak adata</a:t>
+                      </a:r>
+                    </a:p>
+                  </a:txBody>
+                  <a:tcPr anchor="ctr"/>
+                </a:tc>
+                <a:extLst>
+                  <a:ext uri="{0D108BD9-81ED-4DB2-BD59-A6C34878D82A}">
+                    <a16:rowId xmlns:a16="http://schemas.microsoft.com/office/drawing/2014/main" val="3556319821"/>
+                  </a:ext>
+                </a:extLst>
+              </a:tr>
+              <a:tr h="243465">
+                <a:tc>
+                  <a:txBody>
+                    <a:bodyPr/>
+                    <a:lstStyle/>
+                    <a:p>
+                      <a:r>
+                        <a:rPr lang="en-US" sz="1100"/>
+                        <a:t>Gyakornok neve</a:t>
+                      </a:r>
+                    </a:p>
+                  </a:txBody>
+                  <a:tcPr anchor="ctr"/>
+                </a:tc>
+                <a:tc>
+                  <a:txBody>
+                    <a:bodyPr/>
+                    <a:lstStyle/>
+                    <a:p>
+                      <a:r>
+                        <a:rPr lang="en-US" sz="1100"/>
+                        <a:t>$g/nev</a:t>
+                      </a:r>
+                    </a:p>
+                  </a:txBody>
+                  <a:tcPr anchor="ctr"/>
+                </a:tc>
+                <a:tc>
+                  <a:txBody>
+                    <a:bodyPr/>
+                    <a:lstStyle/>
+                    <a:p>
+                      <a:r>
+                        <a:rPr lang="en-US" sz="1100"/>
+                        <a:t>A gyakornok neve</a:t>
+                      </a:r>
+                    </a:p>
+                  </a:txBody>
+                  <a:tcPr anchor="ctr"/>
+                </a:tc>
+                <a:extLst>
+                  <a:ext uri="{0D108BD9-81ED-4DB2-BD59-A6C34878D82A}">
+                    <a16:rowId xmlns:a16="http://schemas.microsoft.com/office/drawing/2014/main" val="3347129301"/>
+                  </a:ext>
+                </a:extLst>
+              </a:tr>
+              <a:tr h="420227">
+                <a:tc>
+                  <a:txBody>
+                    <a:bodyPr/>
+                    <a:lstStyle/>
+                    <a:p>
+                      <a:r>
+                        <a:rPr lang="en-US" sz="1100"/>
+                        <a:t>Gyakorlat kezdete</a:t>
+                      </a:r>
+                    </a:p>
+                  </a:txBody>
+                  <a:tcPr anchor="ctr"/>
+                </a:tc>
+                <a:tc>
+                  <a:txBody>
+                    <a:bodyPr/>
+                    <a:lstStyle/>
+                    <a:p>
+                      <a:r>
+                        <a:rPr lang="en-US" sz="1100"/>
+                        <a:t>$g/gyakorlat/kezdete</a:t>
+                      </a:r>
+                    </a:p>
+                  </a:txBody>
+                  <a:tcPr anchor="ctr"/>
+                </a:tc>
+                <a:tc>
+                  <a:txBody>
+                    <a:bodyPr/>
+                    <a:lstStyle/>
+                    <a:p>
+                      <a:r>
+                        <a:rPr lang="en-US" sz="1100"/>
+                        <a:t>A gyakornok gyakorlatának kezdete</a:t>
+                      </a:r>
+                    </a:p>
+                  </a:txBody>
+                  <a:tcPr anchor="ctr"/>
+                </a:tc>
+                <a:extLst>
+                  <a:ext uri="{0D108BD9-81ED-4DB2-BD59-A6C34878D82A}">
+                    <a16:rowId xmlns:a16="http://schemas.microsoft.com/office/drawing/2014/main" val="1652256174"/>
+                  </a:ext>
+                </a:extLst>
+              </a:tr>
+              <a:tr h="420227">
+                <a:tc>
+                  <a:txBody>
+                    <a:bodyPr/>
+                    <a:lstStyle/>
+                    <a:p>
+                      <a:r>
+                        <a:rPr lang="en-US" sz="1100"/>
+                        <a:t>ID attribútum</a:t>
+                      </a:r>
+                    </a:p>
+                  </a:txBody>
+                  <a:tcPr anchor="ctr"/>
+                </a:tc>
+                <a:tc>
+                  <a:txBody>
+                    <a:bodyPr/>
+                    <a:lstStyle/>
+                    <a:p>
+                      <a:r>
+                        <a:rPr lang="en-US" sz="1100"/>
+                        <a:t>$e/@id, $g/@id</a:t>
+                      </a:r>
+                    </a:p>
+                  </a:txBody>
+                  <a:tcPr anchor="ctr"/>
+                </a:tc>
+                <a:tc>
+                  <a:txBody>
+                    <a:bodyPr/>
+                    <a:lstStyle/>
+                    <a:p>
+                      <a:r>
+                        <a:rPr lang="en-US" sz="1100" dirty="0" err="1"/>
+                        <a:t>Az</a:t>
+                      </a:r>
+                      <a:r>
+                        <a:rPr lang="en-US" sz="1100" dirty="0"/>
+                        <a:t> </a:t>
+                      </a:r>
+                      <a:r>
+                        <a:rPr lang="en-US" sz="1100" dirty="0" err="1"/>
+                        <a:t>elem</a:t>
+                      </a:r>
+                      <a:r>
+                        <a:rPr lang="en-US" sz="1100" dirty="0"/>
+                        <a:t> </a:t>
+                      </a:r>
+                      <a:r>
+                        <a:rPr lang="en-US" sz="1100" dirty="0" err="1"/>
+                        <a:t>azonosító</a:t>
+                      </a:r>
+                      <a:r>
+                        <a:rPr lang="en-US" sz="1100" dirty="0"/>
+                        <a:t> </a:t>
+                      </a:r>
+                      <a:r>
+                        <a:rPr lang="en-US" sz="1100" dirty="0" err="1"/>
+                        <a:t>attribútuma</a:t>
+                      </a:r>
+                      <a:endParaRPr lang="en-US" sz="1100" dirty="0"/>
+                    </a:p>
+                  </a:txBody>
+                  <a:tcPr anchor="ctr"/>
+                </a:tc>
+                <a:extLst>
+                  <a:ext uri="{0D108BD9-81ED-4DB2-BD59-A6C34878D82A}">
+                    <a16:rowId xmlns:a16="http://schemas.microsoft.com/office/drawing/2014/main" val="436215951"/>
+                  </a:ext>
+                </a:extLst>
+              </a:tr>
+            </a:tbl>
+          </a:graphicData>
+        </a:graphic>
+      </p:graphicFrame>
+    </p:spTree>
+    <p:extLst>
+      <p:ext uri="{BB962C8B-B14F-4D97-AF65-F5344CB8AC3E}">
+        <p14:creationId xmlns:p14="http://schemas.microsoft.com/office/powerpoint/2010/main" val="2345391029"/>
+      </p:ext>
+    </p:extLst>
+  </p:cSld>
+  <p:clrMapOvr>
+    <a:masterClrMapping/>
+  </p:clrMapOvr>
+</p:sld>
+</file>
+
 <file path=ppt/slides/slide2.xml><?xml version="1.0" encoding="utf-8"?>
 <p:sld xmlns:a="http://schemas.openxmlformats.org/drawingml/2006/main" xmlns:r="http://schemas.openxmlformats.org/officeDocument/2006/relationships" xmlns:p="http://schemas.openxmlformats.org/presentationml/2006/main">
   <p:cSld>
@@ -8509,12 +9220,16 @@
           <a:p>
             <a:pPr lvl="1"/>
             <a:r>
-              <a:rPr lang="en-US" dirty="0" err="1"/>
-              <a:t>új</a:t>
+              <a:rPr lang="hu-HU" dirty="0" err="1"/>
+              <a:t>Ú</a:t>
+            </a:r>
+            <a:r>
+              <a:rPr lang="en-US" dirty="0" smtClean="0"/>
+              <a:t>j </a:t>
             </a:r>
             <a:r>
               <a:rPr lang="en-US" dirty="0"/>
-              <a:t> XML </a:t>
+              <a:t>XML </a:t>
             </a:r>
             <a:r>
               <a:rPr lang="en-US" b="1" dirty="0" err="1"/>
@@ -8652,395 +9367,747 @@
           <a:chExt cx="0" cy="0"/>
         </a:xfrm>
       </p:grpSpPr>
-      <p:sp>
-        <p:nvSpPr>
-          <p:cNvPr id="4" name="Ellipszis 3">
-            <a:extLst>
-              <a:ext uri="{FF2B5EF4-FFF2-40B4-BE49-F238E27FC236}">
-                <a16:creationId xmlns:a16="http://schemas.microsoft.com/office/drawing/2014/main" id="{DDF9337B-0E19-2E70-AFC0-2F31E7F488CF}"/>
-              </a:ext>
-            </a:extLst>
-          </p:cNvPr>
-          <p:cNvSpPr/>
+      <p:grpSp>
+        <p:nvGrpSpPr>
+          <p:cNvPr id="53" name="Csoportba foglalás 52"/>
+          <p:cNvGrpSpPr/>
+          <p:nvPr/>
+        </p:nvGrpSpPr>
+        <p:grpSpPr>
+          <a:xfrm>
+            <a:off x="2268985" y="1826828"/>
+            <a:ext cx="8719712" cy="4171950"/>
+            <a:chOff x="1905000" y="406400"/>
+            <a:chExt cx="8719712" cy="4171950"/>
+          </a:xfrm>
+        </p:grpSpPr>
+        <p:sp>
+          <p:nvSpPr>
+            <p:cNvPr id="4" name="Ellipszis 3">
+              <a:extLst>
+                <a:ext uri="{FF2B5EF4-FFF2-40B4-BE49-F238E27FC236}">
+                  <a16:creationId xmlns:a16="http://schemas.microsoft.com/office/drawing/2014/main" id="{DDF9337B-0E19-2E70-AFC0-2F31E7F488CF}"/>
+                </a:ext>
+              </a:extLst>
+            </p:cNvPr>
+            <p:cNvSpPr/>
+            <p:nvPr/>
+          </p:nvSpPr>
+          <p:spPr>
+            <a:xfrm>
+              <a:off x="6629400" y="406400"/>
+              <a:ext cx="1739900" cy="749300"/>
+            </a:xfrm>
+            <a:prstGeom prst="ellipse">
+              <a:avLst/>
+            </a:prstGeom>
+            <a:ln>
+              <a:solidFill>
+                <a:srgbClr val="C00000"/>
+              </a:solidFill>
+            </a:ln>
+          </p:spPr>
+          <p:style>
+            <a:lnRef idx="2">
+              <a:schemeClr val="accent6"/>
+            </a:lnRef>
+            <a:fillRef idx="1">
+              <a:schemeClr val="lt1"/>
+            </a:fillRef>
+            <a:effectRef idx="0">
+              <a:schemeClr val="accent6"/>
+            </a:effectRef>
+            <a:fontRef idx="minor">
+              <a:schemeClr val="dk1"/>
+            </a:fontRef>
+          </p:style>
+          <p:txBody>
+            <a:bodyPr rtlCol="0" anchor="ctr"/>
+            <a:lstStyle/>
+            <a:p>
+              <a:pPr algn="ctr"/>
+              <a:r>
+                <a:rPr lang="hu-HU" b="1" dirty="0" err="1"/>
+                <a:t>Xquery</a:t>
+              </a:r>
+              <a:endParaRPr lang="hu-HU" b="1" dirty="0"/>
+            </a:p>
+          </p:txBody>
+        </p:sp>
+        <p:sp>
+          <p:nvSpPr>
+            <p:cNvPr id="5" name="Ellipszis 4">
+              <a:extLst>
+                <a:ext uri="{FF2B5EF4-FFF2-40B4-BE49-F238E27FC236}">
+                  <a16:creationId xmlns:a16="http://schemas.microsoft.com/office/drawing/2014/main" id="{22FA9C70-6626-2365-30B3-B3CC9F27DA34}"/>
+                </a:ext>
+              </a:extLst>
+            </p:cNvPr>
+            <p:cNvSpPr/>
+            <p:nvPr/>
+          </p:nvSpPr>
+          <p:spPr>
+            <a:xfrm>
+              <a:off x="4202113" y="1660853"/>
+              <a:ext cx="1422400" cy="749300"/>
+            </a:xfrm>
+            <a:prstGeom prst="ellipse">
+              <a:avLst/>
+            </a:prstGeom>
+            <a:ln>
+              <a:solidFill>
+                <a:srgbClr val="C00000"/>
+              </a:solidFill>
+            </a:ln>
+          </p:spPr>
+          <p:style>
+            <a:lnRef idx="2">
+              <a:schemeClr val="accent6"/>
+            </a:lnRef>
+            <a:fillRef idx="1">
+              <a:schemeClr val="lt1"/>
+            </a:fillRef>
+            <a:effectRef idx="0">
+              <a:schemeClr val="accent6"/>
+            </a:effectRef>
+            <a:fontRef idx="minor">
+              <a:schemeClr val="dk1"/>
+            </a:fontRef>
+          </p:style>
+          <p:txBody>
+            <a:bodyPr rtlCol="0" anchor="ctr"/>
+            <a:lstStyle/>
+            <a:p>
+              <a:pPr algn="ctr"/>
+              <a:r>
+                <a:rPr lang="hu-HU" sz="1600" b="1" dirty="0" err="1"/>
+                <a:t>Query</a:t>
+              </a:r>
+              <a:r>
+                <a:rPr lang="hu-HU" sz="1600" dirty="0"/>
+                <a:t> </a:t>
+              </a:r>
+              <a:r>
+                <a:rPr lang="hu-HU" sz="1600" b="1" dirty="0"/>
+                <a:t>FLWOR</a:t>
+              </a:r>
+            </a:p>
+          </p:txBody>
+        </p:sp>
+        <p:sp>
+          <p:nvSpPr>
+            <p:cNvPr id="7" name="Ellipszis 6">
+              <a:extLst>
+                <a:ext uri="{FF2B5EF4-FFF2-40B4-BE49-F238E27FC236}">
+                  <a16:creationId xmlns:a16="http://schemas.microsoft.com/office/drawing/2014/main" id="{2135333B-A0C0-3B67-54A8-3576D89ED47C}"/>
+                </a:ext>
+              </a:extLst>
+            </p:cNvPr>
+            <p:cNvSpPr/>
+            <p:nvPr/>
+          </p:nvSpPr>
+          <p:spPr>
+            <a:xfrm>
+              <a:off x="9088012" y="1660853"/>
+              <a:ext cx="1536700" cy="749300"/>
+            </a:xfrm>
+            <a:prstGeom prst="ellipse">
+              <a:avLst/>
+            </a:prstGeom>
+            <a:ln>
+              <a:solidFill>
+                <a:srgbClr val="C00000"/>
+              </a:solidFill>
+            </a:ln>
+          </p:spPr>
+          <p:style>
+            <a:lnRef idx="2">
+              <a:schemeClr val="accent6"/>
+            </a:lnRef>
+            <a:fillRef idx="1">
+              <a:schemeClr val="lt1"/>
+            </a:fillRef>
+            <a:effectRef idx="0">
+              <a:schemeClr val="accent6"/>
+            </a:effectRef>
+            <a:fontRef idx="minor">
+              <a:schemeClr val="dk1"/>
+            </a:fontRef>
+          </p:style>
+          <p:txBody>
+            <a:bodyPr rtlCol="0" anchor="ctr"/>
+            <a:lstStyle/>
+            <a:p>
+              <a:pPr algn="ctr"/>
+              <a:r>
+                <a:rPr lang="hu-HU" sz="1600" b="1" dirty="0"/>
+                <a:t>Update</a:t>
+              </a:r>
+            </a:p>
+          </p:txBody>
+        </p:sp>
+        <p:sp>
+          <p:nvSpPr>
+            <p:cNvPr id="8" name="Ellipszis 7">
+              <a:extLst>
+                <a:ext uri="{FF2B5EF4-FFF2-40B4-BE49-F238E27FC236}">
+                  <a16:creationId xmlns:a16="http://schemas.microsoft.com/office/drawing/2014/main" id="{B36A805E-D790-8253-A800-285F42F0D605}"/>
+                </a:ext>
+              </a:extLst>
+            </p:cNvPr>
+            <p:cNvSpPr/>
+            <p:nvPr/>
+          </p:nvSpPr>
+          <p:spPr>
+            <a:xfrm>
+              <a:off x="1905000" y="4006850"/>
+              <a:ext cx="1320800" cy="571500"/>
+            </a:xfrm>
+            <a:prstGeom prst="ellipse">
+              <a:avLst/>
+            </a:prstGeom>
+            <a:ln>
+              <a:solidFill>
+                <a:srgbClr val="C00000"/>
+              </a:solidFill>
+            </a:ln>
+          </p:spPr>
+          <p:style>
+            <a:lnRef idx="2">
+              <a:schemeClr val="accent6"/>
+            </a:lnRef>
+            <a:fillRef idx="1">
+              <a:schemeClr val="lt1"/>
+            </a:fillRef>
+            <a:effectRef idx="0">
+              <a:schemeClr val="accent6"/>
+            </a:effectRef>
+            <a:fontRef idx="minor">
+              <a:schemeClr val="dk1"/>
+            </a:fontRef>
+          </p:style>
+          <p:txBody>
+            <a:bodyPr rtlCol="0" anchor="ctr"/>
+            <a:lstStyle/>
+            <a:p>
+              <a:pPr algn="ctr"/>
+              <a:r>
+                <a:rPr lang="hu-HU" sz="1200" b="1" dirty="0" err="1"/>
+                <a:t>Selection</a:t>
+              </a:r>
+              <a:endParaRPr lang="hu-HU" sz="1200" b="1" dirty="0"/>
+            </a:p>
+          </p:txBody>
+        </p:sp>
+        <p:sp>
+          <p:nvSpPr>
+            <p:cNvPr id="9" name="Ellipszis 8">
+              <a:extLst>
+                <a:ext uri="{FF2B5EF4-FFF2-40B4-BE49-F238E27FC236}">
+                  <a16:creationId xmlns:a16="http://schemas.microsoft.com/office/drawing/2014/main" id="{F4D740C2-2EDD-F56A-6528-EEE4BC005864}"/>
+                </a:ext>
+              </a:extLst>
+            </p:cNvPr>
+            <p:cNvSpPr/>
+            <p:nvPr/>
+          </p:nvSpPr>
+          <p:spPr>
+            <a:xfrm>
+              <a:off x="3541713" y="4006850"/>
+              <a:ext cx="1320800" cy="571500"/>
+            </a:xfrm>
+            <a:prstGeom prst="ellipse">
+              <a:avLst/>
+            </a:prstGeom>
+            <a:ln>
+              <a:solidFill>
+                <a:srgbClr val="C00000"/>
+              </a:solidFill>
+            </a:ln>
+          </p:spPr>
+          <p:style>
+            <a:lnRef idx="2">
+              <a:schemeClr val="accent6"/>
+            </a:lnRef>
+            <a:fillRef idx="1">
+              <a:schemeClr val="lt1"/>
+            </a:fillRef>
+            <a:effectRef idx="0">
+              <a:schemeClr val="accent6"/>
+            </a:effectRef>
+            <a:fontRef idx="minor">
+              <a:schemeClr val="dk1"/>
+            </a:fontRef>
+          </p:style>
+          <p:txBody>
+            <a:bodyPr rtlCol="0" anchor="ctr"/>
+            <a:lstStyle/>
+            <a:p>
+              <a:pPr algn="ctr"/>
+              <a:r>
+                <a:rPr lang="hu-HU" sz="1200" b="1" dirty="0"/>
+                <a:t>Projection</a:t>
+              </a:r>
+            </a:p>
+          </p:txBody>
+        </p:sp>
+        <p:sp>
+          <p:nvSpPr>
+            <p:cNvPr id="10" name="Ellipszis 9">
+              <a:extLst>
+                <a:ext uri="{FF2B5EF4-FFF2-40B4-BE49-F238E27FC236}">
+                  <a16:creationId xmlns:a16="http://schemas.microsoft.com/office/drawing/2014/main" id="{2B625B94-B04C-DE66-5865-4EE9676534BC}"/>
+                </a:ext>
+              </a:extLst>
+            </p:cNvPr>
+            <p:cNvSpPr/>
+            <p:nvPr/>
+          </p:nvSpPr>
+          <p:spPr>
+            <a:xfrm>
+              <a:off x="4969271" y="4006850"/>
+              <a:ext cx="1320800" cy="571499"/>
+            </a:xfrm>
+            <a:prstGeom prst="ellipse">
+              <a:avLst/>
+            </a:prstGeom>
+            <a:ln>
+              <a:solidFill>
+                <a:srgbClr val="C00000"/>
+              </a:solidFill>
+            </a:ln>
+          </p:spPr>
+          <p:style>
+            <a:lnRef idx="2">
+              <a:schemeClr val="accent6"/>
+            </a:lnRef>
+            <a:fillRef idx="1">
+              <a:schemeClr val="lt1"/>
+            </a:fillRef>
+            <a:effectRef idx="0">
+              <a:schemeClr val="accent6"/>
+            </a:effectRef>
+            <a:fontRef idx="minor">
+              <a:schemeClr val="dk1"/>
+            </a:fontRef>
+          </p:style>
+          <p:txBody>
+            <a:bodyPr rtlCol="0" anchor="ctr"/>
+            <a:lstStyle/>
+            <a:p>
+              <a:pPr algn="ctr"/>
+              <a:r>
+                <a:rPr lang="hu-HU" sz="1200" b="1" dirty="0"/>
+                <a:t>Group</a:t>
+              </a:r>
+              <a:r>
+                <a:rPr lang="hu-HU" dirty="0"/>
+                <a:t> </a:t>
+              </a:r>
+            </a:p>
+          </p:txBody>
+        </p:sp>
+        <p:sp>
+          <p:nvSpPr>
+            <p:cNvPr id="11" name="Ellipszis 10">
+              <a:extLst>
+                <a:ext uri="{FF2B5EF4-FFF2-40B4-BE49-F238E27FC236}">
+                  <a16:creationId xmlns:a16="http://schemas.microsoft.com/office/drawing/2014/main" id="{FEE51206-AE15-3A98-FE71-FD008335C960}"/>
+                </a:ext>
+              </a:extLst>
+            </p:cNvPr>
+            <p:cNvSpPr/>
+            <p:nvPr/>
+          </p:nvSpPr>
+          <p:spPr>
+            <a:xfrm>
+              <a:off x="6501406" y="4006850"/>
+              <a:ext cx="1320800" cy="571500"/>
+            </a:xfrm>
+            <a:prstGeom prst="ellipse">
+              <a:avLst/>
+            </a:prstGeom>
+            <a:ln>
+              <a:solidFill>
+                <a:srgbClr val="C00000"/>
+              </a:solidFill>
+            </a:ln>
+          </p:spPr>
+          <p:style>
+            <a:lnRef idx="2">
+              <a:schemeClr val="accent6"/>
+            </a:lnRef>
+            <a:fillRef idx="1">
+              <a:schemeClr val="lt1"/>
+            </a:fillRef>
+            <a:effectRef idx="0">
+              <a:schemeClr val="accent6"/>
+            </a:effectRef>
+            <a:fontRef idx="minor">
+              <a:schemeClr val="dk1"/>
+            </a:fontRef>
+          </p:style>
+          <p:txBody>
+            <a:bodyPr rtlCol="0" anchor="ctr"/>
+            <a:lstStyle/>
+            <a:p>
+              <a:pPr algn="ctr"/>
+              <a:r>
+                <a:rPr lang="hu-HU" sz="1200" b="1" dirty="0" err="1"/>
+                <a:t>Join</a:t>
+              </a:r>
+              <a:endParaRPr lang="hu-HU" sz="1200" b="1" dirty="0"/>
+            </a:p>
+          </p:txBody>
+        </p:sp>
+        <p:sp>
+          <p:nvSpPr>
+            <p:cNvPr id="12" name="Ellipszis 11">
+              <a:extLst>
+                <a:ext uri="{FF2B5EF4-FFF2-40B4-BE49-F238E27FC236}">
+                  <a16:creationId xmlns:a16="http://schemas.microsoft.com/office/drawing/2014/main" id="{5D882330-2F7A-F9F8-8A84-A5D488D05218}"/>
+                </a:ext>
+              </a:extLst>
+            </p:cNvPr>
+            <p:cNvSpPr/>
+            <p:nvPr/>
+          </p:nvSpPr>
+          <p:spPr>
+            <a:xfrm>
+              <a:off x="9103908" y="3917581"/>
+              <a:ext cx="1520804" cy="660768"/>
+            </a:xfrm>
+            <a:prstGeom prst="ellipse">
+              <a:avLst/>
+            </a:prstGeom>
+            <a:ln>
+              <a:solidFill>
+                <a:srgbClr val="C00000"/>
+              </a:solidFill>
+            </a:ln>
+          </p:spPr>
+          <p:style>
+            <a:lnRef idx="2">
+              <a:schemeClr val="accent6"/>
+            </a:lnRef>
+            <a:fillRef idx="1">
+              <a:schemeClr val="lt1"/>
+            </a:fillRef>
+            <a:effectRef idx="0">
+              <a:schemeClr val="accent6"/>
+            </a:effectRef>
+            <a:fontRef idx="minor">
+              <a:schemeClr val="dk1"/>
+            </a:fontRef>
+          </p:style>
+          <p:txBody>
+            <a:bodyPr rtlCol="0" anchor="ctr"/>
+            <a:lstStyle/>
+            <a:p>
+              <a:pPr algn="ctr"/>
+              <a:r>
+                <a:rPr lang="hu-HU" sz="1200" b="1" dirty="0" err="1"/>
+                <a:t>Insert</a:t>
+              </a:r>
+              <a:r>
+                <a:rPr lang="hu-HU" sz="1200" dirty="0"/>
+                <a:t>, </a:t>
+              </a:r>
+              <a:r>
+                <a:rPr lang="hu-HU" sz="1200" b="1" dirty="0"/>
+                <a:t>update</a:t>
+              </a:r>
+              <a:r>
+                <a:rPr lang="hu-HU" sz="1200" dirty="0"/>
+                <a:t>, </a:t>
+              </a:r>
+              <a:r>
+                <a:rPr lang="hu-HU" sz="1200" b="1" dirty="0" err="1"/>
+                <a:t>delete</a:t>
+              </a:r>
+              <a:endParaRPr lang="hu-HU" sz="1200" b="1" dirty="0"/>
+            </a:p>
+          </p:txBody>
+        </p:sp>
+        <p:cxnSp>
+          <p:nvCxnSpPr>
+            <p:cNvPr id="3" name="Egyenes összekötő 2"/>
+            <p:cNvCxnSpPr>
+              <a:stCxn id="5" idx="4"/>
+              <a:endCxn id="8" idx="0"/>
+            </p:cNvCxnSpPr>
+            <p:nvPr/>
+          </p:nvCxnSpPr>
+          <p:spPr>
+            <a:xfrm flipH="1">
+              <a:off x="2565400" y="2410153"/>
+              <a:ext cx="2347913" cy="1596697"/>
+            </a:xfrm>
+            <a:prstGeom prst="line">
+              <a:avLst/>
+            </a:prstGeom>
+          </p:spPr>
+          <p:style>
+            <a:lnRef idx="1">
+              <a:schemeClr val="accent1"/>
+            </a:lnRef>
+            <a:fillRef idx="0">
+              <a:schemeClr val="accent1"/>
+            </a:fillRef>
+            <a:effectRef idx="0">
+              <a:schemeClr val="accent1"/>
+            </a:effectRef>
+            <a:fontRef idx="minor">
+              <a:schemeClr val="tx1"/>
+            </a:fontRef>
+          </p:style>
+        </p:cxnSp>
+        <p:cxnSp>
+          <p:nvCxnSpPr>
+            <p:cNvPr id="13" name="Egyenes összekötő 12"/>
+            <p:cNvCxnSpPr>
+              <a:stCxn id="5" idx="4"/>
+              <a:endCxn id="9" idx="0"/>
+            </p:cNvCxnSpPr>
+            <p:nvPr/>
+          </p:nvCxnSpPr>
+          <p:spPr>
+            <a:xfrm flipH="1">
+              <a:off x="4202113" y="2410153"/>
+              <a:ext cx="711200" cy="1596697"/>
+            </a:xfrm>
+            <a:prstGeom prst="line">
+              <a:avLst/>
+            </a:prstGeom>
+          </p:spPr>
+          <p:style>
+            <a:lnRef idx="1">
+              <a:schemeClr val="accent1"/>
+            </a:lnRef>
+            <a:fillRef idx="0">
+              <a:schemeClr val="accent1"/>
+            </a:fillRef>
+            <a:effectRef idx="0">
+              <a:schemeClr val="accent1"/>
+            </a:effectRef>
+            <a:fontRef idx="minor">
+              <a:schemeClr val="tx1"/>
+            </a:fontRef>
+          </p:style>
+        </p:cxnSp>
+        <p:cxnSp>
+          <p:nvCxnSpPr>
+            <p:cNvPr id="15" name="Egyenes összekötő 14"/>
+            <p:cNvCxnSpPr>
+              <a:stCxn id="5" idx="4"/>
+              <a:endCxn id="10" idx="0"/>
+            </p:cNvCxnSpPr>
+            <p:nvPr/>
+          </p:nvCxnSpPr>
+          <p:spPr>
+            <a:xfrm>
+              <a:off x="4913313" y="2410153"/>
+              <a:ext cx="716358" cy="1596697"/>
+            </a:xfrm>
+            <a:prstGeom prst="line">
+              <a:avLst/>
+            </a:prstGeom>
+          </p:spPr>
+          <p:style>
+            <a:lnRef idx="1">
+              <a:schemeClr val="accent1"/>
+            </a:lnRef>
+            <a:fillRef idx="0">
+              <a:schemeClr val="accent1"/>
+            </a:fillRef>
+            <a:effectRef idx="0">
+              <a:schemeClr val="accent1"/>
+            </a:effectRef>
+            <a:fontRef idx="minor">
+              <a:schemeClr val="tx1"/>
+            </a:fontRef>
+          </p:style>
+        </p:cxnSp>
+        <p:cxnSp>
+          <p:nvCxnSpPr>
+            <p:cNvPr id="18" name="Egyenes összekötő 17"/>
+            <p:cNvCxnSpPr>
+              <a:stCxn id="5" idx="4"/>
+              <a:endCxn id="11" idx="0"/>
+            </p:cNvCxnSpPr>
+            <p:nvPr/>
+          </p:nvCxnSpPr>
+          <p:spPr>
+            <a:xfrm>
+              <a:off x="4913313" y="2410153"/>
+              <a:ext cx="2248493" cy="1596697"/>
+            </a:xfrm>
+            <a:prstGeom prst="line">
+              <a:avLst/>
+            </a:prstGeom>
+          </p:spPr>
+          <p:style>
+            <a:lnRef idx="1">
+              <a:schemeClr val="accent1"/>
+            </a:lnRef>
+            <a:fillRef idx="0">
+              <a:schemeClr val="accent1"/>
+            </a:fillRef>
+            <a:effectRef idx="0">
+              <a:schemeClr val="accent1"/>
+            </a:effectRef>
+            <a:fontRef idx="minor">
+              <a:schemeClr val="tx1"/>
+            </a:fontRef>
+          </p:style>
+        </p:cxnSp>
+        <p:cxnSp>
+          <p:nvCxnSpPr>
+            <p:cNvPr id="21" name="Egyenes összekötő 20"/>
+            <p:cNvCxnSpPr>
+              <a:stCxn id="7" idx="4"/>
+              <a:endCxn id="12" idx="0"/>
+            </p:cNvCxnSpPr>
+            <p:nvPr/>
+          </p:nvCxnSpPr>
+          <p:spPr>
+            <a:xfrm>
+              <a:off x="9856362" y="2410153"/>
+              <a:ext cx="7948" cy="1507428"/>
+            </a:xfrm>
+            <a:prstGeom prst="line">
+              <a:avLst/>
+            </a:prstGeom>
+          </p:spPr>
+          <p:style>
+            <a:lnRef idx="1">
+              <a:schemeClr val="accent1"/>
+            </a:lnRef>
+            <a:fillRef idx="0">
+              <a:schemeClr val="accent1"/>
+            </a:fillRef>
+            <a:effectRef idx="0">
+              <a:schemeClr val="accent1"/>
+            </a:effectRef>
+            <a:fontRef idx="minor">
+              <a:schemeClr val="tx1"/>
+            </a:fontRef>
+          </p:style>
+        </p:cxnSp>
+        <p:cxnSp>
+          <p:nvCxnSpPr>
+            <p:cNvPr id="27" name="Egyenes összekötő 26"/>
+            <p:cNvCxnSpPr>
+              <a:stCxn id="4" idx="4"/>
+              <a:endCxn id="5" idx="0"/>
+            </p:cNvCxnSpPr>
+            <p:nvPr/>
+          </p:nvCxnSpPr>
+          <p:spPr>
+            <a:xfrm flipH="1">
+              <a:off x="4913313" y="1155700"/>
+              <a:ext cx="2586037" cy="505153"/>
+            </a:xfrm>
+            <a:prstGeom prst="line">
+              <a:avLst/>
+            </a:prstGeom>
+          </p:spPr>
+          <p:style>
+            <a:lnRef idx="1">
+              <a:schemeClr val="accent1"/>
+            </a:lnRef>
+            <a:fillRef idx="0">
+              <a:schemeClr val="accent1"/>
+            </a:fillRef>
+            <a:effectRef idx="0">
+              <a:schemeClr val="accent1"/>
+            </a:effectRef>
+            <a:fontRef idx="minor">
+              <a:schemeClr val="tx1"/>
+            </a:fontRef>
+          </p:style>
+        </p:cxnSp>
+        <p:cxnSp>
+          <p:nvCxnSpPr>
+            <p:cNvPr id="30" name="Egyenes összekötő 29"/>
+            <p:cNvCxnSpPr>
+              <a:stCxn id="4" idx="4"/>
+              <a:endCxn id="7" idx="0"/>
+            </p:cNvCxnSpPr>
+            <p:nvPr/>
+          </p:nvCxnSpPr>
+          <p:spPr>
+            <a:xfrm>
+              <a:off x="7499350" y="1155700"/>
+              <a:ext cx="2357012" cy="505153"/>
+            </a:xfrm>
+            <a:prstGeom prst="line">
+              <a:avLst/>
+            </a:prstGeom>
+          </p:spPr>
+          <p:style>
+            <a:lnRef idx="1">
+              <a:schemeClr val="accent1"/>
+            </a:lnRef>
+            <a:fillRef idx="0">
+              <a:schemeClr val="accent1"/>
+            </a:fillRef>
+            <a:effectRef idx="0">
+              <a:schemeClr val="accent1"/>
+            </a:effectRef>
+            <a:fontRef idx="minor">
+              <a:schemeClr val="tx1"/>
+            </a:fontRef>
+          </p:style>
+        </p:cxnSp>
+      </p:grpSp>
+      <p:sp>
+        <p:nvSpPr>
+          <p:cNvPr id="54" name="Szövegdoboz 53"/>
+          <p:cNvSpPr txBox="1"/>
           <p:nvPr/>
         </p:nvSpPr>
         <p:spPr>
           <a:xfrm>
-            <a:off x="6629400" y="406400"/>
-            <a:ext cx="1739900" cy="749300"/>
+            <a:off x="1942184" y="656265"/>
+            <a:ext cx="4779139" cy="646331"/>
           </a:xfrm>
-          <a:prstGeom prst="ellipse">
+          <a:prstGeom prst="rect">
             <a:avLst/>
           </a:prstGeom>
+          <a:noFill/>
         </p:spPr>
-        <p:style>
-          <a:lnRef idx="2">
-            <a:schemeClr val="accent6"/>
-          </a:lnRef>
-          <a:fillRef idx="1">
-            <a:schemeClr val="lt1"/>
-          </a:fillRef>
-          <a:effectRef idx="0">
-            <a:schemeClr val="accent6"/>
-          </a:effectRef>
-          <a:fontRef idx="minor">
-            <a:schemeClr val="dk1"/>
-          </a:fontRef>
-        </p:style>
         <p:txBody>
-          <a:bodyPr rtlCol="0" anchor="ctr"/>
+          <a:bodyPr wrap="square" rtlCol="0">
+            <a:spAutoFit/>
+          </a:bodyPr>
           <a:lstStyle/>
           <a:p>
-            <a:pPr algn="ctr"/>
-            <a:r>
-              <a:rPr lang="hu-HU" dirty="0" err="1"/>
+            <a:r>
+              <a:rPr lang="hu-HU" sz="3600" dirty="0" err="1">
+                <a:solidFill>
+                  <a:schemeClr val="tx1">
+                    <a:lumMod val="85000"/>
+                    <a:lumOff val="15000"/>
+                  </a:schemeClr>
+                </a:solidFill>
+                <a:latin typeface="+mj-lt"/>
+                <a:ea typeface="+mj-ea"/>
+                <a:cs typeface="+mj-cs"/>
+              </a:rPr>
               <a:t>Xquery</a:t>
             </a:r>
-            <a:endParaRPr lang="hu-HU" dirty="0"/>
-          </a:p>
-        </p:txBody>
-      </p:sp>
-      <p:sp>
-        <p:nvSpPr>
-          <p:cNvPr id="5" name="Ellipszis 4">
-            <a:extLst>
-              <a:ext uri="{FF2B5EF4-FFF2-40B4-BE49-F238E27FC236}">
-                <a16:creationId xmlns:a16="http://schemas.microsoft.com/office/drawing/2014/main" id="{22FA9C70-6626-2365-30B3-B3CC9F27DA34}"/>
-              </a:ext>
-            </a:extLst>
-          </p:cNvPr>
-          <p:cNvSpPr/>
-          <p:nvPr/>
-        </p:nvSpPr>
-        <p:spPr>
-          <a:xfrm>
-            <a:off x="4298156" y="1672911"/>
-            <a:ext cx="1422400" cy="749300"/>
-          </a:xfrm>
-          <a:prstGeom prst="ellipse">
-            <a:avLst/>
-          </a:prstGeom>
-        </p:spPr>
-        <p:style>
-          <a:lnRef idx="2">
-            <a:schemeClr val="accent6"/>
-          </a:lnRef>
-          <a:fillRef idx="1">
-            <a:schemeClr val="lt1"/>
-          </a:fillRef>
-          <a:effectRef idx="0">
-            <a:schemeClr val="accent6"/>
-          </a:effectRef>
-          <a:fontRef idx="minor">
-            <a:schemeClr val="dk1"/>
-          </a:fontRef>
-        </p:style>
-        <p:txBody>
-          <a:bodyPr rtlCol="0" anchor="ctr"/>
-          <a:lstStyle/>
-          <a:p>
-            <a:pPr algn="ctr"/>
-            <a:r>
-              <a:rPr lang="hu-HU" dirty="0" err="1"/>
-              <a:t>Query</a:t>
-            </a:r>
-            <a:r>
-              <a:rPr lang="hu-HU" dirty="0"/>
-              <a:t> FLWOR</a:t>
-            </a:r>
-          </a:p>
-        </p:txBody>
-      </p:sp>
-      <p:sp>
-        <p:nvSpPr>
-          <p:cNvPr id="7" name="Ellipszis 6">
-            <a:extLst>
-              <a:ext uri="{FF2B5EF4-FFF2-40B4-BE49-F238E27FC236}">
-                <a16:creationId xmlns:a16="http://schemas.microsoft.com/office/drawing/2014/main" id="{2135333B-A0C0-3B67-54A8-3576D89ED47C}"/>
-              </a:ext>
-            </a:extLst>
-          </p:cNvPr>
-          <p:cNvSpPr/>
-          <p:nvPr/>
-        </p:nvSpPr>
-        <p:spPr>
-          <a:xfrm>
-            <a:off x="9354342" y="1672911"/>
-            <a:ext cx="1536700" cy="749300"/>
-          </a:xfrm>
-          <a:prstGeom prst="ellipse">
-            <a:avLst/>
-          </a:prstGeom>
-        </p:spPr>
-        <p:style>
-          <a:lnRef idx="2">
-            <a:schemeClr val="accent6"/>
-          </a:lnRef>
-          <a:fillRef idx="1">
-            <a:schemeClr val="lt1"/>
-          </a:fillRef>
-          <a:effectRef idx="0">
-            <a:schemeClr val="accent6"/>
-          </a:effectRef>
-          <a:fontRef idx="minor">
-            <a:schemeClr val="dk1"/>
-          </a:fontRef>
-        </p:style>
-        <p:txBody>
-          <a:bodyPr rtlCol="0" anchor="ctr"/>
-          <a:lstStyle/>
-          <a:p>
-            <a:pPr algn="ctr"/>
-            <a:r>
-              <a:rPr lang="hu-HU" dirty="0"/>
-              <a:t>Update</a:t>
-            </a:r>
-          </a:p>
-        </p:txBody>
-      </p:sp>
-      <p:sp>
-        <p:nvSpPr>
-          <p:cNvPr id="8" name="Ellipszis 7">
-            <a:extLst>
-              <a:ext uri="{FF2B5EF4-FFF2-40B4-BE49-F238E27FC236}">
-                <a16:creationId xmlns:a16="http://schemas.microsoft.com/office/drawing/2014/main" id="{B36A805E-D790-8253-A800-285F42F0D605}"/>
-              </a:ext>
-            </a:extLst>
-          </p:cNvPr>
-          <p:cNvSpPr/>
-          <p:nvPr/>
-        </p:nvSpPr>
-        <p:spPr>
-          <a:xfrm>
-            <a:off x="1905000" y="4006850"/>
-            <a:ext cx="1320800" cy="571500"/>
-          </a:xfrm>
-          <a:prstGeom prst="ellipse">
-            <a:avLst/>
-          </a:prstGeom>
-        </p:spPr>
-        <p:style>
-          <a:lnRef idx="2">
-            <a:schemeClr val="accent6"/>
-          </a:lnRef>
-          <a:fillRef idx="1">
-            <a:schemeClr val="lt1"/>
-          </a:fillRef>
-          <a:effectRef idx="0">
-            <a:schemeClr val="accent6"/>
-          </a:effectRef>
-          <a:fontRef idx="minor">
-            <a:schemeClr val="dk1"/>
-          </a:fontRef>
-        </p:style>
-        <p:txBody>
-          <a:bodyPr rtlCol="0" anchor="ctr"/>
-          <a:lstStyle/>
-          <a:p>
-            <a:pPr algn="ctr"/>
-            <a:r>
-              <a:rPr lang="hu-HU" dirty="0" err="1"/>
-              <a:t>Selection</a:t>
-            </a:r>
-            <a:endParaRPr lang="hu-HU" dirty="0"/>
-          </a:p>
-        </p:txBody>
-      </p:sp>
-      <p:sp>
-        <p:nvSpPr>
-          <p:cNvPr id="9" name="Ellipszis 8">
-            <a:extLst>
-              <a:ext uri="{FF2B5EF4-FFF2-40B4-BE49-F238E27FC236}">
-                <a16:creationId xmlns:a16="http://schemas.microsoft.com/office/drawing/2014/main" id="{F4D740C2-2EDD-F56A-6528-EEE4BC005864}"/>
-              </a:ext>
-            </a:extLst>
-          </p:cNvPr>
-          <p:cNvSpPr/>
-          <p:nvPr/>
-        </p:nvSpPr>
-        <p:spPr>
-          <a:xfrm>
-            <a:off x="3541713" y="4006850"/>
-            <a:ext cx="1320800" cy="571500"/>
-          </a:xfrm>
-          <a:prstGeom prst="ellipse">
-            <a:avLst/>
-          </a:prstGeom>
-        </p:spPr>
-        <p:style>
-          <a:lnRef idx="2">
-            <a:schemeClr val="accent6"/>
-          </a:lnRef>
-          <a:fillRef idx="1">
-            <a:schemeClr val="lt1"/>
-          </a:fillRef>
-          <a:effectRef idx="0">
-            <a:schemeClr val="accent6"/>
-          </a:effectRef>
-          <a:fontRef idx="minor">
-            <a:schemeClr val="dk1"/>
-          </a:fontRef>
-        </p:style>
-        <p:txBody>
-          <a:bodyPr rtlCol="0" anchor="ctr"/>
-          <a:lstStyle/>
-          <a:p>
-            <a:pPr algn="ctr"/>
-            <a:r>
-              <a:rPr lang="hu-HU" dirty="0"/>
-              <a:t>Projection</a:t>
-            </a:r>
-          </a:p>
-        </p:txBody>
-      </p:sp>
-      <p:sp>
-        <p:nvSpPr>
-          <p:cNvPr id="10" name="Ellipszis 9">
-            <a:extLst>
-              <a:ext uri="{FF2B5EF4-FFF2-40B4-BE49-F238E27FC236}">
-                <a16:creationId xmlns:a16="http://schemas.microsoft.com/office/drawing/2014/main" id="{2B625B94-B04C-DE66-5865-4EE9676534BC}"/>
-              </a:ext>
-            </a:extLst>
-          </p:cNvPr>
-          <p:cNvSpPr/>
-          <p:nvPr/>
-        </p:nvSpPr>
-        <p:spPr>
-          <a:xfrm>
-            <a:off x="5009356" y="4006851"/>
-            <a:ext cx="1320800" cy="571499"/>
-          </a:xfrm>
-          <a:prstGeom prst="ellipse">
-            <a:avLst/>
-          </a:prstGeom>
-        </p:spPr>
-        <p:style>
-          <a:lnRef idx="2">
-            <a:schemeClr val="accent6"/>
-          </a:lnRef>
-          <a:fillRef idx="1">
-            <a:schemeClr val="lt1"/>
-          </a:fillRef>
-          <a:effectRef idx="0">
-            <a:schemeClr val="accent6"/>
-          </a:effectRef>
-          <a:fontRef idx="minor">
-            <a:schemeClr val="dk1"/>
-          </a:fontRef>
-        </p:style>
-        <p:txBody>
-          <a:bodyPr rtlCol="0" anchor="ctr"/>
-          <a:lstStyle/>
-          <a:p>
-            <a:pPr algn="ctr"/>
-            <a:r>
-              <a:rPr lang="hu-HU" dirty="0"/>
-              <a:t>Group </a:t>
-            </a:r>
-          </a:p>
-        </p:txBody>
-      </p:sp>
-      <p:sp>
-        <p:nvSpPr>
-          <p:cNvPr id="11" name="Ellipszis 10">
-            <a:extLst>
-              <a:ext uri="{FF2B5EF4-FFF2-40B4-BE49-F238E27FC236}">
-                <a16:creationId xmlns:a16="http://schemas.microsoft.com/office/drawing/2014/main" id="{FEE51206-AE15-3A98-FE71-FD008335C960}"/>
-              </a:ext>
-            </a:extLst>
-          </p:cNvPr>
-          <p:cNvSpPr/>
-          <p:nvPr/>
-        </p:nvSpPr>
-        <p:spPr>
-          <a:xfrm>
-            <a:off x="6477000" y="4006850"/>
-            <a:ext cx="1320800" cy="571500"/>
-          </a:xfrm>
-          <a:prstGeom prst="ellipse">
-            <a:avLst/>
-          </a:prstGeom>
-        </p:spPr>
-        <p:style>
-          <a:lnRef idx="2">
-            <a:schemeClr val="accent6"/>
-          </a:lnRef>
-          <a:fillRef idx="1">
-            <a:schemeClr val="lt1"/>
-          </a:fillRef>
-          <a:effectRef idx="0">
-            <a:schemeClr val="accent6"/>
-          </a:effectRef>
-          <a:fontRef idx="minor">
-            <a:schemeClr val="dk1"/>
-          </a:fontRef>
-        </p:style>
-        <p:txBody>
-          <a:bodyPr rtlCol="0" anchor="ctr"/>
-          <a:lstStyle/>
-          <a:p>
-            <a:pPr algn="ctr"/>
-            <a:r>
-              <a:rPr lang="hu-HU" dirty="0" err="1"/>
-              <a:t>Join</a:t>
-            </a:r>
-            <a:endParaRPr lang="hu-HU" dirty="0"/>
-          </a:p>
-        </p:txBody>
-      </p:sp>
-      <p:sp>
-        <p:nvSpPr>
-          <p:cNvPr id="12" name="Ellipszis 11">
-            <a:extLst>
-              <a:ext uri="{FF2B5EF4-FFF2-40B4-BE49-F238E27FC236}">
-                <a16:creationId xmlns:a16="http://schemas.microsoft.com/office/drawing/2014/main" id="{5D882330-2F7A-F9F8-8A84-A5D488D05218}"/>
-              </a:ext>
-            </a:extLst>
-          </p:cNvPr>
-          <p:cNvSpPr/>
-          <p:nvPr/>
-        </p:nvSpPr>
-        <p:spPr>
-          <a:xfrm>
-            <a:off x="9354342" y="3740150"/>
-            <a:ext cx="2037558" cy="933450"/>
-          </a:xfrm>
-          <a:prstGeom prst="ellipse">
-            <a:avLst/>
-          </a:prstGeom>
-        </p:spPr>
-        <p:style>
-          <a:lnRef idx="2">
-            <a:schemeClr val="accent6"/>
-          </a:lnRef>
-          <a:fillRef idx="1">
-            <a:schemeClr val="lt1"/>
-          </a:fillRef>
-          <a:effectRef idx="0">
-            <a:schemeClr val="accent6"/>
-          </a:effectRef>
-          <a:fontRef idx="minor">
-            <a:schemeClr val="dk1"/>
-          </a:fontRef>
-        </p:style>
-        <p:txBody>
-          <a:bodyPr rtlCol="0" anchor="ctr"/>
-          <a:lstStyle/>
-          <a:p>
-            <a:pPr algn="ctr"/>
-            <a:r>
-              <a:rPr lang="hu-HU" dirty="0" err="1"/>
-              <a:t>Insert</a:t>
-            </a:r>
-            <a:r>
-              <a:rPr lang="hu-HU" dirty="0"/>
-              <a:t>, update, </a:t>
-            </a:r>
-            <a:r>
-              <a:rPr lang="hu-HU" dirty="0" err="1"/>
-              <a:t>delete</a:t>
-            </a:r>
-            <a:endParaRPr lang="hu-HU" dirty="0"/>
+            <a:endParaRPr lang="en-US" sz="3600" dirty="0">
+              <a:solidFill>
+                <a:schemeClr val="tx1">
+                  <a:lumMod val="85000"/>
+                  <a:lumOff val="15000"/>
+                </a:schemeClr>
+              </a:solidFill>
+              <a:latin typeface="+mj-lt"/>
+              <a:ea typeface="+mj-ea"/>
+              <a:cs typeface="+mj-cs"/>
+            </a:endParaRPr>
           </a:p>
         </p:txBody>
       </p:sp>
@@ -9282,6 +10349,1987 @@
     <p:extLst>
       <p:ext uri="{BB962C8B-B14F-4D97-AF65-F5344CB8AC3E}">
         <p14:creationId xmlns:p14="http://schemas.microsoft.com/office/powerpoint/2010/main" val="184371124"/>
+      </p:ext>
+    </p:extLst>
+  </p:cSld>
+  <p:clrMapOvr>
+    <a:masterClrMapping/>
+  </p:clrMapOvr>
+</p:sld>
+</file>
+
+<file path=ppt/slides/slide6.xml><?xml version="1.0" encoding="utf-8"?>
+<p:sld xmlns:a="http://schemas.openxmlformats.org/drawingml/2006/main" xmlns:r="http://schemas.openxmlformats.org/officeDocument/2006/relationships" xmlns:p="http://schemas.openxmlformats.org/presentationml/2006/main">
+  <p:cSld>
+    <p:spTree>
+      <p:nvGrpSpPr>
+        <p:cNvPr id="1" name=""/>
+        <p:cNvGrpSpPr/>
+        <p:nvPr/>
+      </p:nvGrpSpPr>
+      <p:grpSpPr>
+        <a:xfrm>
+          <a:off x="0" y="0"/>
+          <a:ext cx="0" cy="0"/>
+          <a:chOff x="0" y="0"/>
+          <a:chExt cx="0" cy="0"/>
+        </a:xfrm>
+      </p:grpSpPr>
+      <p:sp>
+        <p:nvSpPr>
+          <p:cNvPr id="2" name="Cím 1"/>
+          <p:cNvSpPr>
+            <a:spLocks noGrp="1"/>
+          </p:cNvSpPr>
+          <p:nvPr>
+            <p:ph type="title"/>
+          </p:nvPr>
+        </p:nvSpPr>
+        <p:spPr>
+          <a:xfrm>
+            <a:off x="2273329" y="641866"/>
+            <a:ext cx="8911687" cy="1280890"/>
+          </a:xfrm>
+        </p:spPr>
+        <p:txBody>
+          <a:bodyPr/>
+          <a:lstStyle/>
+          <a:p>
+            <a:r>
+              <a:rPr lang="hu-HU" dirty="0" smtClean="0"/>
+              <a:t>1. Feladat</a:t>
+            </a:r>
+            <a:br>
+              <a:rPr lang="hu-HU" dirty="0" smtClean="0"/>
+            </a:br>
+            <a:endParaRPr lang="en-US" dirty="0"/>
+          </a:p>
+        </p:txBody>
+      </p:sp>
+      <p:sp>
+        <p:nvSpPr>
+          <p:cNvPr id="3" name="Tartalom helye 2"/>
+          <p:cNvSpPr>
+            <a:spLocks noGrp="1"/>
+          </p:cNvSpPr>
+          <p:nvPr>
+            <p:ph idx="1"/>
+          </p:nvPr>
+        </p:nvSpPr>
+        <p:spPr>
+          <a:xfrm>
+            <a:off x="514904" y="2148396"/>
+            <a:ext cx="5015883" cy="3737499"/>
+          </a:xfrm>
+        </p:spPr>
+        <p:txBody>
+          <a:bodyPr/>
+          <a:lstStyle/>
+          <a:p>
+            <a:r>
+              <a:rPr lang="en-US" dirty="0" err="1" smtClean="0"/>
+              <a:t>Készítsen</a:t>
+            </a:r>
+            <a:r>
+              <a:rPr lang="en-US" dirty="0" smtClean="0"/>
+              <a:t> </a:t>
+            </a:r>
+            <a:r>
+              <a:rPr lang="en-US" dirty="0" err="1"/>
+              <a:t>egy</a:t>
+            </a:r>
+            <a:r>
+              <a:rPr lang="en-US" dirty="0"/>
+              <a:t> </a:t>
+            </a:r>
+            <a:r>
+              <a:rPr lang="en-US" dirty="0" err="1"/>
+              <a:t>Xquery</a:t>
+            </a:r>
+            <a:r>
+              <a:rPr lang="en-US" dirty="0"/>
+              <a:t> </a:t>
+            </a:r>
+            <a:r>
+              <a:rPr lang="en-US" dirty="0" err="1"/>
+              <a:t>lekérdezést</a:t>
+            </a:r>
+            <a:r>
+              <a:rPr lang="en-US" dirty="0"/>
+              <a:t> </a:t>
+            </a:r>
+            <a:r>
+              <a:rPr lang="en-US" dirty="0" err="1"/>
+              <a:t>amely</a:t>
+            </a:r>
+            <a:r>
+              <a:rPr lang="en-US" dirty="0"/>
+              <a:t> </a:t>
+            </a:r>
+            <a:r>
+              <a:rPr lang="en-US" dirty="0" err="1"/>
+              <a:t>kiirtja</a:t>
+            </a:r>
+            <a:r>
+              <a:rPr lang="en-US" dirty="0"/>
+              <a:t> </a:t>
+            </a:r>
+            <a:r>
+              <a:rPr lang="en-US" dirty="0" err="1"/>
+              <a:t>az</a:t>
+            </a:r>
+            <a:r>
+              <a:rPr lang="en-US" dirty="0"/>
+              <a:t> </a:t>
+            </a:r>
+            <a:r>
+              <a:rPr lang="en-US" dirty="0" err="1"/>
+              <a:t>összes</a:t>
+            </a:r>
+            <a:r>
+              <a:rPr lang="en-US" dirty="0"/>
+              <a:t> </a:t>
+            </a:r>
+            <a:r>
+              <a:rPr lang="en-US" dirty="0" err="1" smtClean="0"/>
+              <a:t>vendéget</a:t>
+            </a:r>
+            <a:r>
+              <a:rPr lang="hu-HU" dirty="0" smtClean="0"/>
+              <a:t>:</a:t>
+            </a:r>
+            <a:endParaRPr lang="hu-HU" dirty="0"/>
+          </a:p>
+          <a:p>
+            <a:pPr marL="0" indent="0">
+              <a:buNone/>
+            </a:pPr>
+            <a:endParaRPr lang="hu-HU" dirty="0" smtClean="0"/>
+          </a:p>
+          <a:p>
+            <a:pPr marL="0" indent="0">
+              <a:buNone/>
+            </a:pPr>
+            <a:r>
+              <a:rPr lang="en-US" i="1" dirty="0" smtClean="0">
+                <a:latin typeface="Bahnschrift Light" panose="020B0502040204020203" pitchFamily="34" charset="0"/>
+              </a:rPr>
+              <a:t>doc</a:t>
+            </a:r>
+            <a:r>
+              <a:rPr lang="en-US" i="1" dirty="0">
+                <a:latin typeface="Bahnschrift Light" panose="020B0502040204020203" pitchFamily="34" charset="0"/>
+              </a:rPr>
+              <a:t>("/</a:t>
+            </a:r>
+            <a:r>
+              <a:rPr lang="en-US" i="1" dirty="0" err="1" smtClean="0">
+                <a:latin typeface="Bahnschrift Light" panose="020B0502040204020203" pitchFamily="34" charset="0"/>
+              </a:rPr>
+              <a:t>db</a:t>
+            </a:r>
+            <a:r>
+              <a:rPr lang="hu-HU" i="1" dirty="0">
+                <a:latin typeface="Bahnschrift Light" panose="020B0502040204020203" pitchFamily="34" charset="0"/>
+              </a:rPr>
+              <a:t>/</a:t>
+            </a:r>
+            <a:r>
+              <a:rPr lang="en-US" i="1" dirty="0" smtClean="0">
+                <a:latin typeface="Bahnschrift Light" panose="020B0502040204020203" pitchFamily="34" charset="0"/>
+              </a:rPr>
+              <a:t>etterem.xml</a:t>
+            </a:r>
+            <a:r>
+              <a:rPr lang="en-US" i="1" dirty="0">
+                <a:latin typeface="Bahnschrift Light" panose="020B0502040204020203" pitchFamily="34" charset="0"/>
+              </a:rPr>
+              <a:t>")//</a:t>
+            </a:r>
+            <a:r>
+              <a:rPr lang="en-US" i="1" dirty="0" err="1" smtClean="0">
+                <a:latin typeface="Bahnschrift Light" panose="020B0502040204020203" pitchFamily="34" charset="0"/>
+              </a:rPr>
+              <a:t>vendeg</a:t>
+            </a:r>
+            <a:endParaRPr lang="en-US" i="1" dirty="0">
+              <a:latin typeface="Bahnschrift Light" panose="020B0502040204020203" pitchFamily="34" charset="0"/>
+            </a:endParaRPr>
+          </a:p>
+        </p:txBody>
+      </p:sp>
+      <p:pic>
+        <p:nvPicPr>
+          <p:cNvPr id="5" name="Kép 4"/>
+          <p:cNvPicPr>
+            <a:picLocks noChangeAspect="1"/>
+          </p:cNvPicPr>
+          <p:nvPr/>
+        </p:nvPicPr>
+        <p:blipFill>
+          <a:blip r:embed="rId2"/>
+          <a:stretch>
+            <a:fillRect/>
+          </a:stretch>
+        </p:blipFill>
+        <p:spPr>
+          <a:xfrm>
+            <a:off x="6530717" y="1380198"/>
+            <a:ext cx="5276583" cy="4627989"/>
+          </a:xfrm>
+          <a:prstGeom prst="rect">
+            <a:avLst/>
+          </a:prstGeom>
+        </p:spPr>
+      </p:pic>
+    </p:spTree>
+    <p:extLst>
+      <p:ext uri="{BB962C8B-B14F-4D97-AF65-F5344CB8AC3E}">
+        <p14:creationId xmlns:p14="http://schemas.microsoft.com/office/powerpoint/2010/main" val="2755277444"/>
+      </p:ext>
+    </p:extLst>
+  </p:cSld>
+  <p:clrMapOvr>
+    <a:masterClrMapping/>
+  </p:clrMapOvr>
+</p:sld>
+</file>
+
+<file path=ppt/slides/slide7.xml><?xml version="1.0" encoding="utf-8"?>
+<p:sld xmlns:a="http://schemas.openxmlformats.org/drawingml/2006/main" xmlns:r="http://schemas.openxmlformats.org/officeDocument/2006/relationships" xmlns:p="http://schemas.openxmlformats.org/presentationml/2006/main">
+  <p:cSld>
+    <p:spTree>
+      <p:nvGrpSpPr>
+        <p:cNvPr id="1" name=""/>
+        <p:cNvGrpSpPr/>
+        <p:nvPr/>
+      </p:nvGrpSpPr>
+      <p:grpSpPr>
+        <a:xfrm>
+          <a:off x="0" y="0"/>
+          <a:ext cx="0" cy="0"/>
+          <a:chOff x="0" y="0"/>
+          <a:chExt cx="0" cy="0"/>
+        </a:xfrm>
+      </p:grpSpPr>
+      <p:sp>
+        <p:nvSpPr>
+          <p:cNvPr id="2" name="Cím 1"/>
+          <p:cNvSpPr>
+            <a:spLocks noGrp="1"/>
+          </p:cNvSpPr>
+          <p:nvPr>
+            <p:ph type="title"/>
+          </p:nvPr>
+        </p:nvSpPr>
+        <p:spPr/>
+        <p:txBody>
+          <a:bodyPr/>
+          <a:lstStyle/>
+          <a:p>
+            <a:r>
+              <a:rPr lang="hu-HU" dirty="0" smtClean="0"/>
+              <a:t>2. Feladat</a:t>
+            </a:r>
+            <a:endParaRPr lang="en-US" dirty="0"/>
+          </a:p>
+        </p:txBody>
+      </p:sp>
+      <p:sp>
+        <p:nvSpPr>
+          <p:cNvPr id="3" name="Tartalom helye 2"/>
+          <p:cNvSpPr>
+            <a:spLocks noGrp="1"/>
+          </p:cNvSpPr>
+          <p:nvPr>
+            <p:ph idx="1"/>
+          </p:nvPr>
+        </p:nvSpPr>
+        <p:spPr>
+          <a:xfrm>
+            <a:off x="927970" y="2053700"/>
+            <a:ext cx="5622633" cy="3565865"/>
+          </a:xfrm>
+        </p:spPr>
+        <p:txBody>
+          <a:bodyPr>
+            <a:normAutofit lnSpcReduction="10000"/>
+          </a:bodyPr>
+          <a:lstStyle/>
+          <a:p>
+            <a:r>
+              <a:rPr lang="en-US" dirty="0" err="1"/>
+              <a:t>Kérdezze</a:t>
+            </a:r>
+            <a:r>
+              <a:rPr lang="en-US" dirty="0"/>
+              <a:t> le </a:t>
+            </a:r>
+            <a:r>
+              <a:rPr lang="en-US" dirty="0" err="1"/>
+              <a:t>azokat</a:t>
+            </a:r>
+            <a:r>
+              <a:rPr lang="en-US" dirty="0"/>
+              <a:t> a </a:t>
+            </a:r>
+            <a:r>
+              <a:rPr lang="en-US" dirty="0" err="1"/>
+              <a:t>szakácsokat</a:t>
+            </a:r>
+            <a:r>
+              <a:rPr lang="en-US" dirty="0"/>
+              <a:t>, </a:t>
+            </a:r>
+            <a:r>
+              <a:rPr lang="en-US" dirty="0" err="1"/>
+              <a:t>akiknek</a:t>
+            </a:r>
+            <a:r>
+              <a:rPr lang="en-US" dirty="0"/>
+              <a:t> a </a:t>
+            </a:r>
+            <a:r>
+              <a:rPr lang="en-US" dirty="0" err="1"/>
+              <a:t>végzettségeik</a:t>
+            </a:r>
+            <a:r>
+              <a:rPr lang="en-US" dirty="0"/>
+              <a:t> </a:t>
+            </a:r>
+            <a:r>
+              <a:rPr lang="en-US" dirty="0" err="1"/>
+              <a:t>között</a:t>
+            </a:r>
+            <a:r>
+              <a:rPr lang="en-US" dirty="0"/>
+              <a:t> van </a:t>
+            </a:r>
+            <a:r>
+              <a:rPr lang="en-US" dirty="0" err="1"/>
+              <a:t>szakközépiskola</a:t>
+            </a:r>
+            <a:r>
+              <a:rPr lang="en-US" dirty="0"/>
+              <a:t> (</a:t>
+            </a:r>
+            <a:r>
+              <a:rPr lang="en-US" dirty="0" err="1"/>
+              <a:t>SzakácsID</a:t>
+            </a:r>
+            <a:r>
+              <a:rPr lang="en-US" dirty="0"/>
+              <a:t>, </a:t>
+            </a:r>
+            <a:r>
+              <a:rPr lang="en-US" dirty="0" err="1"/>
+              <a:t>Név</a:t>
+            </a:r>
+            <a:r>
+              <a:rPr lang="en-US" dirty="0"/>
+              <a:t>, </a:t>
+            </a:r>
+            <a:r>
+              <a:rPr lang="en-US" dirty="0" err="1"/>
+              <a:t>Részleg</a:t>
+            </a:r>
+            <a:r>
+              <a:rPr lang="en-US" dirty="0"/>
+              <a:t>, </a:t>
+            </a:r>
+            <a:r>
+              <a:rPr lang="en-US" dirty="0" err="1"/>
+              <a:t>Végzettségek</a:t>
+            </a:r>
+            <a:r>
+              <a:rPr lang="en-US" dirty="0"/>
+              <a:t>)! </a:t>
+            </a:r>
+            <a:endParaRPr lang="hu-HU" dirty="0" smtClean="0"/>
+          </a:p>
+          <a:p>
+            <a:endParaRPr lang="hu-HU" dirty="0"/>
+          </a:p>
+          <a:p>
+            <a:pPr marL="0" indent="0">
+              <a:lnSpc>
+                <a:spcPct val="110000"/>
+              </a:lnSpc>
+              <a:buNone/>
+            </a:pPr>
+            <a:r>
+              <a:rPr lang="en-US" i="1" dirty="0">
+                <a:latin typeface="Bahnschrift Light" panose="020B0502040204020203" pitchFamily="34" charset="0"/>
+              </a:rPr>
+              <a:t>for $s in doc("/</a:t>
+            </a:r>
+            <a:r>
+              <a:rPr lang="en-US" i="1" dirty="0" err="1">
+                <a:latin typeface="Bahnschrift Light" panose="020B0502040204020203" pitchFamily="34" charset="0"/>
+              </a:rPr>
+              <a:t>db</a:t>
+            </a:r>
+            <a:r>
+              <a:rPr lang="en-US" i="1" dirty="0">
+                <a:latin typeface="Bahnschrift Light" panose="020B0502040204020203" pitchFamily="34" charset="0"/>
+              </a:rPr>
+              <a:t>/etterem.xml")//</a:t>
+            </a:r>
+            <a:r>
+              <a:rPr lang="en-US" i="1" dirty="0" err="1" smtClean="0">
+                <a:latin typeface="Bahnschrift Light" panose="020B0502040204020203" pitchFamily="34" charset="0"/>
+              </a:rPr>
+              <a:t>szakacs</a:t>
+            </a:r>
+            <a:r>
+              <a:rPr lang="hu-HU" i="1" dirty="0" smtClean="0">
+                <a:latin typeface="Bahnschrift Light" panose="020B0502040204020203" pitchFamily="34" charset="0"/>
+              </a:rPr>
+              <a:t/>
+            </a:r>
+            <a:br>
+              <a:rPr lang="hu-HU" i="1" dirty="0" smtClean="0">
+                <a:latin typeface="Bahnschrift Light" panose="020B0502040204020203" pitchFamily="34" charset="0"/>
+              </a:rPr>
+            </a:br>
+            <a:r>
+              <a:rPr lang="en-US" i="1" dirty="0" smtClean="0">
+                <a:latin typeface="Bahnschrift Light" panose="020B0502040204020203" pitchFamily="34" charset="0"/>
+              </a:rPr>
+              <a:t>where </a:t>
+            </a:r>
+            <a:r>
+              <a:rPr lang="en-US" i="1" dirty="0">
+                <a:latin typeface="Bahnschrift Light" panose="020B0502040204020203" pitchFamily="34" charset="0"/>
+              </a:rPr>
+              <a:t>$s/</a:t>
+            </a:r>
+            <a:r>
+              <a:rPr lang="en-US" i="1" dirty="0" err="1">
+                <a:latin typeface="Bahnschrift Light" panose="020B0502040204020203" pitchFamily="34" charset="0"/>
+              </a:rPr>
+              <a:t>vegzettseg</a:t>
+            </a:r>
+            <a:r>
+              <a:rPr lang="en-US" i="1" dirty="0">
+                <a:latin typeface="Bahnschrift Light" panose="020B0502040204020203" pitchFamily="34" charset="0"/>
+              </a:rPr>
+              <a:t> = "</a:t>
+            </a:r>
+            <a:r>
+              <a:rPr lang="en-US" i="1" dirty="0" err="1" smtClean="0">
+                <a:latin typeface="Bahnschrift Light" panose="020B0502040204020203" pitchFamily="34" charset="0"/>
+              </a:rPr>
+              <a:t>Szakközépiskola</a:t>
+            </a:r>
+            <a:r>
+              <a:rPr lang="hu-HU" i="1" dirty="0" smtClean="0">
+                <a:latin typeface="Bahnschrift Light" panose="020B0502040204020203" pitchFamily="34" charset="0"/>
+              </a:rPr>
+              <a:t>”</a:t>
+            </a:r>
+            <a:br>
+              <a:rPr lang="hu-HU" i="1" dirty="0" smtClean="0">
+                <a:latin typeface="Bahnschrift Light" panose="020B0502040204020203" pitchFamily="34" charset="0"/>
+              </a:rPr>
+            </a:br>
+            <a:r>
+              <a:rPr lang="en-US" i="1" dirty="0" smtClean="0">
+                <a:latin typeface="Bahnschrift Light" panose="020B0502040204020203" pitchFamily="34" charset="0"/>
+              </a:rPr>
+              <a:t>return</a:t>
+            </a:r>
+            <a:r>
+              <a:rPr lang="hu-HU" i="1" dirty="0" smtClean="0">
+                <a:latin typeface="Bahnschrift Light" panose="020B0502040204020203" pitchFamily="34" charset="0"/>
+              </a:rPr>
+              <a:t/>
+            </a:r>
+            <a:br>
+              <a:rPr lang="hu-HU" i="1" dirty="0" smtClean="0">
+                <a:latin typeface="Bahnschrift Light" panose="020B0502040204020203" pitchFamily="34" charset="0"/>
+              </a:rPr>
+            </a:br>
+            <a:r>
+              <a:rPr lang="en-US" i="1" dirty="0" smtClean="0">
+                <a:latin typeface="Bahnschrift Light" panose="020B0502040204020203" pitchFamily="34" charset="0"/>
+              </a:rPr>
+              <a:t>&lt;</a:t>
+            </a:r>
+            <a:r>
+              <a:rPr lang="en-US" i="1" dirty="0" err="1" smtClean="0">
+                <a:latin typeface="Bahnschrift Light" panose="020B0502040204020203" pitchFamily="34" charset="0"/>
+              </a:rPr>
+              <a:t>szakacs</a:t>
+            </a:r>
+            <a:r>
+              <a:rPr lang="en-US" i="1" dirty="0">
+                <a:latin typeface="Bahnschrift Light" panose="020B0502040204020203" pitchFamily="34" charset="0"/>
+              </a:rPr>
+              <a:t>&gt;  &lt;</a:t>
+            </a:r>
+            <a:r>
+              <a:rPr lang="en-US" i="1" dirty="0" err="1">
+                <a:latin typeface="Bahnschrift Light" panose="020B0502040204020203" pitchFamily="34" charset="0"/>
+              </a:rPr>
+              <a:t>SzakacsID</a:t>
+            </a:r>
+            <a:r>
+              <a:rPr lang="en-US" i="1" dirty="0">
+                <a:latin typeface="Bahnschrift Light" panose="020B0502040204020203" pitchFamily="34" charset="0"/>
+              </a:rPr>
+              <a:t>&gt;{data($s/@id)}&lt;/</a:t>
+            </a:r>
+            <a:r>
+              <a:rPr lang="en-US" i="1" dirty="0" err="1">
+                <a:latin typeface="Bahnschrift Light" panose="020B0502040204020203" pitchFamily="34" charset="0"/>
+              </a:rPr>
+              <a:t>SzakacsID</a:t>
+            </a:r>
+            <a:r>
+              <a:rPr lang="en-US" i="1" dirty="0">
+                <a:latin typeface="Bahnschrift Light" panose="020B0502040204020203" pitchFamily="34" charset="0"/>
+              </a:rPr>
+              <a:t>&gt;  &lt;</a:t>
+            </a:r>
+            <a:r>
+              <a:rPr lang="en-US" i="1" dirty="0" err="1">
+                <a:latin typeface="Bahnschrift Light" panose="020B0502040204020203" pitchFamily="34" charset="0"/>
+              </a:rPr>
+              <a:t>Nev</a:t>
+            </a:r>
+            <a:r>
+              <a:rPr lang="en-US" i="1" dirty="0">
+                <a:latin typeface="Bahnschrift Light" panose="020B0502040204020203" pitchFamily="34" charset="0"/>
+              </a:rPr>
+              <a:t>&gt;{data($s/</a:t>
+            </a:r>
+            <a:r>
+              <a:rPr lang="en-US" i="1" dirty="0" err="1">
+                <a:latin typeface="Bahnschrift Light" panose="020B0502040204020203" pitchFamily="34" charset="0"/>
+              </a:rPr>
+              <a:t>nev</a:t>
+            </a:r>
+            <a:r>
+              <a:rPr lang="en-US" i="1" dirty="0">
+                <a:latin typeface="Bahnschrift Light" panose="020B0502040204020203" pitchFamily="34" charset="0"/>
+              </a:rPr>
+              <a:t>)}&lt;/</a:t>
+            </a:r>
+            <a:r>
+              <a:rPr lang="en-US" i="1" dirty="0" err="1">
+                <a:latin typeface="Bahnschrift Light" panose="020B0502040204020203" pitchFamily="34" charset="0"/>
+              </a:rPr>
+              <a:t>Nev</a:t>
+            </a:r>
+            <a:r>
+              <a:rPr lang="en-US" i="1" dirty="0">
+                <a:latin typeface="Bahnschrift Light" panose="020B0502040204020203" pitchFamily="34" charset="0"/>
+              </a:rPr>
+              <a:t>&gt;  &lt;</a:t>
+            </a:r>
+            <a:r>
+              <a:rPr lang="en-US" i="1" dirty="0" err="1">
+                <a:latin typeface="Bahnschrift Light" panose="020B0502040204020203" pitchFamily="34" charset="0"/>
+              </a:rPr>
+              <a:t>Reszleg</a:t>
+            </a:r>
+            <a:r>
+              <a:rPr lang="en-US" i="1" dirty="0">
+                <a:latin typeface="Bahnschrift Light" panose="020B0502040204020203" pitchFamily="34" charset="0"/>
+              </a:rPr>
+              <a:t>&gt;{data($s/</a:t>
+            </a:r>
+            <a:r>
+              <a:rPr lang="en-US" i="1" dirty="0" err="1">
+                <a:latin typeface="Bahnschrift Light" panose="020B0502040204020203" pitchFamily="34" charset="0"/>
+              </a:rPr>
+              <a:t>reszleg</a:t>
+            </a:r>
+            <a:r>
+              <a:rPr lang="en-US" i="1" dirty="0">
+                <a:latin typeface="Bahnschrift Light" panose="020B0502040204020203" pitchFamily="34" charset="0"/>
+              </a:rPr>
+              <a:t>)}&lt;/</a:t>
+            </a:r>
+            <a:r>
+              <a:rPr lang="en-US" i="1" dirty="0" err="1">
+                <a:latin typeface="Bahnschrift Light" panose="020B0502040204020203" pitchFamily="34" charset="0"/>
+              </a:rPr>
+              <a:t>Reszleg</a:t>
+            </a:r>
+            <a:r>
+              <a:rPr lang="en-US" i="1" dirty="0">
+                <a:latin typeface="Bahnschrift Light" panose="020B0502040204020203" pitchFamily="34" charset="0"/>
+              </a:rPr>
+              <a:t>&gt;  &lt;</a:t>
+            </a:r>
+            <a:r>
+              <a:rPr lang="en-US" i="1" dirty="0" err="1">
+                <a:latin typeface="Bahnschrift Light" panose="020B0502040204020203" pitchFamily="34" charset="0"/>
+              </a:rPr>
+              <a:t>Vegzettsegek</a:t>
+            </a:r>
+            <a:r>
+              <a:rPr lang="en-US" i="1" dirty="0">
+                <a:latin typeface="Bahnschrift Light" panose="020B0502040204020203" pitchFamily="34" charset="0"/>
+              </a:rPr>
+              <a:t>&gt;{$s/</a:t>
+            </a:r>
+            <a:r>
+              <a:rPr lang="en-US" i="1" dirty="0" err="1">
+                <a:latin typeface="Bahnschrift Light" panose="020B0502040204020203" pitchFamily="34" charset="0"/>
+              </a:rPr>
+              <a:t>vegzettseg</a:t>
+            </a:r>
+            <a:r>
+              <a:rPr lang="en-US" i="1" dirty="0">
+                <a:latin typeface="Bahnschrift Light" panose="020B0502040204020203" pitchFamily="34" charset="0"/>
+              </a:rPr>
+              <a:t>}&lt;/</a:t>
+            </a:r>
+            <a:r>
+              <a:rPr lang="en-US" i="1" dirty="0" err="1">
+                <a:latin typeface="Bahnschrift Light" panose="020B0502040204020203" pitchFamily="34" charset="0"/>
+              </a:rPr>
+              <a:t>Vegzettsegek</a:t>
+            </a:r>
+            <a:r>
+              <a:rPr lang="en-US" i="1" dirty="0" smtClean="0">
+                <a:latin typeface="Bahnschrift Light" panose="020B0502040204020203" pitchFamily="34" charset="0"/>
+              </a:rPr>
+              <a:t>&gt;</a:t>
+            </a:r>
+            <a:r>
+              <a:rPr lang="hu-HU" i="1" dirty="0" smtClean="0">
+                <a:latin typeface="Bahnschrift Light" panose="020B0502040204020203" pitchFamily="34" charset="0"/>
+              </a:rPr>
+              <a:t/>
+            </a:r>
+            <a:br>
+              <a:rPr lang="hu-HU" i="1" dirty="0" smtClean="0">
+                <a:latin typeface="Bahnschrift Light" panose="020B0502040204020203" pitchFamily="34" charset="0"/>
+              </a:rPr>
+            </a:br>
+            <a:r>
+              <a:rPr lang="en-US" i="1" dirty="0" smtClean="0">
+                <a:latin typeface="Bahnschrift Light" panose="020B0502040204020203" pitchFamily="34" charset="0"/>
+              </a:rPr>
+              <a:t>&lt;/</a:t>
+            </a:r>
+            <a:r>
+              <a:rPr lang="en-US" i="1" dirty="0" err="1">
+                <a:latin typeface="Bahnschrift Light" panose="020B0502040204020203" pitchFamily="34" charset="0"/>
+              </a:rPr>
+              <a:t>szakacs</a:t>
+            </a:r>
+            <a:r>
+              <a:rPr lang="en-US" i="1" dirty="0">
+                <a:latin typeface="Bahnschrift Light" panose="020B0502040204020203" pitchFamily="34" charset="0"/>
+              </a:rPr>
+              <a:t>&gt;</a:t>
+            </a:r>
+          </a:p>
+        </p:txBody>
+      </p:sp>
+      <p:pic>
+        <p:nvPicPr>
+          <p:cNvPr id="4" name="Kép 3"/>
+          <p:cNvPicPr>
+            <a:picLocks noChangeAspect="1"/>
+          </p:cNvPicPr>
+          <p:nvPr/>
+        </p:nvPicPr>
+        <p:blipFill>
+          <a:blip r:embed="rId2"/>
+          <a:stretch>
+            <a:fillRect/>
+          </a:stretch>
+        </p:blipFill>
+        <p:spPr>
+          <a:xfrm>
+            <a:off x="6550603" y="624110"/>
+            <a:ext cx="5398741" cy="5674030"/>
+          </a:xfrm>
+          <a:prstGeom prst="rect">
+            <a:avLst/>
+          </a:prstGeom>
+        </p:spPr>
+      </p:pic>
+    </p:spTree>
+    <p:extLst>
+      <p:ext uri="{BB962C8B-B14F-4D97-AF65-F5344CB8AC3E}">
+        <p14:creationId xmlns:p14="http://schemas.microsoft.com/office/powerpoint/2010/main" val="2804187026"/>
+      </p:ext>
+    </p:extLst>
+  </p:cSld>
+  <p:clrMapOvr>
+    <a:masterClrMapping/>
+  </p:clrMapOvr>
+</p:sld>
+</file>
+
+<file path=ppt/slides/slide8.xml><?xml version="1.0" encoding="utf-8"?>
+<p:sld xmlns:a="http://schemas.openxmlformats.org/drawingml/2006/main" xmlns:r="http://schemas.openxmlformats.org/officeDocument/2006/relationships" xmlns:p="http://schemas.openxmlformats.org/presentationml/2006/main">
+  <p:cSld>
+    <p:spTree>
+      <p:nvGrpSpPr>
+        <p:cNvPr id="1" name=""/>
+        <p:cNvGrpSpPr/>
+        <p:nvPr/>
+      </p:nvGrpSpPr>
+      <p:grpSpPr>
+        <a:xfrm>
+          <a:off x="0" y="0"/>
+          <a:ext cx="0" cy="0"/>
+          <a:chOff x="0" y="0"/>
+          <a:chExt cx="0" cy="0"/>
+        </a:xfrm>
+      </p:grpSpPr>
+      <p:sp>
+        <p:nvSpPr>
+          <p:cNvPr id="2" name="Cím 1"/>
+          <p:cNvSpPr>
+            <a:spLocks noGrp="1"/>
+          </p:cNvSpPr>
+          <p:nvPr>
+            <p:ph type="title"/>
+          </p:nvPr>
+        </p:nvSpPr>
+        <p:spPr/>
+        <p:txBody>
+          <a:bodyPr/>
+          <a:lstStyle/>
+          <a:p>
+            <a:r>
+              <a:rPr lang="hu-HU" dirty="0" smtClean="0"/>
+              <a:t>3. feladat</a:t>
+            </a:r>
+            <a:endParaRPr lang="en-US" dirty="0"/>
+          </a:p>
+        </p:txBody>
+      </p:sp>
+      <p:pic>
+        <p:nvPicPr>
+          <p:cNvPr id="4" name="Tartalom helye 3"/>
+          <p:cNvPicPr>
+            <a:picLocks noGrp="1" noChangeAspect="1"/>
+          </p:cNvPicPr>
+          <p:nvPr>
+            <p:ph idx="1"/>
+          </p:nvPr>
+        </p:nvPicPr>
+        <p:blipFill>
+          <a:blip r:embed="rId2"/>
+          <a:stretch>
+            <a:fillRect/>
+          </a:stretch>
+        </p:blipFill>
+        <p:spPr>
+          <a:xfrm>
+            <a:off x="7044497" y="1264555"/>
+            <a:ext cx="4460115" cy="4741268"/>
+          </a:xfrm>
+          <a:prstGeom prst="rect">
+            <a:avLst/>
+          </a:prstGeom>
+        </p:spPr>
+      </p:pic>
+      <p:sp>
+        <p:nvSpPr>
+          <p:cNvPr id="6" name="Szövegdoboz 5"/>
+          <p:cNvSpPr txBox="1"/>
+          <p:nvPr/>
+        </p:nvSpPr>
+        <p:spPr>
+          <a:xfrm>
+            <a:off x="1633492" y="1905000"/>
+            <a:ext cx="5255580" cy="3793859"/>
+          </a:xfrm>
+          <a:prstGeom prst="rect">
+            <a:avLst/>
+          </a:prstGeom>
+          <a:noFill/>
+        </p:spPr>
+        <p:txBody>
+          <a:bodyPr wrap="square" rtlCol="0">
+            <a:spAutoFit/>
+          </a:bodyPr>
+          <a:lstStyle/>
+          <a:p>
+            <a:r>
+              <a:rPr lang="en-US" dirty="0" err="1"/>
+              <a:t>Kérdezze</a:t>
+            </a:r>
+            <a:r>
+              <a:rPr lang="en-US" dirty="0"/>
+              <a:t> le </a:t>
+            </a:r>
+            <a:r>
+              <a:rPr lang="en-US" dirty="0" err="1"/>
+              <a:t>azokat</a:t>
+            </a:r>
+            <a:r>
+              <a:rPr lang="en-US" dirty="0"/>
+              <a:t> </a:t>
+            </a:r>
+            <a:r>
+              <a:rPr lang="en-US" dirty="0" err="1"/>
+              <a:t>az</a:t>
+            </a:r>
+            <a:r>
+              <a:rPr lang="en-US" dirty="0"/>
+              <a:t> </a:t>
+            </a:r>
+            <a:r>
+              <a:rPr lang="en-US" dirty="0" err="1"/>
+              <a:t>éttermeket</a:t>
+            </a:r>
+            <a:r>
+              <a:rPr lang="en-US" dirty="0"/>
+              <a:t>, </a:t>
+            </a:r>
+            <a:r>
+              <a:rPr lang="en-US" dirty="0" err="1"/>
+              <a:t>amelyek</a:t>
+            </a:r>
+            <a:r>
+              <a:rPr lang="en-US" dirty="0"/>
+              <a:t> </a:t>
+            </a:r>
+            <a:r>
+              <a:rPr lang="en-US" dirty="0" err="1"/>
+              <a:t>öt</a:t>
+            </a:r>
+            <a:r>
+              <a:rPr lang="en-US" dirty="0"/>
+              <a:t> </a:t>
+            </a:r>
+            <a:r>
+              <a:rPr lang="en-US" dirty="0" err="1"/>
+              <a:t>csillagosak</a:t>
+            </a:r>
+            <a:r>
+              <a:rPr lang="en-US" dirty="0"/>
+              <a:t> (</a:t>
+            </a:r>
+            <a:r>
+              <a:rPr lang="en-US" dirty="0" err="1"/>
+              <a:t>ÉtteremID</a:t>
+            </a:r>
+            <a:r>
+              <a:rPr lang="en-US" dirty="0"/>
+              <a:t>, </a:t>
+            </a:r>
+            <a:r>
+              <a:rPr lang="en-US" dirty="0" err="1"/>
+              <a:t>Név</a:t>
+            </a:r>
+            <a:r>
+              <a:rPr lang="en-US" dirty="0"/>
+              <a:t>, </a:t>
+            </a:r>
+            <a:r>
+              <a:rPr lang="en-US" dirty="0" err="1"/>
+              <a:t>Cím</a:t>
+            </a:r>
+            <a:r>
+              <a:rPr lang="en-US" dirty="0"/>
+              <a:t>, </a:t>
+            </a:r>
+            <a:r>
+              <a:rPr lang="en-US" dirty="0" err="1"/>
+              <a:t>Csillag</a:t>
+            </a:r>
+            <a:r>
+              <a:rPr lang="en-US" dirty="0" smtClean="0"/>
+              <a:t>)!</a:t>
+            </a:r>
+            <a:endParaRPr lang="hu-HU" dirty="0" smtClean="0"/>
+          </a:p>
+          <a:p>
+            <a:endParaRPr lang="hu-HU" dirty="0"/>
+          </a:p>
+          <a:p>
+            <a:pPr defTabSz="457200">
+              <a:lnSpc>
+                <a:spcPct val="110000"/>
+              </a:lnSpc>
+              <a:spcBef>
+                <a:spcPts val="1000"/>
+              </a:spcBef>
+              <a:buClr>
+                <a:schemeClr val="accent1"/>
+              </a:buClr>
+            </a:pPr>
+            <a:r>
+              <a:rPr lang="en-US" i="1" dirty="0">
+                <a:solidFill>
+                  <a:schemeClr val="tx1">
+                    <a:lumMod val="75000"/>
+                    <a:lumOff val="25000"/>
+                  </a:schemeClr>
+                </a:solidFill>
+                <a:latin typeface="Bahnschrift Light" panose="020B0502040204020203" pitchFamily="34" charset="0"/>
+              </a:rPr>
+              <a:t>for $e in doc("/</a:t>
+            </a:r>
+            <a:r>
+              <a:rPr lang="en-US" i="1" dirty="0" err="1">
+                <a:solidFill>
+                  <a:schemeClr val="tx1">
+                    <a:lumMod val="75000"/>
+                    <a:lumOff val="25000"/>
+                  </a:schemeClr>
+                </a:solidFill>
+                <a:latin typeface="Bahnschrift Light" panose="020B0502040204020203" pitchFamily="34" charset="0"/>
+              </a:rPr>
+              <a:t>db</a:t>
+            </a:r>
+            <a:r>
+              <a:rPr lang="en-US" i="1" dirty="0">
+                <a:solidFill>
+                  <a:schemeClr val="tx1">
+                    <a:lumMod val="75000"/>
+                    <a:lumOff val="25000"/>
+                  </a:schemeClr>
+                </a:solidFill>
+                <a:latin typeface="Bahnschrift Light" panose="020B0502040204020203" pitchFamily="34" charset="0"/>
+              </a:rPr>
+              <a:t>/etterem.xml")//</a:t>
+            </a:r>
+            <a:r>
+              <a:rPr lang="en-US" i="1" dirty="0" err="1" smtClean="0">
+                <a:solidFill>
+                  <a:schemeClr val="tx1">
+                    <a:lumMod val="75000"/>
+                    <a:lumOff val="25000"/>
+                  </a:schemeClr>
+                </a:solidFill>
+                <a:latin typeface="Bahnschrift Light" panose="020B0502040204020203" pitchFamily="34" charset="0"/>
+              </a:rPr>
+              <a:t>etterem</a:t>
+            </a:r>
+            <a:r>
+              <a:rPr lang="hu-HU" i="1" dirty="0" smtClean="0">
+                <a:solidFill>
+                  <a:schemeClr val="tx1">
+                    <a:lumMod val="75000"/>
+                    <a:lumOff val="25000"/>
+                  </a:schemeClr>
+                </a:solidFill>
+                <a:latin typeface="Bahnschrift Light" panose="020B0502040204020203" pitchFamily="34" charset="0"/>
+              </a:rPr>
+              <a:t/>
+            </a:r>
+            <a:br>
+              <a:rPr lang="hu-HU" i="1" dirty="0" smtClean="0">
+                <a:solidFill>
+                  <a:schemeClr val="tx1">
+                    <a:lumMod val="75000"/>
+                    <a:lumOff val="25000"/>
+                  </a:schemeClr>
+                </a:solidFill>
+                <a:latin typeface="Bahnschrift Light" panose="020B0502040204020203" pitchFamily="34" charset="0"/>
+              </a:rPr>
+            </a:br>
+            <a:r>
+              <a:rPr lang="en-US" i="1" dirty="0" smtClean="0">
+                <a:solidFill>
+                  <a:schemeClr val="tx1">
+                    <a:lumMod val="75000"/>
+                    <a:lumOff val="25000"/>
+                  </a:schemeClr>
+                </a:solidFill>
+                <a:latin typeface="Bahnschrift Light" panose="020B0502040204020203" pitchFamily="34" charset="0"/>
+              </a:rPr>
+              <a:t>where </a:t>
+            </a:r>
+            <a:r>
+              <a:rPr lang="en-US" i="1" dirty="0">
+                <a:solidFill>
+                  <a:schemeClr val="tx1">
+                    <a:lumMod val="75000"/>
+                    <a:lumOff val="25000"/>
+                  </a:schemeClr>
+                </a:solidFill>
+                <a:latin typeface="Bahnschrift Light" panose="020B0502040204020203" pitchFamily="34" charset="0"/>
+              </a:rPr>
+              <a:t>$e/</a:t>
+            </a:r>
+            <a:r>
+              <a:rPr lang="en-US" i="1" dirty="0" err="1">
+                <a:solidFill>
+                  <a:schemeClr val="tx1">
+                    <a:lumMod val="75000"/>
+                    <a:lumOff val="25000"/>
+                  </a:schemeClr>
+                </a:solidFill>
+                <a:latin typeface="Bahnschrift Light" panose="020B0502040204020203" pitchFamily="34" charset="0"/>
+              </a:rPr>
+              <a:t>csillag</a:t>
+            </a:r>
+            <a:r>
+              <a:rPr lang="en-US" i="1" dirty="0">
+                <a:solidFill>
+                  <a:schemeClr val="tx1">
+                    <a:lumMod val="75000"/>
+                    <a:lumOff val="25000"/>
+                  </a:schemeClr>
+                </a:solidFill>
+                <a:latin typeface="Bahnschrift Light" panose="020B0502040204020203" pitchFamily="34" charset="0"/>
+              </a:rPr>
+              <a:t> = </a:t>
+            </a:r>
+            <a:r>
+              <a:rPr lang="en-US" i="1" dirty="0" smtClean="0">
+                <a:solidFill>
+                  <a:schemeClr val="tx1">
+                    <a:lumMod val="75000"/>
+                    <a:lumOff val="25000"/>
+                  </a:schemeClr>
+                </a:solidFill>
+                <a:latin typeface="Bahnschrift Light" panose="020B0502040204020203" pitchFamily="34" charset="0"/>
+              </a:rPr>
+              <a:t>5</a:t>
+            </a:r>
+            <a:r>
+              <a:rPr lang="hu-HU" i="1" dirty="0" smtClean="0">
+                <a:solidFill>
+                  <a:schemeClr val="tx1">
+                    <a:lumMod val="75000"/>
+                    <a:lumOff val="25000"/>
+                  </a:schemeClr>
+                </a:solidFill>
+                <a:latin typeface="Bahnschrift Light" panose="020B0502040204020203" pitchFamily="34" charset="0"/>
+              </a:rPr>
+              <a:t/>
+            </a:r>
+            <a:br>
+              <a:rPr lang="hu-HU" i="1" dirty="0" smtClean="0">
+                <a:solidFill>
+                  <a:schemeClr val="tx1">
+                    <a:lumMod val="75000"/>
+                    <a:lumOff val="25000"/>
+                  </a:schemeClr>
+                </a:solidFill>
+                <a:latin typeface="Bahnschrift Light" panose="020B0502040204020203" pitchFamily="34" charset="0"/>
+              </a:rPr>
+            </a:br>
+            <a:r>
+              <a:rPr lang="en-US" i="1" dirty="0" smtClean="0">
+                <a:solidFill>
+                  <a:schemeClr val="tx1">
+                    <a:lumMod val="75000"/>
+                    <a:lumOff val="25000"/>
+                  </a:schemeClr>
+                </a:solidFill>
+                <a:latin typeface="Bahnschrift Light" panose="020B0502040204020203" pitchFamily="34" charset="0"/>
+              </a:rPr>
+              <a:t>return</a:t>
+            </a:r>
+            <a:r>
+              <a:rPr lang="hu-HU" i="1" dirty="0" smtClean="0">
+                <a:solidFill>
+                  <a:schemeClr val="tx1">
+                    <a:lumMod val="75000"/>
+                    <a:lumOff val="25000"/>
+                  </a:schemeClr>
+                </a:solidFill>
+                <a:latin typeface="Bahnschrift Light" panose="020B0502040204020203" pitchFamily="34" charset="0"/>
+              </a:rPr>
+              <a:t/>
+            </a:r>
+            <a:br>
+              <a:rPr lang="hu-HU" i="1" dirty="0" smtClean="0">
+                <a:solidFill>
+                  <a:schemeClr val="tx1">
+                    <a:lumMod val="75000"/>
+                    <a:lumOff val="25000"/>
+                  </a:schemeClr>
+                </a:solidFill>
+                <a:latin typeface="Bahnschrift Light" panose="020B0502040204020203" pitchFamily="34" charset="0"/>
+              </a:rPr>
+            </a:br>
+            <a:r>
+              <a:rPr lang="en-US" i="1" dirty="0" smtClean="0">
+                <a:solidFill>
+                  <a:schemeClr val="tx1">
+                    <a:lumMod val="75000"/>
+                    <a:lumOff val="25000"/>
+                  </a:schemeClr>
+                </a:solidFill>
+                <a:latin typeface="Bahnschrift Light" panose="020B0502040204020203" pitchFamily="34" charset="0"/>
+              </a:rPr>
+              <a:t>&lt;</a:t>
+            </a:r>
+            <a:r>
+              <a:rPr lang="en-US" i="1" dirty="0" err="1" smtClean="0">
+                <a:solidFill>
+                  <a:schemeClr val="tx1">
+                    <a:lumMod val="75000"/>
+                    <a:lumOff val="25000"/>
+                  </a:schemeClr>
+                </a:solidFill>
+                <a:latin typeface="Bahnschrift Light" panose="020B0502040204020203" pitchFamily="34" charset="0"/>
+              </a:rPr>
+              <a:t>etterem</a:t>
+            </a:r>
+            <a:r>
+              <a:rPr lang="en-US" i="1" dirty="0">
+                <a:solidFill>
+                  <a:schemeClr val="tx1">
+                    <a:lumMod val="75000"/>
+                    <a:lumOff val="25000"/>
+                  </a:schemeClr>
+                </a:solidFill>
+                <a:latin typeface="Bahnschrift Light" panose="020B0502040204020203" pitchFamily="34" charset="0"/>
+              </a:rPr>
+              <a:t>&gt;  &lt;</a:t>
+            </a:r>
+            <a:r>
+              <a:rPr lang="en-US" i="1" dirty="0" err="1">
+                <a:solidFill>
+                  <a:schemeClr val="tx1">
+                    <a:lumMod val="75000"/>
+                    <a:lumOff val="25000"/>
+                  </a:schemeClr>
+                </a:solidFill>
+                <a:latin typeface="Bahnschrift Light" panose="020B0502040204020203" pitchFamily="34" charset="0"/>
+              </a:rPr>
+              <a:t>EtteremID</a:t>
+            </a:r>
+            <a:r>
+              <a:rPr lang="en-US" i="1" dirty="0">
+                <a:solidFill>
+                  <a:schemeClr val="tx1">
+                    <a:lumMod val="75000"/>
+                    <a:lumOff val="25000"/>
+                  </a:schemeClr>
+                </a:solidFill>
+                <a:latin typeface="Bahnschrift Light" panose="020B0502040204020203" pitchFamily="34" charset="0"/>
+              </a:rPr>
+              <a:t>&gt;{data($e/@id)}&lt;/</a:t>
+            </a:r>
+            <a:r>
+              <a:rPr lang="en-US" i="1" dirty="0" err="1">
+                <a:solidFill>
+                  <a:schemeClr val="tx1">
+                    <a:lumMod val="75000"/>
+                    <a:lumOff val="25000"/>
+                  </a:schemeClr>
+                </a:solidFill>
+                <a:latin typeface="Bahnschrift Light" panose="020B0502040204020203" pitchFamily="34" charset="0"/>
+              </a:rPr>
+              <a:t>EtteremID</a:t>
+            </a:r>
+            <a:r>
+              <a:rPr lang="en-US" i="1" dirty="0">
+                <a:solidFill>
+                  <a:schemeClr val="tx1">
+                    <a:lumMod val="75000"/>
+                    <a:lumOff val="25000"/>
+                  </a:schemeClr>
+                </a:solidFill>
+                <a:latin typeface="Bahnschrift Light" panose="020B0502040204020203" pitchFamily="34" charset="0"/>
+              </a:rPr>
+              <a:t>&gt;  &lt;</a:t>
+            </a:r>
+            <a:r>
+              <a:rPr lang="en-US" i="1" dirty="0" err="1">
+                <a:solidFill>
+                  <a:schemeClr val="tx1">
+                    <a:lumMod val="75000"/>
+                    <a:lumOff val="25000"/>
+                  </a:schemeClr>
+                </a:solidFill>
+                <a:latin typeface="Bahnschrift Light" panose="020B0502040204020203" pitchFamily="34" charset="0"/>
+              </a:rPr>
+              <a:t>Nev</a:t>
+            </a:r>
+            <a:r>
+              <a:rPr lang="en-US" i="1" dirty="0">
+                <a:solidFill>
+                  <a:schemeClr val="tx1">
+                    <a:lumMod val="75000"/>
+                    <a:lumOff val="25000"/>
+                  </a:schemeClr>
+                </a:solidFill>
+                <a:latin typeface="Bahnschrift Light" panose="020B0502040204020203" pitchFamily="34" charset="0"/>
+              </a:rPr>
+              <a:t>&gt;{data($e/</a:t>
+            </a:r>
+            <a:r>
+              <a:rPr lang="en-US" i="1" dirty="0" err="1">
+                <a:solidFill>
+                  <a:schemeClr val="tx1">
+                    <a:lumMod val="75000"/>
+                    <a:lumOff val="25000"/>
+                  </a:schemeClr>
+                </a:solidFill>
+                <a:latin typeface="Bahnschrift Light" panose="020B0502040204020203" pitchFamily="34" charset="0"/>
+              </a:rPr>
+              <a:t>nev</a:t>
+            </a:r>
+            <a:r>
+              <a:rPr lang="en-US" i="1" dirty="0">
+                <a:solidFill>
+                  <a:schemeClr val="tx1">
+                    <a:lumMod val="75000"/>
+                    <a:lumOff val="25000"/>
+                  </a:schemeClr>
+                </a:solidFill>
+                <a:latin typeface="Bahnschrift Light" panose="020B0502040204020203" pitchFamily="34" charset="0"/>
+              </a:rPr>
+              <a:t>)}&lt;/</a:t>
+            </a:r>
+            <a:r>
+              <a:rPr lang="en-US" i="1" dirty="0" err="1">
+                <a:solidFill>
+                  <a:schemeClr val="tx1">
+                    <a:lumMod val="75000"/>
+                    <a:lumOff val="25000"/>
+                  </a:schemeClr>
+                </a:solidFill>
+                <a:latin typeface="Bahnschrift Light" panose="020B0502040204020203" pitchFamily="34" charset="0"/>
+              </a:rPr>
+              <a:t>Nev</a:t>
+            </a:r>
+            <a:r>
+              <a:rPr lang="en-US" i="1" dirty="0">
+                <a:solidFill>
+                  <a:schemeClr val="tx1">
+                    <a:lumMod val="75000"/>
+                    <a:lumOff val="25000"/>
+                  </a:schemeClr>
+                </a:solidFill>
+                <a:latin typeface="Bahnschrift Light" panose="020B0502040204020203" pitchFamily="34" charset="0"/>
+              </a:rPr>
+              <a:t>&gt;  </a:t>
+            </a:r>
+            <a:r>
+              <a:rPr lang="hu-HU" i="1" dirty="0" smtClean="0">
+                <a:solidFill>
+                  <a:schemeClr val="tx1">
+                    <a:lumMod val="75000"/>
+                    <a:lumOff val="25000"/>
+                  </a:schemeClr>
+                </a:solidFill>
+                <a:latin typeface="Bahnschrift Light" panose="020B0502040204020203" pitchFamily="34" charset="0"/>
+              </a:rPr>
+              <a:t/>
+            </a:r>
+            <a:br>
+              <a:rPr lang="hu-HU" i="1" dirty="0" smtClean="0">
+                <a:solidFill>
+                  <a:schemeClr val="tx1">
+                    <a:lumMod val="75000"/>
+                    <a:lumOff val="25000"/>
+                  </a:schemeClr>
+                </a:solidFill>
+                <a:latin typeface="Bahnschrift Light" panose="020B0502040204020203" pitchFamily="34" charset="0"/>
+              </a:rPr>
+            </a:br>
+            <a:r>
+              <a:rPr lang="en-US" i="1" dirty="0" smtClean="0">
+                <a:solidFill>
+                  <a:schemeClr val="tx1">
+                    <a:lumMod val="75000"/>
+                    <a:lumOff val="25000"/>
+                  </a:schemeClr>
+                </a:solidFill>
+                <a:latin typeface="Bahnschrift Light" panose="020B0502040204020203" pitchFamily="34" charset="0"/>
+              </a:rPr>
+              <a:t>&lt;</a:t>
+            </a:r>
+            <a:r>
+              <a:rPr lang="en-US" i="1" dirty="0" err="1">
+                <a:solidFill>
+                  <a:schemeClr val="tx1">
+                    <a:lumMod val="75000"/>
+                    <a:lumOff val="25000"/>
+                  </a:schemeClr>
+                </a:solidFill>
+                <a:latin typeface="Bahnschrift Light" panose="020B0502040204020203" pitchFamily="34" charset="0"/>
+              </a:rPr>
+              <a:t>Cim</a:t>
+            </a:r>
+            <a:r>
+              <a:rPr lang="en-US" i="1" dirty="0">
+                <a:solidFill>
+                  <a:schemeClr val="tx1">
+                    <a:lumMod val="75000"/>
+                    <a:lumOff val="25000"/>
+                  </a:schemeClr>
+                </a:solidFill>
+                <a:latin typeface="Bahnschrift Light" panose="020B0502040204020203" pitchFamily="34" charset="0"/>
+              </a:rPr>
+              <a:t>&gt;{$e/</a:t>
+            </a:r>
+            <a:r>
+              <a:rPr lang="en-US" i="1" dirty="0" err="1">
+                <a:solidFill>
+                  <a:schemeClr val="tx1">
+                    <a:lumMod val="75000"/>
+                    <a:lumOff val="25000"/>
+                  </a:schemeClr>
+                </a:solidFill>
+                <a:latin typeface="Bahnschrift Light" panose="020B0502040204020203" pitchFamily="34" charset="0"/>
+              </a:rPr>
+              <a:t>cim</a:t>
+            </a:r>
+            <a:r>
+              <a:rPr lang="en-US" i="1" dirty="0">
+                <a:solidFill>
+                  <a:schemeClr val="tx1">
+                    <a:lumMod val="75000"/>
+                    <a:lumOff val="25000"/>
+                  </a:schemeClr>
+                </a:solidFill>
+                <a:latin typeface="Bahnschrift Light" panose="020B0502040204020203" pitchFamily="34" charset="0"/>
+              </a:rPr>
+              <a:t>}&lt;/</a:t>
+            </a:r>
+            <a:r>
+              <a:rPr lang="en-US" i="1" dirty="0" err="1">
+                <a:solidFill>
+                  <a:schemeClr val="tx1">
+                    <a:lumMod val="75000"/>
+                    <a:lumOff val="25000"/>
+                  </a:schemeClr>
+                </a:solidFill>
+                <a:latin typeface="Bahnschrift Light" panose="020B0502040204020203" pitchFamily="34" charset="0"/>
+              </a:rPr>
+              <a:t>Cim</a:t>
+            </a:r>
+            <a:r>
+              <a:rPr lang="en-US" i="1" dirty="0">
+                <a:solidFill>
+                  <a:schemeClr val="tx1">
+                    <a:lumMod val="75000"/>
+                    <a:lumOff val="25000"/>
+                  </a:schemeClr>
+                </a:solidFill>
+                <a:latin typeface="Bahnschrift Light" panose="020B0502040204020203" pitchFamily="34" charset="0"/>
+              </a:rPr>
+              <a:t>&gt;  &lt;</a:t>
+            </a:r>
+            <a:r>
+              <a:rPr lang="en-US" i="1" dirty="0" err="1">
+                <a:solidFill>
+                  <a:schemeClr val="tx1">
+                    <a:lumMod val="75000"/>
+                    <a:lumOff val="25000"/>
+                  </a:schemeClr>
+                </a:solidFill>
+                <a:latin typeface="Bahnschrift Light" panose="020B0502040204020203" pitchFamily="34" charset="0"/>
+              </a:rPr>
+              <a:t>Csillag</a:t>
+            </a:r>
+            <a:r>
+              <a:rPr lang="en-US" i="1" dirty="0">
+                <a:solidFill>
+                  <a:schemeClr val="tx1">
+                    <a:lumMod val="75000"/>
+                    <a:lumOff val="25000"/>
+                  </a:schemeClr>
+                </a:solidFill>
+                <a:latin typeface="Bahnschrift Light" panose="020B0502040204020203" pitchFamily="34" charset="0"/>
+              </a:rPr>
+              <a:t>&gt;{data($e/</a:t>
+            </a:r>
+            <a:r>
+              <a:rPr lang="en-US" i="1" dirty="0" err="1">
+                <a:solidFill>
+                  <a:schemeClr val="tx1">
+                    <a:lumMod val="75000"/>
+                    <a:lumOff val="25000"/>
+                  </a:schemeClr>
+                </a:solidFill>
+                <a:latin typeface="Bahnschrift Light" panose="020B0502040204020203" pitchFamily="34" charset="0"/>
+              </a:rPr>
+              <a:t>csillag</a:t>
+            </a:r>
+            <a:r>
+              <a:rPr lang="en-US" i="1" dirty="0">
+                <a:solidFill>
+                  <a:schemeClr val="tx1">
+                    <a:lumMod val="75000"/>
+                    <a:lumOff val="25000"/>
+                  </a:schemeClr>
+                </a:solidFill>
+                <a:latin typeface="Bahnschrift Light" panose="020B0502040204020203" pitchFamily="34" charset="0"/>
+              </a:rPr>
+              <a:t>)}&lt;/</a:t>
+            </a:r>
+            <a:r>
+              <a:rPr lang="en-US" i="1" dirty="0" err="1">
+                <a:solidFill>
+                  <a:schemeClr val="tx1">
+                    <a:lumMod val="75000"/>
+                    <a:lumOff val="25000"/>
+                  </a:schemeClr>
+                </a:solidFill>
+                <a:latin typeface="Bahnschrift Light" panose="020B0502040204020203" pitchFamily="34" charset="0"/>
+              </a:rPr>
+              <a:t>Csillag</a:t>
+            </a:r>
+            <a:r>
+              <a:rPr lang="en-US" i="1" dirty="0" smtClean="0">
+                <a:solidFill>
+                  <a:schemeClr val="tx1">
+                    <a:lumMod val="75000"/>
+                    <a:lumOff val="25000"/>
+                  </a:schemeClr>
+                </a:solidFill>
+                <a:latin typeface="Bahnschrift Light" panose="020B0502040204020203" pitchFamily="34" charset="0"/>
+              </a:rPr>
+              <a:t>&gt;</a:t>
+            </a:r>
+            <a:r>
+              <a:rPr lang="hu-HU" i="1" dirty="0" smtClean="0">
+                <a:solidFill>
+                  <a:schemeClr val="tx1">
+                    <a:lumMod val="75000"/>
+                    <a:lumOff val="25000"/>
+                  </a:schemeClr>
+                </a:solidFill>
+                <a:latin typeface="Bahnschrift Light" panose="020B0502040204020203" pitchFamily="34" charset="0"/>
+              </a:rPr>
+              <a:t/>
+            </a:r>
+            <a:br>
+              <a:rPr lang="hu-HU" i="1" dirty="0" smtClean="0">
+                <a:solidFill>
+                  <a:schemeClr val="tx1">
+                    <a:lumMod val="75000"/>
+                    <a:lumOff val="25000"/>
+                  </a:schemeClr>
+                </a:solidFill>
+                <a:latin typeface="Bahnschrift Light" panose="020B0502040204020203" pitchFamily="34" charset="0"/>
+              </a:rPr>
+            </a:br>
+            <a:r>
+              <a:rPr lang="en-US" i="1" dirty="0" smtClean="0">
+                <a:solidFill>
+                  <a:schemeClr val="tx1">
+                    <a:lumMod val="75000"/>
+                    <a:lumOff val="25000"/>
+                  </a:schemeClr>
+                </a:solidFill>
+                <a:latin typeface="Bahnschrift Light" panose="020B0502040204020203" pitchFamily="34" charset="0"/>
+              </a:rPr>
+              <a:t>&lt;/</a:t>
+            </a:r>
+            <a:r>
+              <a:rPr lang="en-US" i="1" dirty="0" err="1">
+                <a:solidFill>
+                  <a:schemeClr val="tx1">
+                    <a:lumMod val="75000"/>
+                    <a:lumOff val="25000"/>
+                  </a:schemeClr>
+                </a:solidFill>
+                <a:latin typeface="Bahnschrift Light" panose="020B0502040204020203" pitchFamily="34" charset="0"/>
+              </a:rPr>
+              <a:t>etterem</a:t>
+            </a:r>
+            <a:r>
+              <a:rPr lang="en-US" i="1" dirty="0">
+                <a:solidFill>
+                  <a:schemeClr val="tx1">
+                    <a:lumMod val="75000"/>
+                    <a:lumOff val="25000"/>
+                  </a:schemeClr>
+                </a:solidFill>
+                <a:latin typeface="Bahnschrift Light" panose="020B0502040204020203" pitchFamily="34" charset="0"/>
+              </a:rPr>
+              <a:t>&gt;</a:t>
+            </a:r>
+          </a:p>
+        </p:txBody>
+      </p:sp>
+    </p:spTree>
+    <p:extLst>
+      <p:ext uri="{BB962C8B-B14F-4D97-AF65-F5344CB8AC3E}">
+        <p14:creationId xmlns:p14="http://schemas.microsoft.com/office/powerpoint/2010/main" val="1366501508"/>
+      </p:ext>
+    </p:extLst>
+  </p:cSld>
+  <p:clrMapOvr>
+    <a:masterClrMapping/>
+  </p:clrMapOvr>
+</p:sld>
+</file>
+
+<file path=ppt/slides/slide9.xml><?xml version="1.0" encoding="utf-8"?>
+<p:sld xmlns:a="http://schemas.openxmlformats.org/drawingml/2006/main" xmlns:r="http://schemas.openxmlformats.org/officeDocument/2006/relationships" xmlns:p="http://schemas.openxmlformats.org/presentationml/2006/main">
+  <p:cSld>
+    <p:spTree>
+      <p:nvGrpSpPr>
+        <p:cNvPr id="1" name=""/>
+        <p:cNvGrpSpPr/>
+        <p:nvPr/>
+      </p:nvGrpSpPr>
+      <p:grpSpPr>
+        <a:xfrm>
+          <a:off x="0" y="0"/>
+          <a:ext cx="0" cy="0"/>
+          <a:chOff x="0" y="0"/>
+          <a:chExt cx="0" cy="0"/>
+        </a:xfrm>
+      </p:grpSpPr>
+      <p:sp>
+        <p:nvSpPr>
+          <p:cNvPr id="2" name="Cím 1"/>
+          <p:cNvSpPr>
+            <a:spLocks noGrp="1"/>
+          </p:cNvSpPr>
+          <p:nvPr>
+            <p:ph type="title"/>
+          </p:nvPr>
+        </p:nvSpPr>
+        <p:spPr/>
+        <p:txBody>
+          <a:bodyPr/>
+          <a:lstStyle/>
+          <a:p>
+            <a:r>
+              <a:rPr lang="hu-HU" dirty="0" smtClean="0"/>
+              <a:t>4. Feladat</a:t>
+            </a:r>
+            <a:endParaRPr lang="en-US" dirty="0"/>
+          </a:p>
+        </p:txBody>
+      </p:sp>
+      <p:sp>
+        <p:nvSpPr>
+          <p:cNvPr id="3" name="Tartalom helye 2"/>
+          <p:cNvSpPr>
+            <a:spLocks noGrp="1"/>
+          </p:cNvSpPr>
+          <p:nvPr>
+            <p:ph idx="1"/>
+          </p:nvPr>
+        </p:nvSpPr>
+        <p:spPr>
+          <a:xfrm>
+            <a:off x="298773" y="2002655"/>
+            <a:ext cx="6909894" cy="3777622"/>
+          </a:xfrm>
+        </p:spPr>
+        <p:txBody>
+          <a:bodyPr>
+            <a:normAutofit/>
+          </a:bodyPr>
+          <a:lstStyle/>
+          <a:p>
+            <a:r>
+              <a:rPr lang="hu-HU" dirty="0"/>
+              <a:t>Kérdezze le azokat a gyakornokokat, akik délutánra be </a:t>
+            </a:r>
+            <a:r>
+              <a:rPr lang="hu-HU" dirty="0" smtClean="0"/>
+              <a:t>vannak </a:t>
+            </a:r>
+            <a:r>
+              <a:rPr lang="hu-HU" dirty="0"/>
+              <a:t>osztva (</a:t>
+            </a:r>
+            <a:r>
+              <a:rPr lang="hu-HU" dirty="0" err="1"/>
+              <a:t>GyakornokID</a:t>
+            </a:r>
+            <a:r>
+              <a:rPr lang="hu-HU" dirty="0"/>
+              <a:t>, Név, Gyakorlat kezdete, Műszak)! </a:t>
+            </a:r>
+            <a:endParaRPr lang="hu-HU" dirty="0" smtClean="0"/>
+          </a:p>
+          <a:p>
+            <a:pPr marL="400050" lvl="1" indent="0">
+              <a:lnSpc>
+                <a:spcPct val="110000"/>
+              </a:lnSpc>
+              <a:buNone/>
+            </a:pPr>
+            <a:r>
+              <a:rPr lang="en-US" i="1" dirty="0">
+                <a:latin typeface="Bahnschrift Light" panose="020B0502040204020203" pitchFamily="34" charset="0"/>
+              </a:rPr>
+              <a:t>for $g in doc("/</a:t>
+            </a:r>
+            <a:r>
+              <a:rPr lang="en-US" i="1" dirty="0" err="1">
+                <a:latin typeface="Bahnschrift Light" panose="020B0502040204020203" pitchFamily="34" charset="0"/>
+              </a:rPr>
+              <a:t>db</a:t>
+            </a:r>
+            <a:r>
+              <a:rPr lang="en-US" i="1" dirty="0">
+                <a:latin typeface="Bahnschrift Light" panose="020B0502040204020203" pitchFamily="34" charset="0"/>
+              </a:rPr>
+              <a:t>/etterem.xml")//</a:t>
+            </a:r>
+            <a:r>
+              <a:rPr lang="en-US" i="1" dirty="0" err="1">
+                <a:latin typeface="Bahnschrift Light" panose="020B0502040204020203" pitchFamily="34" charset="0"/>
+              </a:rPr>
+              <a:t>gyakornokwhere</a:t>
+            </a:r>
+            <a:r>
+              <a:rPr lang="en-US" i="1" dirty="0">
+                <a:latin typeface="Bahnschrift Light" panose="020B0502040204020203" pitchFamily="34" charset="0"/>
+              </a:rPr>
+              <a:t> </a:t>
+            </a:r>
+            <a:r>
+              <a:rPr lang="hu-HU" i="1" dirty="0" smtClean="0">
+                <a:latin typeface="Bahnschrift Light" panose="020B0502040204020203" pitchFamily="34" charset="0"/>
+              </a:rPr>
+              <a:t/>
+            </a:r>
+            <a:br>
+              <a:rPr lang="hu-HU" i="1" dirty="0" smtClean="0">
+                <a:latin typeface="Bahnschrift Light" panose="020B0502040204020203" pitchFamily="34" charset="0"/>
+              </a:rPr>
+            </a:br>
+            <a:r>
+              <a:rPr lang="en-US" i="1" dirty="0" smtClean="0">
+                <a:latin typeface="Bahnschrift Light" panose="020B0502040204020203" pitchFamily="34" charset="0"/>
+              </a:rPr>
+              <a:t>$g/</a:t>
+            </a:r>
+            <a:r>
+              <a:rPr lang="en-US" i="1" dirty="0" err="1" smtClean="0">
+                <a:latin typeface="Bahnschrift Light" panose="020B0502040204020203" pitchFamily="34" charset="0"/>
+              </a:rPr>
+              <a:t>muszak</a:t>
+            </a:r>
+            <a:r>
+              <a:rPr lang="en-US" i="1" dirty="0" smtClean="0">
+                <a:latin typeface="Bahnschrift Light" panose="020B0502040204020203" pitchFamily="34" charset="0"/>
+              </a:rPr>
+              <a:t> </a:t>
+            </a:r>
+            <a:r>
+              <a:rPr lang="en-US" i="1" dirty="0">
+                <a:latin typeface="Bahnschrift Light" panose="020B0502040204020203" pitchFamily="34" charset="0"/>
+              </a:rPr>
+              <a:t>= "</a:t>
+            </a:r>
+            <a:r>
+              <a:rPr lang="en-US" i="1" dirty="0" err="1" smtClean="0">
+                <a:latin typeface="Bahnschrift Light" panose="020B0502040204020203" pitchFamily="34" charset="0"/>
+              </a:rPr>
+              <a:t>délután</a:t>
+            </a:r>
+            <a:r>
+              <a:rPr lang="hu-HU" i="1" dirty="0" smtClean="0">
+                <a:latin typeface="Bahnschrift Light" panose="020B0502040204020203" pitchFamily="34" charset="0"/>
+              </a:rPr>
+              <a:t>”</a:t>
+            </a:r>
+            <a:r>
+              <a:rPr lang="hu-HU" i="1" dirty="0">
+                <a:latin typeface="Bahnschrift Light" panose="020B0502040204020203" pitchFamily="34" charset="0"/>
+              </a:rPr>
+              <a:t/>
+            </a:r>
+            <a:br>
+              <a:rPr lang="hu-HU" i="1" dirty="0">
+                <a:latin typeface="Bahnschrift Light" panose="020B0502040204020203" pitchFamily="34" charset="0"/>
+              </a:rPr>
+            </a:br>
+            <a:r>
+              <a:rPr lang="en-US" i="1" dirty="0" smtClean="0">
+                <a:latin typeface="Bahnschrift Light" panose="020B0502040204020203" pitchFamily="34" charset="0"/>
+              </a:rPr>
+              <a:t>return</a:t>
+            </a:r>
+            <a:r>
+              <a:rPr lang="hu-HU" i="1" dirty="0" smtClean="0">
+                <a:latin typeface="Bahnschrift Light" panose="020B0502040204020203" pitchFamily="34" charset="0"/>
+              </a:rPr>
+              <a:t/>
+            </a:r>
+            <a:br>
+              <a:rPr lang="hu-HU" i="1" dirty="0" smtClean="0">
+                <a:latin typeface="Bahnschrift Light" panose="020B0502040204020203" pitchFamily="34" charset="0"/>
+              </a:rPr>
+            </a:br>
+            <a:r>
+              <a:rPr lang="en-US" i="1" dirty="0" smtClean="0">
+                <a:latin typeface="Bahnschrift Light" panose="020B0502040204020203" pitchFamily="34" charset="0"/>
+              </a:rPr>
+              <a:t>&lt;</a:t>
+            </a:r>
+            <a:r>
+              <a:rPr lang="en-US" i="1" dirty="0" err="1" smtClean="0">
+                <a:latin typeface="Bahnschrift Light" panose="020B0502040204020203" pitchFamily="34" charset="0"/>
+              </a:rPr>
+              <a:t>gyakornok</a:t>
+            </a:r>
+            <a:r>
+              <a:rPr lang="en-US" i="1" dirty="0">
+                <a:latin typeface="Bahnschrift Light" panose="020B0502040204020203" pitchFamily="34" charset="0"/>
+              </a:rPr>
+              <a:t>&gt;  </a:t>
+            </a:r>
+            <a:r>
+              <a:rPr lang="hu-HU" i="1" dirty="0" smtClean="0">
+                <a:latin typeface="Bahnschrift Light" panose="020B0502040204020203" pitchFamily="34" charset="0"/>
+              </a:rPr>
+              <a:t/>
+            </a:r>
+            <a:br>
+              <a:rPr lang="hu-HU" i="1" dirty="0" smtClean="0">
+                <a:latin typeface="Bahnschrift Light" panose="020B0502040204020203" pitchFamily="34" charset="0"/>
+              </a:rPr>
+            </a:br>
+            <a:r>
+              <a:rPr lang="en-US" i="1" dirty="0" smtClean="0">
+                <a:latin typeface="Bahnschrift Light" panose="020B0502040204020203" pitchFamily="34" charset="0"/>
+              </a:rPr>
+              <a:t>&lt;</a:t>
+            </a:r>
+            <a:r>
+              <a:rPr lang="en-US" i="1" dirty="0" err="1">
+                <a:latin typeface="Bahnschrift Light" panose="020B0502040204020203" pitchFamily="34" charset="0"/>
+              </a:rPr>
+              <a:t>GyakornokID</a:t>
+            </a:r>
+            <a:r>
+              <a:rPr lang="en-US" i="1" dirty="0">
+                <a:latin typeface="Bahnschrift Light" panose="020B0502040204020203" pitchFamily="34" charset="0"/>
+              </a:rPr>
+              <a:t>&gt;{data($g/@id)}&lt;/</a:t>
+            </a:r>
+            <a:r>
+              <a:rPr lang="en-US" i="1" dirty="0" err="1">
+                <a:latin typeface="Bahnschrift Light" panose="020B0502040204020203" pitchFamily="34" charset="0"/>
+              </a:rPr>
+              <a:t>GyakornokID</a:t>
+            </a:r>
+            <a:r>
+              <a:rPr lang="en-US" i="1" dirty="0">
+                <a:latin typeface="Bahnschrift Light" panose="020B0502040204020203" pitchFamily="34" charset="0"/>
+              </a:rPr>
+              <a:t>&gt;  &lt;</a:t>
+            </a:r>
+            <a:r>
+              <a:rPr lang="en-US" i="1" dirty="0" err="1">
+                <a:latin typeface="Bahnschrift Light" panose="020B0502040204020203" pitchFamily="34" charset="0"/>
+              </a:rPr>
+              <a:t>Nev</a:t>
+            </a:r>
+            <a:r>
+              <a:rPr lang="en-US" i="1" dirty="0">
+                <a:latin typeface="Bahnschrift Light" panose="020B0502040204020203" pitchFamily="34" charset="0"/>
+              </a:rPr>
+              <a:t>&gt;{data($g/</a:t>
+            </a:r>
+            <a:r>
+              <a:rPr lang="en-US" i="1" dirty="0" err="1">
+                <a:latin typeface="Bahnschrift Light" panose="020B0502040204020203" pitchFamily="34" charset="0"/>
+              </a:rPr>
+              <a:t>nev</a:t>
+            </a:r>
+            <a:r>
+              <a:rPr lang="en-US" i="1" dirty="0">
+                <a:latin typeface="Bahnschrift Light" panose="020B0502040204020203" pitchFamily="34" charset="0"/>
+              </a:rPr>
+              <a:t>)}&lt;/</a:t>
+            </a:r>
+            <a:r>
+              <a:rPr lang="en-US" i="1" dirty="0" err="1">
+                <a:latin typeface="Bahnschrift Light" panose="020B0502040204020203" pitchFamily="34" charset="0"/>
+              </a:rPr>
+              <a:t>Nev</a:t>
+            </a:r>
+            <a:r>
+              <a:rPr lang="en-US" i="1" dirty="0">
+                <a:latin typeface="Bahnschrift Light" panose="020B0502040204020203" pitchFamily="34" charset="0"/>
+              </a:rPr>
+              <a:t>&gt;  &lt;</a:t>
+            </a:r>
+            <a:r>
+              <a:rPr lang="en-US" i="1" dirty="0" err="1">
+                <a:latin typeface="Bahnschrift Light" panose="020B0502040204020203" pitchFamily="34" charset="0"/>
+              </a:rPr>
+              <a:t>GyakorlatKezdete</a:t>
+            </a:r>
+            <a:r>
+              <a:rPr lang="en-US" i="1" dirty="0">
+                <a:latin typeface="Bahnschrift Light" panose="020B0502040204020203" pitchFamily="34" charset="0"/>
+              </a:rPr>
+              <a:t>&gt;{data($g/</a:t>
+            </a:r>
+            <a:r>
+              <a:rPr lang="en-US" i="1" dirty="0" err="1">
+                <a:latin typeface="Bahnschrift Light" panose="020B0502040204020203" pitchFamily="34" charset="0"/>
+              </a:rPr>
+              <a:t>gyakorlat</a:t>
+            </a:r>
+            <a:r>
+              <a:rPr lang="en-US" i="1" dirty="0">
+                <a:latin typeface="Bahnschrift Light" panose="020B0502040204020203" pitchFamily="34" charset="0"/>
+              </a:rPr>
+              <a:t>/</a:t>
+            </a:r>
+            <a:r>
+              <a:rPr lang="en-US" i="1" dirty="0" err="1">
+                <a:latin typeface="Bahnschrift Light" panose="020B0502040204020203" pitchFamily="34" charset="0"/>
+              </a:rPr>
+              <a:t>kezdete</a:t>
+            </a:r>
+            <a:r>
+              <a:rPr lang="en-US" i="1" dirty="0" smtClean="0">
+                <a:latin typeface="Bahnschrift Light" panose="020B0502040204020203" pitchFamily="34" charset="0"/>
+              </a:rPr>
+              <a:t>)}</a:t>
+            </a:r>
+            <a:r>
+              <a:rPr lang="hu-HU" i="1" dirty="0" smtClean="0">
+                <a:latin typeface="Bahnschrift Light" panose="020B0502040204020203" pitchFamily="34" charset="0"/>
+              </a:rPr>
+              <a:t/>
+            </a:r>
+            <a:br>
+              <a:rPr lang="hu-HU" i="1" dirty="0" smtClean="0">
+                <a:latin typeface="Bahnschrift Light" panose="020B0502040204020203" pitchFamily="34" charset="0"/>
+              </a:rPr>
+            </a:br>
+            <a:r>
+              <a:rPr lang="en-US" i="1" dirty="0" smtClean="0">
+                <a:latin typeface="Bahnschrift Light" panose="020B0502040204020203" pitchFamily="34" charset="0"/>
+              </a:rPr>
+              <a:t>&lt;/</a:t>
+            </a:r>
+            <a:r>
+              <a:rPr lang="en-US" i="1" dirty="0" err="1">
+                <a:latin typeface="Bahnschrift Light" panose="020B0502040204020203" pitchFamily="34" charset="0"/>
+              </a:rPr>
+              <a:t>GyakorlatKezdete</a:t>
+            </a:r>
+            <a:r>
+              <a:rPr lang="en-US" i="1" dirty="0">
+                <a:latin typeface="Bahnschrift Light" panose="020B0502040204020203" pitchFamily="34" charset="0"/>
+              </a:rPr>
+              <a:t>&gt; </a:t>
+            </a:r>
+            <a:r>
+              <a:rPr lang="hu-HU" i="1" dirty="0" smtClean="0">
+                <a:latin typeface="Bahnschrift Light" panose="020B0502040204020203" pitchFamily="34" charset="0"/>
+              </a:rPr>
+              <a:t/>
+            </a:r>
+            <a:br>
+              <a:rPr lang="hu-HU" i="1" dirty="0" smtClean="0">
+                <a:latin typeface="Bahnschrift Light" panose="020B0502040204020203" pitchFamily="34" charset="0"/>
+              </a:rPr>
+            </a:br>
+            <a:r>
+              <a:rPr lang="en-US" i="1" dirty="0" smtClean="0">
+                <a:latin typeface="Bahnschrift Light" panose="020B0502040204020203" pitchFamily="34" charset="0"/>
+              </a:rPr>
+              <a:t>&lt;</a:t>
+            </a:r>
+            <a:r>
+              <a:rPr lang="en-US" i="1" dirty="0" err="1">
+                <a:latin typeface="Bahnschrift Light" panose="020B0502040204020203" pitchFamily="34" charset="0"/>
+              </a:rPr>
+              <a:t>Muszak</a:t>
+            </a:r>
+            <a:r>
+              <a:rPr lang="en-US" i="1" dirty="0">
+                <a:latin typeface="Bahnschrift Light" panose="020B0502040204020203" pitchFamily="34" charset="0"/>
+              </a:rPr>
+              <a:t>&gt;{data($g/</a:t>
+            </a:r>
+            <a:r>
+              <a:rPr lang="en-US" i="1" dirty="0" err="1">
+                <a:latin typeface="Bahnschrift Light" panose="020B0502040204020203" pitchFamily="34" charset="0"/>
+              </a:rPr>
+              <a:t>muszak</a:t>
+            </a:r>
+            <a:r>
+              <a:rPr lang="en-US" i="1" dirty="0">
+                <a:latin typeface="Bahnschrift Light" panose="020B0502040204020203" pitchFamily="34" charset="0"/>
+              </a:rPr>
+              <a:t>)}&lt;/</a:t>
+            </a:r>
+            <a:r>
+              <a:rPr lang="en-US" i="1" dirty="0" err="1">
+                <a:latin typeface="Bahnschrift Light" panose="020B0502040204020203" pitchFamily="34" charset="0"/>
+              </a:rPr>
+              <a:t>Muszak</a:t>
+            </a:r>
+            <a:r>
+              <a:rPr lang="en-US" i="1" dirty="0" smtClean="0">
+                <a:latin typeface="Bahnschrift Light" panose="020B0502040204020203" pitchFamily="34" charset="0"/>
+              </a:rPr>
+              <a:t>&gt;&lt;</a:t>
+            </a:r>
+            <a:r>
+              <a:rPr lang="hu-HU" i="1" dirty="0" smtClean="0">
+                <a:latin typeface="Bahnschrift Light" panose="020B0502040204020203" pitchFamily="34" charset="0"/>
+              </a:rPr>
+              <a:t/>
+            </a:r>
+            <a:br>
+              <a:rPr lang="hu-HU" i="1" dirty="0" smtClean="0">
+                <a:latin typeface="Bahnschrift Light" panose="020B0502040204020203" pitchFamily="34" charset="0"/>
+              </a:rPr>
+            </a:br>
+            <a:r>
+              <a:rPr lang="en-US" i="1" dirty="0" smtClean="0">
+                <a:latin typeface="Bahnschrift Light" panose="020B0502040204020203" pitchFamily="34" charset="0"/>
+              </a:rPr>
+              <a:t>/</a:t>
+            </a:r>
+            <a:r>
+              <a:rPr lang="en-US" i="1" dirty="0" err="1">
+                <a:latin typeface="Bahnschrift Light" panose="020B0502040204020203" pitchFamily="34" charset="0"/>
+              </a:rPr>
+              <a:t>gyakornok</a:t>
+            </a:r>
+            <a:r>
+              <a:rPr lang="en-US" i="1" dirty="0">
+                <a:latin typeface="Bahnschrift Light" panose="020B0502040204020203" pitchFamily="34" charset="0"/>
+              </a:rPr>
+              <a:t>&gt;</a:t>
+            </a:r>
+          </a:p>
+        </p:txBody>
+      </p:sp>
+      <p:pic>
+        <p:nvPicPr>
+          <p:cNvPr id="4" name="Kép 3"/>
+          <p:cNvPicPr>
+            <a:picLocks noChangeAspect="1"/>
+          </p:cNvPicPr>
+          <p:nvPr/>
+        </p:nvPicPr>
+        <p:blipFill>
+          <a:blip r:embed="rId2"/>
+          <a:stretch>
+            <a:fillRect/>
+          </a:stretch>
+        </p:blipFill>
+        <p:spPr>
+          <a:xfrm>
+            <a:off x="6850277" y="1742003"/>
+            <a:ext cx="5224323" cy="4118172"/>
+          </a:xfrm>
+          <a:prstGeom prst="rect">
+            <a:avLst/>
+          </a:prstGeom>
+        </p:spPr>
+      </p:pic>
+    </p:spTree>
+    <p:extLst>
+      <p:ext uri="{BB962C8B-B14F-4D97-AF65-F5344CB8AC3E}">
+        <p14:creationId xmlns:p14="http://schemas.microsoft.com/office/powerpoint/2010/main" val="3085908072"/>
       </p:ext>
     </p:extLst>
   </p:cSld>

--- a/Y4O4X0_0318/Xquery.pptx
+++ b/Y4O4X0_0318/Xquery.pptx
@@ -309,7 +309,7 @@
           <a:p>
             <a:fld id="{9FFE2455-E091-4BD6-840D-D056C88E8DD0}" type="datetimeFigureOut">
               <a:rPr lang="en-US" smtClean="0"/>
-              <a:t>3/16/2026</a:t>
+              <a:t>3/17/2026</a:t>
             </a:fld>
             <a:endParaRPr lang="en-US"/>
           </a:p>
@@ -654,7 +654,7 @@
           <a:p>
             <a:fld id="{9FFE2455-E091-4BD6-840D-D056C88E8DD0}" type="datetimeFigureOut">
               <a:rPr lang="en-US" smtClean="0"/>
-              <a:t>3/16/2026</a:t>
+              <a:t>3/17/2026</a:t>
             </a:fld>
             <a:endParaRPr lang="en-US"/>
           </a:p>
@@ -1055,7 +1055,7 @@
           <a:p>
             <a:fld id="{9FFE2455-E091-4BD6-840D-D056C88E8DD0}" type="datetimeFigureOut">
               <a:rPr lang="en-US" smtClean="0"/>
-              <a:t>3/16/2026</a:t>
+              <a:t>3/17/2026</a:t>
             </a:fld>
             <a:endParaRPr lang="en-US"/>
           </a:p>
@@ -1391,7 +1391,7 @@
           <a:p>
             <a:fld id="{9FFE2455-E091-4BD6-840D-D056C88E8DD0}" type="datetimeFigureOut">
               <a:rPr lang="en-US" smtClean="0"/>
-              <a:t>3/16/2026</a:t>
+              <a:t>3/17/2026</a:t>
             </a:fld>
             <a:endParaRPr lang="en-US"/>
           </a:p>
@@ -1711,7 +1711,7 @@
           <a:p>
             <a:fld id="{9FFE2455-E091-4BD6-840D-D056C88E8DD0}" type="datetimeFigureOut">
               <a:rPr lang="en-US" smtClean="0"/>
-              <a:t>3/16/2026</a:t>
+              <a:t>3/17/2026</a:t>
             </a:fld>
             <a:endParaRPr lang="en-US"/>
           </a:p>
@@ -2107,7 +2107,7 @@
           <a:p>
             <a:fld id="{9FFE2455-E091-4BD6-840D-D056C88E8DD0}" type="datetimeFigureOut">
               <a:rPr lang="en-US" smtClean="0"/>
-              <a:t>3/16/2026</a:t>
+              <a:t>3/17/2026</a:t>
             </a:fld>
             <a:endParaRPr lang="en-US"/>
           </a:p>
@@ -2364,7 +2364,7 @@
           <a:p>
             <a:fld id="{9FFE2455-E091-4BD6-840D-D056C88E8DD0}" type="datetimeFigureOut">
               <a:rPr lang="en-US" smtClean="0"/>
-              <a:t>3/16/2026</a:t>
+              <a:t>3/17/2026</a:t>
             </a:fld>
             <a:endParaRPr lang="en-US"/>
           </a:p>
@@ -2626,7 +2626,7 @@
           <a:p>
             <a:fld id="{9FFE2455-E091-4BD6-840D-D056C88E8DD0}" type="datetimeFigureOut">
               <a:rPr lang="en-US" smtClean="0"/>
-              <a:t>3/16/2026</a:t>
+              <a:t>3/17/2026</a:t>
             </a:fld>
             <a:endParaRPr lang="en-US"/>
           </a:p>
@@ -2888,7 +2888,7 @@
           <a:p>
             <a:fld id="{9FFE2455-E091-4BD6-840D-D056C88E8DD0}" type="datetimeFigureOut">
               <a:rPr lang="en-US" smtClean="0"/>
-              <a:t>3/16/2026</a:t>
+              <a:t>3/17/2026</a:t>
             </a:fld>
             <a:endParaRPr lang="en-US"/>
           </a:p>
@@ -3217,7 +3217,7 @@
           <a:p>
             <a:fld id="{9FFE2455-E091-4BD6-840D-D056C88E8DD0}" type="datetimeFigureOut">
               <a:rPr lang="en-US" smtClean="0"/>
-              <a:t>3/16/2026</a:t>
+              <a:t>3/17/2026</a:t>
             </a:fld>
             <a:endParaRPr lang="en-US"/>
           </a:p>
@@ -3540,7 +3540,7 @@
           <a:p>
             <a:fld id="{9FFE2455-E091-4BD6-840D-D056C88E8DD0}" type="datetimeFigureOut">
               <a:rPr lang="en-US" smtClean="0"/>
-              <a:t>3/16/2026</a:t>
+              <a:t>3/17/2026</a:t>
             </a:fld>
             <a:endParaRPr lang="en-US"/>
           </a:p>
@@ -3997,7 +3997,7 @@
           <a:p>
             <a:fld id="{9FFE2455-E091-4BD6-840D-D056C88E8DD0}" type="datetimeFigureOut">
               <a:rPr lang="en-US" smtClean="0"/>
-              <a:t>3/16/2026</a:t>
+              <a:t>3/17/2026</a:t>
             </a:fld>
             <a:endParaRPr lang="en-US"/>
           </a:p>
@@ -4202,7 +4202,7 @@
           <a:p>
             <a:fld id="{9FFE2455-E091-4BD6-840D-D056C88E8DD0}" type="datetimeFigureOut">
               <a:rPr lang="en-US" smtClean="0"/>
-              <a:t>3/16/2026</a:t>
+              <a:t>3/17/2026</a:t>
             </a:fld>
             <a:endParaRPr lang="en-US"/>
           </a:p>
@@ -4379,7 +4379,7 @@
           <a:p>
             <a:fld id="{9FFE2455-E091-4BD6-840D-D056C88E8DD0}" type="datetimeFigureOut">
               <a:rPr lang="en-US" smtClean="0"/>
-              <a:t>3/16/2026</a:t>
+              <a:t>3/17/2026</a:t>
             </a:fld>
             <a:endParaRPr lang="en-US"/>
           </a:p>
@@ -4712,7 +4712,7 @@
           <a:p>
             <a:fld id="{9FFE2455-E091-4BD6-840D-D056C88E8DD0}" type="datetimeFigureOut">
               <a:rPr lang="en-US" smtClean="0"/>
-              <a:t>3/16/2026</a:t>
+              <a:t>3/17/2026</a:t>
             </a:fld>
             <a:endParaRPr lang="en-US"/>
           </a:p>
@@ -5057,7 +5057,7 @@
           <a:p>
             <a:fld id="{9FFE2455-E091-4BD6-840D-D056C88E8DD0}" type="datetimeFigureOut">
               <a:rPr lang="en-US" smtClean="0"/>
-              <a:t>3/16/2026</a:t>
+              <a:t>3/17/2026</a:t>
             </a:fld>
             <a:endParaRPr lang="en-US"/>
           </a:p>
@@ -7349,7 +7349,7 @@
           <a:p>
             <a:fld id="{9FFE2455-E091-4BD6-840D-D056C88E8DD0}" type="datetimeFigureOut">
               <a:rPr lang="en-US" smtClean="0"/>
-              <a:t>3/16/2026</a:t>
+              <a:t>3/17/2026</a:t>
             </a:fld>
             <a:endParaRPr lang="en-US"/>
           </a:p>
@@ -7974,15 +7974,15 @@
           <a:lstStyle/>
           <a:p>
             <a:r>
-              <a:rPr lang="hu-HU" dirty="0" smtClean="0"/>
-              <a:t>Használ </a:t>
-            </a:r>
-            <a:r>
-              <a:rPr lang="hu-HU" dirty="0" err="1" smtClean="0"/>
+              <a:rPr lang="hu-HU"/>
+              <a:t>Használt </a:t>
+            </a:r>
+            <a:r>
+              <a:rPr lang="hu-HU" dirty="0" err="1"/>
               <a:t>Xpath</a:t>
             </a:r>
             <a:r>
-              <a:rPr lang="hu-HU" dirty="0" smtClean="0"/>
+              <a:rPr lang="hu-HU" dirty="0"/>
               <a:t> kifejezések</a:t>
             </a:r>
             <a:endParaRPr lang="en-US" dirty="0"/>
@@ -9224,12 +9224,8 @@
               <a:t>Ú</a:t>
             </a:r>
             <a:r>
-              <a:rPr lang="en-US" dirty="0" smtClean="0"/>
-              <a:t>j </a:t>
-            </a:r>
-            <a:r>
               <a:rPr lang="en-US" dirty="0"/>
-              <a:t>XML </a:t>
+              <a:t>j XML </a:t>
             </a:r>
             <a:r>
               <a:rPr lang="en-US" b="1" dirty="0" err="1"/>
@@ -10396,11 +10392,11 @@
           <a:lstStyle/>
           <a:p>
             <a:r>
-              <a:rPr lang="hu-HU" dirty="0" smtClean="0"/>
+              <a:rPr lang="hu-HU" dirty="0"/>
               <a:t>1. Feladat</a:t>
             </a:r>
             <a:br>
-              <a:rPr lang="hu-HU" dirty="0" smtClean="0"/>
+              <a:rPr lang="hu-HU" dirty="0"/>
             </a:br>
             <a:endParaRPr lang="en-US" dirty="0"/>
           </a:p>
@@ -10427,11 +10423,11 @@
           <a:lstStyle/>
           <a:p>
             <a:r>
-              <a:rPr lang="en-US" dirty="0" err="1" smtClean="0"/>
+              <a:rPr lang="en-US" dirty="0" err="1"/>
               <a:t>Készítsen</a:t>
             </a:r>
             <a:r>
-              <a:rPr lang="en-US" dirty="0" smtClean="0"/>
+              <a:rPr lang="en-US" dirty="0"/>
               <a:t> </a:t>
             </a:r>
             <a:r>
@@ -10491,39 +10487,32 @@
               <a:t> </a:t>
             </a:r>
             <a:r>
-              <a:rPr lang="en-US" dirty="0" err="1" smtClean="0"/>
+              <a:rPr lang="en-US" dirty="0" err="1"/>
               <a:t>vendéget</a:t>
             </a:r>
             <a:r>
-              <a:rPr lang="hu-HU" dirty="0" smtClean="0"/>
+              <a:rPr lang="hu-HU" dirty="0"/>
               <a:t>:</a:t>
             </a:r>
-            <a:endParaRPr lang="hu-HU" dirty="0"/>
           </a:p>
           <a:p>
             <a:pPr marL="0" indent="0">
               <a:buNone/>
             </a:pPr>
-            <a:endParaRPr lang="hu-HU" dirty="0" smtClean="0"/>
+            <a:endParaRPr lang="hu-HU" dirty="0"/>
           </a:p>
           <a:p>
             <a:pPr marL="0" indent="0">
               <a:buNone/>
             </a:pPr>
             <a:r>
-              <a:rPr lang="en-US" i="1" dirty="0" smtClean="0">
-                <a:latin typeface="Bahnschrift Light" panose="020B0502040204020203" pitchFamily="34" charset="0"/>
-              </a:rPr>
-              <a:t>doc</a:t>
-            </a:r>
-            <a:r>
               <a:rPr lang="en-US" i="1" dirty="0">
                 <a:latin typeface="Bahnschrift Light" panose="020B0502040204020203" pitchFamily="34" charset="0"/>
               </a:rPr>
-              <a:t>("/</a:t>
-            </a:r>
-            <a:r>
-              <a:rPr lang="en-US" i="1" dirty="0" err="1" smtClean="0">
+              <a:t>doc("/</a:t>
+            </a:r>
+            <a:r>
+              <a:rPr lang="en-US" i="1" dirty="0" err="1">
                 <a:latin typeface="Bahnschrift Light" panose="020B0502040204020203" pitchFamily="34" charset="0"/>
               </a:rPr>
               <a:t>db</a:t>
@@ -10535,19 +10524,13 @@
               <a:t>/</a:t>
             </a:r>
             <a:r>
-              <a:rPr lang="en-US" i="1" dirty="0" smtClean="0">
-                <a:latin typeface="Bahnschrift Light" panose="020B0502040204020203" pitchFamily="34" charset="0"/>
-              </a:rPr>
-              <a:t>etterem.xml</a:t>
-            </a:r>
-            <a:r>
               <a:rPr lang="en-US" i="1" dirty="0">
                 <a:latin typeface="Bahnschrift Light" panose="020B0502040204020203" pitchFamily="34" charset="0"/>
               </a:rPr>
-              <a:t>")//</a:t>
-            </a:r>
-            <a:r>
-              <a:rPr lang="en-US" i="1" dirty="0" err="1" smtClean="0">
+              <a:t>etterem.xml")//</a:t>
+            </a:r>
+            <a:r>
+              <a:rPr lang="en-US" i="1" dirty="0" err="1">
                 <a:latin typeface="Bahnschrift Light" panose="020B0502040204020203" pitchFamily="34" charset="0"/>
               </a:rPr>
               <a:t>vendeg</a:t>
@@ -10628,7 +10611,7 @@
           <a:lstStyle/>
           <a:p>
             <a:r>
-              <a:rPr lang="hu-HU" dirty="0" smtClean="0"/>
+              <a:rPr lang="hu-HU" dirty="0"/>
               <a:t>2. Feladat</a:t>
             </a:r>
             <a:endParaRPr lang="en-US" dirty="0"/>
@@ -10745,7 +10728,7 @@
               <a:rPr lang="en-US" dirty="0"/>
               <a:t>)! </a:t>
             </a:r>
-            <a:endParaRPr lang="hu-HU" dirty="0" smtClean="0"/>
+            <a:endParaRPr lang="hu-HU" dirty="0"/>
           </a:p>
           <a:p>
             <a:endParaRPr lang="hu-HU" dirty="0"/>
@@ -10776,33 +10759,21 @@
               <a:t>/etterem.xml")//</a:t>
             </a:r>
             <a:r>
-              <a:rPr lang="en-US" i="1" dirty="0" err="1" smtClean="0">
+              <a:rPr lang="en-US" i="1" dirty="0" err="1">
                 <a:latin typeface="Bahnschrift Light" panose="020B0502040204020203" pitchFamily="34" charset="0"/>
               </a:rPr>
               <a:t>szakacs</a:t>
             </a:r>
-            <a:r>
-              <a:rPr lang="hu-HU" i="1" dirty="0" smtClean="0">
-                <a:latin typeface="Bahnschrift Light" panose="020B0502040204020203" pitchFamily="34" charset="0"/>
-              </a:rPr>
-              <a:t/>
-            </a:r>
             <a:br>
-              <a:rPr lang="hu-HU" i="1" dirty="0" smtClean="0">
+              <a:rPr lang="hu-HU" i="1" dirty="0">
                 <a:latin typeface="Bahnschrift Light" panose="020B0502040204020203" pitchFamily="34" charset="0"/>
               </a:rPr>
             </a:br>
             <a:r>
-              <a:rPr lang="en-US" i="1" dirty="0" smtClean="0">
-                <a:latin typeface="Bahnschrift Light" panose="020B0502040204020203" pitchFamily="34" charset="0"/>
-              </a:rPr>
-              <a:t>where </a:t>
-            </a:r>
-            <a:r>
               <a:rPr lang="en-US" i="1" dirty="0">
                 <a:latin typeface="Bahnschrift Light" panose="020B0502040204020203" pitchFamily="34" charset="0"/>
               </a:rPr>
-              <a:t>$s/</a:t>
+              <a:t>where $s/</a:t>
             </a:r>
             <a:r>
               <a:rPr lang="en-US" i="1" dirty="0" err="1">
@@ -10817,47 +10788,41 @@
               <a:t> = "</a:t>
             </a:r>
             <a:r>
-              <a:rPr lang="en-US" i="1" dirty="0" err="1" smtClean="0">
+              <a:rPr lang="en-US" i="1" dirty="0" err="1">
                 <a:latin typeface="Bahnschrift Light" panose="020B0502040204020203" pitchFamily="34" charset="0"/>
               </a:rPr>
               <a:t>Szakközépiskola</a:t>
             </a:r>
             <a:r>
-              <a:rPr lang="hu-HU" i="1" dirty="0" smtClean="0">
+              <a:rPr lang="hu-HU" i="1" dirty="0">
                 <a:latin typeface="Bahnschrift Light" panose="020B0502040204020203" pitchFamily="34" charset="0"/>
               </a:rPr>
               <a:t>”</a:t>
             </a:r>
             <a:br>
-              <a:rPr lang="hu-HU" i="1" dirty="0" smtClean="0">
+              <a:rPr lang="hu-HU" i="1" dirty="0">
                 <a:latin typeface="Bahnschrift Light" panose="020B0502040204020203" pitchFamily="34" charset="0"/>
               </a:rPr>
             </a:br>
             <a:r>
-              <a:rPr lang="en-US" i="1" dirty="0" smtClean="0">
+              <a:rPr lang="en-US" i="1" dirty="0">
                 <a:latin typeface="Bahnschrift Light" panose="020B0502040204020203" pitchFamily="34" charset="0"/>
               </a:rPr>
               <a:t>return</a:t>
             </a:r>
-            <a:r>
-              <a:rPr lang="hu-HU" i="1" dirty="0" smtClean="0">
-                <a:latin typeface="Bahnschrift Light" panose="020B0502040204020203" pitchFamily="34" charset="0"/>
-              </a:rPr>
-              <a:t/>
-            </a:r>
             <a:br>
-              <a:rPr lang="hu-HU" i="1" dirty="0" smtClean="0">
+              <a:rPr lang="hu-HU" i="1" dirty="0">
                 <a:latin typeface="Bahnschrift Light" panose="020B0502040204020203" pitchFamily="34" charset="0"/>
               </a:rPr>
             </a:br>
             <a:r>
-              <a:rPr lang="en-US" i="1" dirty="0" smtClean="0">
+              <a:rPr lang="en-US" i="1" dirty="0">
                 <a:latin typeface="Bahnschrift Light" panose="020B0502040204020203" pitchFamily="34" charset="0"/>
               </a:rPr>
               <a:t>&lt;</a:t>
             </a:r>
             <a:r>
-              <a:rPr lang="en-US" i="1" dirty="0" err="1" smtClean="0">
+              <a:rPr lang="en-US" i="1" dirty="0" err="1">
                 <a:latin typeface="Bahnschrift Light" panose="020B0502040204020203" pitchFamily="34" charset="0"/>
               </a:rPr>
               <a:t>szakacs</a:t>
@@ -10995,24 +10960,18 @@
               <a:t>Vegzettsegek</a:t>
             </a:r>
             <a:r>
-              <a:rPr lang="en-US" i="1" dirty="0" smtClean="0">
+              <a:rPr lang="en-US" i="1" dirty="0">
                 <a:latin typeface="Bahnschrift Light" panose="020B0502040204020203" pitchFamily="34" charset="0"/>
               </a:rPr>
               <a:t>&gt;</a:t>
             </a:r>
-            <a:r>
-              <a:rPr lang="hu-HU" i="1" dirty="0" smtClean="0">
-                <a:latin typeface="Bahnschrift Light" panose="020B0502040204020203" pitchFamily="34" charset="0"/>
-              </a:rPr>
-              <a:t/>
-            </a:r>
             <a:br>
-              <a:rPr lang="hu-HU" i="1" dirty="0" smtClean="0">
+              <a:rPr lang="hu-HU" i="1" dirty="0">
                 <a:latin typeface="Bahnschrift Light" panose="020B0502040204020203" pitchFamily="34" charset="0"/>
               </a:rPr>
             </a:br>
             <a:r>
-              <a:rPr lang="en-US" i="1" dirty="0" smtClean="0">
+              <a:rPr lang="en-US" i="1" dirty="0">
                 <a:latin typeface="Bahnschrift Light" panose="020B0502040204020203" pitchFamily="34" charset="0"/>
               </a:rPr>
               <a:t>&lt;/</a:t>
@@ -11102,7 +11061,7 @@
           <a:lstStyle/>
           <a:p>
             <a:r>
-              <a:rPr lang="hu-HU" dirty="0" smtClean="0"/>
+              <a:rPr lang="hu-HU" dirty="0"/>
               <a:t>3. feladat</a:t>
             </a:r>
             <a:endParaRPr lang="en-US" dirty="0"/>
@@ -11242,10 +11201,10 @@
               <a:t>Csillag</a:t>
             </a:r>
             <a:r>
-              <a:rPr lang="en-US" dirty="0" smtClean="0"/>
+              <a:rPr lang="en-US" dirty="0"/>
               <a:t>)!</a:t>
             </a:r>
-            <a:endParaRPr lang="hu-HU" dirty="0" smtClean="0"/>
+            <a:endParaRPr lang="hu-HU" dirty="0"/>
           </a:p>
           <a:p>
             <a:endParaRPr lang="hu-HU" dirty="0"/>
@@ -11299,7 +11258,7 @@
               <a:t>/etterem.xml")//</a:t>
             </a:r>
             <a:r>
-              <a:rPr lang="en-US" i="1" dirty="0" err="1" smtClean="0">
+              <a:rPr lang="en-US" i="1" dirty="0" err="1">
                 <a:solidFill>
                   <a:schemeClr val="tx1">
                     <a:lumMod val="75000"/>
@@ -11310,8 +11269,8 @@
               </a:rPr>
               <a:t>etterem</a:t>
             </a:r>
-            <a:r>
-              <a:rPr lang="hu-HU" i="1" dirty="0" smtClean="0">
+            <a:br>
+              <a:rPr lang="hu-HU" i="1" dirty="0">
                 <a:solidFill>
                   <a:schemeClr val="tx1">
                     <a:lumMod val="75000"/>
@@ -11320,31 +11279,7 @@
                 </a:solidFill>
                 <a:latin typeface="Bahnschrift Light" panose="020B0502040204020203" pitchFamily="34" charset="0"/>
               </a:rPr>
-              <a:t/>
-            </a:r>
-            <a:br>
-              <a:rPr lang="hu-HU" i="1" dirty="0" smtClean="0">
-                <a:solidFill>
-                  <a:schemeClr val="tx1">
-                    <a:lumMod val="75000"/>
-                    <a:lumOff val="25000"/>
-                  </a:schemeClr>
-                </a:solidFill>
-                <a:latin typeface="Bahnschrift Light" panose="020B0502040204020203" pitchFamily="34" charset="0"/>
-              </a:rPr>
             </a:br>
-            <a:r>
-              <a:rPr lang="en-US" i="1" dirty="0" smtClean="0">
-                <a:solidFill>
-                  <a:schemeClr val="tx1">
-                    <a:lumMod val="75000"/>
-                    <a:lumOff val="25000"/>
-                  </a:schemeClr>
-                </a:solidFill>
-                <a:latin typeface="Bahnschrift Light" panose="020B0502040204020203" pitchFamily="34" charset="0"/>
-              </a:rPr>
-              <a:t>where </a:t>
-            </a:r>
             <a:r>
               <a:rPr lang="en-US" i="1" dirty="0">
                 <a:solidFill>
@@ -11355,7 +11290,7 @@
                 </a:solidFill>
                 <a:latin typeface="Bahnschrift Light" panose="020B0502040204020203" pitchFamily="34" charset="0"/>
               </a:rPr>
-              <a:t>$e/</a:t>
+              <a:t>where $e/</a:t>
             </a:r>
             <a:r>
               <a:rPr lang="en-US" i="1" dirty="0" err="1">
@@ -11379,10 +11314,10 @@
                 </a:solidFill>
                 <a:latin typeface="Bahnschrift Light" panose="020B0502040204020203" pitchFamily="34" charset="0"/>
               </a:rPr>
-              <a:t> = </a:t>
-            </a:r>
-            <a:r>
-              <a:rPr lang="en-US" i="1" dirty="0" smtClean="0">
+              <a:t> = 5</a:t>
+            </a:r>
+            <a:br>
+              <a:rPr lang="hu-HU" i="1" dirty="0">
                 <a:solidFill>
                   <a:schemeClr val="tx1">
                     <a:lumMod val="75000"/>
@@ -11391,90 +11326,7 @@
                 </a:solidFill>
                 <a:latin typeface="Bahnschrift Light" panose="020B0502040204020203" pitchFamily="34" charset="0"/>
               </a:rPr>
-              <a:t>5</a:t>
-            </a:r>
-            <a:r>
-              <a:rPr lang="hu-HU" i="1" dirty="0" smtClean="0">
-                <a:solidFill>
-                  <a:schemeClr val="tx1">
-                    <a:lumMod val="75000"/>
-                    <a:lumOff val="25000"/>
-                  </a:schemeClr>
-                </a:solidFill>
-                <a:latin typeface="Bahnschrift Light" panose="020B0502040204020203" pitchFamily="34" charset="0"/>
-              </a:rPr>
-              <a:t/>
-            </a:r>
-            <a:br>
-              <a:rPr lang="hu-HU" i="1" dirty="0" smtClean="0">
-                <a:solidFill>
-                  <a:schemeClr val="tx1">
-                    <a:lumMod val="75000"/>
-                    <a:lumOff val="25000"/>
-                  </a:schemeClr>
-                </a:solidFill>
-                <a:latin typeface="Bahnschrift Light" panose="020B0502040204020203" pitchFamily="34" charset="0"/>
-              </a:rPr>
             </a:br>
-            <a:r>
-              <a:rPr lang="en-US" i="1" dirty="0" smtClean="0">
-                <a:solidFill>
-                  <a:schemeClr val="tx1">
-                    <a:lumMod val="75000"/>
-                    <a:lumOff val="25000"/>
-                  </a:schemeClr>
-                </a:solidFill>
-                <a:latin typeface="Bahnschrift Light" panose="020B0502040204020203" pitchFamily="34" charset="0"/>
-              </a:rPr>
-              <a:t>return</a:t>
-            </a:r>
-            <a:r>
-              <a:rPr lang="hu-HU" i="1" dirty="0" smtClean="0">
-                <a:solidFill>
-                  <a:schemeClr val="tx1">
-                    <a:lumMod val="75000"/>
-                    <a:lumOff val="25000"/>
-                  </a:schemeClr>
-                </a:solidFill>
-                <a:latin typeface="Bahnschrift Light" panose="020B0502040204020203" pitchFamily="34" charset="0"/>
-              </a:rPr>
-              <a:t/>
-            </a:r>
-            <a:br>
-              <a:rPr lang="hu-HU" i="1" dirty="0" smtClean="0">
-                <a:solidFill>
-                  <a:schemeClr val="tx1">
-                    <a:lumMod val="75000"/>
-                    <a:lumOff val="25000"/>
-                  </a:schemeClr>
-                </a:solidFill>
-                <a:latin typeface="Bahnschrift Light" panose="020B0502040204020203" pitchFamily="34" charset="0"/>
-              </a:rPr>
-            </a:br>
-            <a:r>
-              <a:rPr lang="en-US" i="1" dirty="0" smtClean="0">
-                <a:solidFill>
-                  <a:schemeClr val="tx1">
-                    <a:lumMod val="75000"/>
-                    <a:lumOff val="25000"/>
-                  </a:schemeClr>
-                </a:solidFill>
-                <a:latin typeface="Bahnschrift Light" panose="020B0502040204020203" pitchFamily="34" charset="0"/>
-              </a:rPr>
-              <a:t>&lt;</a:t>
-            </a:r>
-            <a:r>
-              <a:rPr lang="en-US" i="1" dirty="0" err="1" smtClean="0">
-                <a:solidFill>
-                  <a:schemeClr val="tx1">
-                    <a:lumMod val="75000"/>
-                    <a:lumOff val="25000"/>
-                  </a:schemeClr>
-                </a:solidFill>
-                <a:latin typeface="Bahnschrift Light" panose="020B0502040204020203" pitchFamily="34" charset="0"/>
-              </a:rPr>
-              <a:t>etterem</a:t>
-            </a:r>
             <a:r>
               <a:rPr lang="en-US" i="1" dirty="0">
                 <a:solidFill>
@@ -11485,7 +11337,30 @@
                 </a:solidFill>
                 <a:latin typeface="Bahnschrift Light" panose="020B0502040204020203" pitchFamily="34" charset="0"/>
               </a:rPr>
-              <a:t>&gt;  &lt;</a:t>
+              <a:t>return</a:t>
+            </a:r>
+            <a:br>
+              <a:rPr lang="hu-HU" i="1" dirty="0">
+                <a:solidFill>
+                  <a:schemeClr val="tx1">
+                    <a:lumMod val="75000"/>
+                    <a:lumOff val="25000"/>
+                  </a:schemeClr>
+                </a:solidFill>
+                <a:latin typeface="Bahnschrift Light" panose="020B0502040204020203" pitchFamily="34" charset="0"/>
+              </a:rPr>
+            </a:br>
+            <a:r>
+              <a:rPr lang="en-US" i="1" dirty="0">
+                <a:solidFill>
+                  <a:schemeClr val="tx1">
+                    <a:lumMod val="75000"/>
+                    <a:lumOff val="25000"/>
+                  </a:schemeClr>
+                </a:solidFill>
+                <a:latin typeface="Bahnschrift Light" panose="020B0502040204020203" pitchFamily="34" charset="0"/>
+              </a:rPr>
+              <a:t>&lt;</a:t>
             </a:r>
             <a:r>
               <a:rPr lang="en-US" i="1" dirty="0" err="1">
@@ -11497,7 +11372,7 @@
                 </a:solidFill>
                 <a:latin typeface="Bahnschrift Light" panose="020B0502040204020203" pitchFamily="34" charset="0"/>
               </a:rPr>
-              <a:t>EtteremID</a:t>
+              <a:t>etterem</a:t>
             </a:r>
             <a:r>
               <a:rPr lang="en-US" i="1" dirty="0">
@@ -11509,7 +11384,7 @@
                 </a:solidFill>
                 <a:latin typeface="Bahnschrift Light" panose="020B0502040204020203" pitchFamily="34" charset="0"/>
               </a:rPr>
-              <a:t>&gt;{data($e/@id)}&lt;/</a:t>
+              <a:t>&gt;  &lt;</a:t>
             </a:r>
             <a:r>
               <a:rPr lang="en-US" i="1" dirty="0" err="1">
@@ -11533,7 +11408,7 @@
                 </a:solidFill>
                 <a:latin typeface="Bahnschrift Light" panose="020B0502040204020203" pitchFamily="34" charset="0"/>
               </a:rPr>
-              <a:t>&gt;  &lt;</a:t>
+              <a:t>&gt;{data($e/@id)}&lt;/</a:t>
             </a:r>
             <a:r>
               <a:rPr lang="en-US" i="1" dirty="0" err="1">
@@ -11545,7 +11420,7 @@
                 </a:solidFill>
                 <a:latin typeface="Bahnschrift Light" panose="020B0502040204020203" pitchFamily="34" charset="0"/>
               </a:rPr>
-              <a:t>Nev</a:t>
+              <a:t>EtteremID</a:t>
             </a:r>
             <a:r>
               <a:rPr lang="en-US" i="1" dirty="0">
@@ -11557,7 +11432,7 @@
                 </a:solidFill>
                 <a:latin typeface="Bahnschrift Light" panose="020B0502040204020203" pitchFamily="34" charset="0"/>
               </a:rPr>
-              <a:t>&gt;{data($e/</a:t>
+              <a:t>&gt;  &lt;</a:t>
             </a:r>
             <a:r>
               <a:rPr lang="en-US" i="1" dirty="0" err="1">
@@ -11569,7 +11444,7 @@
                 </a:solidFill>
                 <a:latin typeface="Bahnschrift Light" panose="020B0502040204020203" pitchFamily="34" charset="0"/>
               </a:rPr>
-              <a:t>nev</a:t>
+              <a:t>Nev</a:t>
             </a:r>
             <a:r>
               <a:rPr lang="en-US" i="1" dirty="0">
@@ -11581,7 +11456,7 @@
                 </a:solidFill>
                 <a:latin typeface="Bahnschrift Light" panose="020B0502040204020203" pitchFamily="34" charset="0"/>
               </a:rPr>
-              <a:t>)}&lt;/</a:t>
+              <a:t>&gt;{data($e/</a:t>
             </a:r>
             <a:r>
               <a:rPr lang="en-US" i="1" dirty="0" err="1">
@@ -11593,7 +11468,7 @@
                 </a:solidFill>
                 <a:latin typeface="Bahnschrift Light" panose="020B0502040204020203" pitchFamily="34" charset="0"/>
               </a:rPr>
-              <a:t>Nev</a:t>
+              <a:t>nev</a:t>
             </a:r>
             <a:r>
               <a:rPr lang="en-US" i="1" dirty="0">
@@ -11605,42 +11480,7 @@
                 </a:solidFill>
                 <a:latin typeface="Bahnschrift Light" panose="020B0502040204020203" pitchFamily="34" charset="0"/>
               </a:rPr>
-              <a:t>&gt;  </a:t>
-            </a:r>
-            <a:r>
-              <a:rPr lang="hu-HU" i="1" dirty="0" smtClean="0">
-                <a:solidFill>
-                  <a:schemeClr val="tx1">
-                    <a:lumMod val="75000"/>
-                    <a:lumOff val="25000"/>
-                  </a:schemeClr>
-                </a:solidFill>
-                <a:latin typeface="Bahnschrift Light" panose="020B0502040204020203" pitchFamily="34" charset="0"/>
-              </a:rPr>
-              <a:t/>
-            </a:r>
-            <a:br>
-              <a:rPr lang="hu-HU" i="1" dirty="0" smtClean="0">
-                <a:solidFill>
-                  <a:schemeClr val="tx1">
-                    <a:lumMod val="75000"/>
-                    <a:lumOff val="25000"/>
-                  </a:schemeClr>
-                </a:solidFill>
-                <a:latin typeface="Bahnschrift Light" panose="020B0502040204020203" pitchFamily="34" charset="0"/>
-              </a:rPr>
-            </a:br>
-            <a:r>
-              <a:rPr lang="en-US" i="1" dirty="0" smtClean="0">
-                <a:solidFill>
-                  <a:schemeClr val="tx1">
-                    <a:lumMod val="75000"/>
-                    <a:lumOff val="25000"/>
-                  </a:schemeClr>
-                </a:solidFill>
-                <a:latin typeface="Bahnschrift Light" panose="020B0502040204020203" pitchFamily="34" charset="0"/>
-              </a:rPr>
-              <a:t>&lt;</a:t>
+              <a:t>)}&lt;/</a:t>
             </a:r>
             <a:r>
               <a:rPr lang="en-US" i="1" dirty="0" err="1">
@@ -11652,7 +11492,7 @@
                 </a:solidFill>
                 <a:latin typeface="Bahnschrift Light" panose="020B0502040204020203" pitchFamily="34" charset="0"/>
               </a:rPr>
-              <a:t>Cim</a:t>
+              <a:t>Nev</a:t>
             </a:r>
             <a:r>
               <a:rPr lang="en-US" i="1" dirty="0">
@@ -11664,7 +11504,30 @@
                 </a:solidFill>
                 <a:latin typeface="Bahnschrift Light" panose="020B0502040204020203" pitchFamily="34" charset="0"/>
               </a:rPr>
-              <a:t>&gt;{$e/</a:t>
+              <a:t>&gt;  </a:t>
+            </a:r>
+            <a:br>
+              <a:rPr lang="hu-HU" i="1" dirty="0">
+                <a:solidFill>
+                  <a:schemeClr val="tx1">
+                    <a:lumMod val="75000"/>
+                    <a:lumOff val="25000"/>
+                  </a:schemeClr>
+                </a:solidFill>
+                <a:latin typeface="Bahnschrift Light" panose="020B0502040204020203" pitchFamily="34" charset="0"/>
+              </a:rPr>
+            </a:br>
+            <a:r>
+              <a:rPr lang="en-US" i="1" dirty="0">
+                <a:solidFill>
+                  <a:schemeClr val="tx1">
+                    <a:lumMod val="75000"/>
+                    <a:lumOff val="25000"/>
+                  </a:schemeClr>
+                </a:solidFill>
+                <a:latin typeface="Bahnschrift Light" panose="020B0502040204020203" pitchFamily="34" charset="0"/>
+              </a:rPr>
+              <a:t>&lt;</a:t>
             </a:r>
             <a:r>
               <a:rPr lang="en-US" i="1" dirty="0" err="1">
@@ -11676,7 +11539,7 @@
                 </a:solidFill>
                 <a:latin typeface="Bahnschrift Light" panose="020B0502040204020203" pitchFamily="34" charset="0"/>
               </a:rPr>
-              <a:t>cim</a:t>
+              <a:t>Cim</a:t>
             </a:r>
             <a:r>
               <a:rPr lang="en-US" i="1" dirty="0">
@@ -11688,7 +11551,7 @@
                 </a:solidFill>
                 <a:latin typeface="Bahnschrift Light" panose="020B0502040204020203" pitchFamily="34" charset="0"/>
               </a:rPr>
-              <a:t>}&lt;/</a:t>
+              <a:t>&gt;{$e/</a:t>
             </a:r>
             <a:r>
               <a:rPr lang="en-US" i="1" dirty="0" err="1">
@@ -11700,7 +11563,7 @@
                 </a:solidFill>
                 <a:latin typeface="Bahnschrift Light" panose="020B0502040204020203" pitchFamily="34" charset="0"/>
               </a:rPr>
-              <a:t>Cim</a:t>
+              <a:t>cim</a:t>
             </a:r>
             <a:r>
               <a:rPr lang="en-US" i="1" dirty="0">
@@ -11712,7 +11575,7 @@
                 </a:solidFill>
                 <a:latin typeface="Bahnschrift Light" panose="020B0502040204020203" pitchFamily="34" charset="0"/>
               </a:rPr>
-              <a:t>&gt;  &lt;</a:t>
+              <a:t>}&lt;/</a:t>
             </a:r>
             <a:r>
               <a:rPr lang="en-US" i="1" dirty="0" err="1">
@@ -11724,7 +11587,7 @@
                 </a:solidFill>
                 <a:latin typeface="Bahnschrift Light" panose="020B0502040204020203" pitchFamily="34" charset="0"/>
               </a:rPr>
-              <a:t>Csillag</a:t>
+              <a:t>Cim</a:t>
             </a:r>
             <a:r>
               <a:rPr lang="en-US" i="1" dirty="0">
@@ -11736,7 +11599,7 @@
                 </a:solidFill>
                 <a:latin typeface="Bahnschrift Light" panose="020B0502040204020203" pitchFamily="34" charset="0"/>
               </a:rPr>
-              <a:t>&gt;{data($e/</a:t>
+              <a:t>&gt;  &lt;</a:t>
             </a:r>
             <a:r>
               <a:rPr lang="en-US" i="1" dirty="0" err="1">
@@ -11748,7 +11611,7 @@
                 </a:solidFill>
                 <a:latin typeface="Bahnschrift Light" panose="020B0502040204020203" pitchFamily="34" charset="0"/>
               </a:rPr>
-              <a:t>csillag</a:t>
+              <a:t>Csillag</a:t>
             </a:r>
             <a:r>
               <a:rPr lang="en-US" i="1" dirty="0">
@@ -11760,7 +11623,7 @@
                 </a:solidFill>
                 <a:latin typeface="Bahnschrift Light" panose="020B0502040204020203" pitchFamily="34" charset="0"/>
               </a:rPr>
-              <a:t>)}&lt;/</a:t>
+              <a:t>&gt;{data($e/</a:t>
             </a:r>
             <a:r>
               <a:rPr lang="en-US" i="1" dirty="0" err="1">
@@ -11772,10 +11635,10 @@
                 </a:solidFill>
                 <a:latin typeface="Bahnschrift Light" panose="020B0502040204020203" pitchFamily="34" charset="0"/>
               </a:rPr>
-              <a:t>Csillag</a:t>
-            </a:r>
-            <a:r>
-              <a:rPr lang="en-US" i="1" dirty="0" smtClean="0">
+              <a:t>csillag</a:t>
+            </a:r>
+            <a:r>
+              <a:rPr lang="en-US" i="1" dirty="0">
                 <a:solidFill>
                   <a:schemeClr val="tx1">
                     <a:lumMod val="75000"/>
@@ -11784,10 +11647,10 @@
                 </a:solidFill>
                 <a:latin typeface="Bahnschrift Light" panose="020B0502040204020203" pitchFamily="34" charset="0"/>
               </a:rPr>
-              <a:t>&gt;</a:t>
-            </a:r>
-            <a:r>
-              <a:rPr lang="hu-HU" i="1" dirty="0" smtClean="0">
+              <a:t>)}&lt;/</a:t>
+            </a:r>
+            <a:r>
+              <a:rPr lang="en-US" i="1" dirty="0" err="1">
                 <a:solidFill>
                   <a:schemeClr val="tx1">
                     <a:lumMod val="75000"/>
@@ -11796,10 +11659,10 @@
                 </a:solidFill>
                 <a:latin typeface="Bahnschrift Light" panose="020B0502040204020203" pitchFamily="34" charset="0"/>
               </a:rPr>
-              <a:t/>
-            </a:r>
-            <a:br>
-              <a:rPr lang="hu-HU" i="1" dirty="0" smtClean="0">
+              <a:t>Csillag</a:t>
+            </a:r>
+            <a:r>
+              <a:rPr lang="en-US" i="1" dirty="0">
                 <a:solidFill>
                   <a:schemeClr val="tx1">
                     <a:lumMod val="75000"/>
@@ -11808,9 +11671,21 @@
                 </a:solidFill>
                 <a:latin typeface="Bahnschrift Light" panose="020B0502040204020203" pitchFamily="34" charset="0"/>
               </a:rPr>
+              <a:t>&gt;</a:t>
+            </a:r>
+            <a:br>
+              <a:rPr lang="hu-HU" i="1" dirty="0">
+                <a:solidFill>
+                  <a:schemeClr val="tx1">
+                    <a:lumMod val="75000"/>
+                    <a:lumOff val="25000"/>
+                  </a:schemeClr>
+                </a:solidFill>
+                <a:latin typeface="Bahnschrift Light" panose="020B0502040204020203" pitchFamily="34" charset="0"/>
+              </a:rPr>
             </a:br>
             <a:r>
-              <a:rPr lang="en-US" i="1" dirty="0" smtClean="0">
+              <a:rPr lang="en-US" i="1" dirty="0">
                 <a:solidFill>
                   <a:schemeClr val="tx1">
                     <a:lumMod val="75000"/>
@@ -11894,7 +11769,7 @@
           <a:lstStyle/>
           <a:p>
             <a:r>
-              <a:rPr lang="hu-HU" dirty="0" smtClean="0"/>
+              <a:rPr lang="hu-HU" dirty="0"/>
               <a:t>4. Feladat</a:t>
             </a:r>
             <a:endParaRPr lang="en-US" dirty="0"/>
@@ -11925,15 +11800,7 @@
           <a:p>
             <a:r>
               <a:rPr lang="hu-HU" dirty="0"/>
-              <a:t>Kérdezze le azokat a gyakornokokat, akik délutánra be </a:t>
-            </a:r>
-            <a:r>
-              <a:rPr lang="hu-HU" dirty="0" smtClean="0"/>
-              <a:t>vannak </a:t>
-            </a:r>
-            <a:r>
-              <a:rPr lang="hu-HU" dirty="0"/>
-              <a:t>osztva (</a:t>
+              <a:t>Kérdezze le azokat a gyakornokokat, akik délutánra be vannak osztva (</a:t>
             </a:r>
             <a:r>
               <a:rPr lang="hu-HU" dirty="0" err="1"/>
@@ -11943,7 +11810,6 @@
               <a:rPr lang="hu-HU" dirty="0"/>
               <a:t>, Név, Gyakorlat kezdete, Műszak)! </a:t>
             </a:r>
-            <a:endParaRPr lang="hu-HU" dirty="0" smtClean="0"/>
           </a:p>
           <a:p>
             <a:pPr marL="400050" lvl="1" indent="0">
@@ -11982,89 +11848,65 @@
               </a:rPr>
               <a:t> </a:t>
             </a:r>
-            <a:r>
-              <a:rPr lang="hu-HU" i="1" dirty="0" smtClean="0">
-                <a:latin typeface="Bahnschrift Light" panose="020B0502040204020203" pitchFamily="34" charset="0"/>
-              </a:rPr>
-              <a:t/>
-            </a:r>
-            <a:br>
-              <a:rPr lang="hu-HU" i="1" dirty="0" smtClean="0">
-                <a:latin typeface="Bahnschrift Light" panose="020B0502040204020203" pitchFamily="34" charset="0"/>
-              </a:rPr>
-            </a:br>
-            <a:r>
-              <a:rPr lang="en-US" i="1" dirty="0" smtClean="0">
-                <a:latin typeface="Bahnschrift Light" panose="020B0502040204020203" pitchFamily="34" charset="0"/>
-              </a:rPr>
-              <a:t>$g/</a:t>
-            </a:r>
-            <a:r>
-              <a:rPr lang="en-US" i="1" dirty="0" err="1" smtClean="0">
-                <a:latin typeface="Bahnschrift Light" panose="020B0502040204020203" pitchFamily="34" charset="0"/>
-              </a:rPr>
-              <a:t>muszak</a:t>
-            </a:r>
-            <a:r>
-              <a:rPr lang="en-US" i="1" dirty="0" smtClean="0">
-                <a:latin typeface="Bahnschrift Light" panose="020B0502040204020203" pitchFamily="34" charset="0"/>
-              </a:rPr>
-              <a:t> </a:t>
-            </a:r>
-            <a:r>
-              <a:rPr lang="en-US" i="1" dirty="0">
-                <a:latin typeface="Bahnschrift Light" panose="020B0502040204020203" pitchFamily="34" charset="0"/>
-              </a:rPr>
-              <a:t>= "</a:t>
-            </a:r>
-            <a:r>
-              <a:rPr lang="en-US" i="1" dirty="0" err="1" smtClean="0">
-                <a:latin typeface="Bahnschrift Light" panose="020B0502040204020203" pitchFamily="34" charset="0"/>
-              </a:rPr>
-              <a:t>délután</a:t>
-            </a:r>
-            <a:r>
-              <a:rPr lang="hu-HU" i="1" dirty="0" smtClean="0">
-                <a:latin typeface="Bahnschrift Light" panose="020B0502040204020203" pitchFamily="34" charset="0"/>
-              </a:rPr>
-              <a:t>”</a:t>
-            </a:r>
-            <a:r>
-              <a:rPr lang="hu-HU" i="1" dirty="0">
-                <a:latin typeface="Bahnschrift Light" panose="020B0502040204020203" pitchFamily="34" charset="0"/>
-              </a:rPr>
-              <a:t/>
-            </a:r>
             <a:br>
               <a:rPr lang="hu-HU" i="1" dirty="0">
                 <a:latin typeface="Bahnschrift Light" panose="020B0502040204020203" pitchFamily="34" charset="0"/>
               </a:rPr>
             </a:br>
             <a:r>
-              <a:rPr lang="en-US" i="1" dirty="0" smtClean="0">
+              <a:rPr lang="en-US" i="1" dirty="0">
+                <a:latin typeface="Bahnschrift Light" panose="020B0502040204020203" pitchFamily="34" charset="0"/>
+              </a:rPr>
+              <a:t>$g/</a:t>
+            </a:r>
+            <a:r>
+              <a:rPr lang="en-US" i="1" dirty="0" err="1">
+                <a:latin typeface="Bahnschrift Light" panose="020B0502040204020203" pitchFamily="34" charset="0"/>
+              </a:rPr>
+              <a:t>muszak</a:t>
+            </a:r>
+            <a:r>
+              <a:rPr lang="en-US" i="1" dirty="0">
+                <a:latin typeface="Bahnschrift Light" panose="020B0502040204020203" pitchFamily="34" charset="0"/>
+              </a:rPr>
+              <a:t> = "</a:t>
+            </a:r>
+            <a:r>
+              <a:rPr lang="en-US" i="1" dirty="0" err="1">
+                <a:latin typeface="Bahnschrift Light" panose="020B0502040204020203" pitchFamily="34" charset="0"/>
+              </a:rPr>
+              <a:t>délután</a:t>
+            </a:r>
+            <a:r>
+              <a:rPr lang="hu-HU" i="1" dirty="0">
+                <a:latin typeface="Bahnschrift Light" panose="020B0502040204020203" pitchFamily="34" charset="0"/>
+              </a:rPr>
+              <a:t>”</a:t>
+            </a:r>
+            <a:br>
+              <a:rPr lang="hu-HU" i="1" dirty="0">
+                <a:latin typeface="Bahnschrift Light" panose="020B0502040204020203" pitchFamily="34" charset="0"/>
+              </a:rPr>
+            </a:br>
+            <a:r>
+              <a:rPr lang="en-US" i="1" dirty="0">
                 <a:latin typeface="Bahnschrift Light" panose="020B0502040204020203" pitchFamily="34" charset="0"/>
               </a:rPr>
               <a:t>return</a:t>
             </a:r>
-            <a:r>
-              <a:rPr lang="hu-HU" i="1" dirty="0" smtClean="0">
-                <a:latin typeface="Bahnschrift Light" panose="020B0502040204020203" pitchFamily="34" charset="0"/>
-              </a:rPr>
-              <a:t/>
-            </a:r>
             <a:br>
-              <a:rPr lang="hu-HU" i="1" dirty="0" smtClean="0">
+              <a:rPr lang="hu-HU" i="1" dirty="0">
                 <a:latin typeface="Bahnschrift Light" panose="020B0502040204020203" pitchFamily="34" charset="0"/>
               </a:rPr>
             </a:br>
             <a:r>
-              <a:rPr lang="en-US" i="1" dirty="0" smtClean="0">
+              <a:rPr lang="en-US" i="1" dirty="0">
                 <a:latin typeface="Bahnschrift Light" panose="020B0502040204020203" pitchFamily="34" charset="0"/>
               </a:rPr>
               <a:t>&lt;</a:t>
             </a:r>
             <a:r>
-              <a:rPr lang="en-US" i="1" dirty="0" err="1" smtClean="0">
+              <a:rPr lang="en-US" i="1" dirty="0" err="1">
                 <a:latin typeface="Bahnschrift Light" panose="020B0502040204020203" pitchFamily="34" charset="0"/>
               </a:rPr>
               <a:t>gyakornok</a:t>
@@ -12075,19 +11917,13 @@
               </a:rPr>
               <a:t>&gt;  </a:t>
             </a:r>
-            <a:r>
-              <a:rPr lang="hu-HU" i="1" dirty="0" smtClean="0">
-                <a:latin typeface="Bahnschrift Light" panose="020B0502040204020203" pitchFamily="34" charset="0"/>
-              </a:rPr>
-              <a:t/>
-            </a:r>
             <a:br>
-              <a:rPr lang="hu-HU" i="1" dirty="0" smtClean="0">
+              <a:rPr lang="hu-HU" i="1" dirty="0">
                 <a:latin typeface="Bahnschrift Light" panose="020B0502040204020203" pitchFamily="34" charset="0"/>
               </a:rPr>
             </a:br>
             <a:r>
-              <a:rPr lang="en-US" i="1" dirty="0" smtClean="0">
+              <a:rPr lang="en-US" i="1" dirty="0">
                 <a:latin typeface="Bahnschrift Light" panose="020B0502040204020203" pitchFamily="34" charset="0"/>
               </a:rPr>
               <a:t>&lt;</a:t>
@@ -12183,24 +12019,18 @@
               <a:t>kezdete</a:t>
             </a:r>
             <a:r>
-              <a:rPr lang="en-US" i="1" dirty="0" smtClean="0">
+              <a:rPr lang="en-US" i="1" dirty="0">
                 <a:latin typeface="Bahnschrift Light" panose="020B0502040204020203" pitchFamily="34" charset="0"/>
               </a:rPr>
               <a:t>)}</a:t>
             </a:r>
-            <a:r>
-              <a:rPr lang="hu-HU" i="1" dirty="0" smtClean="0">
-                <a:latin typeface="Bahnschrift Light" panose="020B0502040204020203" pitchFamily="34" charset="0"/>
-              </a:rPr>
-              <a:t/>
-            </a:r>
             <a:br>
-              <a:rPr lang="hu-HU" i="1" dirty="0" smtClean="0">
+              <a:rPr lang="hu-HU" i="1" dirty="0">
                 <a:latin typeface="Bahnschrift Light" panose="020B0502040204020203" pitchFamily="34" charset="0"/>
               </a:rPr>
             </a:br>
             <a:r>
-              <a:rPr lang="en-US" i="1" dirty="0" smtClean="0">
+              <a:rPr lang="en-US" i="1" dirty="0">
                 <a:latin typeface="Bahnschrift Light" panose="020B0502040204020203" pitchFamily="34" charset="0"/>
               </a:rPr>
               <a:t>&lt;/</a:t>
@@ -12217,19 +12047,13 @@
               </a:rPr>
               <a:t>&gt; </a:t>
             </a:r>
-            <a:r>
-              <a:rPr lang="hu-HU" i="1" dirty="0" smtClean="0">
-                <a:latin typeface="Bahnschrift Light" panose="020B0502040204020203" pitchFamily="34" charset="0"/>
-              </a:rPr>
-              <a:t/>
-            </a:r>
             <a:br>
-              <a:rPr lang="hu-HU" i="1" dirty="0" smtClean="0">
+              <a:rPr lang="hu-HU" i="1" dirty="0">
                 <a:latin typeface="Bahnschrift Light" panose="020B0502040204020203" pitchFamily="34" charset="0"/>
               </a:rPr>
             </a:br>
             <a:r>
-              <a:rPr lang="en-US" i="1" dirty="0" smtClean="0">
+              <a:rPr lang="en-US" i="1" dirty="0">
                 <a:latin typeface="Bahnschrift Light" panose="020B0502040204020203" pitchFamily="34" charset="0"/>
               </a:rPr>
               <a:t>&lt;</a:t>
@@ -12265,24 +12089,18 @@
               <a:t>Muszak</a:t>
             </a:r>
             <a:r>
-              <a:rPr lang="en-US" i="1" dirty="0" smtClean="0">
+              <a:rPr lang="en-US" i="1" dirty="0">
                 <a:latin typeface="Bahnschrift Light" panose="020B0502040204020203" pitchFamily="34" charset="0"/>
               </a:rPr>
               <a:t>&gt;&lt;</a:t>
             </a:r>
-            <a:r>
-              <a:rPr lang="hu-HU" i="1" dirty="0" smtClean="0">
-                <a:latin typeface="Bahnschrift Light" panose="020B0502040204020203" pitchFamily="34" charset="0"/>
-              </a:rPr>
-              <a:t/>
-            </a:r>
             <a:br>
-              <a:rPr lang="hu-HU" i="1" dirty="0" smtClean="0">
+              <a:rPr lang="hu-HU" i="1" dirty="0">
                 <a:latin typeface="Bahnschrift Light" panose="020B0502040204020203" pitchFamily="34" charset="0"/>
               </a:rPr>
             </a:br>
             <a:r>
-              <a:rPr lang="en-US" i="1" dirty="0" smtClean="0">
+              <a:rPr lang="en-US" i="1" dirty="0">
                 <a:latin typeface="Bahnschrift Light" panose="020B0502040204020203" pitchFamily="34" charset="0"/>
               </a:rPr>
               <a:t>/</a:t>

--- a/Y4O4X0_0318/Xquery.pptx
+++ b/Y4O4X0_0318/Xquery.pptx
@@ -14,7 +14,10 @@
     <p:sldId id="262" r:id="rId8"/>
     <p:sldId id="263" r:id="rId9"/>
     <p:sldId id="264" r:id="rId10"/>
-    <p:sldId id="265" r:id="rId11"/>
+    <p:sldId id="266" r:id="rId11"/>
+    <p:sldId id="267" r:id="rId12"/>
+    <p:sldId id="268" r:id="rId13"/>
+    <p:sldId id="265" r:id="rId14"/>
   </p:sldIdLst>
   <p:sldSz cx="12192000" cy="6858000"/>
   <p:notesSz cx="6858000" cy="9144000"/>
@@ -309,7 +312,7 @@
           <a:p>
             <a:fld id="{9FFE2455-E091-4BD6-840D-D056C88E8DD0}" type="datetimeFigureOut">
               <a:rPr lang="en-US" smtClean="0"/>
-              <a:t>3/16/2026</a:t>
+              <a:t>3/17/2026</a:t>
             </a:fld>
             <a:endParaRPr lang="en-US"/>
           </a:p>
@@ -654,7 +657,7 @@
           <a:p>
             <a:fld id="{9FFE2455-E091-4BD6-840D-D056C88E8DD0}" type="datetimeFigureOut">
               <a:rPr lang="en-US" smtClean="0"/>
-              <a:t>3/16/2026</a:t>
+              <a:t>3/17/2026</a:t>
             </a:fld>
             <a:endParaRPr lang="en-US"/>
           </a:p>
@@ -1055,7 +1058,7 @@
           <a:p>
             <a:fld id="{9FFE2455-E091-4BD6-840D-D056C88E8DD0}" type="datetimeFigureOut">
               <a:rPr lang="en-US" smtClean="0"/>
-              <a:t>3/16/2026</a:t>
+              <a:t>3/17/2026</a:t>
             </a:fld>
             <a:endParaRPr lang="en-US"/>
           </a:p>
@@ -1391,7 +1394,7 @@
           <a:p>
             <a:fld id="{9FFE2455-E091-4BD6-840D-D056C88E8DD0}" type="datetimeFigureOut">
               <a:rPr lang="en-US" smtClean="0"/>
-              <a:t>3/16/2026</a:t>
+              <a:t>3/17/2026</a:t>
             </a:fld>
             <a:endParaRPr lang="en-US"/>
           </a:p>
@@ -1711,7 +1714,7 @@
           <a:p>
             <a:fld id="{9FFE2455-E091-4BD6-840D-D056C88E8DD0}" type="datetimeFigureOut">
               <a:rPr lang="en-US" smtClean="0"/>
-              <a:t>3/16/2026</a:t>
+              <a:t>3/17/2026</a:t>
             </a:fld>
             <a:endParaRPr lang="en-US"/>
           </a:p>
@@ -2107,7 +2110,7 @@
           <a:p>
             <a:fld id="{9FFE2455-E091-4BD6-840D-D056C88E8DD0}" type="datetimeFigureOut">
               <a:rPr lang="en-US" smtClean="0"/>
-              <a:t>3/16/2026</a:t>
+              <a:t>3/17/2026</a:t>
             </a:fld>
             <a:endParaRPr lang="en-US"/>
           </a:p>
@@ -2364,7 +2367,7 @@
           <a:p>
             <a:fld id="{9FFE2455-E091-4BD6-840D-D056C88E8DD0}" type="datetimeFigureOut">
               <a:rPr lang="en-US" smtClean="0"/>
-              <a:t>3/16/2026</a:t>
+              <a:t>3/17/2026</a:t>
             </a:fld>
             <a:endParaRPr lang="en-US"/>
           </a:p>
@@ -2626,7 +2629,7 @@
           <a:p>
             <a:fld id="{9FFE2455-E091-4BD6-840D-D056C88E8DD0}" type="datetimeFigureOut">
               <a:rPr lang="en-US" smtClean="0"/>
-              <a:t>3/16/2026</a:t>
+              <a:t>3/17/2026</a:t>
             </a:fld>
             <a:endParaRPr lang="en-US"/>
           </a:p>
@@ -2888,7 +2891,7 @@
           <a:p>
             <a:fld id="{9FFE2455-E091-4BD6-840D-D056C88E8DD0}" type="datetimeFigureOut">
               <a:rPr lang="en-US" smtClean="0"/>
-              <a:t>3/16/2026</a:t>
+              <a:t>3/17/2026</a:t>
             </a:fld>
             <a:endParaRPr lang="en-US"/>
           </a:p>
@@ -3217,7 +3220,7 @@
           <a:p>
             <a:fld id="{9FFE2455-E091-4BD6-840D-D056C88E8DD0}" type="datetimeFigureOut">
               <a:rPr lang="en-US" smtClean="0"/>
-              <a:t>3/16/2026</a:t>
+              <a:t>3/17/2026</a:t>
             </a:fld>
             <a:endParaRPr lang="en-US"/>
           </a:p>
@@ -3540,7 +3543,7 @@
           <a:p>
             <a:fld id="{9FFE2455-E091-4BD6-840D-D056C88E8DD0}" type="datetimeFigureOut">
               <a:rPr lang="en-US" smtClean="0"/>
-              <a:t>3/16/2026</a:t>
+              <a:t>3/17/2026</a:t>
             </a:fld>
             <a:endParaRPr lang="en-US"/>
           </a:p>
@@ -3997,7 +4000,7 @@
           <a:p>
             <a:fld id="{9FFE2455-E091-4BD6-840D-D056C88E8DD0}" type="datetimeFigureOut">
               <a:rPr lang="en-US" smtClean="0"/>
-              <a:t>3/16/2026</a:t>
+              <a:t>3/17/2026</a:t>
             </a:fld>
             <a:endParaRPr lang="en-US"/>
           </a:p>
@@ -4202,7 +4205,7 @@
           <a:p>
             <a:fld id="{9FFE2455-E091-4BD6-840D-D056C88E8DD0}" type="datetimeFigureOut">
               <a:rPr lang="en-US" smtClean="0"/>
-              <a:t>3/16/2026</a:t>
+              <a:t>3/17/2026</a:t>
             </a:fld>
             <a:endParaRPr lang="en-US"/>
           </a:p>
@@ -4379,7 +4382,7 @@
           <a:p>
             <a:fld id="{9FFE2455-E091-4BD6-840D-D056C88E8DD0}" type="datetimeFigureOut">
               <a:rPr lang="en-US" smtClean="0"/>
-              <a:t>3/16/2026</a:t>
+              <a:t>3/17/2026</a:t>
             </a:fld>
             <a:endParaRPr lang="en-US"/>
           </a:p>
@@ -4712,7 +4715,7 @@
           <a:p>
             <a:fld id="{9FFE2455-E091-4BD6-840D-D056C88E8DD0}" type="datetimeFigureOut">
               <a:rPr lang="en-US" smtClean="0"/>
-              <a:t>3/16/2026</a:t>
+              <a:t>3/17/2026</a:t>
             </a:fld>
             <a:endParaRPr lang="en-US"/>
           </a:p>
@@ -5057,7 +5060,7 @@
           <a:p>
             <a:fld id="{9FFE2455-E091-4BD6-840D-D056C88E8DD0}" type="datetimeFigureOut">
               <a:rPr lang="en-US" smtClean="0"/>
-              <a:t>3/16/2026</a:t>
+              <a:t>3/17/2026</a:t>
             </a:fld>
             <a:endParaRPr lang="en-US"/>
           </a:p>
@@ -7349,7 +7352,7 @@
           <a:p>
             <a:fld id="{9FFE2455-E091-4BD6-840D-D056C88E8DD0}" type="datetimeFigureOut">
               <a:rPr lang="en-US" smtClean="0"/>
-              <a:t>3/16/2026</a:t>
+              <a:t>3/17/2026</a:t>
             </a:fld>
             <a:endParaRPr lang="en-US"/>
           </a:p>
@@ -7942,6 +7945,1484 @@
 </file>
 
 <file path=ppt/slides/slide10.xml><?xml version="1.0" encoding="utf-8"?>
+<p:sld xmlns:a="http://schemas.openxmlformats.org/drawingml/2006/main" xmlns:r="http://schemas.openxmlformats.org/officeDocument/2006/relationships" xmlns:p="http://schemas.openxmlformats.org/presentationml/2006/main">
+  <p:cSld>
+    <p:spTree>
+      <p:nvGrpSpPr>
+        <p:cNvPr id="1" name=""/>
+        <p:cNvGrpSpPr/>
+        <p:nvPr/>
+      </p:nvGrpSpPr>
+      <p:grpSpPr>
+        <a:xfrm>
+          <a:off x="0" y="0"/>
+          <a:ext cx="0" cy="0"/>
+          <a:chOff x="0" y="0"/>
+          <a:chExt cx="0" cy="0"/>
+        </a:xfrm>
+      </p:grpSpPr>
+      <p:sp>
+        <p:nvSpPr>
+          <p:cNvPr id="2" name="Cím 1"/>
+          <p:cNvSpPr>
+            <a:spLocks noGrp="1"/>
+          </p:cNvSpPr>
+          <p:nvPr>
+            <p:ph type="title"/>
+          </p:nvPr>
+        </p:nvSpPr>
+        <p:spPr/>
+        <p:txBody>
+          <a:bodyPr/>
+          <a:lstStyle/>
+          <a:p>
+            <a:r>
+              <a:rPr lang="hu-HU" dirty="0" smtClean="0"/>
+              <a:t>5. Feladat</a:t>
+            </a:r>
+            <a:endParaRPr lang="en-US" dirty="0"/>
+          </a:p>
+        </p:txBody>
+      </p:sp>
+      <p:pic>
+        <p:nvPicPr>
+          <p:cNvPr id="4" name="Tartalom helye 3"/>
+          <p:cNvPicPr>
+            <a:picLocks noGrp="1" noChangeAspect="1"/>
+          </p:cNvPicPr>
+          <p:nvPr>
+            <p:ph idx="1"/>
+          </p:nvPr>
+        </p:nvPicPr>
+        <p:blipFill>
+          <a:blip r:embed="rId2"/>
+          <a:stretch>
+            <a:fillRect/>
+          </a:stretch>
+        </p:blipFill>
+        <p:spPr>
+          <a:xfrm>
+            <a:off x="8099197" y="1264555"/>
+            <a:ext cx="3548306" cy="4705363"/>
+          </a:xfrm>
+          <a:prstGeom prst="rect">
+            <a:avLst/>
+          </a:prstGeom>
+        </p:spPr>
+      </p:pic>
+      <p:sp>
+        <p:nvSpPr>
+          <p:cNvPr id="5" name="Szövegdoboz 4"/>
+          <p:cNvSpPr txBox="1"/>
+          <p:nvPr/>
+        </p:nvSpPr>
+        <p:spPr>
+          <a:xfrm>
+            <a:off x="621437" y="2044804"/>
+            <a:ext cx="7477760" cy="2843022"/>
+          </a:xfrm>
+          <a:prstGeom prst="rect">
+            <a:avLst/>
+          </a:prstGeom>
+          <a:noFill/>
+        </p:spPr>
+        <p:txBody>
+          <a:bodyPr wrap="square" rtlCol="0">
+            <a:spAutoFit/>
+          </a:bodyPr>
+          <a:lstStyle/>
+          <a:p>
+            <a:pPr marL="400050" lvl="1" defTabSz="457200">
+              <a:lnSpc>
+                <a:spcPct val="110000"/>
+              </a:lnSpc>
+              <a:spcBef>
+                <a:spcPts val="1000"/>
+              </a:spcBef>
+              <a:buClr>
+                <a:schemeClr val="accent1"/>
+              </a:buClr>
+            </a:pPr>
+            <a:r>
+              <a:rPr lang="en-US" dirty="0" err="1" smtClean="0"/>
+              <a:t>L</a:t>
+            </a:r>
+            <a:r>
+              <a:rPr lang="en-US" dirty="0" err="1" smtClean="0">
+                <a:solidFill>
+                  <a:schemeClr val="tx1">
+                    <a:lumMod val="75000"/>
+                    <a:lumOff val="25000"/>
+                  </a:schemeClr>
+                </a:solidFill>
+              </a:rPr>
+              <a:t>istázza</a:t>
+            </a:r>
+            <a:r>
+              <a:rPr lang="hu-HU" dirty="0" smtClean="0">
+                <a:solidFill>
+                  <a:schemeClr val="tx1">
+                    <a:lumMod val="75000"/>
+                    <a:lumOff val="25000"/>
+                  </a:schemeClr>
+                </a:solidFill>
+              </a:rPr>
+              <a:t> ki</a:t>
+            </a:r>
+            <a:r>
+              <a:rPr lang="en-US" dirty="0" smtClean="0">
+                <a:solidFill>
+                  <a:schemeClr val="tx1">
+                    <a:lumMod val="75000"/>
+                    <a:lumOff val="25000"/>
+                  </a:schemeClr>
+                </a:solidFill>
+              </a:rPr>
+              <a:t> </a:t>
+            </a:r>
+            <a:r>
+              <a:rPr lang="en-US" dirty="0">
+                <a:solidFill>
+                  <a:schemeClr val="tx1">
+                    <a:lumMod val="75000"/>
+                    <a:lumOff val="25000"/>
+                  </a:schemeClr>
+                </a:solidFill>
+              </a:rPr>
+              <a:t>a </a:t>
+            </a:r>
+            <a:r>
+              <a:rPr lang="en-US" dirty="0" err="1">
+                <a:solidFill>
+                  <a:schemeClr val="tx1">
+                    <a:lumMod val="75000"/>
+                    <a:lumOff val="25000"/>
+                  </a:schemeClr>
+                </a:solidFill>
+              </a:rPr>
+              <a:t>vendégek</a:t>
+            </a:r>
+            <a:r>
+              <a:rPr lang="en-US" dirty="0">
+                <a:solidFill>
+                  <a:schemeClr val="tx1">
+                    <a:lumMod val="75000"/>
+                    <a:lumOff val="25000"/>
+                  </a:schemeClr>
+                </a:solidFill>
+              </a:rPr>
+              <a:t> </a:t>
+            </a:r>
+            <a:r>
+              <a:rPr lang="en-US" dirty="0" err="1">
+                <a:solidFill>
+                  <a:schemeClr val="tx1">
+                    <a:lumMod val="75000"/>
+                    <a:lumOff val="25000"/>
+                  </a:schemeClr>
+                </a:solidFill>
+              </a:rPr>
+              <a:t>nevét</a:t>
+            </a:r>
+            <a:r>
+              <a:rPr lang="en-US" dirty="0">
+                <a:solidFill>
+                  <a:schemeClr val="tx1">
+                    <a:lumMod val="75000"/>
+                    <a:lumOff val="25000"/>
+                  </a:schemeClr>
+                </a:solidFill>
+              </a:rPr>
+              <a:t> </a:t>
+            </a:r>
+            <a:r>
+              <a:rPr lang="en-US" dirty="0" err="1">
+                <a:solidFill>
+                  <a:schemeClr val="tx1">
+                    <a:lumMod val="75000"/>
+                    <a:lumOff val="25000"/>
+                  </a:schemeClr>
+                </a:solidFill>
+              </a:rPr>
+              <a:t>és</a:t>
+            </a:r>
+            <a:r>
+              <a:rPr lang="en-US" dirty="0">
+                <a:solidFill>
+                  <a:schemeClr val="tx1">
+                    <a:lumMod val="75000"/>
+                    <a:lumOff val="25000"/>
+                  </a:schemeClr>
+                </a:solidFill>
+              </a:rPr>
+              <a:t> a </a:t>
+            </a:r>
+            <a:r>
+              <a:rPr lang="en-US" dirty="0" err="1">
+                <a:solidFill>
+                  <a:schemeClr val="tx1">
+                    <a:lumMod val="75000"/>
+                    <a:lumOff val="25000"/>
+                  </a:schemeClr>
+                </a:solidFill>
+              </a:rPr>
+              <a:t>rendeléseik</a:t>
+            </a:r>
+            <a:r>
+              <a:rPr lang="en-US" dirty="0">
+                <a:solidFill>
+                  <a:schemeClr val="tx1">
+                    <a:lumMod val="75000"/>
+                    <a:lumOff val="25000"/>
+                  </a:schemeClr>
+                </a:solidFill>
+              </a:rPr>
+              <a:t> </a:t>
+            </a:r>
+            <a:r>
+              <a:rPr lang="en-US" dirty="0" err="1">
+                <a:solidFill>
+                  <a:schemeClr val="tx1">
+                    <a:lumMod val="75000"/>
+                    <a:lumOff val="25000"/>
+                  </a:schemeClr>
+                </a:solidFill>
+              </a:rPr>
+              <a:t>összegét</a:t>
+            </a:r>
+            <a:r>
+              <a:rPr lang="en-US" dirty="0">
+                <a:solidFill>
+                  <a:schemeClr val="tx1">
+                    <a:lumMod val="75000"/>
+                    <a:lumOff val="25000"/>
+                  </a:schemeClr>
+                </a:solidFill>
+              </a:rPr>
+              <a:t>!</a:t>
+            </a:r>
+            <a:r>
+              <a:rPr lang="hu-HU" dirty="0">
+                <a:solidFill>
+                  <a:schemeClr val="tx1">
+                    <a:lumMod val="75000"/>
+                    <a:lumOff val="25000"/>
+                  </a:schemeClr>
+                </a:solidFill>
+              </a:rPr>
+              <a:t> (</a:t>
+            </a:r>
+            <a:r>
+              <a:rPr lang="hu-HU" dirty="0" err="1">
+                <a:solidFill>
+                  <a:schemeClr val="tx1">
+                    <a:lumMod val="75000"/>
+                    <a:lumOff val="25000"/>
+                  </a:schemeClr>
+                </a:solidFill>
+              </a:rPr>
+              <a:t>join</a:t>
+            </a:r>
+            <a:r>
+              <a:rPr lang="hu-HU" dirty="0">
+                <a:solidFill>
+                  <a:schemeClr val="tx1">
+                    <a:lumMod val="75000"/>
+                    <a:lumOff val="25000"/>
+                  </a:schemeClr>
+                </a:solidFill>
+              </a:rPr>
+              <a:t>)</a:t>
+            </a:r>
+            <a:r>
+              <a:rPr lang="hu-HU" dirty="0" smtClean="0"/>
+              <a:t/>
+            </a:r>
+            <a:br>
+              <a:rPr lang="hu-HU" dirty="0" smtClean="0"/>
+            </a:br>
+            <a:r>
+              <a:rPr lang="hu-HU" dirty="0" smtClean="0"/>
+              <a:t/>
+            </a:r>
+            <a:br>
+              <a:rPr lang="hu-HU" dirty="0" smtClean="0"/>
+            </a:br>
+            <a:r>
+              <a:rPr lang="en-US" sz="1600" i="1" dirty="0">
+                <a:solidFill>
+                  <a:schemeClr val="tx1">
+                    <a:lumMod val="75000"/>
+                    <a:lumOff val="25000"/>
+                  </a:schemeClr>
+                </a:solidFill>
+                <a:latin typeface="Bahnschrift Light" panose="020B0502040204020203" pitchFamily="34" charset="0"/>
+              </a:rPr>
+              <a:t>for $v in doc("/</a:t>
+            </a:r>
+            <a:r>
+              <a:rPr lang="en-US" sz="1600" i="1" dirty="0" err="1">
+                <a:solidFill>
+                  <a:schemeClr val="tx1">
+                    <a:lumMod val="75000"/>
+                    <a:lumOff val="25000"/>
+                  </a:schemeClr>
+                </a:solidFill>
+                <a:latin typeface="Bahnschrift Light" panose="020B0502040204020203" pitchFamily="34" charset="0"/>
+              </a:rPr>
+              <a:t>db</a:t>
+            </a:r>
+            <a:r>
+              <a:rPr lang="en-US" sz="1600" i="1" dirty="0">
+                <a:solidFill>
+                  <a:schemeClr val="tx1">
+                    <a:lumMod val="75000"/>
+                    <a:lumOff val="25000"/>
+                  </a:schemeClr>
+                </a:solidFill>
+                <a:latin typeface="Bahnschrift Light" panose="020B0502040204020203" pitchFamily="34" charset="0"/>
+              </a:rPr>
+              <a:t>/etterem.xml")//</a:t>
+            </a:r>
+            <a:r>
+              <a:rPr lang="en-US" sz="1600" i="1" dirty="0" err="1">
+                <a:solidFill>
+                  <a:schemeClr val="tx1">
+                    <a:lumMod val="75000"/>
+                    <a:lumOff val="25000"/>
+                  </a:schemeClr>
+                </a:solidFill>
+                <a:latin typeface="Bahnschrift Light" panose="020B0502040204020203" pitchFamily="34" charset="0"/>
+              </a:rPr>
+              <a:t>vendeg</a:t>
+            </a:r>
+            <a:r>
+              <a:rPr lang="hu-HU" sz="1600" i="1" dirty="0">
+                <a:solidFill>
+                  <a:schemeClr val="tx1">
+                    <a:lumMod val="75000"/>
+                    <a:lumOff val="25000"/>
+                  </a:schemeClr>
+                </a:solidFill>
+                <a:latin typeface="Bahnschrift Light" panose="020B0502040204020203" pitchFamily="34" charset="0"/>
+              </a:rPr>
+              <a:t/>
+            </a:r>
+            <a:br>
+              <a:rPr lang="hu-HU" sz="1600" i="1" dirty="0">
+                <a:solidFill>
+                  <a:schemeClr val="tx1">
+                    <a:lumMod val="75000"/>
+                    <a:lumOff val="25000"/>
+                  </a:schemeClr>
+                </a:solidFill>
+                <a:latin typeface="Bahnschrift Light" panose="020B0502040204020203" pitchFamily="34" charset="0"/>
+              </a:rPr>
+            </a:br>
+            <a:r>
+              <a:rPr lang="en-US" sz="1600" i="1" dirty="0">
+                <a:solidFill>
+                  <a:schemeClr val="tx1">
+                    <a:lumMod val="75000"/>
+                    <a:lumOff val="25000"/>
+                  </a:schemeClr>
+                </a:solidFill>
+                <a:latin typeface="Bahnschrift Light" panose="020B0502040204020203" pitchFamily="34" charset="0"/>
+              </a:rPr>
+              <a:t>let $</a:t>
+            </a:r>
+            <a:r>
+              <a:rPr lang="en-US" sz="1600" i="1" dirty="0" err="1">
+                <a:solidFill>
+                  <a:schemeClr val="tx1">
+                    <a:lumMod val="75000"/>
+                    <a:lumOff val="25000"/>
+                  </a:schemeClr>
+                </a:solidFill>
+                <a:latin typeface="Bahnschrift Light" panose="020B0502040204020203" pitchFamily="34" charset="0"/>
+              </a:rPr>
+              <a:t>rendelesek</a:t>
+            </a:r>
+            <a:r>
+              <a:rPr lang="en-US" sz="1600" i="1" dirty="0">
+                <a:solidFill>
+                  <a:schemeClr val="tx1">
+                    <a:lumMod val="75000"/>
+                    <a:lumOff val="25000"/>
+                  </a:schemeClr>
+                </a:solidFill>
+                <a:latin typeface="Bahnschrift Light" panose="020B0502040204020203" pitchFamily="34" charset="0"/>
+              </a:rPr>
+              <a:t> :=  doc("/</a:t>
+            </a:r>
+            <a:r>
+              <a:rPr lang="en-US" sz="1600" i="1" dirty="0" err="1">
+                <a:solidFill>
+                  <a:schemeClr val="tx1">
+                    <a:lumMod val="75000"/>
+                    <a:lumOff val="25000"/>
+                  </a:schemeClr>
+                </a:solidFill>
+                <a:latin typeface="Bahnschrift Light" panose="020B0502040204020203" pitchFamily="34" charset="0"/>
+              </a:rPr>
+              <a:t>db</a:t>
+            </a:r>
+            <a:r>
+              <a:rPr lang="en-US" sz="1600" i="1" dirty="0">
+                <a:solidFill>
+                  <a:schemeClr val="tx1">
+                    <a:lumMod val="75000"/>
+                    <a:lumOff val="25000"/>
+                  </a:schemeClr>
+                </a:solidFill>
+                <a:latin typeface="Bahnschrift Light" panose="020B0502040204020203" pitchFamily="34" charset="0"/>
+              </a:rPr>
+              <a:t>/etterem.xml")//</a:t>
+            </a:r>
+            <a:r>
+              <a:rPr lang="en-US" sz="1600" i="1" dirty="0" err="1">
+                <a:solidFill>
+                  <a:schemeClr val="tx1">
+                    <a:lumMod val="75000"/>
+                    <a:lumOff val="25000"/>
+                  </a:schemeClr>
+                </a:solidFill>
+                <a:latin typeface="Bahnschrift Light" panose="020B0502040204020203" pitchFamily="34" charset="0"/>
+              </a:rPr>
+              <a:t>rendeles</a:t>
+            </a:r>
+            <a:r>
+              <a:rPr lang="en-US" sz="1600" i="1" dirty="0">
+                <a:solidFill>
+                  <a:schemeClr val="tx1">
+                    <a:lumMod val="75000"/>
+                    <a:lumOff val="25000"/>
+                  </a:schemeClr>
+                </a:solidFill>
+                <a:latin typeface="Bahnschrift Light" panose="020B0502040204020203" pitchFamily="34" charset="0"/>
+              </a:rPr>
+              <a:t>[@</a:t>
+            </a:r>
+            <a:r>
+              <a:rPr lang="en-US" sz="1600" i="1" dirty="0" err="1">
+                <a:solidFill>
+                  <a:schemeClr val="tx1">
+                    <a:lumMod val="75000"/>
+                    <a:lumOff val="25000"/>
+                  </a:schemeClr>
+                </a:solidFill>
+                <a:latin typeface="Bahnschrift Light" panose="020B0502040204020203" pitchFamily="34" charset="0"/>
+              </a:rPr>
+              <a:t>e_v_v</a:t>
+            </a:r>
+            <a:r>
+              <a:rPr lang="en-US" sz="1600" i="1" dirty="0">
+                <a:solidFill>
+                  <a:schemeClr val="tx1">
+                    <a:lumMod val="75000"/>
+                    <a:lumOff val="25000"/>
+                  </a:schemeClr>
+                </a:solidFill>
+                <a:latin typeface="Bahnschrift Light" panose="020B0502040204020203" pitchFamily="34" charset="0"/>
+              </a:rPr>
+              <a:t> = $v/@</a:t>
+            </a:r>
+            <a:r>
+              <a:rPr lang="en-US" sz="1600" i="1" dirty="0" err="1">
+                <a:solidFill>
+                  <a:schemeClr val="tx1">
+                    <a:lumMod val="75000"/>
+                    <a:lumOff val="25000"/>
+                  </a:schemeClr>
+                </a:solidFill>
+                <a:latin typeface="Bahnschrift Light" panose="020B0502040204020203" pitchFamily="34" charset="0"/>
+              </a:rPr>
+              <a:t>vkod</a:t>
+            </a:r>
+            <a:r>
+              <a:rPr lang="en-US" sz="1600" i="1" dirty="0">
+                <a:solidFill>
+                  <a:schemeClr val="tx1">
+                    <a:lumMod val="75000"/>
+                    <a:lumOff val="25000"/>
+                  </a:schemeClr>
+                </a:solidFill>
+                <a:latin typeface="Bahnschrift Light" panose="020B0502040204020203" pitchFamily="34" charset="0"/>
+              </a:rPr>
+              <a:t>]</a:t>
+            </a:r>
+            <a:r>
+              <a:rPr lang="hu-HU" sz="1600" i="1" dirty="0">
+                <a:solidFill>
+                  <a:schemeClr val="tx1">
+                    <a:lumMod val="75000"/>
+                    <a:lumOff val="25000"/>
+                  </a:schemeClr>
+                </a:solidFill>
+                <a:latin typeface="Bahnschrift Light" panose="020B0502040204020203" pitchFamily="34" charset="0"/>
+              </a:rPr>
+              <a:t/>
+            </a:r>
+            <a:br>
+              <a:rPr lang="hu-HU" sz="1600" i="1" dirty="0">
+                <a:solidFill>
+                  <a:schemeClr val="tx1">
+                    <a:lumMod val="75000"/>
+                    <a:lumOff val="25000"/>
+                  </a:schemeClr>
+                </a:solidFill>
+                <a:latin typeface="Bahnschrift Light" panose="020B0502040204020203" pitchFamily="34" charset="0"/>
+              </a:rPr>
+            </a:br>
+            <a:r>
+              <a:rPr lang="en-US" sz="1600" i="1" dirty="0">
+                <a:solidFill>
+                  <a:schemeClr val="tx1">
+                    <a:lumMod val="75000"/>
+                    <a:lumOff val="25000"/>
+                  </a:schemeClr>
+                </a:solidFill>
+                <a:latin typeface="Bahnschrift Light" panose="020B0502040204020203" pitchFamily="34" charset="0"/>
+              </a:rPr>
+              <a:t>for $r in $</a:t>
+            </a:r>
+            <a:r>
+              <a:rPr lang="en-US" sz="1600" i="1" dirty="0" err="1">
+                <a:solidFill>
+                  <a:schemeClr val="tx1">
+                    <a:lumMod val="75000"/>
+                    <a:lumOff val="25000"/>
+                  </a:schemeClr>
+                </a:solidFill>
+                <a:latin typeface="Bahnschrift Light" panose="020B0502040204020203" pitchFamily="34" charset="0"/>
+              </a:rPr>
+              <a:t>rendelesek</a:t>
+            </a:r>
+            <a:r>
+              <a:rPr lang="hu-HU" sz="1600" i="1" dirty="0">
+                <a:solidFill>
+                  <a:schemeClr val="tx1">
+                    <a:lumMod val="75000"/>
+                    <a:lumOff val="25000"/>
+                  </a:schemeClr>
+                </a:solidFill>
+                <a:latin typeface="Bahnschrift Light" panose="020B0502040204020203" pitchFamily="34" charset="0"/>
+              </a:rPr>
+              <a:t/>
+            </a:r>
+            <a:br>
+              <a:rPr lang="hu-HU" sz="1600" i="1" dirty="0">
+                <a:solidFill>
+                  <a:schemeClr val="tx1">
+                    <a:lumMod val="75000"/>
+                    <a:lumOff val="25000"/>
+                  </a:schemeClr>
+                </a:solidFill>
+                <a:latin typeface="Bahnschrift Light" panose="020B0502040204020203" pitchFamily="34" charset="0"/>
+              </a:rPr>
+            </a:br>
+            <a:r>
+              <a:rPr lang="en-US" sz="1600" i="1" dirty="0">
+                <a:solidFill>
+                  <a:schemeClr val="tx1">
+                    <a:lumMod val="75000"/>
+                    <a:lumOff val="25000"/>
+                  </a:schemeClr>
+                </a:solidFill>
+                <a:latin typeface="Bahnschrift Light" panose="020B0502040204020203" pitchFamily="34" charset="0"/>
+              </a:rPr>
+              <a:t>return</a:t>
+            </a:r>
+            <a:r>
+              <a:rPr lang="hu-HU" sz="1600" i="1" dirty="0">
+                <a:solidFill>
+                  <a:schemeClr val="tx1">
+                    <a:lumMod val="75000"/>
+                    <a:lumOff val="25000"/>
+                  </a:schemeClr>
+                </a:solidFill>
+                <a:latin typeface="Bahnschrift Light" panose="020B0502040204020203" pitchFamily="34" charset="0"/>
+              </a:rPr>
+              <a:t/>
+            </a:r>
+            <a:br>
+              <a:rPr lang="hu-HU" sz="1600" i="1" dirty="0">
+                <a:solidFill>
+                  <a:schemeClr val="tx1">
+                    <a:lumMod val="75000"/>
+                    <a:lumOff val="25000"/>
+                  </a:schemeClr>
+                </a:solidFill>
+                <a:latin typeface="Bahnschrift Light" panose="020B0502040204020203" pitchFamily="34" charset="0"/>
+              </a:rPr>
+            </a:br>
+            <a:r>
+              <a:rPr lang="en-US" sz="1600" i="1" dirty="0">
+                <a:solidFill>
+                  <a:schemeClr val="tx1">
+                    <a:lumMod val="75000"/>
+                    <a:lumOff val="25000"/>
+                  </a:schemeClr>
+                </a:solidFill>
+                <a:latin typeface="Bahnschrift Light" panose="020B0502040204020203" pitchFamily="34" charset="0"/>
+              </a:rPr>
+              <a:t>&lt;</a:t>
+            </a:r>
+            <a:r>
+              <a:rPr lang="en-US" sz="1600" i="1" dirty="0" err="1">
+                <a:solidFill>
+                  <a:schemeClr val="tx1">
+                    <a:lumMod val="75000"/>
+                    <a:lumOff val="25000"/>
+                  </a:schemeClr>
+                </a:solidFill>
+                <a:latin typeface="Bahnschrift Light" panose="020B0502040204020203" pitchFamily="34" charset="0"/>
+              </a:rPr>
+              <a:t>adat</a:t>
+            </a:r>
+            <a:r>
+              <a:rPr lang="en-US" sz="1600" i="1" dirty="0">
+                <a:solidFill>
+                  <a:schemeClr val="tx1">
+                    <a:lumMod val="75000"/>
+                    <a:lumOff val="25000"/>
+                  </a:schemeClr>
+                </a:solidFill>
+                <a:latin typeface="Bahnschrift Light" panose="020B0502040204020203" pitchFamily="34" charset="0"/>
+              </a:rPr>
+              <a:t>&gt;  </a:t>
+            </a:r>
+            <a:r>
+              <a:rPr lang="hu-HU" sz="1600" i="1" dirty="0">
+                <a:solidFill>
+                  <a:schemeClr val="tx1">
+                    <a:lumMod val="75000"/>
+                    <a:lumOff val="25000"/>
+                  </a:schemeClr>
+                </a:solidFill>
+                <a:latin typeface="Bahnschrift Light" panose="020B0502040204020203" pitchFamily="34" charset="0"/>
+              </a:rPr>
+              <a:t/>
+            </a:r>
+            <a:br>
+              <a:rPr lang="hu-HU" sz="1600" i="1" dirty="0">
+                <a:solidFill>
+                  <a:schemeClr val="tx1">
+                    <a:lumMod val="75000"/>
+                    <a:lumOff val="25000"/>
+                  </a:schemeClr>
+                </a:solidFill>
+                <a:latin typeface="Bahnschrift Light" panose="020B0502040204020203" pitchFamily="34" charset="0"/>
+              </a:rPr>
+            </a:br>
+            <a:r>
+              <a:rPr lang="en-US" sz="1600" i="1" dirty="0">
+                <a:solidFill>
+                  <a:schemeClr val="tx1">
+                    <a:lumMod val="75000"/>
+                    <a:lumOff val="25000"/>
+                  </a:schemeClr>
+                </a:solidFill>
+                <a:latin typeface="Bahnschrift Light" panose="020B0502040204020203" pitchFamily="34" charset="0"/>
+              </a:rPr>
+              <a:t>&lt;</a:t>
+            </a:r>
+            <a:r>
+              <a:rPr lang="en-US" sz="1600" i="1" dirty="0" err="1">
+                <a:solidFill>
+                  <a:schemeClr val="tx1">
+                    <a:lumMod val="75000"/>
+                    <a:lumOff val="25000"/>
+                  </a:schemeClr>
+                </a:solidFill>
+                <a:latin typeface="Bahnschrift Light" panose="020B0502040204020203" pitchFamily="34" charset="0"/>
+              </a:rPr>
+              <a:t>nev</a:t>
+            </a:r>
+            <a:r>
+              <a:rPr lang="en-US" sz="1600" i="1" dirty="0">
+                <a:solidFill>
+                  <a:schemeClr val="tx1">
+                    <a:lumMod val="75000"/>
+                    <a:lumOff val="25000"/>
+                  </a:schemeClr>
+                </a:solidFill>
+                <a:latin typeface="Bahnschrift Light" panose="020B0502040204020203" pitchFamily="34" charset="0"/>
+              </a:rPr>
+              <a:t>&gt;{$v/</a:t>
+            </a:r>
+            <a:r>
+              <a:rPr lang="en-US" sz="1600" i="1" dirty="0" err="1">
+                <a:solidFill>
+                  <a:schemeClr val="tx1">
+                    <a:lumMod val="75000"/>
+                    <a:lumOff val="25000"/>
+                  </a:schemeClr>
+                </a:solidFill>
+                <a:latin typeface="Bahnschrift Light" panose="020B0502040204020203" pitchFamily="34" charset="0"/>
+              </a:rPr>
+              <a:t>nev</a:t>
+            </a:r>
+            <a:r>
+              <a:rPr lang="en-US" sz="1600" i="1" dirty="0">
+                <a:solidFill>
+                  <a:schemeClr val="tx1">
+                    <a:lumMod val="75000"/>
+                    <a:lumOff val="25000"/>
+                  </a:schemeClr>
+                </a:solidFill>
+                <a:latin typeface="Bahnschrift Light" panose="020B0502040204020203" pitchFamily="34" charset="0"/>
+              </a:rPr>
+              <a:t>}&lt;/</a:t>
+            </a:r>
+            <a:r>
+              <a:rPr lang="en-US" sz="1600" i="1" dirty="0" err="1">
+                <a:solidFill>
+                  <a:schemeClr val="tx1">
+                    <a:lumMod val="75000"/>
+                    <a:lumOff val="25000"/>
+                  </a:schemeClr>
+                </a:solidFill>
+                <a:latin typeface="Bahnschrift Light" panose="020B0502040204020203" pitchFamily="34" charset="0"/>
+              </a:rPr>
+              <a:t>nev</a:t>
+            </a:r>
+            <a:r>
+              <a:rPr lang="en-US" sz="1600" i="1" dirty="0">
+                <a:solidFill>
+                  <a:schemeClr val="tx1">
+                    <a:lumMod val="75000"/>
+                    <a:lumOff val="25000"/>
+                  </a:schemeClr>
+                </a:solidFill>
+                <a:latin typeface="Bahnschrift Light" panose="020B0502040204020203" pitchFamily="34" charset="0"/>
+              </a:rPr>
+              <a:t>&gt;  </a:t>
+            </a:r>
+            <a:r>
+              <a:rPr lang="hu-HU" sz="1600" i="1" dirty="0">
+                <a:solidFill>
+                  <a:schemeClr val="tx1">
+                    <a:lumMod val="75000"/>
+                    <a:lumOff val="25000"/>
+                  </a:schemeClr>
+                </a:solidFill>
+                <a:latin typeface="Bahnschrift Light" panose="020B0502040204020203" pitchFamily="34" charset="0"/>
+              </a:rPr>
+              <a:t/>
+            </a:r>
+            <a:br>
+              <a:rPr lang="hu-HU" sz="1600" i="1" dirty="0">
+                <a:solidFill>
+                  <a:schemeClr val="tx1">
+                    <a:lumMod val="75000"/>
+                    <a:lumOff val="25000"/>
+                  </a:schemeClr>
+                </a:solidFill>
+                <a:latin typeface="Bahnschrift Light" panose="020B0502040204020203" pitchFamily="34" charset="0"/>
+              </a:rPr>
+            </a:br>
+            <a:r>
+              <a:rPr lang="en-US" sz="1600" i="1" dirty="0">
+                <a:solidFill>
+                  <a:schemeClr val="tx1">
+                    <a:lumMod val="75000"/>
+                    <a:lumOff val="25000"/>
+                  </a:schemeClr>
+                </a:solidFill>
+                <a:latin typeface="Bahnschrift Light" panose="020B0502040204020203" pitchFamily="34" charset="0"/>
+              </a:rPr>
+              <a:t>&lt;</a:t>
+            </a:r>
+            <a:r>
+              <a:rPr lang="en-US" sz="1600" i="1" dirty="0" err="1">
+                <a:solidFill>
+                  <a:schemeClr val="tx1">
+                    <a:lumMod val="75000"/>
+                    <a:lumOff val="25000"/>
+                  </a:schemeClr>
+                </a:solidFill>
+                <a:latin typeface="Bahnschrift Light" panose="020B0502040204020203" pitchFamily="34" charset="0"/>
+              </a:rPr>
+              <a:t>osszeg</a:t>
+            </a:r>
+            <a:r>
+              <a:rPr lang="en-US" sz="1600" i="1" dirty="0">
+                <a:solidFill>
+                  <a:schemeClr val="tx1">
+                    <a:lumMod val="75000"/>
+                    <a:lumOff val="25000"/>
+                  </a:schemeClr>
+                </a:solidFill>
+                <a:latin typeface="Bahnschrift Light" panose="020B0502040204020203" pitchFamily="34" charset="0"/>
+              </a:rPr>
+              <a:t>&gt;{$r/</a:t>
+            </a:r>
+            <a:r>
+              <a:rPr lang="en-US" sz="1600" i="1" dirty="0" err="1">
+                <a:solidFill>
+                  <a:schemeClr val="tx1">
+                    <a:lumMod val="75000"/>
+                    <a:lumOff val="25000"/>
+                  </a:schemeClr>
+                </a:solidFill>
+                <a:latin typeface="Bahnschrift Light" panose="020B0502040204020203" pitchFamily="34" charset="0"/>
+              </a:rPr>
+              <a:t>osszeg</a:t>
+            </a:r>
+            <a:r>
+              <a:rPr lang="en-US" sz="1600" i="1" dirty="0">
+                <a:solidFill>
+                  <a:schemeClr val="tx1">
+                    <a:lumMod val="75000"/>
+                    <a:lumOff val="25000"/>
+                  </a:schemeClr>
+                </a:solidFill>
+                <a:latin typeface="Bahnschrift Light" panose="020B0502040204020203" pitchFamily="34" charset="0"/>
+              </a:rPr>
+              <a:t>}&lt;/</a:t>
+            </a:r>
+            <a:r>
+              <a:rPr lang="en-US" sz="1600" i="1" dirty="0" err="1">
+                <a:solidFill>
+                  <a:schemeClr val="tx1">
+                    <a:lumMod val="75000"/>
+                    <a:lumOff val="25000"/>
+                  </a:schemeClr>
+                </a:solidFill>
+                <a:latin typeface="Bahnschrift Light" panose="020B0502040204020203" pitchFamily="34" charset="0"/>
+              </a:rPr>
+              <a:t>osszeg</a:t>
+            </a:r>
+            <a:r>
+              <a:rPr lang="en-US" sz="1600" i="1" dirty="0">
+                <a:solidFill>
+                  <a:schemeClr val="tx1">
+                    <a:lumMod val="75000"/>
+                    <a:lumOff val="25000"/>
+                  </a:schemeClr>
+                </a:solidFill>
+                <a:latin typeface="Bahnschrift Light" panose="020B0502040204020203" pitchFamily="34" charset="0"/>
+              </a:rPr>
+              <a:t>&gt;</a:t>
+            </a:r>
+            <a:r>
+              <a:rPr lang="hu-HU" sz="1600" i="1" dirty="0">
+                <a:solidFill>
+                  <a:schemeClr val="tx1">
+                    <a:lumMod val="75000"/>
+                    <a:lumOff val="25000"/>
+                  </a:schemeClr>
+                </a:solidFill>
+                <a:latin typeface="Bahnschrift Light" panose="020B0502040204020203" pitchFamily="34" charset="0"/>
+              </a:rPr>
+              <a:t/>
+            </a:r>
+            <a:br>
+              <a:rPr lang="hu-HU" sz="1600" i="1" dirty="0">
+                <a:solidFill>
+                  <a:schemeClr val="tx1">
+                    <a:lumMod val="75000"/>
+                    <a:lumOff val="25000"/>
+                  </a:schemeClr>
+                </a:solidFill>
+                <a:latin typeface="Bahnschrift Light" panose="020B0502040204020203" pitchFamily="34" charset="0"/>
+              </a:rPr>
+            </a:br>
+            <a:r>
+              <a:rPr lang="en-US" sz="1600" i="1" dirty="0">
+                <a:solidFill>
+                  <a:schemeClr val="tx1">
+                    <a:lumMod val="75000"/>
+                    <a:lumOff val="25000"/>
+                  </a:schemeClr>
+                </a:solidFill>
+                <a:latin typeface="Bahnschrift Light" panose="020B0502040204020203" pitchFamily="34" charset="0"/>
+              </a:rPr>
+              <a:t>&lt;/</a:t>
+            </a:r>
+            <a:r>
+              <a:rPr lang="en-US" sz="1600" i="1" dirty="0" err="1">
+                <a:solidFill>
+                  <a:schemeClr val="tx1">
+                    <a:lumMod val="75000"/>
+                    <a:lumOff val="25000"/>
+                  </a:schemeClr>
+                </a:solidFill>
+                <a:latin typeface="Bahnschrift Light" panose="020B0502040204020203" pitchFamily="34" charset="0"/>
+              </a:rPr>
+              <a:t>adat</a:t>
+            </a:r>
+            <a:r>
+              <a:rPr lang="en-US" sz="1600" i="1" dirty="0">
+                <a:solidFill>
+                  <a:schemeClr val="tx1">
+                    <a:lumMod val="75000"/>
+                    <a:lumOff val="25000"/>
+                  </a:schemeClr>
+                </a:solidFill>
+                <a:latin typeface="Bahnschrift Light" panose="020B0502040204020203" pitchFamily="34" charset="0"/>
+              </a:rPr>
+              <a:t>&gt;</a:t>
+            </a:r>
+          </a:p>
+        </p:txBody>
+      </p:sp>
+    </p:spTree>
+    <p:extLst>
+      <p:ext uri="{BB962C8B-B14F-4D97-AF65-F5344CB8AC3E}">
+        <p14:creationId xmlns:p14="http://schemas.microsoft.com/office/powerpoint/2010/main" val="2868948027"/>
+      </p:ext>
+    </p:extLst>
+  </p:cSld>
+  <p:clrMapOvr>
+    <a:masterClrMapping/>
+  </p:clrMapOvr>
+</p:sld>
+</file>
+
+<file path=ppt/slides/slide11.xml><?xml version="1.0" encoding="utf-8"?>
+<p:sld xmlns:a="http://schemas.openxmlformats.org/drawingml/2006/main" xmlns:r="http://schemas.openxmlformats.org/officeDocument/2006/relationships" xmlns:p="http://schemas.openxmlformats.org/presentationml/2006/main">
+  <p:cSld>
+    <p:spTree>
+      <p:nvGrpSpPr>
+        <p:cNvPr id="1" name=""/>
+        <p:cNvGrpSpPr/>
+        <p:nvPr/>
+      </p:nvGrpSpPr>
+      <p:grpSpPr>
+        <a:xfrm>
+          <a:off x="0" y="0"/>
+          <a:ext cx="0" cy="0"/>
+          <a:chOff x="0" y="0"/>
+          <a:chExt cx="0" cy="0"/>
+        </a:xfrm>
+      </p:grpSpPr>
+      <p:sp>
+        <p:nvSpPr>
+          <p:cNvPr id="2" name="Cím 1"/>
+          <p:cNvSpPr>
+            <a:spLocks noGrp="1"/>
+          </p:cNvSpPr>
+          <p:nvPr>
+            <p:ph type="title"/>
+          </p:nvPr>
+        </p:nvSpPr>
+        <p:spPr/>
+        <p:txBody>
+          <a:bodyPr/>
+          <a:lstStyle/>
+          <a:p>
+            <a:r>
+              <a:rPr lang="hu-HU" dirty="0" smtClean="0"/>
+              <a:t>6. Feladat</a:t>
+            </a:r>
+            <a:endParaRPr lang="en-US" dirty="0"/>
+          </a:p>
+        </p:txBody>
+      </p:sp>
+      <p:sp>
+        <p:nvSpPr>
+          <p:cNvPr id="3" name="Tartalom helye 2"/>
+          <p:cNvSpPr>
+            <a:spLocks noGrp="1"/>
+          </p:cNvSpPr>
+          <p:nvPr>
+            <p:ph idx="1"/>
+          </p:nvPr>
+        </p:nvSpPr>
+        <p:spPr>
+          <a:xfrm>
+            <a:off x="2340636" y="2133600"/>
+            <a:ext cx="8915400" cy="3777622"/>
+          </a:xfrm>
+        </p:spPr>
+        <p:txBody>
+          <a:bodyPr/>
+          <a:lstStyle/>
+          <a:p>
+            <a:pPr marL="400050" lvl="1">
+              <a:lnSpc>
+                <a:spcPct val="110000"/>
+              </a:lnSpc>
+            </a:pPr>
+            <a:r>
+              <a:rPr lang="en-US" sz="1800" dirty="0" err="1" smtClean="0"/>
+              <a:t>Növe</a:t>
+            </a:r>
+            <a:r>
+              <a:rPr lang="hu-HU" sz="1800" dirty="0" err="1" smtClean="0"/>
+              <a:t>lje</a:t>
+            </a:r>
+            <a:r>
+              <a:rPr lang="en-US" sz="1800" dirty="0" smtClean="0"/>
+              <a:t> </a:t>
+            </a:r>
+            <a:r>
+              <a:rPr lang="en-US" sz="1800" dirty="0"/>
+              <a:t>meg </a:t>
+            </a:r>
+            <a:r>
+              <a:rPr lang="en-US" sz="1800" dirty="0" err="1"/>
+              <a:t>minden</a:t>
+            </a:r>
+            <a:r>
+              <a:rPr lang="en-US" sz="1800" dirty="0"/>
+              <a:t> </a:t>
+            </a:r>
+            <a:r>
+              <a:rPr lang="en-US" sz="1800" dirty="0" err="1"/>
+              <a:t>rendelés</a:t>
+            </a:r>
+            <a:r>
+              <a:rPr lang="en-US" sz="1800" dirty="0"/>
+              <a:t> </a:t>
+            </a:r>
+            <a:r>
+              <a:rPr lang="en-US" sz="1800" dirty="0" err="1"/>
+              <a:t>összegét</a:t>
+            </a:r>
+            <a:r>
+              <a:rPr lang="en-US" sz="1800" dirty="0"/>
+              <a:t> 1000 Ft-</a:t>
+            </a:r>
+            <a:r>
+              <a:rPr lang="en-US" sz="1800" dirty="0" err="1"/>
+              <a:t>tal</a:t>
+            </a:r>
+            <a:r>
+              <a:rPr lang="en-US" sz="1800" dirty="0"/>
+              <a:t>!</a:t>
+            </a:r>
+            <a:r>
+              <a:rPr lang="hu-HU" sz="1800" dirty="0"/>
+              <a:t> (update)</a:t>
+            </a:r>
+            <a:br>
+              <a:rPr lang="hu-HU" sz="1800" dirty="0"/>
+            </a:br>
+            <a:r>
+              <a:rPr lang="hu-HU" dirty="0"/>
+              <a:t/>
+            </a:r>
+            <a:br>
+              <a:rPr lang="hu-HU" dirty="0"/>
+            </a:br>
+            <a:r>
+              <a:rPr lang="hu-HU" i="1" dirty="0" err="1">
+                <a:latin typeface="Bahnschrift Light" panose="020B0502040204020203" pitchFamily="34" charset="0"/>
+              </a:rPr>
+              <a:t>for</a:t>
+            </a:r>
+            <a:r>
+              <a:rPr lang="hu-HU" i="1" dirty="0">
+                <a:latin typeface="Bahnschrift Light" panose="020B0502040204020203" pitchFamily="34" charset="0"/>
+              </a:rPr>
+              <a:t> $r in </a:t>
+            </a:r>
+            <a:r>
+              <a:rPr lang="hu-HU" i="1" dirty="0" err="1">
+                <a:latin typeface="Bahnschrift Light" panose="020B0502040204020203" pitchFamily="34" charset="0"/>
+              </a:rPr>
+              <a:t>doc</a:t>
+            </a:r>
+            <a:r>
+              <a:rPr lang="hu-HU" i="1" dirty="0">
+                <a:latin typeface="Bahnschrift Light" panose="020B0502040204020203" pitchFamily="34" charset="0"/>
+              </a:rPr>
+              <a:t>("/db/etterem.xml")//</a:t>
+            </a:r>
+            <a:r>
+              <a:rPr lang="hu-HU" i="1" dirty="0" err="1">
+                <a:latin typeface="Bahnschrift Light" panose="020B0502040204020203" pitchFamily="34" charset="0"/>
+              </a:rPr>
+              <a:t>rendelesreturnupdate</a:t>
+            </a:r>
+            <a:r>
+              <a:rPr lang="hu-HU" i="1" dirty="0">
+                <a:latin typeface="Bahnschrift Light" panose="020B0502040204020203" pitchFamily="34" charset="0"/>
+              </a:rPr>
+              <a:t> </a:t>
+            </a:r>
+            <a:r>
+              <a:rPr lang="hu-HU" i="1" dirty="0" err="1">
+                <a:latin typeface="Bahnschrift Light" panose="020B0502040204020203" pitchFamily="34" charset="0"/>
+              </a:rPr>
+              <a:t>value</a:t>
+            </a:r>
+            <a:r>
+              <a:rPr lang="hu-HU" i="1" dirty="0">
+                <a:latin typeface="Bahnschrift Light" panose="020B0502040204020203" pitchFamily="34" charset="0"/>
+              </a:rPr>
+              <a:t> $r/</a:t>
+            </a:r>
+            <a:r>
+              <a:rPr lang="hu-HU" i="1" dirty="0" err="1">
+                <a:latin typeface="Bahnschrift Light" panose="020B0502040204020203" pitchFamily="34" charset="0"/>
+              </a:rPr>
+              <a:t>osszeg</a:t>
+            </a:r>
+            <a:r>
+              <a:rPr lang="hu-HU" i="1" dirty="0">
+                <a:latin typeface="Bahnschrift Light" panose="020B0502040204020203" pitchFamily="34" charset="0"/>
+              </a:rPr>
+              <a:t> </a:t>
+            </a:r>
+            <a:r>
+              <a:rPr lang="hu-HU" i="1" dirty="0" err="1">
+                <a:latin typeface="Bahnschrift Light" panose="020B0502040204020203" pitchFamily="34" charset="0"/>
+              </a:rPr>
+              <a:t>with</a:t>
+            </a:r>
+            <a:r>
+              <a:rPr lang="hu-HU" i="1" dirty="0">
+                <a:latin typeface="Bahnschrift Light" panose="020B0502040204020203" pitchFamily="34" charset="0"/>
+              </a:rPr>
+              <a:t> $r/</a:t>
+            </a:r>
+            <a:r>
+              <a:rPr lang="hu-HU" i="1" dirty="0" err="1">
+                <a:latin typeface="Bahnschrift Light" panose="020B0502040204020203" pitchFamily="34" charset="0"/>
+              </a:rPr>
+              <a:t>osszeg</a:t>
+            </a:r>
+            <a:r>
+              <a:rPr lang="hu-HU" i="1" dirty="0">
+                <a:latin typeface="Bahnschrift Light" panose="020B0502040204020203" pitchFamily="34" charset="0"/>
+              </a:rPr>
+              <a:t> + 1000</a:t>
+            </a:r>
+            <a:endParaRPr lang="en-US" i="1" dirty="0">
+              <a:latin typeface="Bahnschrift Light" panose="020B0502040204020203" pitchFamily="34" charset="0"/>
+            </a:endParaRPr>
+          </a:p>
+        </p:txBody>
+      </p:sp>
+      <p:pic>
+        <p:nvPicPr>
+          <p:cNvPr id="4" name="Kép 3"/>
+          <p:cNvPicPr>
+            <a:picLocks noChangeAspect="1"/>
+          </p:cNvPicPr>
+          <p:nvPr/>
+        </p:nvPicPr>
+        <p:blipFill>
+          <a:blip r:embed="rId2"/>
+          <a:stretch>
+            <a:fillRect/>
+          </a:stretch>
+        </p:blipFill>
+        <p:spPr>
+          <a:xfrm>
+            <a:off x="4540855" y="3354905"/>
+            <a:ext cx="2978531" cy="2556317"/>
+          </a:xfrm>
+          <a:prstGeom prst="rect">
+            <a:avLst/>
+          </a:prstGeom>
+        </p:spPr>
+      </p:pic>
+    </p:spTree>
+    <p:extLst>
+      <p:ext uri="{BB962C8B-B14F-4D97-AF65-F5344CB8AC3E}">
+        <p14:creationId xmlns:p14="http://schemas.microsoft.com/office/powerpoint/2010/main" val="4048655835"/>
+      </p:ext>
+    </p:extLst>
+  </p:cSld>
+  <p:clrMapOvr>
+    <a:masterClrMapping/>
+  </p:clrMapOvr>
+</p:sld>
+</file>
+
+<file path=ppt/slides/slide12.xml><?xml version="1.0" encoding="utf-8"?>
+<p:sld xmlns:a="http://schemas.openxmlformats.org/drawingml/2006/main" xmlns:r="http://schemas.openxmlformats.org/officeDocument/2006/relationships" xmlns:p="http://schemas.openxmlformats.org/presentationml/2006/main">
+  <p:cSld>
+    <p:spTree>
+      <p:nvGrpSpPr>
+        <p:cNvPr id="1" name=""/>
+        <p:cNvGrpSpPr/>
+        <p:nvPr/>
+      </p:nvGrpSpPr>
+      <p:grpSpPr>
+        <a:xfrm>
+          <a:off x="0" y="0"/>
+          <a:ext cx="0" cy="0"/>
+          <a:chOff x="0" y="0"/>
+          <a:chExt cx="0" cy="0"/>
+        </a:xfrm>
+      </p:grpSpPr>
+      <p:sp>
+        <p:nvSpPr>
+          <p:cNvPr id="2" name="Cím 1"/>
+          <p:cNvSpPr>
+            <a:spLocks noGrp="1"/>
+          </p:cNvSpPr>
+          <p:nvPr>
+            <p:ph type="title"/>
+          </p:nvPr>
+        </p:nvSpPr>
+        <p:spPr/>
+        <p:txBody>
+          <a:bodyPr/>
+          <a:lstStyle/>
+          <a:p>
+            <a:r>
+              <a:rPr lang="hu-HU" dirty="0" smtClean="0"/>
+              <a:t>7. Feladat</a:t>
+            </a:r>
+            <a:endParaRPr lang="en-US" dirty="0"/>
+          </a:p>
+        </p:txBody>
+      </p:sp>
+      <p:sp>
+        <p:nvSpPr>
+          <p:cNvPr id="3" name="Tartalom helye 2"/>
+          <p:cNvSpPr>
+            <a:spLocks noGrp="1"/>
+          </p:cNvSpPr>
+          <p:nvPr>
+            <p:ph idx="1"/>
+          </p:nvPr>
+        </p:nvSpPr>
+        <p:spPr>
+          <a:xfrm>
+            <a:off x="2731254" y="2204621"/>
+            <a:ext cx="8915400" cy="3777622"/>
+          </a:xfrm>
+        </p:spPr>
+        <p:txBody>
+          <a:bodyPr/>
+          <a:lstStyle/>
+          <a:p>
+            <a:pPr>
+              <a:lnSpc>
+                <a:spcPct val="150000"/>
+              </a:lnSpc>
+            </a:pPr>
+            <a:r>
+              <a:rPr lang="hu-HU" dirty="0" smtClean="0"/>
+              <a:t>Hány rendelés van </a:t>
+            </a:r>
+            <a:r>
+              <a:rPr lang="hu-HU" dirty="0" smtClean="0"/>
+              <a:t>összesen</a:t>
+            </a:r>
+          </a:p>
+          <a:p>
+            <a:pPr marL="457200" lvl="1" indent="0">
+              <a:lnSpc>
+                <a:spcPct val="150000"/>
+              </a:lnSpc>
+              <a:buNone/>
+            </a:pPr>
+            <a:r>
+              <a:rPr lang="en-US" i="1" dirty="0">
+                <a:latin typeface="Bahnschrift Light" panose="020B0502040204020203" pitchFamily="34" charset="0"/>
+              </a:rPr>
+              <a:t>count(doc("/</a:t>
+            </a:r>
+            <a:r>
+              <a:rPr lang="en-US" i="1" dirty="0" err="1">
+                <a:latin typeface="Bahnschrift Light" panose="020B0502040204020203" pitchFamily="34" charset="0"/>
+              </a:rPr>
+              <a:t>db</a:t>
+            </a:r>
+            <a:r>
+              <a:rPr lang="en-US" i="1" dirty="0">
+                <a:latin typeface="Bahnschrift Light" panose="020B0502040204020203" pitchFamily="34" charset="0"/>
+              </a:rPr>
+              <a:t>/etterem.xml")//</a:t>
+            </a:r>
+            <a:r>
+              <a:rPr lang="en-US" i="1" dirty="0" err="1">
+                <a:latin typeface="Bahnschrift Light" panose="020B0502040204020203" pitchFamily="34" charset="0"/>
+              </a:rPr>
+              <a:t>rendeles</a:t>
+            </a:r>
+            <a:r>
+              <a:rPr lang="en-US" i="1" dirty="0">
+                <a:latin typeface="Bahnschrift Light" panose="020B0502040204020203" pitchFamily="34" charset="0"/>
+              </a:rPr>
+              <a:t>)</a:t>
+            </a:r>
+            <a:endParaRPr lang="hu-HU" i="1" dirty="0">
+              <a:latin typeface="Bahnschrift Light" panose="020B0502040204020203" pitchFamily="34" charset="0"/>
+            </a:endParaRPr>
+          </a:p>
+          <a:p>
+            <a:pPr>
+              <a:lnSpc>
+                <a:spcPct val="150000"/>
+              </a:lnSpc>
+            </a:pPr>
+            <a:r>
+              <a:rPr lang="hu-HU" dirty="0" smtClean="0"/>
+              <a:t>Mennyi az összes rendelés </a:t>
+            </a:r>
+            <a:r>
+              <a:rPr lang="hu-HU" dirty="0" smtClean="0"/>
+              <a:t>értéke</a:t>
+            </a:r>
+          </a:p>
+          <a:p>
+            <a:pPr marL="0" lvl="1" indent="0">
+              <a:lnSpc>
+                <a:spcPct val="150000"/>
+              </a:lnSpc>
+              <a:buNone/>
+            </a:pPr>
+            <a:r>
+              <a:rPr lang="hu-HU" dirty="0"/>
+              <a:t>	</a:t>
+            </a:r>
+            <a:r>
+              <a:rPr lang="en-US" i="1" dirty="0">
+                <a:latin typeface="Bahnschrift Light" panose="020B0502040204020203" pitchFamily="34" charset="0"/>
+              </a:rPr>
+              <a:t>sum(doc("/</a:t>
+            </a:r>
+            <a:r>
+              <a:rPr lang="en-US" i="1" dirty="0" err="1">
+                <a:latin typeface="Bahnschrift Light" panose="020B0502040204020203" pitchFamily="34" charset="0"/>
+              </a:rPr>
+              <a:t>db</a:t>
+            </a:r>
+            <a:r>
+              <a:rPr lang="en-US" i="1" dirty="0">
+                <a:latin typeface="Bahnschrift Light" panose="020B0502040204020203" pitchFamily="34" charset="0"/>
+              </a:rPr>
+              <a:t>/etterem.xml")//</a:t>
+            </a:r>
+            <a:r>
+              <a:rPr lang="en-US" i="1" dirty="0" err="1">
+                <a:latin typeface="Bahnschrift Light" panose="020B0502040204020203" pitchFamily="34" charset="0"/>
+              </a:rPr>
+              <a:t>rendeles</a:t>
+            </a:r>
+            <a:r>
+              <a:rPr lang="en-US" i="1" dirty="0">
+                <a:latin typeface="Bahnschrift Light" panose="020B0502040204020203" pitchFamily="34" charset="0"/>
+              </a:rPr>
+              <a:t>/</a:t>
+            </a:r>
+            <a:r>
+              <a:rPr lang="en-US" i="1" dirty="0" err="1">
+                <a:latin typeface="Bahnschrift Light" panose="020B0502040204020203" pitchFamily="34" charset="0"/>
+              </a:rPr>
+              <a:t>osszeg</a:t>
+            </a:r>
+            <a:r>
+              <a:rPr lang="en-US" i="1" dirty="0">
+                <a:latin typeface="Bahnschrift Light" panose="020B0502040204020203" pitchFamily="34" charset="0"/>
+              </a:rPr>
+              <a:t>)</a:t>
+            </a:r>
+            <a:endParaRPr lang="hu-HU" i="1" dirty="0">
+              <a:latin typeface="Bahnschrift Light" panose="020B0502040204020203" pitchFamily="34" charset="0"/>
+            </a:endParaRPr>
+          </a:p>
+          <a:p>
+            <a:pPr>
+              <a:lnSpc>
+                <a:spcPct val="150000"/>
+              </a:lnSpc>
+            </a:pPr>
+            <a:r>
+              <a:rPr lang="hu-HU" dirty="0" smtClean="0"/>
+              <a:t>Átlagos rendelési érték</a:t>
+            </a:r>
+          </a:p>
+          <a:p>
+            <a:pPr marL="0" lvl="1" indent="0">
+              <a:lnSpc>
+                <a:spcPct val="150000"/>
+              </a:lnSpc>
+              <a:buNone/>
+            </a:pPr>
+            <a:r>
+              <a:rPr lang="hu-HU" i="1" dirty="0" smtClean="0">
+                <a:latin typeface="Bahnschrift Light" panose="020B0502040204020203" pitchFamily="34" charset="0"/>
+              </a:rPr>
+              <a:t>	</a:t>
+            </a:r>
+            <a:r>
+              <a:rPr lang="en-US" i="1" dirty="0" err="1" smtClean="0">
+                <a:latin typeface="Bahnschrift Light" panose="020B0502040204020203" pitchFamily="34" charset="0"/>
+              </a:rPr>
+              <a:t>avg</a:t>
+            </a:r>
+            <a:r>
+              <a:rPr lang="en-US" i="1" dirty="0" smtClean="0">
+                <a:latin typeface="Bahnschrift Light" panose="020B0502040204020203" pitchFamily="34" charset="0"/>
+              </a:rPr>
+              <a:t>(doc</a:t>
+            </a:r>
+            <a:r>
+              <a:rPr lang="en-US" i="1" dirty="0">
+                <a:latin typeface="Bahnschrift Light" panose="020B0502040204020203" pitchFamily="34" charset="0"/>
+              </a:rPr>
+              <a:t>("/</a:t>
+            </a:r>
+            <a:r>
+              <a:rPr lang="en-US" i="1" dirty="0" err="1">
+                <a:latin typeface="Bahnschrift Light" panose="020B0502040204020203" pitchFamily="34" charset="0"/>
+              </a:rPr>
+              <a:t>db</a:t>
+            </a:r>
+            <a:r>
+              <a:rPr lang="en-US" i="1" dirty="0">
+                <a:latin typeface="Bahnschrift Light" panose="020B0502040204020203" pitchFamily="34" charset="0"/>
+              </a:rPr>
+              <a:t>/etterem.xml</a:t>
+            </a:r>
+            <a:r>
+              <a:rPr lang="en-US" i="1" dirty="0">
+                <a:latin typeface="Bahnschrift Light" panose="020B0502040204020203" pitchFamily="34" charset="0"/>
+              </a:rPr>
+              <a:t>")//</a:t>
+            </a:r>
+            <a:r>
+              <a:rPr lang="en-US" i="1" dirty="0" err="1">
+                <a:latin typeface="Bahnschrift Light" panose="020B0502040204020203" pitchFamily="34" charset="0"/>
+              </a:rPr>
+              <a:t>rendeles</a:t>
+            </a:r>
+            <a:r>
+              <a:rPr lang="en-US" i="1" dirty="0">
+                <a:latin typeface="Bahnschrift Light" panose="020B0502040204020203" pitchFamily="34" charset="0"/>
+              </a:rPr>
+              <a:t>/</a:t>
+            </a:r>
+            <a:r>
+              <a:rPr lang="en-US" i="1" dirty="0" err="1">
+                <a:latin typeface="Bahnschrift Light" panose="020B0502040204020203" pitchFamily="34" charset="0"/>
+              </a:rPr>
+              <a:t>osszeg</a:t>
+            </a:r>
+            <a:r>
+              <a:rPr lang="en-US" i="1" dirty="0">
+                <a:latin typeface="Bahnschrift Light" panose="020B0502040204020203" pitchFamily="34" charset="0"/>
+              </a:rPr>
+              <a:t>)</a:t>
+            </a:r>
+          </a:p>
+        </p:txBody>
+      </p:sp>
+    </p:spTree>
+    <p:extLst>
+      <p:ext uri="{BB962C8B-B14F-4D97-AF65-F5344CB8AC3E}">
+        <p14:creationId xmlns:p14="http://schemas.microsoft.com/office/powerpoint/2010/main" val="4189422738"/>
+      </p:ext>
+    </p:extLst>
+  </p:cSld>
+  <p:clrMapOvr>
+    <a:masterClrMapping/>
+  </p:clrMapOvr>
+</p:sld>
+</file>
+
+<file path=ppt/slides/slide13.xml><?xml version="1.0" encoding="utf-8"?>
 <p:sld xmlns:a="http://schemas.openxmlformats.org/drawingml/2006/main" xmlns:r="http://schemas.openxmlformats.org/officeDocument/2006/relationships" xmlns:p="http://schemas.openxmlformats.org/presentationml/2006/main">
   <p:cSld>
     <p:spTree>

--- a/Y4O4X0_0318/Xquery.pptx
+++ b/Y4O4X0_0318/Xquery.pptx
@@ -312,7 +312,7 @@
           <a:p>
             <a:fld id="{9FFE2455-E091-4BD6-840D-D056C88E8DD0}" type="datetimeFigureOut">
               <a:rPr lang="en-US" smtClean="0"/>
-              <a:t>3/17/2026</a:t>
+              <a:t>3/25/2026</a:t>
             </a:fld>
             <a:endParaRPr lang="en-US"/>
           </a:p>
@@ -657,7 +657,7 @@
           <a:p>
             <a:fld id="{9FFE2455-E091-4BD6-840D-D056C88E8DD0}" type="datetimeFigureOut">
               <a:rPr lang="en-US" smtClean="0"/>
-              <a:t>3/17/2026</a:t>
+              <a:t>3/25/2026</a:t>
             </a:fld>
             <a:endParaRPr lang="en-US"/>
           </a:p>
@@ -1058,7 +1058,7 @@
           <a:p>
             <a:fld id="{9FFE2455-E091-4BD6-840D-D056C88E8DD0}" type="datetimeFigureOut">
               <a:rPr lang="en-US" smtClean="0"/>
-              <a:t>3/17/2026</a:t>
+              <a:t>3/25/2026</a:t>
             </a:fld>
             <a:endParaRPr lang="en-US"/>
           </a:p>
@@ -1394,7 +1394,7 @@
           <a:p>
             <a:fld id="{9FFE2455-E091-4BD6-840D-D056C88E8DD0}" type="datetimeFigureOut">
               <a:rPr lang="en-US" smtClean="0"/>
-              <a:t>3/17/2026</a:t>
+              <a:t>3/25/2026</a:t>
             </a:fld>
             <a:endParaRPr lang="en-US"/>
           </a:p>
@@ -1714,7 +1714,7 @@
           <a:p>
             <a:fld id="{9FFE2455-E091-4BD6-840D-D056C88E8DD0}" type="datetimeFigureOut">
               <a:rPr lang="en-US" smtClean="0"/>
-              <a:t>3/17/2026</a:t>
+              <a:t>3/25/2026</a:t>
             </a:fld>
             <a:endParaRPr lang="en-US"/>
           </a:p>
@@ -2110,7 +2110,7 @@
           <a:p>
             <a:fld id="{9FFE2455-E091-4BD6-840D-D056C88E8DD0}" type="datetimeFigureOut">
               <a:rPr lang="en-US" smtClean="0"/>
-              <a:t>3/17/2026</a:t>
+              <a:t>3/25/2026</a:t>
             </a:fld>
             <a:endParaRPr lang="en-US"/>
           </a:p>
@@ -2367,7 +2367,7 @@
           <a:p>
             <a:fld id="{9FFE2455-E091-4BD6-840D-D056C88E8DD0}" type="datetimeFigureOut">
               <a:rPr lang="en-US" smtClean="0"/>
-              <a:t>3/17/2026</a:t>
+              <a:t>3/25/2026</a:t>
             </a:fld>
             <a:endParaRPr lang="en-US"/>
           </a:p>
@@ -2629,7 +2629,7 @@
           <a:p>
             <a:fld id="{9FFE2455-E091-4BD6-840D-D056C88E8DD0}" type="datetimeFigureOut">
               <a:rPr lang="en-US" smtClean="0"/>
-              <a:t>3/17/2026</a:t>
+              <a:t>3/25/2026</a:t>
             </a:fld>
             <a:endParaRPr lang="en-US"/>
           </a:p>
@@ -2891,7 +2891,7 @@
           <a:p>
             <a:fld id="{9FFE2455-E091-4BD6-840D-D056C88E8DD0}" type="datetimeFigureOut">
               <a:rPr lang="en-US" smtClean="0"/>
-              <a:t>3/17/2026</a:t>
+              <a:t>3/25/2026</a:t>
             </a:fld>
             <a:endParaRPr lang="en-US"/>
           </a:p>
@@ -3220,7 +3220,7 @@
           <a:p>
             <a:fld id="{9FFE2455-E091-4BD6-840D-D056C88E8DD0}" type="datetimeFigureOut">
               <a:rPr lang="en-US" smtClean="0"/>
-              <a:t>3/17/2026</a:t>
+              <a:t>3/25/2026</a:t>
             </a:fld>
             <a:endParaRPr lang="en-US"/>
           </a:p>
@@ -3543,7 +3543,7 @@
           <a:p>
             <a:fld id="{9FFE2455-E091-4BD6-840D-D056C88E8DD0}" type="datetimeFigureOut">
               <a:rPr lang="en-US" smtClean="0"/>
-              <a:t>3/17/2026</a:t>
+              <a:t>3/25/2026</a:t>
             </a:fld>
             <a:endParaRPr lang="en-US"/>
           </a:p>
@@ -4000,7 +4000,7 @@
           <a:p>
             <a:fld id="{9FFE2455-E091-4BD6-840D-D056C88E8DD0}" type="datetimeFigureOut">
               <a:rPr lang="en-US" smtClean="0"/>
-              <a:t>3/17/2026</a:t>
+              <a:t>3/25/2026</a:t>
             </a:fld>
             <a:endParaRPr lang="en-US"/>
           </a:p>
@@ -4205,7 +4205,7 @@
           <a:p>
             <a:fld id="{9FFE2455-E091-4BD6-840D-D056C88E8DD0}" type="datetimeFigureOut">
               <a:rPr lang="en-US" smtClean="0"/>
-              <a:t>3/17/2026</a:t>
+              <a:t>3/25/2026</a:t>
             </a:fld>
             <a:endParaRPr lang="en-US"/>
           </a:p>
@@ -4382,7 +4382,7 @@
           <a:p>
             <a:fld id="{9FFE2455-E091-4BD6-840D-D056C88E8DD0}" type="datetimeFigureOut">
               <a:rPr lang="en-US" smtClean="0"/>
-              <a:t>3/17/2026</a:t>
+              <a:t>3/25/2026</a:t>
             </a:fld>
             <a:endParaRPr lang="en-US"/>
           </a:p>
@@ -4715,7 +4715,7 @@
           <a:p>
             <a:fld id="{9FFE2455-E091-4BD6-840D-D056C88E8DD0}" type="datetimeFigureOut">
               <a:rPr lang="en-US" smtClean="0"/>
-              <a:t>3/17/2026</a:t>
+              <a:t>3/25/2026</a:t>
             </a:fld>
             <a:endParaRPr lang="en-US"/>
           </a:p>
@@ -5060,7 +5060,7 @@
           <a:p>
             <a:fld id="{9FFE2455-E091-4BD6-840D-D056C88E8DD0}" type="datetimeFigureOut">
               <a:rPr lang="en-US" smtClean="0"/>
-              <a:t>3/17/2026</a:t>
+              <a:t>3/25/2026</a:t>
             </a:fld>
             <a:endParaRPr lang="en-US"/>
           </a:p>
@@ -7352,7 +7352,7 @@
           <a:p>
             <a:fld id="{9FFE2455-E091-4BD6-840D-D056C88E8DD0}" type="datetimeFigureOut">
               <a:rPr lang="en-US" smtClean="0"/>
-              <a:t>3/17/2026</a:t>
+              <a:t>3/25/2026</a:t>
             </a:fld>
             <a:endParaRPr lang="en-US"/>
           </a:p>
@@ -7977,7 +7977,7 @@
           <a:lstStyle/>
           <a:p>
             <a:r>
-              <a:rPr lang="hu-HU" dirty="0" smtClean="0"/>
+              <a:rPr lang="hu-HU" dirty="0"/>
               <a:t>5. Feladat</a:t>
             </a:r>
             <a:endParaRPr lang="en-US" dirty="0"/>
@@ -8044,11 +8044,11 @@
               </a:buClr>
             </a:pPr>
             <a:r>
-              <a:rPr lang="en-US" dirty="0" err="1" smtClean="0"/>
+              <a:rPr lang="en-US" dirty="0" err="1"/>
               <a:t>L</a:t>
             </a:r>
             <a:r>
-              <a:rPr lang="en-US" dirty="0" err="1" smtClean="0">
+              <a:rPr lang="en-US" dirty="0" err="1">
                 <a:solidFill>
                   <a:schemeClr val="tx1">
                     <a:lumMod val="75000"/>
@@ -8059,7 +8059,7 @@
               <a:t>istázza</a:t>
             </a:r>
             <a:r>
-              <a:rPr lang="hu-HU" dirty="0" smtClean="0">
+              <a:rPr lang="hu-HU" dirty="0">
                 <a:solidFill>
                   <a:schemeClr val="tx1">
                     <a:lumMod val="75000"/>
@@ -8070,7 +8070,7 @@
               <a:t> ki</a:t>
             </a:r>
             <a:r>
-              <a:rPr lang="en-US" dirty="0" smtClean="0">
+              <a:rPr lang="en-US" dirty="0">
                 <a:solidFill>
                   <a:schemeClr val="tx1">
                     <a:lumMod val="75000"/>
@@ -8078,10 +8078,10 @@
                   </a:schemeClr>
                 </a:solidFill>
               </a:rPr>
-              <a:t> </a:t>
-            </a:r>
-            <a:r>
-              <a:rPr lang="en-US" dirty="0">
+              <a:t> a </a:t>
+            </a:r>
+            <a:r>
+              <a:rPr lang="en-US" dirty="0" err="1">
                 <a:solidFill>
                   <a:schemeClr val="tx1">
                     <a:lumMod val="75000"/>
@@ -8089,10 +8089,10 @@
                   </a:schemeClr>
                 </a:solidFill>
               </a:rPr>
-              <a:t>a </a:t>
-            </a:r>
-            <a:r>
-              <a:rPr lang="en-US" dirty="0" err="1">
+              <a:t>vendégek</a:t>
+            </a:r>
+            <a:r>
+              <a:rPr lang="en-US" dirty="0">
                 <a:solidFill>
                   <a:schemeClr val="tx1">
                     <a:lumMod val="75000"/>
@@ -8100,10 +8100,10 @@
                   </a:schemeClr>
                 </a:solidFill>
               </a:rPr>
-              <a:t>vendégek</a:t>
-            </a:r>
-            <a:r>
-              <a:rPr lang="en-US" dirty="0">
+              <a:t> </a:t>
+            </a:r>
+            <a:r>
+              <a:rPr lang="en-US" dirty="0" err="1">
                 <a:solidFill>
                   <a:schemeClr val="tx1">
                     <a:lumMod val="75000"/>
@@ -8111,10 +8111,10 @@
                   </a:schemeClr>
                 </a:solidFill>
               </a:rPr>
-              <a:t> </a:t>
-            </a:r>
-            <a:r>
-              <a:rPr lang="en-US" dirty="0" err="1">
+              <a:t>nevét</a:t>
+            </a:r>
+            <a:r>
+              <a:rPr lang="en-US" dirty="0">
                 <a:solidFill>
                   <a:schemeClr val="tx1">
                     <a:lumMod val="75000"/>
@@ -8122,10 +8122,10 @@
                   </a:schemeClr>
                 </a:solidFill>
               </a:rPr>
-              <a:t>nevét</a:t>
-            </a:r>
-            <a:r>
-              <a:rPr lang="en-US" dirty="0">
+              <a:t> </a:t>
+            </a:r>
+            <a:r>
+              <a:rPr lang="en-US" dirty="0" err="1">
                 <a:solidFill>
                   <a:schemeClr val="tx1">
                     <a:lumMod val="75000"/>
@@ -8133,10 +8133,10 @@
                   </a:schemeClr>
                 </a:solidFill>
               </a:rPr>
-              <a:t> </a:t>
-            </a:r>
-            <a:r>
-              <a:rPr lang="en-US" dirty="0" err="1">
+              <a:t>és</a:t>
+            </a:r>
+            <a:r>
+              <a:rPr lang="en-US" dirty="0">
                 <a:solidFill>
                   <a:schemeClr val="tx1">
                     <a:lumMod val="75000"/>
@@ -8144,10 +8144,10 @@
                   </a:schemeClr>
                 </a:solidFill>
               </a:rPr>
-              <a:t>és</a:t>
-            </a:r>
-            <a:r>
-              <a:rPr lang="en-US" dirty="0">
+              <a:t> a </a:t>
+            </a:r>
+            <a:r>
+              <a:rPr lang="en-US" dirty="0" err="1">
                 <a:solidFill>
                   <a:schemeClr val="tx1">
                     <a:lumMod val="75000"/>
@@ -8155,10 +8155,10 @@
                   </a:schemeClr>
                 </a:solidFill>
               </a:rPr>
-              <a:t> a </a:t>
-            </a:r>
-            <a:r>
-              <a:rPr lang="en-US" dirty="0" err="1">
+              <a:t>rendeléseik</a:t>
+            </a:r>
+            <a:r>
+              <a:rPr lang="en-US" dirty="0">
                 <a:solidFill>
                   <a:schemeClr val="tx1">
                     <a:lumMod val="75000"/>
@@ -8166,10 +8166,10 @@
                   </a:schemeClr>
                 </a:solidFill>
               </a:rPr>
-              <a:t>rendeléseik</a:t>
-            </a:r>
-            <a:r>
-              <a:rPr lang="en-US" dirty="0">
+              <a:t> </a:t>
+            </a:r>
+            <a:r>
+              <a:rPr lang="en-US" dirty="0" err="1">
                 <a:solidFill>
                   <a:schemeClr val="tx1">
                     <a:lumMod val="75000"/>
@@ -8177,10 +8177,10 @@
                   </a:schemeClr>
                 </a:solidFill>
               </a:rPr>
-              <a:t> </a:t>
-            </a:r>
-            <a:r>
-              <a:rPr lang="en-US" dirty="0" err="1">
+              <a:t>összegét</a:t>
+            </a:r>
+            <a:r>
+              <a:rPr lang="en-US" dirty="0">
                 <a:solidFill>
                   <a:schemeClr val="tx1">
                     <a:lumMod val="75000"/>
@@ -8188,10 +8188,10 @@
                   </a:schemeClr>
                 </a:solidFill>
               </a:rPr>
-              <a:t>összegét</a:t>
-            </a:r>
-            <a:r>
-              <a:rPr lang="en-US" dirty="0">
+              <a:t>!</a:t>
+            </a:r>
+            <a:r>
+              <a:rPr lang="hu-HU" dirty="0">
                 <a:solidFill>
                   <a:schemeClr val="tx1">
                     <a:lumMod val="75000"/>
@@ -8199,10 +8199,10 @@
                   </a:schemeClr>
                 </a:solidFill>
               </a:rPr>
-              <a:t>!</a:t>
-            </a:r>
-            <a:r>
-              <a:rPr lang="hu-HU" dirty="0">
+              <a:t> (</a:t>
+            </a:r>
+            <a:r>
+              <a:rPr lang="hu-HU" dirty="0" err="1">
                 <a:solidFill>
                   <a:schemeClr val="tx1">
                     <a:lumMod val="75000"/>
@@ -8210,10 +8210,10 @@
                   </a:schemeClr>
                 </a:solidFill>
               </a:rPr>
-              <a:t> (</a:t>
-            </a:r>
-            <a:r>
-              <a:rPr lang="hu-HU" dirty="0" err="1">
+              <a:t>join</a:t>
+            </a:r>
+            <a:r>
+              <a:rPr lang="hu-HU" dirty="0">
                 <a:solidFill>
                   <a:schemeClr val="tx1">
                     <a:lumMod val="75000"/>
@@ -8221,35 +8221,28 @@
                   </a:schemeClr>
                 </a:solidFill>
               </a:rPr>
-              <a:t>join</a:t>
-            </a:r>
-            <a:r>
-              <a:rPr lang="hu-HU" dirty="0">
+              <a:t>)</a:t>
+            </a:r>
+            <a:br>
+              <a:rPr lang="hu-HU" dirty="0"/>
+            </a:br>
+            <a:br>
+              <a:rPr lang="hu-HU" dirty="0"/>
+            </a:br>
+            <a:r>
+              <a:rPr lang="en-US" sz="1600" i="1" dirty="0">
                 <a:solidFill>
                   <a:schemeClr val="tx1">
                     <a:lumMod val="75000"/>
                     <a:lumOff val="25000"/>
                   </a:schemeClr>
                 </a:solidFill>
-              </a:rPr>
-              <a:t>)</a:t>
-            </a:r>
-            <a:r>
-              <a:rPr lang="hu-HU" dirty="0" smtClean="0"/>
-              <a:t/>
-            </a:r>
-            <a:br>
-              <a:rPr lang="hu-HU" dirty="0" smtClean="0"/>
-            </a:br>
-            <a:r>
-              <a:rPr lang="hu-HU" dirty="0" smtClean="0"/>
-              <a:t/>
-            </a:r>
-            <a:br>
-              <a:rPr lang="hu-HU" dirty="0" smtClean="0"/>
-            </a:br>
-            <a:r>
-              <a:rPr lang="en-US" sz="1600" i="1" dirty="0">
+                <a:latin typeface="Bahnschrift Light" panose="020B0502040204020203" pitchFamily="34" charset="0"/>
+              </a:rPr>
+              <a:t>for $v in doc("/</a:t>
+            </a:r>
+            <a:r>
+              <a:rPr lang="en-US" sz="1600" i="1" dirty="0" err="1">
                 <a:solidFill>
                   <a:schemeClr val="tx1">
                     <a:lumMod val="75000"/>
@@ -8258,10 +8251,10 @@
                 </a:solidFill>
                 <a:latin typeface="Bahnschrift Light" panose="020B0502040204020203" pitchFamily="34" charset="0"/>
               </a:rPr>
-              <a:t>for $v in doc("/</a:t>
-            </a:r>
-            <a:r>
-              <a:rPr lang="en-US" sz="1600" i="1" dirty="0" err="1">
+              <a:t>db</a:t>
+            </a:r>
+            <a:r>
+              <a:rPr lang="en-US" sz="1600" i="1" dirty="0">
                 <a:solidFill>
                   <a:schemeClr val="tx1">
                     <a:lumMod val="75000"/>
@@ -8270,10 +8263,10 @@
                 </a:solidFill>
                 <a:latin typeface="Bahnschrift Light" panose="020B0502040204020203" pitchFamily="34" charset="0"/>
               </a:rPr>
-              <a:t>db</a:t>
-            </a:r>
-            <a:r>
-              <a:rPr lang="en-US" sz="1600" i="1" dirty="0">
+              <a:t>/etterem.xml")//</a:t>
+            </a:r>
+            <a:r>
+              <a:rPr lang="en-US" sz="1600" i="1" dirty="0" err="1">
                 <a:solidFill>
                   <a:schemeClr val="tx1">
                     <a:lumMod val="75000"/>
@@ -8282,10 +8275,10 @@
                 </a:solidFill>
                 <a:latin typeface="Bahnschrift Light" panose="020B0502040204020203" pitchFamily="34" charset="0"/>
               </a:rPr>
-              <a:t>/etterem.xml")//</a:t>
-            </a:r>
-            <a:r>
-              <a:rPr lang="en-US" sz="1600" i="1" dirty="0" err="1">
+              <a:t>vendeg</a:t>
+            </a:r>
+            <a:br>
+              <a:rPr lang="hu-HU" sz="1600" i="1" dirty="0">
                 <a:solidFill>
                   <a:schemeClr val="tx1">
                     <a:lumMod val="75000"/>
@@ -8294,10 +8287,9 @@
                 </a:solidFill>
                 <a:latin typeface="Bahnschrift Light" panose="020B0502040204020203" pitchFamily="34" charset="0"/>
               </a:rPr>
-              <a:t>vendeg</a:t>
-            </a:r>
-            <a:r>
-              <a:rPr lang="hu-HU" sz="1600" i="1" dirty="0">
+            </a:br>
+            <a:r>
+              <a:rPr lang="en-US" sz="1600" i="1" dirty="0">
                 <a:solidFill>
                   <a:schemeClr val="tx1">
                     <a:lumMod val="75000"/>
@@ -8306,7 +8298,127 @@
                 </a:solidFill>
                 <a:latin typeface="Bahnschrift Light" panose="020B0502040204020203" pitchFamily="34" charset="0"/>
               </a:rPr>
-              <a:t/>
+              <a:t>let $</a:t>
+            </a:r>
+            <a:r>
+              <a:rPr lang="en-US" sz="1600" i="1" dirty="0" err="1">
+                <a:solidFill>
+                  <a:schemeClr val="tx1">
+                    <a:lumMod val="75000"/>
+                    <a:lumOff val="25000"/>
+                  </a:schemeClr>
+                </a:solidFill>
+                <a:latin typeface="Bahnschrift Light" panose="020B0502040204020203" pitchFamily="34" charset="0"/>
+              </a:rPr>
+              <a:t>rendelesek</a:t>
+            </a:r>
+            <a:r>
+              <a:rPr lang="en-US" sz="1600" i="1" dirty="0">
+                <a:solidFill>
+                  <a:schemeClr val="tx1">
+                    <a:lumMod val="75000"/>
+                    <a:lumOff val="25000"/>
+                  </a:schemeClr>
+                </a:solidFill>
+                <a:latin typeface="Bahnschrift Light" panose="020B0502040204020203" pitchFamily="34" charset="0"/>
+              </a:rPr>
+              <a:t> :=  doc("/</a:t>
+            </a:r>
+            <a:r>
+              <a:rPr lang="en-US" sz="1600" i="1" dirty="0" err="1">
+                <a:solidFill>
+                  <a:schemeClr val="tx1">
+                    <a:lumMod val="75000"/>
+                    <a:lumOff val="25000"/>
+                  </a:schemeClr>
+                </a:solidFill>
+                <a:latin typeface="Bahnschrift Light" panose="020B0502040204020203" pitchFamily="34" charset="0"/>
+              </a:rPr>
+              <a:t>db</a:t>
+            </a:r>
+            <a:r>
+              <a:rPr lang="en-US" sz="1600" i="1" dirty="0">
+                <a:solidFill>
+                  <a:schemeClr val="tx1">
+                    <a:lumMod val="75000"/>
+                    <a:lumOff val="25000"/>
+                  </a:schemeClr>
+                </a:solidFill>
+                <a:latin typeface="Bahnschrift Light" panose="020B0502040204020203" pitchFamily="34" charset="0"/>
+              </a:rPr>
+              <a:t>/etterem.xml")//</a:t>
+            </a:r>
+            <a:r>
+              <a:rPr lang="en-US" sz="1600" i="1" dirty="0" err="1">
+                <a:solidFill>
+                  <a:schemeClr val="tx1">
+                    <a:lumMod val="75000"/>
+                    <a:lumOff val="25000"/>
+                  </a:schemeClr>
+                </a:solidFill>
+                <a:latin typeface="Bahnschrift Light" panose="020B0502040204020203" pitchFamily="34" charset="0"/>
+              </a:rPr>
+              <a:t>rendeles</a:t>
+            </a:r>
+            <a:r>
+              <a:rPr lang="en-US" sz="1600" i="1" dirty="0">
+                <a:solidFill>
+                  <a:schemeClr val="tx1">
+                    <a:lumMod val="75000"/>
+                    <a:lumOff val="25000"/>
+                  </a:schemeClr>
+                </a:solidFill>
+                <a:latin typeface="Bahnschrift Light" panose="020B0502040204020203" pitchFamily="34" charset="0"/>
+              </a:rPr>
+              <a:t>[@</a:t>
+            </a:r>
+            <a:r>
+              <a:rPr lang="en-US" sz="1600" i="1" dirty="0" err="1">
+                <a:solidFill>
+                  <a:schemeClr val="tx1">
+                    <a:lumMod val="75000"/>
+                    <a:lumOff val="25000"/>
+                  </a:schemeClr>
+                </a:solidFill>
+                <a:latin typeface="Bahnschrift Light" panose="020B0502040204020203" pitchFamily="34" charset="0"/>
+              </a:rPr>
+              <a:t>e_v_v</a:t>
+            </a:r>
+            <a:r>
+              <a:rPr lang="en-US" sz="1600" i="1" dirty="0">
+                <a:solidFill>
+                  <a:schemeClr val="tx1">
+                    <a:lumMod val="75000"/>
+                    <a:lumOff val="25000"/>
+                  </a:schemeClr>
+                </a:solidFill>
+                <a:latin typeface="Bahnschrift Light" panose="020B0502040204020203" pitchFamily="34" charset="0"/>
+              </a:rPr>
+              <a:t> = $v/@</a:t>
+            </a:r>
+            <a:r>
+              <a:rPr lang="en-US" sz="1600" i="1" dirty="0" err="1">
+                <a:solidFill>
+                  <a:schemeClr val="tx1">
+                    <a:lumMod val="75000"/>
+                    <a:lumOff val="25000"/>
+                  </a:schemeClr>
+                </a:solidFill>
+                <a:latin typeface="Bahnschrift Light" panose="020B0502040204020203" pitchFamily="34" charset="0"/>
+              </a:rPr>
+              <a:t>vkod</a:t>
+            </a:r>
+            <a:r>
+              <a:rPr lang="en-US" sz="1600" i="1" dirty="0">
+                <a:solidFill>
+                  <a:schemeClr val="tx1">
+                    <a:lumMod val="75000"/>
+                    <a:lumOff val="25000"/>
+                  </a:schemeClr>
+                </a:solidFill>
+                <a:latin typeface="Bahnschrift Light" panose="020B0502040204020203" pitchFamily="34" charset="0"/>
+              </a:rPr>
+              <a:t>]</a:t>
             </a:r>
             <a:br>
               <a:rPr lang="hu-HU" sz="1600" i="1" dirty="0">
@@ -8329,7 +8441,7 @@
                 </a:solidFill>
                 <a:latin typeface="Bahnschrift Light" panose="020B0502040204020203" pitchFamily="34" charset="0"/>
               </a:rPr>
-              <a:t>let $</a:t>
+              <a:t>for $r in $</a:t>
             </a:r>
             <a:r>
               <a:rPr lang="en-US" sz="1600" i="1" dirty="0" err="1">
@@ -8343,8 +8455,8 @@
               </a:rPr>
               <a:t>rendelesek</a:t>
             </a:r>
-            <a:r>
-              <a:rPr lang="en-US" sz="1600" i="1" dirty="0">
+            <a:br>
+              <a:rPr lang="hu-HU" sz="1600" i="1" dirty="0">
                 <a:solidFill>
                   <a:schemeClr val="tx1">
                     <a:lumMod val="75000"/>
@@ -8353,10 +8465,9 @@
                 </a:solidFill>
                 <a:latin typeface="Bahnschrift Light" panose="020B0502040204020203" pitchFamily="34" charset="0"/>
               </a:rPr>
-              <a:t> :=  doc("/</a:t>
-            </a:r>
-            <a:r>
-              <a:rPr lang="en-US" sz="1600" i="1" dirty="0" err="1">
+            </a:br>
+            <a:r>
+              <a:rPr lang="en-US" sz="1600" i="1" dirty="0">
                 <a:solidFill>
                   <a:schemeClr val="tx1">
                     <a:lumMod val="75000"/>
@@ -8365,10 +8476,10 @@
                 </a:solidFill>
                 <a:latin typeface="Bahnschrift Light" panose="020B0502040204020203" pitchFamily="34" charset="0"/>
               </a:rPr>
-              <a:t>db</a:t>
-            </a:r>
-            <a:r>
-              <a:rPr lang="en-US" sz="1600" i="1" dirty="0">
+              <a:t>return</a:t>
+            </a:r>
+            <a:br>
+              <a:rPr lang="hu-HU" sz="1600" i="1" dirty="0">
                 <a:solidFill>
                   <a:schemeClr val="tx1">
                     <a:lumMod val="75000"/>
@@ -8377,10 +8488,9 @@
                 </a:solidFill>
                 <a:latin typeface="Bahnschrift Light" panose="020B0502040204020203" pitchFamily="34" charset="0"/>
               </a:rPr>
-              <a:t>/etterem.xml")//</a:t>
-            </a:r>
-            <a:r>
-              <a:rPr lang="en-US" sz="1600" i="1" dirty="0" err="1">
+            </a:br>
+            <a:r>
+              <a:rPr lang="en-US" sz="1600" i="1" dirty="0">
                 <a:solidFill>
                   <a:schemeClr val="tx1">
                     <a:lumMod val="75000"/>
@@ -8389,10 +8499,10 @@
                 </a:solidFill>
                 <a:latin typeface="Bahnschrift Light" panose="020B0502040204020203" pitchFamily="34" charset="0"/>
               </a:rPr>
-              <a:t>rendeles</a:t>
-            </a:r>
-            <a:r>
-              <a:rPr lang="en-US" sz="1600" i="1" dirty="0">
+              <a:t>&lt;</a:t>
+            </a:r>
+            <a:r>
+              <a:rPr lang="en-US" sz="1600" i="1" dirty="0" err="1">
                 <a:solidFill>
                   <a:schemeClr val="tx1">
                     <a:lumMod val="75000"/>
@@ -8401,10 +8511,10 @@
                 </a:solidFill>
                 <a:latin typeface="Bahnschrift Light" panose="020B0502040204020203" pitchFamily="34" charset="0"/>
               </a:rPr>
-              <a:t>[@</a:t>
-            </a:r>
-            <a:r>
-              <a:rPr lang="en-US" sz="1600" i="1" dirty="0" err="1">
+              <a:t>adat</a:t>
+            </a:r>
+            <a:r>
+              <a:rPr lang="en-US" sz="1600" i="1" dirty="0">
                 <a:solidFill>
                   <a:schemeClr val="tx1">
                     <a:lumMod val="75000"/>
@@ -8413,10 +8523,10 @@
                 </a:solidFill>
                 <a:latin typeface="Bahnschrift Light" panose="020B0502040204020203" pitchFamily="34" charset="0"/>
               </a:rPr>
-              <a:t>e_v_v</a:t>
-            </a:r>
-            <a:r>
-              <a:rPr lang="en-US" sz="1600" i="1" dirty="0">
+              <a:t>&gt;  </a:t>
+            </a:r>
+            <a:br>
+              <a:rPr lang="hu-HU" sz="1600" i="1" dirty="0">
                 <a:solidFill>
                   <a:schemeClr val="tx1">
                     <a:lumMod val="75000"/>
@@ -8425,10 +8535,9 @@
                 </a:solidFill>
                 <a:latin typeface="Bahnschrift Light" panose="020B0502040204020203" pitchFamily="34" charset="0"/>
               </a:rPr>
-              <a:t> = $v/@</a:t>
-            </a:r>
-            <a:r>
-              <a:rPr lang="en-US" sz="1600" i="1" dirty="0" err="1">
+            </a:br>
+            <a:r>
+              <a:rPr lang="en-US" sz="1600" i="1" dirty="0">
                 <a:solidFill>
                   <a:schemeClr val="tx1">
                     <a:lumMod val="75000"/>
@@ -8437,10 +8546,10 @@
                 </a:solidFill>
                 <a:latin typeface="Bahnschrift Light" panose="020B0502040204020203" pitchFamily="34" charset="0"/>
               </a:rPr>
-              <a:t>vkod</a:t>
-            </a:r>
-            <a:r>
-              <a:rPr lang="en-US" sz="1600" i="1" dirty="0">
+              <a:t>&lt;</a:t>
+            </a:r>
+            <a:r>
+              <a:rPr lang="en-US" sz="1600" i="1" dirty="0" err="1">
                 <a:solidFill>
                   <a:schemeClr val="tx1">
                     <a:lumMod val="75000"/>
@@ -8449,10 +8558,10 @@
                 </a:solidFill>
                 <a:latin typeface="Bahnschrift Light" panose="020B0502040204020203" pitchFamily="34" charset="0"/>
               </a:rPr>
-              <a:t>]</a:t>
-            </a:r>
-            <a:r>
-              <a:rPr lang="hu-HU" sz="1600" i="1" dirty="0">
+              <a:t>nev</a:t>
+            </a:r>
+            <a:r>
+              <a:rPr lang="en-US" sz="1600" i="1" dirty="0">
                 <a:solidFill>
                   <a:schemeClr val="tx1">
                     <a:lumMod val="75000"/>
@@ -8461,7 +8570,55 @@
                 </a:solidFill>
                 <a:latin typeface="Bahnschrift Light" panose="020B0502040204020203" pitchFamily="34" charset="0"/>
               </a:rPr>
-              <a:t/>
+              <a:t>&gt;{$v/</a:t>
+            </a:r>
+            <a:r>
+              <a:rPr lang="en-US" sz="1600" i="1" dirty="0" err="1">
+                <a:solidFill>
+                  <a:schemeClr val="tx1">
+                    <a:lumMod val="75000"/>
+                    <a:lumOff val="25000"/>
+                  </a:schemeClr>
+                </a:solidFill>
+                <a:latin typeface="Bahnschrift Light" panose="020B0502040204020203" pitchFamily="34" charset="0"/>
+              </a:rPr>
+              <a:t>nev</a:t>
+            </a:r>
+            <a:r>
+              <a:rPr lang="en-US" sz="1600" i="1" dirty="0">
+                <a:solidFill>
+                  <a:schemeClr val="tx1">
+                    <a:lumMod val="75000"/>
+                    <a:lumOff val="25000"/>
+                  </a:schemeClr>
+                </a:solidFill>
+                <a:latin typeface="Bahnschrift Light" panose="020B0502040204020203" pitchFamily="34" charset="0"/>
+              </a:rPr>
+              <a:t>}&lt;/</a:t>
+            </a:r>
+            <a:r>
+              <a:rPr lang="en-US" sz="1600" i="1" dirty="0" err="1">
+                <a:solidFill>
+                  <a:schemeClr val="tx1">
+                    <a:lumMod val="75000"/>
+                    <a:lumOff val="25000"/>
+                  </a:schemeClr>
+                </a:solidFill>
+                <a:latin typeface="Bahnschrift Light" panose="020B0502040204020203" pitchFamily="34" charset="0"/>
+              </a:rPr>
+              <a:t>nev</a:t>
+            </a:r>
+            <a:r>
+              <a:rPr lang="en-US" sz="1600" i="1" dirty="0">
+                <a:solidFill>
+                  <a:schemeClr val="tx1">
+                    <a:lumMod val="75000"/>
+                    <a:lumOff val="25000"/>
+                  </a:schemeClr>
+                </a:solidFill>
+                <a:latin typeface="Bahnschrift Light" panose="020B0502040204020203" pitchFamily="34" charset="0"/>
+              </a:rPr>
+              <a:t>&gt;  </a:t>
             </a:r>
             <a:br>
               <a:rPr lang="hu-HU" sz="1600" i="1" dirty="0">
@@ -8484,7 +8641,7 @@
                 </a:solidFill>
                 <a:latin typeface="Bahnschrift Light" panose="020B0502040204020203" pitchFamily="34" charset="0"/>
               </a:rPr>
-              <a:t>for $r in $</a:t>
+              <a:t>&lt;</a:t>
             </a:r>
             <a:r>
               <a:rPr lang="en-US" sz="1600" i="1" dirty="0" err="1">
@@ -8496,10 +8653,10 @@
                 </a:solidFill>
                 <a:latin typeface="Bahnschrift Light" panose="020B0502040204020203" pitchFamily="34" charset="0"/>
               </a:rPr>
-              <a:t>rendelesek</a:t>
-            </a:r>
-            <a:r>
-              <a:rPr lang="hu-HU" sz="1600" i="1" dirty="0">
+              <a:t>osszeg</a:t>
+            </a:r>
+            <a:r>
+              <a:rPr lang="en-US" sz="1600" i="1" dirty="0">
                 <a:solidFill>
                   <a:schemeClr val="tx1">
                     <a:lumMod val="75000"/>
@@ -8508,10 +8665,10 @@
                 </a:solidFill>
                 <a:latin typeface="Bahnschrift Light" panose="020B0502040204020203" pitchFamily="34" charset="0"/>
               </a:rPr>
-              <a:t/>
-            </a:r>
-            <a:br>
-              <a:rPr lang="hu-HU" sz="1600" i="1" dirty="0">
+              <a:t>&gt;{$r/</a:t>
+            </a:r>
+            <a:r>
+              <a:rPr lang="en-US" sz="1600" i="1" dirty="0" err="1">
                 <a:solidFill>
                   <a:schemeClr val="tx1">
                     <a:lumMod val="75000"/>
@@ -8520,7 +8677,8 @@
                 </a:solidFill>
                 <a:latin typeface="Bahnschrift Light" panose="020B0502040204020203" pitchFamily="34" charset="0"/>
               </a:rPr>
-            </a:br>
+              <a:t>osszeg</a:t>
+            </a:r>
             <a:r>
               <a:rPr lang="en-US" sz="1600" i="1" dirty="0">
                 <a:solidFill>
@@ -8531,10 +8689,10 @@
                 </a:solidFill>
                 <a:latin typeface="Bahnschrift Light" panose="020B0502040204020203" pitchFamily="34" charset="0"/>
               </a:rPr>
-              <a:t>return</a:t>
-            </a:r>
-            <a:r>
-              <a:rPr lang="hu-HU" sz="1600" i="1" dirty="0">
+              <a:t>}&lt;/</a:t>
+            </a:r>
+            <a:r>
+              <a:rPr lang="en-US" sz="1600" i="1" dirty="0" err="1">
                 <a:solidFill>
                   <a:schemeClr val="tx1">
                     <a:lumMod val="75000"/>
@@ -8543,10 +8701,10 @@
                 </a:solidFill>
                 <a:latin typeface="Bahnschrift Light" panose="020B0502040204020203" pitchFamily="34" charset="0"/>
               </a:rPr>
-              <a:t/>
-            </a:r>
-            <a:br>
-              <a:rPr lang="hu-HU" sz="1600" i="1" dirty="0">
+              <a:t>osszeg</a:t>
+            </a:r>
+            <a:r>
+              <a:rPr lang="en-US" sz="1600" i="1" dirty="0">
                 <a:solidFill>
                   <a:schemeClr val="tx1">
                     <a:lumMod val="75000"/>
@@ -8555,268 +8713,7 @@
                 </a:solidFill>
                 <a:latin typeface="Bahnschrift Light" panose="020B0502040204020203" pitchFamily="34" charset="0"/>
               </a:rPr>
-            </a:br>
-            <a:r>
-              <a:rPr lang="en-US" sz="1600" i="1" dirty="0">
-                <a:solidFill>
-                  <a:schemeClr val="tx1">
-                    <a:lumMod val="75000"/>
-                    <a:lumOff val="25000"/>
-                  </a:schemeClr>
-                </a:solidFill>
-                <a:latin typeface="Bahnschrift Light" panose="020B0502040204020203" pitchFamily="34" charset="0"/>
-              </a:rPr>
-              <a:t>&lt;</a:t>
-            </a:r>
-            <a:r>
-              <a:rPr lang="en-US" sz="1600" i="1" dirty="0" err="1">
-                <a:solidFill>
-                  <a:schemeClr val="tx1">
-                    <a:lumMod val="75000"/>
-                    <a:lumOff val="25000"/>
-                  </a:schemeClr>
-                </a:solidFill>
-                <a:latin typeface="Bahnschrift Light" panose="020B0502040204020203" pitchFamily="34" charset="0"/>
-              </a:rPr>
-              <a:t>adat</a:t>
-            </a:r>
-            <a:r>
-              <a:rPr lang="en-US" sz="1600" i="1" dirty="0">
-                <a:solidFill>
-                  <a:schemeClr val="tx1">
-                    <a:lumMod val="75000"/>
-                    <a:lumOff val="25000"/>
-                  </a:schemeClr>
-                </a:solidFill>
-                <a:latin typeface="Bahnschrift Light" panose="020B0502040204020203" pitchFamily="34" charset="0"/>
-              </a:rPr>
-              <a:t>&gt;  </a:t>
-            </a:r>
-            <a:r>
-              <a:rPr lang="hu-HU" sz="1600" i="1" dirty="0">
-                <a:solidFill>
-                  <a:schemeClr val="tx1">
-                    <a:lumMod val="75000"/>
-                    <a:lumOff val="25000"/>
-                  </a:schemeClr>
-                </a:solidFill>
-                <a:latin typeface="Bahnschrift Light" panose="020B0502040204020203" pitchFamily="34" charset="0"/>
-              </a:rPr>
-              <a:t/>
-            </a:r>
-            <a:br>
-              <a:rPr lang="hu-HU" sz="1600" i="1" dirty="0">
-                <a:solidFill>
-                  <a:schemeClr val="tx1">
-                    <a:lumMod val="75000"/>
-                    <a:lumOff val="25000"/>
-                  </a:schemeClr>
-                </a:solidFill>
-                <a:latin typeface="Bahnschrift Light" panose="020B0502040204020203" pitchFamily="34" charset="0"/>
-              </a:rPr>
-            </a:br>
-            <a:r>
-              <a:rPr lang="en-US" sz="1600" i="1" dirty="0">
-                <a:solidFill>
-                  <a:schemeClr val="tx1">
-                    <a:lumMod val="75000"/>
-                    <a:lumOff val="25000"/>
-                  </a:schemeClr>
-                </a:solidFill>
-                <a:latin typeface="Bahnschrift Light" panose="020B0502040204020203" pitchFamily="34" charset="0"/>
-              </a:rPr>
-              <a:t>&lt;</a:t>
-            </a:r>
-            <a:r>
-              <a:rPr lang="en-US" sz="1600" i="1" dirty="0" err="1">
-                <a:solidFill>
-                  <a:schemeClr val="tx1">
-                    <a:lumMod val="75000"/>
-                    <a:lumOff val="25000"/>
-                  </a:schemeClr>
-                </a:solidFill>
-                <a:latin typeface="Bahnschrift Light" panose="020B0502040204020203" pitchFamily="34" charset="0"/>
-              </a:rPr>
-              <a:t>nev</a:t>
-            </a:r>
-            <a:r>
-              <a:rPr lang="en-US" sz="1600" i="1" dirty="0">
-                <a:solidFill>
-                  <a:schemeClr val="tx1">
-                    <a:lumMod val="75000"/>
-                    <a:lumOff val="25000"/>
-                  </a:schemeClr>
-                </a:solidFill>
-                <a:latin typeface="Bahnschrift Light" panose="020B0502040204020203" pitchFamily="34" charset="0"/>
-              </a:rPr>
-              <a:t>&gt;{$v/</a:t>
-            </a:r>
-            <a:r>
-              <a:rPr lang="en-US" sz="1600" i="1" dirty="0" err="1">
-                <a:solidFill>
-                  <a:schemeClr val="tx1">
-                    <a:lumMod val="75000"/>
-                    <a:lumOff val="25000"/>
-                  </a:schemeClr>
-                </a:solidFill>
-                <a:latin typeface="Bahnschrift Light" panose="020B0502040204020203" pitchFamily="34" charset="0"/>
-              </a:rPr>
-              <a:t>nev</a:t>
-            </a:r>
-            <a:r>
-              <a:rPr lang="en-US" sz="1600" i="1" dirty="0">
-                <a:solidFill>
-                  <a:schemeClr val="tx1">
-                    <a:lumMod val="75000"/>
-                    <a:lumOff val="25000"/>
-                  </a:schemeClr>
-                </a:solidFill>
-                <a:latin typeface="Bahnschrift Light" panose="020B0502040204020203" pitchFamily="34" charset="0"/>
-              </a:rPr>
-              <a:t>}&lt;/</a:t>
-            </a:r>
-            <a:r>
-              <a:rPr lang="en-US" sz="1600" i="1" dirty="0" err="1">
-                <a:solidFill>
-                  <a:schemeClr val="tx1">
-                    <a:lumMod val="75000"/>
-                    <a:lumOff val="25000"/>
-                  </a:schemeClr>
-                </a:solidFill>
-                <a:latin typeface="Bahnschrift Light" panose="020B0502040204020203" pitchFamily="34" charset="0"/>
-              </a:rPr>
-              <a:t>nev</a:t>
-            </a:r>
-            <a:r>
-              <a:rPr lang="en-US" sz="1600" i="1" dirty="0">
-                <a:solidFill>
-                  <a:schemeClr val="tx1">
-                    <a:lumMod val="75000"/>
-                    <a:lumOff val="25000"/>
-                  </a:schemeClr>
-                </a:solidFill>
-                <a:latin typeface="Bahnschrift Light" panose="020B0502040204020203" pitchFamily="34" charset="0"/>
-              </a:rPr>
-              <a:t>&gt;  </a:t>
-            </a:r>
-            <a:r>
-              <a:rPr lang="hu-HU" sz="1600" i="1" dirty="0">
-                <a:solidFill>
-                  <a:schemeClr val="tx1">
-                    <a:lumMod val="75000"/>
-                    <a:lumOff val="25000"/>
-                  </a:schemeClr>
-                </a:solidFill>
-                <a:latin typeface="Bahnschrift Light" panose="020B0502040204020203" pitchFamily="34" charset="0"/>
-              </a:rPr>
-              <a:t/>
-            </a:r>
-            <a:br>
-              <a:rPr lang="hu-HU" sz="1600" i="1" dirty="0">
-                <a:solidFill>
-                  <a:schemeClr val="tx1">
-                    <a:lumMod val="75000"/>
-                    <a:lumOff val="25000"/>
-                  </a:schemeClr>
-                </a:solidFill>
-                <a:latin typeface="Bahnschrift Light" panose="020B0502040204020203" pitchFamily="34" charset="0"/>
-              </a:rPr>
-            </a:br>
-            <a:r>
-              <a:rPr lang="en-US" sz="1600" i="1" dirty="0">
-                <a:solidFill>
-                  <a:schemeClr val="tx1">
-                    <a:lumMod val="75000"/>
-                    <a:lumOff val="25000"/>
-                  </a:schemeClr>
-                </a:solidFill>
-                <a:latin typeface="Bahnschrift Light" panose="020B0502040204020203" pitchFamily="34" charset="0"/>
-              </a:rPr>
-              <a:t>&lt;</a:t>
-            </a:r>
-            <a:r>
-              <a:rPr lang="en-US" sz="1600" i="1" dirty="0" err="1">
-                <a:solidFill>
-                  <a:schemeClr val="tx1">
-                    <a:lumMod val="75000"/>
-                    <a:lumOff val="25000"/>
-                  </a:schemeClr>
-                </a:solidFill>
-                <a:latin typeface="Bahnschrift Light" panose="020B0502040204020203" pitchFamily="34" charset="0"/>
-              </a:rPr>
-              <a:t>osszeg</a:t>
-            </a:r>
-            <a:r>
-              <a:rPr lang="en-US" sz="1600" i="1" dirty="0">
-                <a:solidFill>
-                  <a:schemeClr val="tx1">
-                    <a:lumMod val="75000"/>
-                    <a:lumOff val="25000"/>
-                  </a:schemeClr>
-                </a:solidFill>
-                <a:latin typeface="Bahnschrift Light" panose="020B0502040204020203" pitchFamily="34" charset="0"/>
-              </a:rPr>
-              <a:t>&gt;{$r/</a:t>
-            </a:r>
-            <a:r>
-              <a:rPr lang="en-US" sz="1600" i="1" dirty="0" err="1">
-                <a:solidFill>
-                  <a:schemeClr val="tx1">
-                    <a:lumMod val="75000"/>
-                    <a:lumOff val="25000"/>
-                  </a:schemeClr>
-                </a:solidFill>
-                <a:latin typeface="Bahnschrift Light" panose="020B0502040204020203" pitchFamily="34" charset="0"/>
-              </a:rPr>
-              <a:t>osszeg</a:t>
-            </a:r>
-            <a:r>
-              <a:rPr lang="en-US" sz="1600" i="1" dirty="0">
-                <a:solidFill>
-                  <a:schemeClr val="tx1">
-                    <a:lumMod val="75000"/>
-                    <a:lumOff val="25000"/>
-                  </a:schemeClr>
-                </a:solidFill>
-                <a:latin typeface="Bahnschrift Light" panose="020B0502040204020203" pitchFamily="34" charset="0"/>
-              </a:rPr>
-              <a:t>}&lt;/</a:t>
-            </a:r>
-            <a:r>
-              <a:rPr lang="en-US" sz="1600" i="1" dirty="0" err="1">
-                <a:solidFill>
-                  <a:schemeClr val="tx1">
-                    <a:lumMod val="75000"/>
-                    <a:lumOff val="25000"/>
-                  </a:schemeClr>
-                </a:solidFill>
-                <a:latin typeface="Bahnschrift Light" panose="020B0502040204020203" pitchFamily="34" charset="0"/>
-              </a:rPr>
-              <a:t>osszeg</a:t>
-            </a:r>
-            <a:r>
-              <a:rPr lang="en-US" sz="1600" i="1" dirty="0">
-                <a:solidFill>
-                  <a:schemeClr val="tx1">
-                    <a:lumMod val="75000"/>
-                    <a:lumOff val="25000"/>
-                  </a:schemeClr>
-                </a:solidFill>
-                <a:latin typeface="Bahnschrift Light" panose="020B0502040204020203" pitchFamily="34" charset="0"/>
-              </a:rPr>
               <a:t>&gt;</a:t>
-            </a:r>
-            <a:r>
-              <a:rPr lang="hu-HU" sz="1600" i="1" dirty="0">
-                <a:solidFill>
-                  <a:schemeClr val="tx1">
-                    <a:lumMod val="75000"/>
-                    <a:lumOff val="25000"/>
-                  </a:schemeClr>
-                </a:solidFill>
-                <a:latin typeface="Bahnschrift Light" panose="020B0502040204020203" pitchFamily="34" charset="0"/>
-              </a:rPr>
-              <a:t/>
             </a:r>
             <a:br>
               <a:rPr lang="hu-HU" sz="1600" i="1" dirty="0">
@@ -8914,7 +8811,7 @@
           <a:lstStyle/>
           <a:p>
             <a:r>
-              <a:rPr lang="hu-HU" dirty="0" smtClean="0"/>
+              <a:rPr lang="hu-HU" dirty="0"/>
               <a:t>6. Feladat</a:t>
             </a:r>
             <a:endParaRPr lang="en-US" dirty="0"/>
@@ -8947,20 +8844,16 @@
               </a:lnSpc>
             </a:pPr>
             <a:r>
-              <a:rPr lang="en-US" sz="1800" dirty="0" err="1" smtClean="0"/>
+              <a:rPr lang="en-US" sz="1800" dirty="0" err="1"/>
               <a:t>Növe</a:t>
             </a:r>
             <a:r>
-              <a:rPr lang="hu-HU" sz="1800" dirty="0" err="1" smtClean="0"/>
+              <a:rPr lang="hu-HU" sz="1800" dirty="0" err="1"/>
               <a:t>lje</a:t>
             </a:r>
             <a:r>
-              <a:rPr lang="en-US" sz="1800" dirty="0" smtClean="0"/>
-              <a:t> </a:t>
-            </a:r>
-            <a:r>
               <a:rPr lang="en-US" sz="1800" dirty="0"/>
-              <a:t>meg </a:t>
+              <a:t> meg </a:t>
             </a:r>
             <a:r>
               <a:rPr lang="en-US" sz="1800" dirty="0" err="1"/>
@@ -9001,10 +8894,6 @@
             <a:br>
               <a:rPr lang="hu-HU" sz="1800" dirty="0"/>
             </a:br>
-            <a:r>
-              <a:rPr lang="hu-HU" dirty="0"/>
-              <a:t/>
-            </a:r>
             <a:br>
               <a:rPr lang="hu-HU" dirty="0"/>
             </a:br>
@@ -9036,13 +8925,29 @@
               <a:rPr lang="hu-HU" i="1" dirty="0" err="1">
                 <a:latin typeface="Bahnschrift Light" panose="020B0502040204020203" pitchFamily="34" charset="0"/>
               </a:rPr>
-              <a:t>rendelesreturnupdate</a:t>
-            </a:r>
-            <a:r>
+              <a:t>rendeles</a:t>
+            </a:r>
+            <a:br>
               <a:rPr lang="hu-HU" i="1" dirty="0">
                 <a:latin typeface="Bahnschrift Light" panose="020B0502040204020203" pitchFamily="34" charset="0"/>
               </a:rPr>
-              <a:t> </a:t>
+            </a:br>
+            <a:r>
+              <a:rPr lang="hu-HU" i="1" dirty="0" err="1">
+                <a:latin typeface="Bahnschrift Light" panose="020B0502040204020203" pitchFamily="34" charset="0"/>
+              </a:rPr>
+              <a:t>return</a:t>
+            </a:r>
+            <a:br>
+              <a:rPr lang="hu-HU" i="1" dirty="0">
+                <a:latin typeface="Bahnschrift Light" panose="020B0502040204020203" pitchFamily="34" charset="0"/>
+              </a:rPr>
+            </a:br>
+            <a:r>
+              <a:rPr lang="hu-HU" i="1" dirty="0">
+                <a:latin typeface="Bahnschrift Light" panose="020B0502040204020203" pitchFamily="34" charset="0"/>
+              </a:rPr>
+              <a:t>update </a:t>
             </a:r>
             <a:r>
               <a:rPr lang="hu-HU" i="1" dirty="0" err="1">
@@ -9114,7 +9019,7 @@
         </p:blipFill>
         <p:spPr>
           <a:xfrm>
-            <a:off x="4540855" y="3354905"/>
+            <a:off x="7909697" y="3354905"/>
             <a:ext cx="2978531" cy="2556317"/>
           </a:xfrm>
           <a:prstGeom prst="rect">
@@ -9168,7 +9073,7 @@
           <a:lstStyle/>
           <a:p>
             <a:r>
-              <a:rPr lang="hu-HU" dirty="0" smtClean="0"/>
+              <a:rPr lang="hu-HU" dirty="0"/>
               <a:t>7. Feladat</a:t>
             </a:r>
             <a:endParaRPr lang="en-US" dirty="0"/>
@@ -9201,12 +9106,8 @@
               </a:lnSpc>
             </a:pPr>
             <a:r>
-              <a:rPr lang="hu-HU" dirty="0" smtClean="0"/>
-              <a:t>Hány rendelés van </a:t>
-            </a:r>
-            <a:r>
-              <a:rPr lang="hu-HU" dirty="0" smtClean="0"/>
-              <a:t>összesen</a:t>
+              <a:rPr lang="hu-HU" dirty="0"/>
+              <a:t>Hány rendelés van összesen</a:t>
             </a:r>
           </a:p>
           <a:p>
@@ -9257,12 +9158,8 @@
               </a:lnSpc>
             </a:pPr>
             <a:r>
-              <a:rPr lang="hu-HU" dirty="0" smtClean="0"/>
-              <a:t>Mennyi az összes rendelés </a:t>
-            </a:r>
-            <a:r>
-              <a:rPr lang="hu-HU" dirty="0" smtClean="0"/>
-              <a:t>értéke</a:t>
+              <a:rPr lang="hu-HU" dirty="0"/>
+              <a:t>Mennyi az összes rendelés értéke</a:t>
             </a:r>
           </a:p>
           <a:p>
@@ -9329,7 +9226,7 @@
               </a:lnSpc>
             </a:pPr>
             <a:r>
-              <a:rPr lang="hu-HU" dirty="0" smtClean="0"/>
+              <a:rPr lang="hu-HU" dirty="0"/>
               <a:t>Átlagos rendelési érték</a:t>
             </a:r>
           </a:p>
@@ -9341,28 +9238,22 @@
               <a:buNone/>
             </a:pPr>
             <a:r>
-              <a:rPr lang="hu-HU" i="1" dirty="0" smtClean="0">
+              <a:rPr lang="hu-HU" i="1" dirty="0">
                 <a:latin typeface="Bahnschrift Light" panose="020B0502040204020203" pitchFamily="34" charset="0"/>
               </a:rPr>
               <a:t>	</a:t>
             </a:r>
             <a:r>
-              <a:rPr lang="en-US" i="1" dirty="0" err="1" smtClean="0">
+              <a:rPr lang="en-US" i="1" dirty="0" err="1">
                 <a:latin typeface="Bahnschrift Light" panose="020B0502040204020203" pitchFamily="34" charset="0"/>
               </a:rPr>
               <a:t>avg</a:t>
             </a:r>
             <a:r>
-              <a:rPr lang="en-US" i="1" dirty="0" smtClean="0">
-                <a:latin typeface="Bahnschrift Light" panose="020B0502040204020203" pitchFamily="34" charset="0"/>
-              </a:rPr>
-              <a:t>(doc</a:t>
-            </a:r>
-            <a:r>
               <a:rPr lang="en-US" i="1" dirty="0">
                 <a:latin typeface="Bahnschrift Light" panose="020B0502040204020203" pitchFamily="34" charset="0"/>
               </a:rPr>
-              <a:t>("/</a:t>
+              <a:t>(doc("/</a:t>
             </a:r>
             <a:r>
               <a:rPr lang="en-US" i="1" dirty="0" err="1">
@@ -9374,13 +9265,7 @@
               <a:rPr lang="en-US" i="1" dirty="0">
                 <a:latin typeface="Bahnschrift Light" panose="020B0502040204020203" pitchFamily="34" charset="0"/>
               </a:rPr>
-              <a:t>/etterem.xml</a:t>
-            </a:r>
-            <a:r>
-              <a:rPr lang="en-US" i="1" dirty="0">
-                <a:latin typeface="Bahnschrift Light" panose="020B0502040204020203" pitchFamily="34" charset="0"/>
-              </a:rPr>
-              <a:t>")//</a:t>
+              <a:t>/etterem.xml")//</a:t>
             </a:r>
             <a:r>
               <a:rPr lang="en-US" i="1" dirty="0" err="1">
@@ -9455,15 +9340,15 @@
           <a:lstStyle/>
           <a:p>
             <a:r>
-              <a:rPr lang="hu-HU" dirty="0" smtClean="0"/>
+              <a:rPr lang="hu-HU" dirty="0"/>
               <a:t>Használ </a:t>
             </a:r>
             <a:r>
-              <a:rPr lang="hu-HU" dirty="0" err="1" smtClean="0"/>
+              <a:rPr lang="hu-HU" dirty="0" err="1"/>
               <a:t>Xpath</a:t>
             </a:r>
             <a:r>
-              <a:rPr lang="hu-HU" dirty="0" smtClean="0"/>
+              <a:rPr lang="hu-HU" dirty="0"/>
               <a:t> kifejezések</a:t>
             </a:r>
             <a:endParaRPr lang="en-US" dirty="0"/>
@@ -10705,12 +10590,8 @@
               <a:t>Ú</a:t>
             </a:r>
             <a:r>
-              <a:rPr lang="en-US" dirty="0" smtClean="0"/>
-              <a:t>j </a:t>
-            </a:r>
-            <a:r>
               <a:rPr lang="en-US" dirty="0"/>
-              <a:t>XML </a:t>
+              <a:t>j XML </a:t>
             </a:r>
             <a:r>
               <a:rPr lang="en-US" b="1" dirty="0" err="1"/>
@@ -11877,11 +11758,11 @@
           <a:lstStyle/>
           <a:p>
             <a:r>
-              <a:rPr lang="hu-HU" dirty="0" smtClean="0"/>
+              <a:rPr lang="hu-HU" dirty="0"/>
               <a:t>1. Feladat</a:t>
             </a:r>
             <a:br>
-              <a:rPr lang="hu-HU" dirty="0" smtClean="0"/>
+              <a:rPr lang="hu-HU" dirty="0"/>
             </a:br>
             <a:endParaRPr lang="en-US" dirty="0"/>
           </a:p>
@@ -11908,11 +11789,11 @@
           <a:lstStyle/>
           <a:p>
             <a:r>
-              <a:rPr lang="en-US" dirty="0" err="1" smtClean="0"/>
+              <a:rPr lang="en-US" dirty="0" err="1"/>
               <a:t>Készítsen</a:t>
             </a:r>
             <a:r>
-              <a:rPr lang="en-US" dirty="0" smtClean="0"/>
+              <a:rPr lang="en-US" dirty="0"/>
               <a:t> </a:t>
             </a:r>
             <a:r>
@@ -11972,39 +11853,32 @@
               <a:t> </a:t>
             </a:r>
             <a:r>
-              <a:rPr lang="en-US" dirty="0" err="1" smtClean="0"/>
+              <a:rPr lang="en-US" dirty="0" err="1"/>
               <a:t>vendéget</a:t>
             </a:r>
             <a:r>
-              <a:rPr lang="hu-HU" dirty="0" smtClean="0"/>
+              <a:rPr lang="hu-HU" dirty="0"/>
               <a:t>:</a:t>
             </a:r>
-            <a:endParaRPr lang="hu-HU" dirty="0"/>
           </a:p>
           <a:p>
             <a:pPr marL="0" indent="0">
               <a:buNone/>
             </a:pPr>
-            <a:endParaRPr lang="hu-HU" dirty="0" smtClean="0"/>
+            <a:endParaRPr lang="hu-HU" dirty="0"/>
           </a:p>
           <a:p>
             <a:pPr marL="0" indent="0">
               <a:buNone/>
             </a:pPr>
             <a:r>
-              <a:rPr lang="en-US" i="1" dirty="0" smtClean="0">
-                <a:latin typeface="Bahnschrift Light" panose="020B0502040204020203" pitchFamily="34" charset="0"/>
-              </a:rPr>
-              <a:t>doc</a:t>
-            </a:r>
-            <a:r>
               <a:rPr lang="en-US" i="1" dirty="0">
                 <a:latin typeface="Bahnschrift Light" panose="020B0502040204020203" pitchFamily="34" charset="0"/>
               </a:rPr>
-              <a:t>("/</a:t>
-            </a:r>
-            <a:r>
-              <a:rPr lang="en-US" i="1" dirty="0" err="1" smtClean="0">
+              <a:t>doc("/</a:t>
+            </a:r>
+            <a:r>
+              <a:rPr lang="en-US" i="1" dirty="0" err="1">
                 <a:latin typeface="Bahnschrift Light" panose="020B0502040204020203" pitchFamily="34" charset="0"/>
               </a:rPr>
               <a:t>db</a:t>
@@ -12016,19 +11890,13 @@
               <a:t>/</a:t>
             </a:r>
             <a:r>
-              <a:rPr lang="en-US" i="1" dirty="0" smtClean="0">
-                <a:latin typeface="Bahnschrift Light" panose="020B0502040204020203" pitchFamily="34" charset="0"/>
-              </a:rPr>
-              <a:t>etterem.xml</a:t>
-            </a:r>
-            <a:r>
               <a:rPr lang="en-US" i="1" dirty="0">
                 <a:latin typeface="Bahnschrift Light" panose="020B0502040204020203" pitchFamily="34" charset="0"/>
               </a:rPr>
-              <a:t>")//</a:t>
-            </a:r>
-            <a:r>
-              <a:rPr lang="en-US" i="1" dirty="0" err="1" smtClean="0">
+              <a:t>etterem.xml")//</a:t>
+            </a:r>
+            <a:r>
+              <a:rPr lang="en-US" i="1" dirty="0" err="1">
                 <a:latin typeface="Bahnschrift Light" panose="020B0502040204020203" pitchFamily="34" charset="0"/>
               </a:rPr>
               <a:t>vendeg</a:t>
@@ -12109,7 +11977,7 @@
           <a:lstStyle/>
           <a:p>
             <a:r>
-              <a:rPr lang="hu-HU" dirty="0" smtClean="0"/>
+              <a:rPr lang="hu-HU" dirty="0"/>
               <a:t>2. Feladat</a:t>
             </a:r>
             <a:endParaRPr lang="en-US" dirty="0"/>
@@ -12226,7 +12094,7 @@
               <a:rPr lang="en-US" dirty="0"/>
               <a:t>)! </a:t>
             </a:r>
-            <a:endParaRPr lang="hu-HU" dirty="0" smtClean="0"/>
+            <a:endParaRPr lang="hu-HU" dirty="0"/>
           </a:p>
           <a:p>
             <a:endParaRPr lang="hu-HU" dirty="0"/>
@@ -12257,33 +12125,21 @@
               <a:t>/etterem.xml")//</a:t>
             </a:r>
             <a:r>
-              <a:rPr lang="en-US" i="1" dirty="0" err="1" smtClean="0">
+              <a:rPr lang="en-US" i="1" dirty="0" err="1">
                 <a:latin typeface="Bahnschrift Light" panose="020B0502040204020203" pitchFamily="34" charset="0"/>
               </a:rPr>
               <a:t>szakacs</a:t>
             </a:r>
-            <a:r>
-              <a:rPr lang="hu-HU" i="1" dirty="0" smtClean="0">
-                <a:latin typeface="Bahnschrift Light" panose="020B0502040204020203" pitchFamily="34" charset="0"/>
-              </a:rPr>
-              <a:t/>
-            </a:r>
             <a:br>
-              <a:rPr lang="hu-HU" i="1" dirty="0" smtClean="0">
+              <a:rPr lang="hu-HU" i="1" dirty="0">
                 <a:latin typeface="Bahnschrift Light" panose="020B0502040204020203" pitchFamily="34" charset="0"/>
               </a:rPr>
             </a:br>
             <a:r>
-              <a:rPr lang="en-US" i="1" dirty="0" smtClean="0">
-                <a:latin typeface="Bahnschrift Light" panose="020B0502040204020203" pitchFamily="34" charset="0"/>
-              </a:rPr>
-              <a:t>where </a:t>
-            </a:r>
-            <a:r>
               <a:rPr lang="en-US" i="1" dirty="0">
                 <a:latin typeface="Bahnschrift Light" panose="020B0502040204020203" pitchFamily="34" charset="0"/>
               </a:rPr>
-              <a:t>$s/</a:t>
+              <a:t>where $s/</a:t>
             </a:r>
             <a:r>
               <a:rPr lang="en-US" i="1" dirty="0" err="1">
@@ -12298,47 +12154,41 @@
               <a:t> = "</a:t>
             </a:r>
             <a:r>
-              <a:rPr lang="en-US" i="1" dirty="0" err="1" smtClean="0">
+              <a:rPr lang="en-US" i="1" dirty="0" err="1">
                 <a:latin typeface="Bahnschrift Light" panose="020B0502040204020203" pitchFamily="34" charset="0"/>
               </a:rPr>
               <a:t>Szakközépiskola</a:t>
             </a:r>
             <a:r>
-              <a:rPr lang="hu-HU" i="1" dirty="0" smtClean="0">
+              <a:rPr lang="hu-HU" i="1" dirty="0">
                 <a:latin typeface="Bahnschrift Light" panose="020B0502040204020203" pitchFamily="34" charset="0"/>
               </a:rPr>
               <a:t>”</a:t>
             </a:r>
             <a:br>
-              <a:rPr lang="hu-HU" i="1" dirty="0" smtClean="0">
+              <a:rPr lang="hu-HU" i="1" dirty="0">
                 <a:latin typeface="Bahnschrift Light" panose="020B0502040204020203" pitchFamily="34" charset="0"/>
               </a:rPr>
             </a:br>
             <a:r>
-              <a:rPr lang="en-US" i="1" dirty="0" smtClean="0">
+              <a:rPr lang="en-US" i="1" dirty="0">
                 <a:latin typeface="Bahnschrift Light" panose="020B0502040204020203" pitchFamily="34" charset="0"/>
               </a:rPr>
               <a:t>return</a:t>
             </a:r>
-            <a:r>
-              <a:rPr lang="hu-HU" i="1" dirty="0" smtClean="0">
-                <a:latin typeface="Bahnschrift Light" panose="020B0502040204020203" pitchFamily="34" charset="0"/>
-              </a:rPr>
-              <a:t/>
-            </a:r>
             <a:br>
-              <a:rPr lang="hu-HU" i="1" dirty="0" smtClean="0">
+              <a:rPr lang="hu-HU" i="1" dirty="0">
                 <a:latin typeface="Bahnschrift Light" panose="020B0502040204020203" pitchFamily="34" charset="0"/>
               </a:rPr>
             </a:br>
             <a:r>
-              <a:rPr lang="en-US" i="1" dirty="0" smtClean="0">
+              <a:rPr lang="en-US" i="1" dirty="0">
                 <a:latin typeface="Bahnschrift Light" panose="020B0502040204020203" pitchFamily="34" charset="0"/>
               </a:rPr>
               <a:t>&lt;</a:t>
             </a:r>
             <a:r>
-              <a:rPr lang="en-US" i="1" dirty="0" err="1" smtClean="0">
+              <a:rPr lang="en-US" i="1" dirty="0" err="1">
                 <a:latin typeface="Bahnschrift Light" panose="020B0502040204020203" pitchFamily="34" charset="0"/>
               </a:rPr>
               <a:t>szakacs</a:t>
@@ -12476,24 +12326,18 @@
               <a:t>Vegzettsegek</a:t>
             </a:r>
             <a:r>
-              <a:rPr lang="en-US" i="1" dirty="0" smtClean="0">
+              <a:rPr lang="en-US" i="1" dirty="0">
                 <a:latin typeface="Bahnschrift Light" panose="020B0502040204020203" pitchFamily="34" charset="0"/>
               </a:rPr>
               <a:t>&gt;</a:t>
             </a:r>
-            <a:r>
-              <a:rPr lang="hu-HU" i="1" dirty="0" smtClean="0">
-                <a:latin typeface="Bahnschrift Light" panose="020B0502040204020203" pitchFamily="34" charset="0"/>
-              </a:rPr>
-              <a:t/>
-            </a:r>
             <a:br>
-              <a:rPr lang="hu-HU" i="1" dirty="0" smtClean="0">
+              <a:rPr lang="hu-HU" i="1" dirty="0">
                 <a:latin typeface="Bahnschrift Light" panose="020B0502040204020203" pitchFamily="34" charset="0"/>
               </a:rPr>
             </a:br>
             <a:r>
-              <a:rPr lang="en-US" i="1" dirty="0" smtClean="0">
+              <a:rPr lang="en-US" i="1" dirty="0">
                 <a:latin typeface="Bahnschrift Light" panose="020B0502040204020203" pitchFamily="34" charset="0"/>
               </a:rPr>
               <a:t>&lt;/</a:t>
@@ -12583,7 +12427,7 @@
           <a:lstStyle/>
           <a:p>
             <a:r>
-              <a:rPr lang="hu-HU" dirty="0" smtClean="0"/>
+              <a:rPr lang="hu-HU" dirty="0"/>
               <a:t>3. feladat</a:t>
             </a:r>
             <a:endParaRPr lang="en-US" dirty="0"/>
@@ -12723,10 +12567,10 @@
               <a:t>Csillag</a:t>
             </a:r>
             <a:r>
-              <a:rPr lang="en-US" dirty="0" smtClean="0"/>
+              <a:rPr lang="en-US" dirty="0"/>
               <a:t>)!</a:t>
             </a:r>
-            <a:endParaRPr lang="hu-HU" dirty="0" smtClean="0"/>
+            <a:endParaRPr lang="hu-HU" dirty="0"/>
           </a:p>
           <a:p>
             <a:endParaRPr lang="hu-HU" dirty="0"/>
@@ -12780,7 +12624,7 @@
               <a:t>/etterem.xml")//</a:t>
             </a:r>
             <a:r>
-              <a:rPr lang="en-US" i="1" dirty="0" err="1" smtClean="0">
+              <a:rPr lang="en-US" i="1" dirty="0" err="1">
                 <a:solidFill>
                   <a:schemeClr val="tx1">
                     <a:lumMod val="75000"/>
@@ -12791,8 +12635,8 @@
               </a:rPr>
               <a:t>etterem</a:t>
             </a:r>
-            <a:r>
-              <a:rPr lang="hu-HU" i="1" dirty="0" smtClean="0">
+            <a:br>
+              <a:rPr lang="hu-HU" i="1" dirty="0">
                 <a:solidFill>
                   <a:schemeClr val="tx1">
                     <a:lumMod val="75000"/>
@@ -12801,10 +12645,9 @@
                 </a:solidFill>
                 <a:latin typeface="Bahnschrift Light" panose="020B0502040204020203" pitchFamily="34" charset="0"/>
               </a:rPr>
-              <a:t/>
-            </a:r>
-            <a:br>
-              <a:rPr lang="hu-HU" i="1" dirty="0" smtClean="0">
+            </a:br>
+            <a:r>
+              <a:rPr lang="en-US" i="1" dirty="0">
                 <a:solidFill>
                   <a:schemeClr val="tx1">
                     <a:lumMod val="75000"/>
@@ -12813,9 +12656,10 @@
                 </a:solidFill>
                 <a:latin typeface="Bahnschrift Light" panose="020B0502040204020203" pitchFamily="34" charset="0"/>
               </a:rPr>
-            </a:br>
-            <a:r>
-              <a:rPr lang="en-US" i="1" dirty="0" smtClean="0">
+              <a:t>where $e/</a:t>
+            </a:r>
+            <a:r>
+              <a:rPr lang="en-US" i="1" dirty="0" err="1">
                 <a:solidFill>
                   <a:schemeClr val="tx1">
                     <a:lumMod val="75000"/>
@@ -12824,7 +12668,7 @@
                 </a:solidFill>
                 <a:latin typeface="Bahnschrift Light" panose="020B0502040204020203" pitchFamily="34" charset="0"/>
               </a:rPr>
-              <a:t>where </a:t>
+              <a:t>csillag</a:t>
             </a:r>
             <a:r>
               <a:rPr lang="en-US" i="1" dirty="0">
@@ -12836,10 +12680,10 @@
                 </a:solidFill>
                 <a:latin typeface="Bahnschrift Light" panose="020B0502040204020203" pitchFamily="34" charset="0"/>
               </a:rPr>
-              <a:t>$e/</a:t>
-            </a:r>
-            <a:r>
-              <a:rPr lang="en-US" i="1" dirty="0" err="1">
+              <a:t> = 5</a:t>
+            </a:r>
+            <a:br>
+              <a:rPr lang="hu-HU" i="1" dirty="0">
                 <a:solidFill>
                   <a:schemeClr val="tx1">
                     <a:lumMod val="75000"/>
@@ -12848,8 +12692,7 @@
                 </a:solidFill>
                 <a:latin typeface="Bahnschrift Light" panose="020B0502040204020203" pitchFamily="34" charset="0"/>
               </a:rPr>
-              <a:t>csillag</a:t>
-            </a:r>
+            </a:br>
             <a:r>
               <a:rPr lang="en-US" i="1" dirty="0">
                 <a:solidFill>
@@ -12860,10 +12703,10 @@
                 </a:solidFill>
                 <a:latin typeface="Bahnschrift Light" panose="020B0502040204020203" pitchFamily="34" charset="0"/>
               </a:rPr>
-              <a:t> = </a:t>
-            </a:r>
-            <a:r>
-              <a:rPr lang="en-US" i="1" dirty="0" smtClean="0">
+              <a:t>return</a:t>
+            </a:r>
+            <a:br>
+              <a:rPr lang="hu-HU" i="1" dirty="0">
                 <a:solidFill>
                   <a:schemeClr val="tx1">
                     <a:lumMod val="75000"/>
@@ -12872,10 +12715,9 @@
                 </a:solidFill>
                 <a:latin typeface="Bahnschrift Light" panose="020B0502040204020203" pitchFamily="34" charset="0"/>
               </a:rPr>
-              <a:t>5</a:t>
-            </a:r>
-            <a:r>
-              <a:rPr lang="hu-HU" i="1" dirty="0" smtClean="0">
+            </a:br>
+            <a:r>
+              <a:rPr lang="en-US" i="1" dirty="0">
                 <a:solidFill>
                   <a:schemeClr val="tx1">
                     <a:lumMod val="75000"/>
@@ -12884,10 +12726,10 @@
                 </a:solidFill>
                 <a:latin typeface="Bahnschrift Light" panose="020B0502040204020203" pitchFamily="34" charset="0"/>
               </a:rPr>
-              <a:t/>
-            </a:r>
-            <a:br>
-              <a:rPr lang="hu-HU" i="1" dirty="0" smtClean="0">
+              <a:t>&lt;</a:t>
+            </a:r>
+            <a:r>
+              <a:rPr lang="en-US" i="1" dirty="0" err="1">
                 <a:solidFill>
                   <a:schemeClr val="tx1">
                     <a:lumMod val="75000"/>
@@ -12896,9 +12738,10 @@
                 </a:solidFill>
                 <a:latin typeface="Bahnschrift Light" panose="020B0502040204020203" pitchFamily="34" charset="0"/>
               </a:rPr>
-            </a:br>
-            <a:r>
-              <a:rPr lang="en-US" i="1" dirty="0" smtClean="0">
+              <a:t>etterem</a:t>
+            </a:r>
+            <a:r>
+              <a:rPr lang="en-US" i="1" dirty="0">
                 <a:solidFill>
                   <a:schemeClr val="tx1">
                     <a:lumMod val="75000"/>
@@ -12907,10 +12750,10 @@
                 </a:solidFill>
                 <a:latin typeface="Bahnschrift Light" panose="020B0502040204020203" pitchFamily="34" charset="0"/>
               </a:rPr>
-              <a:t>return</a:t>
-            </a:r>
-            <a:r>
-              <a:rPr lang="hu-HU" i="1" dirty="0" smtClean="0">
+              <a:t>&gt;  &lt;</a:t>
+            </a:r>
+            <a:r>
+              <a:rPr lang="en-US" i="1" dirty="0" err="1">
                 <a:solidFill>
                   <a:schemeClr val="tx1">
                     <a:lumMod val="75000"/>
@@ -12919,10 +12762,10 @@
                 </a:solidFill>
                 <a:latin typeface="Bahnschrift Light" panose="020B0502040204020203" pitchFamily="34" charset="0"/>
               </a:rPr>
-              <a:t/>
-            </a:r>
-            <a:br>
-              <a:rPr lang="hu-HU" i="1" dirty="0" smtClean="0">
+              <a:t>EtteremID</a:t>
+            </a:r>
+            <a:r>
+              <a:rPr lang="en-US" i="1" dirty="0">
                 <a:solidFill>
                   <a:schemeClr val="tx1">
                     <a:lumMod val="75000"/>
@@ -12931,9 +12774,10 @@
                 </a:solidFill>
                 <a:latin typeface="Bahnschrift Light" panose="020B0502040204020203" pitchFamily="34" charset="0"/>
               </a:rPr>
-            </a:br>
-            <a:r>
-              <a:rPr lang="en-US" i="1" dirty="0" smtClean="0">
+              <a:t>&gt;{data($e/@id)}&lt;/</a:t>
+            </a:r>
+            <a:r>
+              <a:rPr lang="en-US" i="1" dirty="0" err="1">
                 <a:solidFill>
                   <a:schemeClr val="tx1">
                     <a:lumMod val="75000"/>
@@ -12942,10 +12786,10 @@
                 </a:solidFill>
                 <a:latin typeface="Bahnschrift Light" panose="020B0502040204020203" pitchFamily="34" charset="0"/>
               </a:rPr>
-              <a:t>&lt;</a:t>
-            </a:r>
-            <a:r>
-              <a:rPr lang="en-US" i="1" dirty="0" err="1" smtClean="0">
+              <a:t>EtteremID</a:t>
+            </a:r>
+            <a:r>
+              <a:rPr lang="en-US" i="1" dirty="0">
                 <a:solidFill>
                   <a:schemeClr val="tx1">
                     <a:lumMod val="75000"/>
@@ -12954,10 +12798,10 @@
                 </a:solidFill>
                 <a:latin typeface="Bahnschrift Light" panose="020B0502040204020203" pitchFamily="34" charset="0"/>
               </a:rPr>
-              <a:t>etterem</a:t>
-            </a:r>
-            <a:r>
-              <a:rPr lang="en-US" i="1" dirty="0">
+              <a:t>&gt;  &lt;</a:t>
+            </a:r>
+            <a:r>
+              <a:rPr lang="en-US" i="1" dirty="0" err="1">
                 <a:solidFill>
                   <a:schemeClr val="tx1">
                     <a:lumMod val="75000"/>
@@ -12966,10 +12810,10 @@
                 </a:solidFill>
                 <a:latin typeface="Bahnschrift Light" panose="020B0502040204020203" pitchFamily="34" charset="0"/>
               </a:rPr>
-              <a:t>&gt;  &lt;</a:t>
-            </a:r>
-            <a:r>
-              <a:rPr lang="en-US" i="1" dirty="0" err="1">
+              <a:t>Nev</a:t>
+            </a:r>
+            <a:r>
+              <a:rPr lang="en-US" i="1" dirty="0">
                 <a:solidFill>
                   <a:schemeClr val="tx1">
                     <a:lumMod val="75000"/>
@@ -12978,10 +12822,10 @@
                 </a:solidFill>
                 <a:latin typeface="Bahnschrift Light" panose="020B0502040204020203" pitchFamily="34" charset="0"/>
               </a:rPr>
-              <a:t>EtteremID</a:t>
-            </a:r>
-            <a:r>
-              <a:rPr lang="en-US" i="1" dirty="0">
+              <a:t>&gt;{data($e/</a:t>
+            </a:r>
+            <a:r>
+              <a:rPr lang="en-US" i="1" dirty="0" err="1">
                 <a:solidFill>
                   <a:schemeClr val="tx1">
                     <a:lumMod val="75000"/>
@@ -12990,10 +12834,10 @@
                 </a:solidFill>
                 <a:latin typeface="Bahnschrift Light" panose="020B0502040204020203" pitchFamily="34" charset="0"/>
               </a:rPr>
-              <a:t>&gt;{data($e/@id)}&lt;/</a:t>
-            </a:r>
-            <a:r>
-              <a:rPr lang="en-US" i="1" dirty="0" err="1">
+              <a:t>nev</a:t>
+            </a:r>
+            <a:r>
+              <a:rPr lang="en-US" i="1" dirty="0">
                 <a:solidFill>
                   <a:schemeClr val="tx1">
                     <a:lumMod val="75000"/>
@@ -13002,10 +12846,10 @@
                 </a:solidFill>
                 <a:latin typeface="Bahnschrift Light" panose="020B0502040204020203" pitchFamily="34" charset="0"/>
               </a:rPr>
-              <a:t>EtteremID</a:t>
-            </a:r>
-            <a:r>
-              <a:rPr lang="en-US" i="1" dirty="0">
+              <a:t>)}&lt;/</a:t>
+            </a:r>
+            <a:r>
+              <a:rPr lang="en-US" i="1" dirty="0" err="1">
                 <a:solidFill>
                   <a:schemeClr val="tx1">
                     <a:lumMod val="75000"/>
@@ -13014,10 +12858,10 @@
                 </a:solidFill>
                 <a:latin typeface="Bahnschrift Light" panose="020B0502040204020203" pitchFamily="34" charset="0"/>
               </a:rPr>
-              <a:t>&gt;  &lt;</a:t>
-            </a:r>
-            <a:r>
-              <a:rPr lang="en-US" i="1" dirty="0" err="1">
+              <a:t>Nev</a:t>
+            </a:r>
+            <a:r>
+              <a:rPr lang="en-US" i="1" dirty="0">
                 <a:solidFill>
                   <a:schemeClr val="tx1">
                     <a:lumMod val="75000"/>
@@ -13026,10 +12870,10 @@
                 </a:solidFill>
                 <a:latin typeface="Bahnschrift Light" panose="020B0502040204020203" pitchFamily="34" charset="0"/>
               </a:rPr>
-              <a:t>Nev</a:t>
-            </a:r>
-            <a:r>
-              <a:rPr lang="en-US" i="1" dirty="0">
+              <a:t>&gt;  </a:t>
+            </a:r>
+            <a:br>
+              <a:rPr lang="hu-HU" i="1" dirty="0">
                 <a:solidFill>
                   <a:schemeClr val="tx1">
                     <a:lumMod val="75000"/>
@@ -13038,10 +12882,9 @@
                 </a:solidFill>
                 <a:latin typeface="Bahnschrift Light" panose="020B0502040204020203" pitchFamily="34" charset="0"/>
               </a:rPr>
-              <a:t>&gt;{data($e/</a:t>
-            </a:r>
-            <a:r>
-              <a:rPr lang="en-US" i="1" dirty="0" err="1">
+            </a:br>
+            <a:r>
+              <a:rPr lang="en-US" i="1" dirty="0">
                 <a:solidFill>
                   <a:schemeClr val="tx1">
                     <a:lumMod val="75000"/>
@@ -13050,10 +12893,10 @@
                 </a:solidFill>
                 <a:latin typeface="Bahnschrift Light" panose="020B0502040204020203" pitchFamily="34" charset="0"/>
               </a:rPr>
-              <a:t>nev</a:t>
-            </a:r>
-            <a:r>
-              <a:rPr lang="en-US" i="1" dirty="0">
+              <a:t>&lt;</a:t>
+            </a:r>
+            <a:r>
+              <a:rPr lang="en-US" i="1" dirty="0" err="1">
                 <a:solidFill>
                   <a:schemeClr val="tx1">
                     <a:lumMod val="75000"/>
@@ -13062,10 +12905,10 @@
                 </a:solidFill>
                 <a:latin typeface="Bahnschrift Light" panose="020B0502040204020203" pitchFamily="34" charset="0"/>
               </a:rPr>
-              <a:t>)}&lt;/</a:t>
-            </a:r>
-            <a:r>
-              <a:rPr lang="en-US" i="1" dirty="0" err="1">
+              <a:t>Cim</a:t>
+            </a:r>
+            <a:r>
+              <a:rPr lang="en-US" i="1" dirty="0">
                 <a:solidFill>
                   <a:schemeClr val="tx1">
                     <a:lumMod val="75000"/>
@@ -13074,10 +12917,10 @@
                 </a:solidFill>
                 <a:latin typeface="Bahnschrift Light" panose="020B0502040204020203" pitchFamily="34" charset="0"/>
               </a:rPr>
-              <a:t>Nev</a:t>
-            </a:r>
-            <a:r>
-              <a:rPr lang="en-US" i="1" dirty="0">
+              <a:t>&gt;{$e/</a:t>
+            </a:r>
+            <a:r>
+              <a:rPr lang="en-US" i="1" dirty="0" err="1">
                 <a:solidFill>
                   <a:schemeClr val="tx1">
                     <a:lumMod val="75000"/>
@@ -13086,10 +12929,10 @@
                 </a:solidFill>
                 <a:latin typeface="Bahnschrift Light" panose="020B0502040204020203" pitchFamily="34" charset="0"/>
               </a:rPr>
-              <a:t>&gt;  </a:t>
-            </a:r>
-            <a:r>
-              <a:rPr lang="hu-HU" i="1" dirty="0" smtClean="0">
+              <a:t>cim</a:t>
+            </a:r>
+            <a:r>
+              <a:rPr lang="en-US" i="1" dirty="0">
                 <a:solidFill>
                   <a:schemeClr val="tx1">
                     <a:lumMod val="75000"/>
@@ -13098,10 +12941,10 @@
                 </a:solidFill>
                 <a:latin typeface="Bahnschrift Light" panose="020B0502040204020203" pitchFamily="34" charset="0"/>
               </a:rPr>
-              <a:t/>
-            </a:r>
-            <a:br>
-              <a:rPr lang="hu-HU" i="1" dirty="0" smtClean="0">
+              <a:t>}&lt;/</a:t>
+            </a:r>
+            <a:r>
+              <a:rPr lang="en-US" i="1" dirty="0" err="1">
                 <a:solidFill>
                   <a:schemeClr val="tx1">
                     <a:lumMod val="75000"/>
@@ -13110,9 +12953,10 @@
                 </a:solidFill>
                 <a:latin typeface="Bahnschrift Light" panose="020B0502040204020203" pitchFamily="34" charset="0"/>
               </a:rPr>
-            </a:br>
-            <a:r>
-              <a:rPr lang="en-US" i="1" dirty="0" smtClean="0">
+              <a:t>Cim</a:t>
+            </a:r>
+            <a:r>
+              <a:rPr lang="en-US" i="1" dirty="0">
                 <a:solidFill>
                   <a:schemeClr val="tx1">
                     <a:lumMod val="75000"/>
@@ -13121,7 +12965,7 @@
                 </a:solidFill>
                 <a:latin typeface="Bahnschrift Light" panose="020B0502040204020203" pitchFamily="34" charset="0"/>
               </a:rPr>
-              <a:t>&lt;</a:t>
+              <a:t>&gt;  &lt;</a:t>
             </a:r>
             <a:r>
               <a:rPr lang="en-US" i="1" dirty="0" err="1">
@@ -13133,7 +12977,7 @@
                 </a:solidFill>
                 <a:latin typeface="Bahnschrift Light" panose="020B0502040204020203" pitchFamily="34" charset="0"/>
               </a:rPr>
-              <a:t>Cim</a:t>
+              <a:t>Csillag</a:t>
             </a:r>
             <a:r>
               <a:rPr lang="en-US" i="1" dirty="0">
@@ -13145,7 +12989,7 @@
                 </a:solidFill>
                 <a:latin typeface="Bahnschrift Light" panose="020B0502040204020203" pitchFamily="34" charset="0"/>
               </a:rPr>
-              <a:t>&gt;{$e/</a:t>
+              <a:t>&gt;{data($e/</a:t>
             </a:r>
             <a:r>
               <a:rPr lang="en-US" i="1" dirty="0" err="1">
@@ -13157,7 +13001,7 @@
                 </a:solidFill>
                 <a:latin typeface="Bahnschrift Light" panose="020B0502040204020203" pitchFamily="34" charset="0"/>
               </a:rPr>
-              <a:t>cim</a:t>
+              <a:t>csillag</a:t>
             </a:r>
             <a:r>
               <a:rPr lang="en-US" i="1" dirty="0">
@@ -13169,7 +13013,7 @@
                 </a:solidFill>
                 <a:latin typeface="Bahnschrift Light" panose="020B0502040204020203" pitchFamily="34" charset="0"/>
               </a:rPr>
-              <a:t>}&lt;/</a:t>
+              <a:t>)}&lt;/</a:t>
             </a:r>
             <a:r>
               <a:rPr lang="en-US" i="1" dirty="0" err="1">
@@ -13181,7 +13025,7 @@
                 </a:solidFill>
                 <a:latin typeface="Bahnschrift Light" panose="020B0502040204020203" pitchFamily="34" charset="0"/>
               </a:rPr>
-              <a:t>Cim</a:t>
+              <a:t>Csillag</a:t>
             </a:r>
             <a:r>
               <a:rPr lang="en-US" i="1" dirty="0">
@@ -13193,10 +13037,10 @@
                 </a:solidFill>
                 <a:latin typeface="Bahnschrift Light" panose="020B0502040204020203" pitchFamily="34" charset="0"/>
               </a:rPr>
-              <a:t>&gt;  &lt;</a:t>
-            </a:r>
-            <a:r>
-              <a:rPr lang="en-US" i="1" dirty="0" err="1">
+              <a:t>&gt;</a:t>
+            </a:r>
+            <a:br>
+              <a:rPr lang="hu-HU" i="1" dirty="0">
                 <a:solidFill>
                   <a:schemeClr val="tx1">
                     <a:lumMod val="75000"/>
@@ -13205,93 +13049,9 @@
                 </a:solidFill>
                 <a:latin typeface="Bahnschrift Light" panose="020B0502040204020203" pitchFamily="34" charset="0"/>
               </a:rPr>
-              <a:t>Csillag</a:t>
-            </a:r>
+            </a:br>
             <a:r>
               <a:rPr lang="en-US" i="1" dirty="0">
-                <a:solidFill>
-                  <a:schemeClr val="tx1">
-                    <a:lumMod val="75000"/>
-                    <a:lumOff val="25000"/>
-                  </a:schemeClr>
-                </a:solidFill>
-                <a:latin typeface="Bahnschrift Light" panose="020B0502040204020203" pitchFamily="34" charset="0"/>
-              </a:rPr>
-              <a:t>&gt;{data($e/</a:t>
-            </a:r>
-            <a:r>
-              <a:rPr lang="en-US" i="1" dirty="0" err="1">
-                <a:solidFill>
-                  <a:schemeClr val="tx1">
-                    <a:lumMod val="75000"/>
-                    <a:lumOff val="25000"/>
-                  </a:schemeClr>
-                </a:solidFill>
-                <a:latin typeface="Bahnschrift Light" panose="020B0502040204020203" pitchFamily="34" charset="0"/>
-              </a:rPr>
-              <a:t>csillag</a:t>
-            </a:r>
-            <a:r>
-              <a:rPr lang="en-US" i="1" dirty="0">
-                <a:solidFill>
-                  <a:schemeClr val="tx1">
-                    <a:lumMod val="75000"/>
-                    <a:lumOff val="25000"/>
-                  </a:schemeClr>
-                </a:solidFill>
-                <a:latin typeface="Bahnschrift Light" panose="020B0502040204020203" pitchFamily="34" charset="0"/>
-              </a:rPr>
-              <a:t>)}&lt;/</a:t>
-            </a:r>
-            <a:r>
-              <a:rPr lang="en-US" i="1" dirty="0" err="1">
-                <a:solidFill>
-                  <a:schemeClr val="tx1">
-                    <a:lumMod val="75000"/>
-                    <a:lumOff val="25000"/>
-                  </a:schemeClr>
-                </a:solidFill>
-                <a:latin typeface="Bahnschrift Light" panose="020B0502040204020203" pitchFamily="34" charset="0"/>
-              </a:rPr>
-              <a:t>Csillag</a:t>
-            </a:r>
-            <a:r>
-              <a:rPr lang="en-US" i="1" dirty="0" smtClean="0">
-                <a:solidFill>
-                  <a:schemeClr val="tx1">
-                    <a:lumMod val="75000"/>
-                    <a:lumOff val="25000"/>
-                  </a:schemeClr>
-                </a:solidFill>
-                <a:latin typeface="Bahnschrift Light" panose="020B0502040204020203" pitchFamily="34" charset="0"/>
-              </a:rPr>
-              <a:t>&gt;</a:t>
-            </a:r>
-            <a:r>
-              <a:rPr lang="hu-HU" i="1" dirty="0" smtClean="0">
-                <a:solidFill>
-                  <a:schemeClr val="tx1">
-                    <a:lumMod val="75000"/>
-                    <a:lumOff val="25000"/>
-                  </a:schemeClr>
-                </a:solidFill>
-                <a:latin typeface="Bahnschrift Light" panose="020B0502040204020203" pitchFamily="34" charset="0"/>
-              </a:rPr>
-              <a:t/>
-            </a:r>
-            <a:br>
-              <a:rPr lang="hu-HU" i="1" dirty="0" smtClean="0">
-                <a:solidFill>
-                  <a:schemeClr val="tx1">
-                    <a:lumMod val="75000"/>
-                    <a:lumOff val="25000"/>
-                  </a:schemeClr>
-                </a:solidFill>
-                <a:latin typeface="Bahnschrift Light" panose="020B0502040204020203" pitchFamily="34" charset="0"/>
-              </a:rPr>
-            </a:br>
-            <a:r>
-              <a:rPr lang="en-US" i="1" dirty="0" smtClean="0">
                 <a:solidFill>
                   <a:schemeClr val="tx1">
                     <a:lumMod val="75000"/>
@@ -13375,7 +13135,7 @@
           <a:lstStyle/>
           <a:p>
             <a:r>
-              <a:rPr lang="hu-HU" dirty="0" smtClean="0"/>
+              <a:rPr lang="hu-HU" dirty="0"/>
               <a:t>4. Feladat</a:t>
             </a:r>
             <a:endParaRPr lang="en-US" dirty="0"/>
@@ -13406,15 +13166,7 @@
           <a:p>
             <a:r>
               <a:rPr lang="hu-HU" dirty="0"/>
-              <a:t>Kérdezze le azokat a gyakornokokat, akik délutánra be </a:t>
-            </a:r>
-            <a:r>
-              <a:rPr lang="hu-HU" dirty="0" smtClean="0"/>
-              <a:t>vannak </a:t>
-            </a:r>
-            <a:r>
-              <a:rPr lang="hu-HU" dirty="0"/>
-              <a:t>osztva (</a:t>
+              <a:t>Kérdezze le azokat a gyakornokokat, akik délutánra be vannak osztva (</a:t>
             </a:r>
             <a:r>
               <a:rPr lang="hu-HU" dirty="0" err="1"/>
@@ -13424,7 +13176,6 @@
               <a:rPr lang="hu-HU" dirty="0"/>
               <a:t>, Név, Gyakorlat kezdete, Műszak)! </a:t>
             </a:r>
-            <a:endParaRPr lang="hu-HU" dirty="0" smtClean="0"/>
           </a:p>
           <a:p>
             <a:pPr marL="400050" lvl="1" indent="0">
@@ -13463,89 +13214,65 @@
               </a:rPr>
               <a:t> </a:t>
             </a:r>
-            <a:r>
-              <a:rPr lang="hu-HU" i="1" dirty="0" smtClean="0">
-                <a:latin typeface="Bahnschrift Light" panose="020B0502040204020203" pitchFamily="34" charset="0"/>
-              </a:rPr>
-              <a:t/>
-            </a:r>
-            <a:br>
-              <a:rPr lang="hu-HU" i="1" dirty="0" smtClean="0">
-                <a:latin typeface="Bahnschrift Light" panose="020B0502040204020203" pitchFamily="34" charset="0"/>
-              </a:rPr>
-            </a:br>
-            <a:r>
-              <a:rPr lang="en-US" i="1" dirty="0" smtClean="0">
-                <a:latin typeface="Bahnschrift Light" panose="020B0502040204020203" pitchFamily="34" charset="0"/>
-              </a:rPr>
-              <a:t>$g/</a:t>
-            </a:r>
-            <a:r>
-              <a:rPr lang="en-US" i="1" dirty="0" err="1" smtClean="0">
-                <a:latin typeface="Bahnschrift Light" panose="020B0502040204020203" pitchFamily="34" charset="0"/>
-              </a:rPr>
-              <a:t>muszak</a:t>
-            </a:r>
-            <a:r>
-              <a:rPr lang="en-US" i="1" dirty="0" smtClean="0">
-                <a:latin typeface="Bahnschrift Light" panose="020B0502040204020203" pitchFamily="34" charset="0"/>
-              </a:rPr>
-              <a:t> </a:t>
-            </a:r>
-            <a:r>
-              <a:rPr lang="en-US" i="1" dirty="0">
-                <a:latin typeface="Bahnschrift Light" panose="020B0502040204020203" pitchFamily="34" charset="0"/>
-              </a:rPr>
-              <a:t>= "</a:t>
-            </a:r>
-            <a:r>
-              <a:rPr lang="en-US" i="1" dirty="0" err="1" smtClean="0">
-                <a:latin typeface="Bahnschrift Light" panose="020B0502040204020203" pitchFamily="34" charset="0"/>
-              </a:rPr>
-              <a:t>délután</a:t>
-            </a:r>
-            <a:r>
-              <a:rPr lang="hu-HU" i="1" dirty="0" smtClean="0">
-                <a:latin typeface="Bahnschrift Light" panose="020B0502040204020203" pitchFamily="34" charset="0"/>
-              </a:rPr>
-              <a:t>”</a:t>
-            </a:r>
-            <a:r>
-              <a:rPr lang="hu-HU" i="1" dirty="0">
-                <a:latin typeface="Bahnschrift Light" panose="020B0502040204020203" pitchFamily="34" charset="0"/>
-              </a:rPr>
-              <a:t/>
-            </a:r>
             <a:br>
               <a:rPr lang="hu-HU" i="1" dirty="0">
                 <a:latin typeface="Bahnschrift Light" panose="020B0502040204020203" pitchFamily="34" charset="0"/>
               </a:rPr>
             </a:br>
             <a:r>
-              <a:rPr lang="en-US" i="1" dirty="0" smtClean="0">
+              <a:rPr lang="en-US" i="1" dirty="0">
+                <a:latin typeface="Bahnschrift Light" panose="020B0502040204020203" pitchFamily="34" charset="0"/>
+              </a:rPr>
+              <a:t>$g/</a:t>
+            </a:r>
+            <a:r>
+              <a:rPr lang="en-US" i="1" dirty="0" err="1">
+                <a:latin typeface="Bahnschrift Light" panose="020B0502040204020203" pitchFamily="34" charset="0"/>
+              </a:rPr>
+              <a:t>muszak</a:t>
+            </a:r>
+            <a:r>
+              <a:rPr lang="en-US" i="1" dirty="0">
+                <a:latin typeface="Bahnschrift Light" panose="020B0502040204020203" pitchFamily="34" charset="0"/>
+              </a:rPr>
+              <a:t> = "</a:t>
+            </a:r>
+            <a:r>
+              <a:rPr lang="en-US" i="1" dirty="0" err="1">
+                <a:latin typeface="Bahnschrift Light" panose="020B0502040204020203" pitchFamily="34" charset="0"/>
+              </a:rPr>
+              <a:t>délután</a:t>
+            </a:r>
+            <a:r>
+              <a:rPr lang="hu-HU" i="1" dirty="0">
+                <a:latin typeface="Bahnschrift Light" panose="020B0502040204020203" pitchFamily="34" charset="0"/>
+              </a:rPr>
+              <a:t>”</a:t>
+            </a:r>
+            <a:br>
+              <a:rPr lang="hu-HU" i="1" dirty="0">
+                <a:latin typeface="Bahnschrift Light" panose="020B0502040204020203" pitchFamily="34" charset="0"/>
+              </a:rPr>
+            </a:br>
+            <a:r>
+              <a:rPr lang="en-US" i="1" dirty="0">
                 <a:latin typeface="Bahnschrift Light" panose="020B0502040204020203" pitchFamily="34" charset="0"/>
               </a:rPr>
               <a:t>return</a:t>
             </a:r>
-            <a:r>
-              <a:rPr lang="hu-HU" i="1" dirty="0" smtClean="0">
-                <a:latin typeface="Bahnschrift Light" panose="020B0502040204020203" pitchFamily="34" charset="0"/>
-              </a:rPr>
-              <a:t/>
-            </a:r>
             <a:br>
-              <a:rPr lang="hu-HU" i="1" dirty="0" smtClean="0">
+              <a:rPr lang="hu-HU" i="1" dirty="0">
                 <a:latin typeface="Bahnschrift Light" panose="020B0502040204020203" pitchFamily="34" charset="0"/>
               </a:rPr>
             </a:br>
             <a:r>
-              <a:rPr lang="en-US" i="1" dirty="0" smtClean="0">
+              <a:rPr lang="en-US" i="1" dirty="0">
                 <a:latin typeface="Bahnschrift Light" panose="020B0502040204020203" pitchFamily="34" charset="0"/>
               </a:rPr>
               <a:t>&lt;</a:t>
             </a:r>
             <a:r>
-              <a:rPr lang="en-US" i="1" dirty="0" err="1" smtClean="0">
+              <a:rPr lang="en-US" i="1" dirty="0" err="1">
                 <a:latin typeface="Bahnschrift Light" panose="020B0502040204020203" pitchFamily="34" charset="0"/>
               </a:rPr>
               <a:t>gyakornok</a:t>
@@ -13556,19 +13283,13 @@
               </a:rPr>
               <a:t>&gt;  </a:t>
             </a:r>
-            <a:r>
-              <a:rPr lang="hu-HU" i="1" dirty="0" smtClean="0">
-                <a:latin typeface="Bahnschrift Light" panose="020B0502040204020203" pitchFamily="34" charset="0"/>
-              </a:rPr>
-              <a:t/>
-            </a:r>
             <a:br>
-              <a:rPr lang="hu-HU" i="1" dirty="0" smtClean="0">
+              <a:rPr lang="hu-HU" i="1" dirty="0">
                 <a:latin typeface="Bahnschrift Light" panose="020B0502040204020203" pitchFamily="34" charset="0"/>
               </a:rPr>
             </a:br>
             <a:r>
-              <a:rPr lang="en-US" i="1" dirty="0" smtClean="0">
+              <a:rPr lang="en-US" i="1" dirty="0">
                 <a:latin typeface="Bahnschrift Light" panose="020B0502040204020203" pitchFamily="34" charset="0"/>
               </a:rPr>
               <a:t>&lt;</a:t>
@@ -13664,24 +13385,18 @@
               <a:t>kezdete</a:t>
             </a:r>
             <a:r>
-              <a:rPr lang="en-US" i="1" dirty="0" smtClean="0">
+              <a:rPr lang="en-US" i="1" dirty="0">
                 <a:latin typeface="Bahnschrift Light" panose="020B0502040204020203" pitchFamily="34" charset="0"/>
               </a:rPr>
               <a:t>)}</a:t>
             </a:r>
-            <a:r>
-              <a:rPr lang="hu-HU" i="1" dirty="0" smtClean="0">
-                <a:latin typeface="Bahnschrift Light" panose="020B0502040204020203" pitchFamily="34" charset="0"/>
-              </a:rPr>
-              <a:t/>
-            </a:r>
             <a:br>
-              <a:rPr lang="hu-HU" i="1" dirty="0" smtClean="0">
+              <a:rPr lang="hu-HU" i="1" dirty="0">
                 <a:latin typeface="Bahnschrift Light" panose="020B0502040204020203" pitchFamily="34" charset="0"/>
               </a:rPr>
             </a:br>
             <a:r>
-              <a:rPr lang="en-US" i="1" dirty="0" smtClean="0">
+              <a:rPr lang="en-US" i="1" dirty="0">
                 <a:latin typeface="Bahnschrift Light" panose="020B0502040204020203" pitchFamily="34" charset="0"/>
               </a:rPr>
               <a:t>&lt;/</a:t>
@@ -13698,19 +13413,13 @@
               </a:rPr>
               <a:t>&gt; </a:t>
             </a:r>
-            <a:r>
-              <a:rPr lang="hu-HU" i="1" dirty="0" smtClean="0">
-                <a:latin typeface="Bahnschrift Light" panose="020B0502040204020203" pitchFamily="34" charset="0"/>
-              </a:rPr>
-              <a:t/>
-            </a:r>
             <a:br>
-              <a:rPr lang="hu-HU" i="1" dirty="0" smtClean="0">
+              <a:rPr lang="hu-HU" i="1" dirty="0">
                 <a:latin typeface="Bahnschrift Light" panose="020B0502040204020203" pitchFamily="34" charset="0"/>
               </a:rPr>
             </a:br>
             <a:r>
-              <a:rPr lang="en-US" i="1" dirty="0" smtClean="0">
+              <a:rPr lang="en-US" i="1" dirty="0">
                 <a:latin typeface="Bahnschrift Light" panose="020B0502040204020203" pitchFamily="34" charset="0"/>
               </a:rPr>
               <a:t>&lt;</a:t>
@@ -13746,24 +13455,18 @@
               <a:t>Muszak</a:t>
             </a:r>
             <a:r>
-              <a:rPr lang="en-US" i="1" dirty="0" smtClean="0">
+              <a:rPr lang="en-US" i="1" dirty="0">
                 <a:latin typeface="Bahnschrift Light" panose="020B0502040204020203" pitchFamily="34" charset="0"/>
               </a:rPr>
               <a:t>&gt;&lt;</a:t>
             </a:r>
-            <a:r>
-              <a:rPr lang="hu-HU" i="1" dirty="0" smtClean="0">
-                <a:latin typeface="Bahnschrift Light" panose="020B0502040204020203" pitchFamily="34" charset="0"/>
-              </a:rPr>
-              <a:t/>
-            </a:r>
             <a:br>
-              <a:rPr lang="hu-HU" i="1" dirty="0" smtClean="0">
+              <a:rPr lang="hu-HU" i="1" dirty="0">
                 <a:latin typeface="Bahnschrift Light" panose="020B0502040204020203" pitchFamily="34" charset="0"/>
               </a:rPr>
             </a:br>
             <a:r>
-              <a:rPr lang="en-US" i="1" dirty="0" smtClean="0">
+              <a:rPr lang="en-US" i="1" dirty="0">
                 <a:latin typeface="Bahnschrift Light" panose="020B0502040204020203" pitchFamily="34" charset="0"/>
               </a:rPr>
               <a:t>/</a:t>
